--- a/documents/명함제작/[2026 우리가치(WeValue) QI 활동 프로젝트 명함1(뒤).pptx
+++ b/documents/명함제작/[2026 우리가치(WeValue) QI 활동 프로젝트 명함1(뒤).pptx
@@ -4396,7 +4396,21 @@
                 <a:latin typeface="KoPub돋움체 Light" panose="02020603020101020101" pitchFamily="18" charset="-127"/>
                 <a:ea typeface="KoPub돋움체 Light" panose="02020603020101020101" pitchFamily="18" charset="-127"/>
               </a:rPr>
-              <a:t> 여기로(비난 금지)”</a:t>
+              <a:t> 앞면 </a:t>
+            </a:r>
+            <a:r>
+              <a:rPr lang="en-US" altLang="ko-KR" sz="800" dirty="0">
+                <a:latin typeface="KoPub돋움체 Light" panose="02020603020101020101" pitchFamily="18" charset="-127"/>
+                <a:ea typeface="KoPub돋움체 Light" panose="02020603020101020101" pitchFamily="18" charset="-127"/>
+              </a:rPr>
+              <a:t>QR</a:t>
+            </a:r>
+            <a:r>
+              <a:rPr lang="ko-KR" altLang="en-US" sz="800" dirty="0">
+                <a:latin typeface="KoPub돋움체 Light" panose="02020603020101020101" pitchFamily="18" charset="-127"/>
+                <a:ea typeface="KoPub돋움체 Light" panose="02020603020101020101" pitchFamily="18" charset="-127"/>
+              </a:rPr>
+              <a:t>(비난 금지)”</a:t>
             </a:r>
           </a:p>
         </p:txBody>
@@ -4422,7 +4436,7 @@
         <p:cNvPr id="1" name="">
           <a:extLst>
             <a:ext uri="{FF2B5EF4-FFF2-40B4-BE49-F238E27FC236}">
-              <a16:creationId xmlns:a16="http://schemas.microsoft.com/office/drawing/2014/main" id="{00C79A36-F41E-B9F8-5CC4-688CE626072B}"/>
+              <a16:creationId xmlns:a16="http://schemas.microsoft.com/office/drawing/2014/main" id="{78B6F53A-0430-F559-16AC-1CB94B362177}"/>
             </a:ext>
           </a:extLst>
         </p:cNvPr>
@@ -4442,7 +4456,7 @@
           <p:cNvPr id="3" name="TextBox 2">
             <a:extLst>
               <a:ext uri="{FF2B5EF4-FFF2-40B4-BE49-F238E27FC236}">
-                <a16:creationId xmlns:a16="http://schemas.microsoft.com/office/drawing/2014/main" id="{988E9354-8918-5B9B-A772-C300C030FA4D}"/>
+                <a16:creationId xmlns:a16="http://schemas.microsoft.com/office/drawing/2014/main" id="{F3B48094-EFC1-0AB1-39EA-73E54998CC36}"/>
               </a:ext>
             </a:extLst>
           </p:cNvPr>
@@ -4495,7 +4509,7 @@
           <p:cNvPr id="41" name="TextBox 40">
             <a:extLst>
               <a:ext uri="{FF2B5EF4-FFF2-40B4-BE49-F238E27FC236}">
-                <a16:creationId xmlns:a16="http://schemas.microsoft.com/office/drawing/2014/main" id="{81A57DE9-F5CE-C1C9-3CBD-A571F06AD3E9}"/>
+                <a16:creationId xmlns:a16="http://schemas.microsoft.com/office/drawing/2014/main" id="{E1F63B78-2249-82DE-7187-1069C91C5123}"/>
               </a:ext>
             </a:extLst>
           </p:cNvPr>
@@ -4708,7 +4722,21 @@
                 <a:latin typeface="KoPub돋움체 Light" panose="02020603020101020101" pitchFamily="18" charset="-127"/>
                 <a:ea typeface="KoPub돋움체 Light" panose="02020603020101020101" pitchFamily="18" charset="-127"/>
               </a:rPr>
-              <a:t> 여기로(비난 금지)”</a:t>
+              <a:t> 앞면 </a:t>
+            </a:r>
+            <a:r>
+              <a:rPr lang="en-US" altLang="ko-KR" sz="800" dirty="0">
+                <a:latin typeface="KoPub돋움체 Light" panose="02020603020101020101" pitchFamily="18" charset="-127"/>
+                <a:ea typeface="KoPub돋움체 Light" panose="02020603020101020101" pitchFamily="18" charset="-127"/>
+              </a:rPr>
+              <a:t>QR</a:t>
+            </a:r>
+            <a:r>
+              <a:rPr lang="ko-KR" altLang="en-US" sz="800" dirty="0">
+                <a:latin typeface="KoPub돋움체 Light" panose="02020603020101020101" pitchFamily="18" charset="-127"/>
+                <a:ea typeface="KoPub돋움체 Light" panose="02020603020101020101" pitchFamily="18" charset="-127"/>
+              </a:rPr>
+              <a:t>(비난 금지)”</a:t>
             </a:r>
           </a:p>
         </p:txBody>
@@ -4716,7 +4744,7 @@
     </p:spTree>
     <p:extLst>
       <p:ext uri="{BB962C8B-B14F-4D97-AF65-F5344CB8AC3E}">
-        <p14:creationId xmlns:p14="http://schemas.microsoft.com/office/powerpoint/2010/main" val="452281371"/>
+        <p14:creationId xmlns:p14="http://schemas.microsoft.com/office/powerpoint/2010/main" val="2549708592"/>
       </p:ext>
     </p:extLst>
   </p:cSld>
@@ -4734,7 +4762,7 @@
         <p:cNvPr id="1" name="">
           <a:extLst>
             <a:ext uri="{FF2B5EF4-FFF2-40B4-BE49-F238E27FC236}">
-              <a16:creationId xmlns:a16="http://schemas.microsoft.com/office/drawing/2014/main" id="{089BAF26-8204-CD26-D92D-98A5F200B2C1}"/>
+              <a16:creationId xmlns:a16="http://schemas.microsoft.com/office/drawing/2014/main" id="{9E743C75-3C33-BBC3-E6C9-8240D1A5F1C3}"/>
             </a:ext>
           </a:extLst>
         </p:cNvPr>
@@ -4754,7 +4782,7 @@
           <p:cNvPr id="3" name="TextBox 2">
             <a:extLst>
               <a:ext uri="{FF2B5EF4-FFF2-40B4-BE49-F238E27FC236}">
-                <a16:creationId xmlns:a16="http://schemas.microsoft.com/office/drawing/2014/main" id="{8BAE675C-307C-2897-FB44-AF4AAB6C2BEB}"/>
+                <a16:creationId xmlns:a16="http://schemas.microsoft.com/office/drawing/2014/main" id="{1A900376-78B0-AE26-3502-FF380BB4DCC5}"/>
               </a:ext>
             </a:extLst>
           </p:cNvPr>
@@ -4807,7 +4835,7 @@
           <p:cNvPr id="41" name="TextBox 40">
             <a:extLst>
               <a:ext uri="{FF2B5EF4-FFF2-40B4-BE49-F238E27FC236}">
-                <a16:creationId xmlns:a16="http://schemas.microsoft.com/office/drawing/2014/main" id="{65FED771-D409-92AA-5821-934C3E5AF54D}"/>
+                <a16:creationId xmlns:a16="http://schemas.microsoft.com/office/drawing/2014/main" id="{8A9CB271-6F6E-7134-0EB6-3D48C6824CCF}"/>
               </a:ext>
             </a:extLst>
           </p:cNvPr>
@@ -5020,7 +5048,21 @@
                 <a:latin typeface="KoPub돋움체 Light" panose="02020603020101020101" pitchFamily="18" charset="-127"/>
                 <a:ea typeface="KoPub돋움체 Light" panose="02020603020101020101" pitchFamily="18" charset="-127"/>
               </a:rPr>
-              <a:t> 여기로(비난 금지)”</a:t>
+              <a:t> 앞면 </a:t>
+            </a:r>
+            <a:r>
+              <a:rPr lang="en-US" altLang="ko-KR" sz="800" dirty="0">
+                <a:latin typeface="KoPub돋움체 Light" panose="02020603020101020101" pitchFamily="18" charset="-127"/>
+                <a:ea typeface="KoPub돋움체 Light" panose="02020603020101020101" pitchFamily="18" charset="-127"/>
+              </a:rPr>
+              <a:t>QR</a:t>
+            </a:r>
+            <a:r>
+              <a:rPr lang="ko-KR" altLang="en-US" sz="800" dirty="0">
+                <a:latin typeface="KoPub돋움체 Light" panose="02020603020101020101" pitchFamily="18" charset="-127"/>
+                <a:ea typeface="KoPub돋움체 Light" panose="02020603020101020101" pitchFamily="18" charset="-127"/>
+              </a:rPr>
+              <a:t>(비난 금지)”</a:t>
             </a:r>
           </a:p>
         </p:txBody>
@@ -5028,7 +5070,7 @@
     </p:spTree>
     <p:extLst>
       <p:ext uri="{BB962C8B-B14F-4D97-AF65-F5344CB8AC3E}">
-        <p14:creationId xmlns:p14="http://schemas.microsoft.com/office/powerpoint/2010/main" val="520648049"/>
+        <p14:creationId xmlns:p14="http://schemas.microsoft.com/office/powerpoint/2010/main" val="2151640820"/>
       </p:ext>
     </p:extLst>
   </p:cSld>
@@ -5046,7 +5088,7 @@
         <p:cNvPr id="1" name="">
           <a:extLst>
             <a:ext uri="{FF2B5EF4-FFF2-40B4-BE49-F238E27FC236}">
-              <a16:creationId xmlns:a16="http://schemas.microsoft.com/office/drawing/2014/main" id="{A4E7E1C5-8849-8394-C7AC-308D311B84D0}"/>
+              <a16:creationId xmlns:a16="http://schemas.microsoft.com/office/drawing/2014/main" id="{B06371BF-37B0-1B12-AFF9-CA4F44D40FFE}"/>
             </a:ext>
           </a:extLst>
         </p:cNvPr>
@@ -5066,7 +5108,7 @@
           <p:cNvPr id="3" name="TextBox 2">
             <a:extLst>
               <a:ext uri="{FF2B5EF4-FFF2-40B4-BE49-F238E27FC236}">
-                <a16:creationId xmlns:a16="http://schemas.microsoft.com/office/drawing/2014/main" id="{2AB586B0-FC8F-2596-1554-6E15E85B74AA}"/>
+                <a16:creationId xmlns:a16="http://schemas.microsoft.com/office/drawing/2014/main" id="{D1E49035-D2FB-5CD3-47D4-8B89FF8921A6}"/>
               </a:ext>
             </a:extLst>
           </p:cNvPr>
@@ -5119,7 +5161,7 @@
           <p:cNvPr id="41" name="TextBox 40">
             <a:extLst>
               <a:ext uri="{FF2B5EF4-FFF2-40B4-BE49-F238E27FC236}">
-                <a16:creationId xmlns:a16="http://schemas.microsoft.com/office/drawing/2014/main" id="{E6B75F80-7437-F749-1A5C-5D526FE39CC1}"/>
+                <a16:creationId xmlns:a16="http://schemas.microsoft.com/office/drawing/2014/main" id="{1C886F30-AF10-2656-EADE-35846D6D76A5}"/>
               </a:ext>
             </a:extLst>
           </p:cNvPr>
@@ -5332,7 +5374,21 @@
                 <a:latin typeface="KoPub돋움체 Light" panose="02020603020101020101" pitchFamily="18" charset="-127"/>
                 <a:ea typeface="KoPub돋움체 Light" panose="02020603020101020101" pitchFamily="18" charset="-127"/>
               </a:rPr>
-              <a:t> 여기로(비난 금지)”</a:t>
+              <a:t> 앞면 </a:t>
+            </a:r>
+            <a:r>
+              <a:rPr lang="en-US" altLang="ko-KR" sz="800" dirty="0">
+                <a:latin typeface="KoPub돋움체 Light" panose="02020603020101020101" pitchFamily="18" charset="-127"/>
+                <a:ea typeface="KoPub돋움체 Light" panose="02020603020101020101" pitchFamily="18" charset="-127"/>
+              </a:rPr>
+              <a:t>QR</a:t>
+            </a:r>
+            <a:r>
+              <a:rPr lang="ko-KR" altLang="en-US" sz="800" dirty="0">
+                <a:latin typeface="KoPub돋움체 Light" panose="02020603020101020101" pitchFamily="18" charset="-127"/>
+                <a:ea typeface="KoPub돋움체 Light" panose="02020603020101020101" pitchFamily="18" charset="-127"/>
+              </a:rPr>
+              <a:t>(비난 금지)”</a:t>
             </a:r>
           </a:p>
         </p:txBody>
@@ -5340,7 +5396,7 @@
     </p:spTree>
     <p:extLst>
       <p:ext uri="{BB962C8B-B14F-4D97-AF65-F5344CB8AC3E}">
-        <p14:creationId xmlns:p14="http://schemas.microsoft.com/office/powerpoint/2010/main" val="418352103"/>
+        <p14:creationId xmlns:p14="http://schemas.microsoft.com/office/powerpoint/2010/main" val="2739277754"/>
       </p:ext>
     </p:extLst>
   </p:cSld>
@@ -5358,7 +5414,7 @@
         <p:cNvPr id="1" name="">
           <a:extLst>
             <a:ext uri="{FF2B5EF4-FFF2-40B4-BE49-F238E27FC236}">
-              <a16:creationId xmlns:a16="http://schemas.microsoft.com/office/drawing/2014/main" id="{2FC489F9-9146-7E06-96AA-3ADEB32A14AF}"/>
+              <a16:creationId xmlns:a16="http://schemas.microsoft.com/office/drawing/2014/main" id="{9B035EBF-BDE0-7710-9F14-363DE5E2F9D0}"/>
             </a:ext>
           </a:extLst>
         </p:cNvPr>
@@ -5378,7 +5434,7 @@
           <p:cNvPr id="3" name="TextBox 2">
             <a:extLst>
               <a:ext uri="{FF2B5EF4-FFF2-40B4-BE49-F238E27FC236}">
-                <a16:creationId xmlns:a16="http://schemas.microsoft.com/office/drawing/2014/main" id="{A7469FBA-3DD8-22C7-34D6-FDB0AD3C284D}"/>
+                <a16:creationId xmlns:a16="http://schemas.microsoft.com/office/drawing/2014/main" id="{F4FCD625-F5D9-35BF-F076-2C2A26549467}"/>
               </a:ext>
             </a:extLst>
           </p:cNvPr>
@@ -5431,7 +5487,7 @@
           <p:cNvPr id="41" name="TextBox 40">
             <a:extLst>
               <a:ext uri="{FF2B5EF4-FFF2-40B4-BE49-F238E27FC236}">
-                <a16:creationId xmlns:a16="http://schemas.microsoft.com/office/drawing/2014/main" id="{A71E0841-7ED6-45FD-D8A8-27C7AAD3B0EA}"/>
+                <a16:creationId xmlns:a16="http://schemas.microsoft.com/office/drawing/2014/main" id="{8B16B618-DC08-86B4-A0DA-966A43AB3748}"/>
               </a:ext>
             </a:extLst>
           </p:cNvPr>
@@ -5644,7 +5700,21 @@
                 <a:latin typeface="KoPub돋움체 Light" panose="02020603020101020101" pitchFamily="18" charset="-127"/>
                 <a:ea typeface="KoPub돋움체 Light" panose="02020603020101020101" pitchFamily="18" charset="-127"/>
               </a:rPr>
-              <a:t> 여기로(비난 금지)”</a:t>
+              <a:t> 앞면 </a:t>
+            </a:r>
+            <a:r>
+              <a:rPr lang="en-US" altLang="ko-KR" sz="800" dirty="0">
+                <a:latin typeface="KoPub돋움체 Light" panose="02020603020101020101" pitchFamily="18" charset="-127"/>
+                <a:ea typeface="KoPub돋움체 Light" panose="02020603020101020101" pitchFamily="18" charset="-127"/>
+              </a:rPr>
+              <a:t>QR</a:t>
+            </a:r>
+            <a:r>
+              <a:rPr lang="ko-KR" altLang="en-US" sz="800" dirty="0">
+                <a:latin typeface="KoPub돋움체 Light" panose="02020603020101020101" pitchFamily="18" charset="-127"/>
+                <a:ea typeface="KoPub돋움체 Light" panose="02020603020101020101" pitchFamily="18" charset="-127"/>
+              </a:rPr>
+              <a:t>(비난 금지)”</a:t>
             </a:r>
           </a:p>
         </p:txBody>
@@ -5652,7 +5722,7 @@
     </p:spTree>
     <p:extLst>
       <p:ext uri="{BB962C8B-B14F-4D97-AF65-F5344CB8AC3E}">
-        <p14:creationId xmlns:p14="http://schemas.microsoft.com/office/powerpoint/2010/main" val="2203028303"/>
+        <p14:creationId xmlns:p14="http://schemas.microsoft.com/office/powerpoint/2010/main" val="464322442"/>
       </p:ext>
     </p:extLst>
   </p:cSld>
@@ -5670,7 +5740,7 @@
         <p:cNvPr id="1" name="">
           <a:extLst>
             <a:ext uri="{FF2B5EF4-FFF2-40B4-BE49-F238E27FC236}">
-              <a16:creationId xmlns:a16="http://schemas.microsoft.com/office/drawing/2014/main" id="{837EDC2E-413C-2928-7FF9-1434A0D9160C}"/>
+              <a16:creationId xmlns:a16="http://schemas.microsoft.com/office/drawing/2014/main" id="{0D94B5E4-3E46-1F1D-D256-94661423CF66}"/>
             </a:ext>
           </a:extLst>
         </p:cNvPr>
@@ -5690,7 +5760,7 @@
           <p:cNvPr id="3" name="TextBox 2">
             <a:extLst>
               <a:ext uri="{FF2B5EF4-FFF2-40B4-BE49-F238E27FC236}">
-                <a16:creationId xmlns:a16="http://schemas.microsoft.com/office/drawing/2014/main" id="{BDDE6CAD-8260-CD1D-C932-41FD21BEDE1F}"/>
+                <a16:creationId xmlns:a16="http://schemas.microsoft.com/office/drawing/2014/main" id="{2AEE5029-A646-236D-DE54-A8709FB8A747}"/>
               </a:ext>
             </a:extLst>
           </p:cNvPr>
@@ -5743,7 +5813,7 @@
           <p:cNvPr id="41" name="TextBox 40">
             <a:extLst>
               <a:ext uri="{FF2B5EF4-FFF2-40B4-BE49-F238E27FC236}">
-                <a16:creationId xmlns:a16="http://schemas.microsoft.com/office/drawing/2014/main" id="{6A7E8B42-6B88-B172-D348-74E98D8C48D9}"/>
+                <a16:creationId xmlns:a16="http://schemas.microsoft.com/office/drawing/2014/main" id="{0DCFD04E-7063-AFD6-86B9-3DA157A2CC78}"/>
               </a:ext>
             </a:extLst>
           </p:cNvPr>
@@ -5956,7 +6026,21 @@
                 <a:latin typeface="KoPub돋움체 Light" panose="02020603020101020101" pitchFamily="18" charset="-127"/>
                 <a:ea typeface="KoPub돋움체 Light" panose="02020603020101020101" pitchFamily="18" charset="-127"/>
               </a:rPr>
-              <a:t> 여기로(비난 금지)”</a:t>
+              <a:t> 앞면 </a:t>
+            </a:r>
+            <a:r>
+              <a:rPr lang="en-US" altLang="ko-KR" sz="800" dirty="0">
+                <a:latin typeface="KoPub돋움체 Light" panose="02020603020101020101" pitchFamily="18" charset="-127"/>
+                <a:ea typeface="KoPub돋움체 Light" panose="02020603020101020101" pitchFamily="18" charset="-127"/>
+              </a:rPr>
+              <a:t>QR</a:t>
+            </a:r>
+            <a:r>
+              <a:rPr lang="ko-KR" altLang="en-US" sz="800" dirty="0">
+                <a:latin typeface="KoPub돋움체 Light" panose="02020603020101020101" pitchFamily="18" charset="-127"/>
+                <a:ea typeface="KoPub돋움체 Light" panose="02020603020101020101" pitchFamily="18" charset="-127"/>
+              </a:rPr>
+              <a:t>(비난 금지)”</a:t>
             </a:r>
           </a:p>
         </p:txBody>
@@ -5964,7 +6048,7 @@
     </p:spTree>
     <p:extLst>
       <p:ext uri="{BB962C8B-B14F-4D97-AF65-F5344CB8AC3E}">
-        <p14:creationId xmlns:p14="http://schemas.microsoft.com/office/powerpoint/2010/main" val="27411619"/>
+        <p14:creationId xmlns:p14="http://schemas.microsoft.com/office/powerpoint/2010/main" val="1576876339"/>
       </p:ext>
     </p:extLst>
   </p:cSld>

--- a/documents/명함제작/[2026 우리가치(WeValue) QI 활동 프로젝트 명함1(뒤).pptx
+++ b/documents/명함제작/[2026 우리가치(WeValue) QI 활동 프로젝트 명함1(뒤).pptx
@@ -2,7 +2,7 @@
 <file path=ppt/presentation.xml><?xml version="1.0" encoding="utf-8"?>
 <p:presentation xmlns:a="http://schemas.openxmlformats.org/drawingml/2006/main" xmlns:r="http://schemas.openxmlformats.org/officeDocument/2006/relationships" xmlns:p="http://schemas.openxmlformats.org/presentationml/2006/main" saveSubsetFonts="1">
   <p:sldMasterIdLst>
-    <p:sldMasterId id="2147483870" r:id="rId1"/>
+    <p:sldMasterId id="2147483883" r:id="rId1"/>
   </p:sldMasterIdLst>
   <p:notesMasterIdLst>
     <p:notesMasterId r:id="rId8"/>
@@ -15,7 +15,7 @@
     <p:sldId id="266" r:id="rId6"/>
     <p:sldId id="267" r:id="rId7"/>
   </p:sldIdLst>
-  <p:sldSz cx="3240088" cy="1800225"/>
+  <p:sldSz cx="3203575" cy="1800225"/>
   <p:notesSz cx="6858000" cy="9945688"/>
   <p:defaultTextStyle>
     <a:defPPr>
@@ -130,17 +130,17 @@
             <a:srgbClr val="A4A3A4"/>
           </p15:clr>
         </p15:guide>
-        <p15:guide id="8" pos="1021" userDrawn="1">
+        <p15:guide id="8" pos="1009" userDrawn="1">
           <p15:clr>
             <a:srgbClr val="A4A3A4"/>
           </p15:clr>
         </p15:guide>
-        <p15:guide id="9" pos="132" userDrawn="1">
+        <p15:guide id="9" pos="131" userDrawn="1">
           <p15:clr>
             <a:srgbClr val="A4A3A4"/>
           </p15:clr>
         </p15:guide>
-        <p15:guide id="10" pos="1909" userDrawn="1">
+        <p15:guide id="10" pos="1887" userDrawn="1">
           <p15:clr>
             <a:srgbClr val="A4A3A4"/>
           </p15:clr>
@@ -233,7 +233,7 @@
           <a:p>
             <a:fld id="{F929F65E-AEE7-45C5-814B-4468CAF1E537}" type="datetimeFigureOut">
               <a:rPr lang="ko-KR" altLang="en-US" smtClean="0"/>
-              <a:t>2026-03-08</a:t>
+              <a:t>2026-04-09</a:t>
             </a:fld>
             <a:endParaRPr lang="ko-KR" altLang="en-US"/>
           </a:p>
@@ -251,8 +251,8 @@
         </p:nvSpPr>
         <p:spPr>
           <a:xfrm>
-            <a:off x="407988" y="1241425"/>
-            <a:ext cx="6042025" cy="3357563"/>
+            <a:off x="441325" y="1241425"/>
+            <a:ext cx="5975350" cy="3357563"/>
           </a:xfrm>
           <a:prstGeom prst="rect">
             <a:avLst/>
@@ -529,8 +529,8 @@
         </p:nvSpPr>
         <p:spPr>
           <a:xfrm>
-            <a:off x="405011" y="294620"/>
-            <a:ext cx="2430066" cy="626745"/>
+            <a:off x="400447" y="294620"/>
+            <a:ext cx="2402681" cy="626745"/>
           </a:xfrm>
         </p:spPr>
         <p:txBody>
@@ -561,8 +561,8 @@
         </p:nvSpPr>
         <p:spPr>
           <a:xfrm>
-            <a:off x="405011" y="945535"/>
-            <a:ext cx="2430066" cy="434638"/>
+            <a:off x="400447" y="945535"/>
+            <a:ext cx="2402681" cy="434638"/>
           </a:xfrm>
         </p:spPr>
         <p:txBody>
@@ -631,7 +631,7 @@
           <a:p>
             <a:fld id="{149F34B4-7175-41BD-B98B-2E7021201D7D}" type="datetimeFigureOut">
               <a:rPr lang="ko-KR" altLang="en-US" smtClean="0"/>
-              <a:t>2026-03-08</a:t>
+              <a:t>2026-04-09</a:t>
             </a:fld>
             <a:endParaRPr lang="ko-KR" altLang="en-US"/>
           </a:p>
@@ -682,7 +682,7 @@
     </p:spTree>
     <p:extLst>
       <p:ext uri="{BB962C8B-B14F-4D97-AF65-F5344CB8AC3E}">
-        <p14:creationId xmlns:p14="http://schemas.microsoft.com/office/powerpoint/2010/main" val="3453375835"/>
+        <p14:creationId xmlns:p14="http://schemas.microsoft.com/office/powerpoint/2010/main" val="2968410614"/>
       </p:ext>
     </p:extLst>
   </p:cSld>
@@ -801,7 +801,7 @@
           <a:p>
             <a:fld id="{149F34B4-7175-41BD-B98B-2E7021201D7D}" type="datetimeFigureOut">
               <a:rPr lang="ko-KR" altLang="en-US" smtClean="0"/>
-              <a:t>2026-03-08</a:t>
+              <a:t>2026-04-09</a:t>
             </a:fld>
             <a:endParaRPr lang="ko-KR" altLang="en-US"/>
           </a:p>
@@ -852,7 +852,7 @@
     </p:spTree>
     <p:extLst>
       <p:ext uri="{BB962C8B-B14F-4D97-AF65-F5344CB8AC3E}">
-        <p14:creationId xmlns:p14="http://schemas.microsoft.com/office/powerpoint/2010/main" val="3250027929"/>
+        <p14:creationId xmlns:p14="http://schemas.microsoft.com/office/powerpoint/2010/main" val="1357315700"/>
       </p:ext>
     </p:extLst>
   </p:cSld>
@@ -891,8 +891,8 @@
         </p:nvSpPr>
         <p:spPr>
           <a:xfrm>
-            <a:off x="2318688" y="95846"/>
-            <a:ext cx="698644" cy="1525607"/>
+            <a:off x="2292558" y="95846"/>
+            <a:ext cx="690771" cy="1525607"/>
           </a:xfrm>
         </p:spPr>
         <p:txBody>
@@ -919,8 +919,8 @@
         </p:nvSpPr>
         <p:spPr>
           <a:xfrm>
-            <a:off x="222756" y="95846"/>
-            <a:ext cx="2055431" cy="1525607"/>
+            <a:off x="220246" y="95846"/>
+            <a:ext cx="2032268" cy="1525607"/>
           </a:xfrm>
         </p:spPr>
         <p:txBody>
@@ -981,7 +981,7 @@
           <a:p>
             <a:fld id="{149F34B4-7175-41BD-B98B-2E7021201D7D}" type="datetimeFigureOut">
               <a:rPr lang="ko-KR" altLang="en-US" smtClean="0"/>
-              <a:t>2026-03-08</a:t>
+              <a:t>2026-04-09</a:t>
             </a:fld>
             <a:endParaRPr lang="ko-KR" altLang="en-US"/>
           </a:p>
@@ -1032,7 +1032,7 @@
     </p:spTree>
     <p:extLst>
       <p:ext uri="{BB962C8B-B14F-4D97-AF65-F5344CB8AC3E}">
-        <p14:creationId xmlns:p14="http://schemas.microsoft.com/office/powerpoint/2010/main" val="3315396022"/>
+        <p14:creationId xmlns:p14="http://schemas.microsoft.com/office/powerpoint/2010/main" val="1659860773"/>
       </p:ext>
     </p:extLst>
   </p:cSld>
@@ -1073,8 +1073,8 @@
         </p:nvSpPr>
         <p:spPr>
           <a:xfrm>
-            <a:off x="1" y="0"/>
-            <a:ext cx="3246839" cy="1800225"/>
+            <a:off x="1" y="1"/>
+            <a:ext cx="3210250" cy="1800225"/>
           </a:xfrm>
           <a:prstGeom prst="rect">
             <a:avLst/>
@@ -1127,8 +1127,8 @@
         </p:nvSpPr>
         <p:spPr>
           <a:xfrm>
-            <a:off x="29909" y="30482"/>
-            <a:ext cx="3182265" cy="1728467"/>
+            <a:off x="29572" y="30483"/>
+            <a:ext cx="3146404" cy="1728467"/>
           </a:xfrm>
           <a:prstGeom prst="rect">
             <a:avLst/>
@@ -1187,8 +1187,8 @@
         </p:blipFill>
         <p:spPr>
           <a:xfrm>
-            <a:off x="2790825" y="81588"/>
-            <a:ext cx="363162" cy="203042"/>
+            <a:off x="2759375" y="81588"/>
+            <a:ext cx="359069" cy="203042"/>
           </a:xfrm>
           <a:prstGeom prst="rect">
             <a:avLst/>
@@ -1214,8 +1214,8 @@
         </p:nvSpPr>
         <p:spPr>
           <a:xfrm>
-            <a:off x="2098273" y="1569905"/>
-            <a:ext cx="1141815" cy="169277"/>
+            <a:off x="2074628" y="1569906"/>
+            <a:ext cx="1128948" cy="169277"/>
           </a:xfrm>
           <a:prstGeom prst="rect">
             <a:avLst/>
@@ -1252,7 +1252,7 @@
     </p:spTree>
     <p:extLst>
       <p:ext uri="{BB962C8B-B14F-4D97-AF65-F5344CB8AC3E}">
-        <p14:creationId xmlns:p14="http://schemas.microsoft.com/office/powerpoint/2010/main" val="2744513500"/>
+        <p14:creationId xmlns:p14="http://schemas.microsoft.com/office/powerpoint/2010/main" val="2626730532"/>
       </p:ext>
     </p:extLst>
   </p:cSld>
@@ -1267,7 +1267,7 @@
             <a:srgbClr val="FBAE40"/>
           </p15:clr>
         </p15:guide>
-        <p15:guide id="2" pos="1021">
+        <p15:guide id="2" pos="1009">
           <p15:clr>
             <a:srgbClr val="FBAE40"/>
           </p15:clr>
@@ -1309,8 +1309,8 @@
         </p:nvSpPr>
         <p:spPr>
           <a:xfrm>
-            <a:off x="1" y="0"/>
-            <a:ext cx="3246839" cy="1800225"/>
+            <a:off x="1" y="1"/>
+            <a:ext cx="3210250" cy="1800225"/>
           </a:xfrm>
           <a:prstGeom prst="rect">
             <a:avLst/>
@@ -1363,8 +1363,8 @@
         </p:nvSpPr>
         <p:spPr>
           <a:xfrm>
-            <a:off x="45477" y="17494"/>
-            <a:ext cx="3154111" cy="1764512"/>
+            <a:off x="44965" y="17494"/>
+            <a:ext cx="3118567" cy="1764512"/>
           </a:xfrm>
           <a:prstGeom prst="rect">
             <a:avLst/>
@@ -1423,8 +1423,8 @@
         </p:blipFill>
         <p:spPr>
           <a:xfrm>
-            <a:off x="2829499" y="29235"/>
-            <a:ext cx="324488" cy="75610"/>
+            <a:off x="2797613" y="29235"/>
+            <a:ext cx="320831" cy="75610"/>
           </a:xfrm>
           <a:prstGeom prst="rect">
             <a:avLst/>
@@ -1450,7 +1450,7 @@
         </p:nvSpPr>
         <p:spPr>
           <a:xfrm>
-            <a:off x="2890773" y="1686920"/>
+            <a:off x="2855230" y="1686921"/>
             <a:ext cx="263214" cy="123111"/>
           </a:xfrm>
           <a:prstGeom prst="rect">
@@ -1516,7 +1516,7 @@
             <a:srgbClr val="FBAE40"/>
           </p15:clr>
         </p15:guide>
-        <p15:guide id="2" pos="1021" userDrawn="1">
+        <p15:guide id="2" pos="1009" userDrawn="1">
           <p15:clr>
             <a:srgbClr val="FBAE40"/>
           </p15:clr>
@@ -1558,8 +1558,8 @@
         </p:nvSpPr>
         <p:spPr>
           <a:xfrm>
-            <a:off x="1" y="0"/>
-            <a:ext cx="3246839" cy="1800225"/>
+            <a:off x="1" y="1"/>
+            <a:ext cx="3210250" cy="1800225"/>
           </a:xfrm>
           <a:prstGeom prst="rect">
             <a:avLst/>
@@ -1612,8 +1612,8 @@
         </p:nvSpPr>
         <p:spPr>
           <a:xfrm>
-            <a:off x="45477" y="17494"/>
-            <a:ext cx="3154111" cy="1764512"/>
+            <a:off x="44965" y="17494"/>
+            <a:ext cx="3118567" cy="1764512"/>
           </a:xfrm>
           <a:prstGeom prst="rect">
             <a:avLst/>
@@ -1672,8 +1672,8 @@
         </p:blipFill>
         <p:spPr>
           <a:xfrm>
-            <a:off x="2827923" y="29235"/>
-            <a:ext cx="324488" cy="75610"/>
+            <a:off x="2796055" y="29235"/>
+            <a:ext cx="320831" cy="75610"/>
           </a:xfrm>
           <a:prstGeom prst="rect">
             <a:avLst/>
@@ -1699,8 +1699,8 @@
         </p:nvSpPr>
         <p:spPr>
           <a:xfrm>
-            <a:off x="2863523" y="1707219"/>
-            <a:ext cx="290464" cy="107722"/>
+            <a:off x="2827979" y="1707219"/>
+            <a:ext cx="290465" cy="107722"/>
           </a:xfrm>
           <a:prstGeom prst="rect">
             <a:avLst/>
@@ -1765,7 +1765,7 @@
             <a:srgbClr val="FBAE40"/>
           </p15:clr>
         </p15:guide>
-        <p15:guide id="2" pos="1021" userDrawn="1">
+        <p15:guide id="2" pos="1009" userDrawn="1">
           <p15:clr>
             <a:srgbClr val="FBAE40"/>
           </p15:clr>
@@ -1890,7 +1890,7 @@
           <a:p>
             <a:fld id="{149F34B4-7175-41BD-B98B-2E7021201D7D}" type="datetimeFigureOut">
               <a:rPr lang="ko-KR" altLang="en-US" smtClean="0"/>
-              <a:t>2026-03-08</a:t>
+              <a:t>2026-04-09</a:t>
             </a:fld>
             <a:endParaRPr lang="ko-KR" altLang="en-US"/>
           </a:p>
@@ -1941,7 +1941,7 @@
     </p:spTree>
     <p:extLst>
       <p:ext uri="{BB962C8B-B14F-4D97-AF65-F5344CB8AC3E}">
-        <p14:creationId xmlns:p14="http://schemas.microsoft.com/office/powerpoint/2010/main" val="1634003482"/>
+        <p14:creationId xmlns:p14="http://schemas.microsoft.com/office/powerpoint/2010/main" val="2979786542"/>
       </p:ext>
     </p:extLst>
   </p:cSld>
@@ -1980,8 +1980,8 @@
         </p:nvSpPr>
         <p:spPr>
           <a:xfrm>
-            <a:off x="221068" y="448807"/>
-            <a:ext cx="2794576" cy="748843"/>
+            <a:off x="218577" y="448807"/>
+            <a:ext cx="2763083" cy="748843"/>
           </a:xfrm>
         </p:spPr>
         <p:txBody>
@@ -2012,8 +2012,8 @@
         </p:nvSpPr>
         <p:spPr>
           <a:xfrm>
-            <a:off x="221068" y="1204734"/>
-            <a:ext cx="2794576" cy="393799"/>
+            <a:off x="218577" y="1204734"/>
+            <a:ext cx="2763083" cy="393799"/>
           </a:xfrm>
         </p:spPr>
         <p:txBody>
@@ -2136,7 +2136,7 @@
           <a:p>
             <a:fld id="{149F34B4-7175-41BD-B98B-2E7021201D7D}" type="datetimeFigureOut">
               <a:rPr lang="ko-KR" altLang="en-US" smtClean="0"/>
-              <a:t>2026-03-08</a:t>
+              <a:t>2026-04-09</a:t>
             </a:fld>
             <a:endParaRPr lang="ko-KR" altLang="en-US"/>
           </a:p>
@@ -2187,7 +2187,7 @@
     </p:spTree>
     <p:extLst>
       <p:ext uri="{BB962C8B-B14F-4D97-AF65-F5344CB8AC3E}">
-        <p14:creationId xmlns:p14="http://schemas.microsoft.com/office/powerpoint/2010/main" val="3434871378"/>
+        <p14:creationId xmlns:p14="http://schemas.microsoft.com/office/powerpoint/2010/main" val="2169804254"/>
       </p:ext>
     </p:extLst>
   </p:cSld>
@@ -2249,8 +2249,8 @@
         </p:nvSpPr>
         <p:spPr>
           <a:xfrm>
-            <a:off x="222756" y="479227"/>
-            <a:ext cx="1377037" cy="1142226"/>
+            <a:off x="220246" y="479227"/>
+            <a:ext cx="1361519" cy="1142226"/>
           </a:xfrm>
         </p:spPr>
         <p:txBody>
@@ -2306,8 +2306,8 @@
         </p:nvSpPr>
         <p:spPr>
           <a:xfrm>
-            <a:off x="1640295" y="479227"/>
-            <a:ext cx="1377037" cy="1142226"/>
+            <a:off x="1621810" y="479227"/>
+            <a:ext cx="1361519" cy="1142226"/>
           </a:xfrm>
         </p:spPr>
         <p:txBody>
@@ -2368,7 +2368,7 @@
           <a:p>
             <a:fld id="{149F34B4-7175-41BD-B98B-2E7021201D7D}" type="datetimeFigureOut">
               <a:rPr lang="ko-KR" altLang="en-US" smtClean="0"/>
-              <a:t>2026-03-08</a:t>
+              <a:t>2026-04-09</a:t>
             </a:fld>
             <a:endParaRPr lang="ko-KR" altLang="en-US"/>
           </a:p>
@@ -2419,7 +2419,7 @@
     </p:spTree>
     <p:extLst>
       <p:ext uri="{BB962C8B-B14F-4D97-AF65-F5344CB8AC3E}">
-        <p14:creationId xmlns:p14="http://schemas.microsoft.com/office/powerpoint/2010/main" val="3465910369"/>
+        <p14:creationId xmlns:p14="http://schemas.microsoft.com/office/powerpoint/2010/main" val="1992996158"/>
       </p:ext>
     </p:extLst>
   </p:cSld>
@@ -2458,8 +2458,8 @@
         </p:nvSpPr>
         <p:spPr>
           <a:xfrm>
-            <a:off x="223178" y="95846"/>
-            <a:ext cx="2794576" cy="347960"/>
+            <a:off x="220663" y="95846"/>
+            <a:ext cx="2763083" cy="347960"/>
           </a:xfrm>
         </p:spPr>
         <p:txBody>
@@ -2486,8 +2486,8 @@
         </p:nvSpPr>
         <p:spPr>
           <a:xfrm>
-            <a:off x="223178" y="441305"/>
-            <a:ext cx="1370709" cy="216277"/>
+            <a:off x="220663" y="441305"/>
+            <a:ext cx="1355262" cy="216277"/>
           </a:xfrm>
         </p:spPr>
         <p:txBody>
@@ -2551,8 +2551,8 @@
         </p:nvSpPr>
         <p:spPr>
           <a:xfrm>
-            <a:off x="223178" y="657582"/>
-            <a:ext cx="1370709" cy="967204"/>
+            <a:off x="220663" y="657582"/>
+            <a:ext cx="1355262" cy="967204"/>
           </a:xfrm>
         </p:spPr>
         <p:txBody>
@@ -2608,8 +2608,8 @@
         </p:nvSpPr>
         <p:spPr>
           <a:xfrm>
-            <a:off x="1640295" y="441305"/>
-            <a:ext cx="1377459" cy="216277"/>
+            <a:off x="1621810" y="441305"/>
+            <a:ext cx="1361937" cy="216277"/>
           </a:xfrm>
         </p:spPr>
         <p:txBody>
@@ -2673,8 +2673,8 @@
         </p:nvSpPr>
         <p:spPr>
           <a:xfrm>
-            <a:off x="1640295" y="657582"/>
-            <a:ext cx="1377459" cy="967204"/>
+            <a:off x="1621810" y="657582"/>
+            <a:ext cx="1361937" cy="967204"/>
           </a:xfrm>
         </p:spPr>
         <p:txBody>
@@ -2735,7 +2735,7 @@
           <a:p>
             <a:fld id="{149F34B4-7175-41BD-B98B-2E7021201D7D}" type="datetimeFigureOut">
               <a:rPr lang="ko-KR" altLang="en-US" smtClean="0"/>
-              <a:t>2026-03-08</a:t>
+              <a:t>2026-04-09</a:t>
             </a:fld>
             <a:endParaRPr lang="ko-KR" altLang="en-US"/>
           </a:p>
@@ -2786,7 +2786,7 @@
     </p:spTree>
     <p:extLst>
       <p:ext uri="{BB962C8B-B14F-4D97-AF65-F5344CB8AC3E}">
-        <p14:creationId xmlns:p14="http://schemas.microsoft.com/office/powerpoint/2010/main" val="4164050254"/>
+        <p14:creationId xmlns:p14="http://schemas.microsoft.com/office/powerpoint/2010/main" val="19261393"/>
       </p:ext>
     </p:extLst>
   </p:cSld>
@@ -2853,7 +2853,7 @@
           <a:p>
             <a:fld id="{149F34B4-7175-41BD-B98B-2E7021201D7D}" type="datetimeFigureOut">
               <a:rPr lang="ko-KR" altLang="en-US" smtClean="0"/>
-              <a:t>2026-03-08</a:t>
+              <a:t>2026-04-09</a:t>
             </a:fld>
             <a:endParaRPr lang="ko-KR" altLang="en-US"/>
           </a:p>
@@ -2904,7 +2904,7 @@
     </p:spTree>
     <p:extLst>
       <p:ext uri="{BB962C8B-B14F-4D97-AF65-F5344CB8AC3E}">
-        <p14:creationId xmlns:p14="http://schemas.microsoft.com/office/powerpoint/2010/main" val="2126343418"/>
+        <p14:creationId xmlns:p14="http://schemas.microsoft.com/office/powerpoint/2010/main" val="2721679162"/>
       </p:ext>
     </p:extLst>
   </p:cSld>
@@ -2948,7 +2948,7 @@
           <a:p>
             <a:fld id="{149F34B4-7175-41BD-B98B-2E7021201D7D}" type="datetimeFigureOut">
               <a:rPr lang="ko-KR" altLang="en-US" smtClean="0"/>
-              <a:t>2026-03-08</a:t>
+              <a:t>2026-04-09</a:t>
             </a:fld>
             <a:endParaRPr lang="ko-KR" altLang="en-US"/>
           </a:p>
@@ -2999,7 +2999,7 @@
     </p:spTree>
     <p:extLst>
       <p:ext uri="{BB962C8B-B14F-4D97-AF65-F5344CB8AC3E}">
-        <p14:creationId xmlns:p14="http://schemas.microsoft.com/office/powerpoint/2010/main" val="2295738396"/>
+        <p14:creationId xmlns:p14="http://schemas.microsoft.com/office/powerpoint/2010/main" val="3376872961"/>
       </p:ext>
     </p:extLst>
   </p:cSld>
@@ -3038,8 +3038,8 @@
         </p:nvSpPr>
         <p:spPr>
           <a:xfrm>
-            <a:off x="223178" y="120015"/>
-            <a:ext cx="1045013" cy="420053"/>
+            <a:off x="220663" y="120015"/>
+            <a:ext cx="1033236" cy="420053"/>
           </a:xfrm>
         </p:spPr>
         <p:txBody>
@@ -3070,8 +3070,8 @@
         </p:nvSpPr>
         <p:spPr>
           <a:xfrm>
-            <a:off x="1377459" y="259199"/>
-            <a:ext cx="1640295" cy="1279327"/>
+            <a:off x="1361937" y="259199"/>
+            <a:ext cx="1621810" cy="1279327"/>
           </a:xfrm>
         </p:spPr>
         <p:txBody>
@@ -3155,8 +3155,8 @@
         </p:nvSpPr>
         <p:spPr>
           <a:xfrm>
-            <a:off x="223178" y="540067"/>
-            <a:ext cx="1045013" cy="1000542"/>
+            <a:off x="220663" y="540067"/>
+            <a:ext cx="1033236" cy="1000542"/>
           </a:xfrm>
         </p:spPr>
         <p:txBody>
@@ -3225,7 +3225,7 @@
           <a:p>
             <a:fld id="{149F34B4-7175-41BD-B98B-2E7021201D7D}" type="datetimeFigureOut">
               <a:rPr lang="ko-KR" altLang="en-US" smtClean="0"/>
-              <a:t>2026-03-08</a:t>
+              <a:t>2026-04-09</a:t>
             </a:fld>
             <a:endParaRPr lang="ko-KR" altLang="en-US"/>
           </a:p>
@@ -3276,7 +3276,7 @@
     </p:spTree>
     <p:extLst>
       <p:ext uri="{BB962C8B-B14F-4D97-AF65-F5344CB8AC3E}">
-        <p14:creationId xmlns:p14="http://schemas.microsoft.com/office/powerpoint/2010/main" val="2035658595"/>
+        <p14:creationId xmlns:p14="http://schemas.microsoft.com/office/powerpoint/2010/main" val="1452867841"/>
       </p:ext>
     </p:extLst>
   </p:cSld>
@@ -3315,8 +3315,8 @@
         </p:nvSpPr>
         <p:spPr>
           <a:xfrm>
-            <a:off x="223178" y="120015"/>
-            <a:ext cx="1045013" cy="420053"/>
+            <a:off x="220663" y="120015"/>
+            <a:ext cx="1033236" cy="420053"/>
           </a:xfrm>
         </p:spPr>
         <p:txBody>
@@ -3347,8 +3347,8 @@
         </p:nvSpPr>
         <p:spPr>
           <a:xfrm>
-            <a:off x="1377459" y="259199"/>
-            <a:ext cx="1640295" cy="1279327"/>
+            <a:off x="1361937" y="259199"/>
+            <a:ext cx="1621810" cy="1279327"/>
           </a:xfrm>
         </p:spPr>
         <p:txBody>
@@ -3412,8 +3412,8 @@
         </p:nvSpPr>
         <p:spPr>
           <a:xfrm>
-            <a:off x="223178" y="540067"/>
-            <a:ext cx="1045013" cy="1000542"/>
+            <a:off x="220663" y="540067"/>
+            <a:ext cx="1033236" cy="1000542"/>
           </a:xfrm>
         </p:spPr>
         <p:txBody>
@@ -3482,7 +3482,7 @@
           <a:p>
             <a:fld id="{149F34B4-7175-41BD-B98B-2E7021201D7D}" type="datetimeFigureOut">
               <a:rPr lang="ko-KR" altLang="en-US" smtClean="0"/>
-              <a:t>2026-03-08</a:t>
+              <a:t>2026-04-09</a:t>
             </a:fld>
             <a:endParaRPr lang="ko-KR" altLang="en-US"/>
           </a:p>
@@ -3533,7 +3533,7 @@
     </p:spTree>
     <p:extLst>
       <p:ext uri="{BB962C8B-B14F-4D97-AF65-F5344CB8AC3E}">
-        <p14:creationId xmlns:p14="http://schemas.microsoft.com/office/powerpoint/2010/main" val="1745249668"/>
+        <p14:creationId xmlns:p14="http://schemas.microsoft.com/office/powerpoint/2010/main" val="2283563025"/>
       </p:ext>
     </p:extLst>
   </p:cSld>
@@ -3577,8 +3577,8 @@
         </p:nvSpPr>
         <p:spPr>
           <a:xfrm>
-            <a:off x="222756" y="95846"/>
-            <a:ext cx="2794576" cy="347960"/>
+            <a:off x="220246" y="95846"/>
+            <a:ext cx="2763083" cy="347960"/>
           </a:xfrm>
           <a:prstGeom prst="rect">
             <a:avLst/>
@@ -3610,8 +3610,8 @@
         </p:nvSpPr>
         <p:spPr>
           <a:xfrm>
-            <a:off x="222756" y="479227"/>
-            <a:ext cx="2794576" cy="1142226"/>
+            <a:off x="220246" y="479227"/>
+            <a:ext cx="2763083" cy="1142226"/>
           </a:xfrm>
           <a:prstGeom prst="rect">
             <a:avLst/>
@@ -3672,8 +3672,8 @@
         </p:nvSpPr>
         <p:spPr>
           <a:xfrm>
-            <a:off x="222756" y="1668542"/>
-            <a:ext cx="729020" cy="95845"/>
+            <a:off x="220246" y="1668542"/>
+            <a:ext cx="720804" cy="95845"/>
           </a:xfrm>
           <a:prstGeom prst="rect">
             <a:avLst/>
@@ -3695,7 +3695,7 @@
           <a:p>
             <a:fld id="{149F34B4-7175-41BD-B98B-2E7021201D7D}" type="datetimeFigureOut">
               <a:rPr lang="ko-KR" altLang="en-US" smtClean="0"/>
-              <a:t>2026-03-08</a:t>
+              <a:t>2026-04-09</a:t>
             </a:fld>
             <a:endParaRPr lang="ko-KR" altLang="en-US"/>
           </a:p>
@@ -3713,8 +3713,8 @@
         </p:nvSpPr>
         <p:spPr>
           <a:xfrm>
-            <a:off x="1073279" y="1668542"/>
-            <a:ext cx="1093530" cy="95845"/>
+            <a:off x="1061184" y="1668542"/>
+            <a:ext cx="1081207" cy="95845"/>
           </a:xfrm>
           <a:prstGeom prst="rect">
             <a:avLst/>
@@ -3750,8 +3750,8 @@
         </p:nvSpPr>
         <p:spPr>
           <a:xfrm>
-            <a:off x="2288312" y="1668542"/>
-            <a:ext cx="729020" cy="95845"/>
+            <a:off x="2262525" y="1668542"/>
+            <a:ext cx="720804" cy="95845"/>
           </a:xfrm>
           <a:prstGeom prst="rect">
             <a:avLst/>
@@ -3782,24 +3782,24 @@
     </p:spTree>
     <p:extLst>
       <p:ext uri="{BB962C8B-B14F-4D97-AF65-F5344CB8AC3E}">
-        <p14:creationId xmlns:p14="http://schemas.microsoft.com/office/powerpoint/2010/main" val="4252659477"/>
+        <p14:creationId xmlns:p14="http://schemas.microsoft.com/office/powerpoint/2010/main" val="3017740695"/>
       </p:ext>
     </p:extLst>
   </p:cSld>
   <p:clrMap bg1="lt1" tx1="dk1" bg2="lt2" tx2="dk2" accent1="accent1" accent2="accent2" accent3="accent3" accent4="accent4" accent5="accent5" accent6="accent6" hlink="hlink" folHlink="folHlink"/>
   <p:sldLayoutIdLst>
-    <p:sldLayoutId id="2147483871" r:id="rId1"/>
-    <p:sldLayoutId id="2147483872" r:id="rId2"/>
-    <p:sldLayoutId id="2147483873" r:id="rId3"/>
-    <p:sldLayoutId id="2147483874" r:id="rId4"/>
-    <p:sldLayoutId id="2147483875" r:id="rId5"/>
-    <p:sldLayoutId id="2147483876" r:id="rId6"/>
-    <p:sldLayoutId id="2147483877" r:id="rId7"/>
-    <p:sldLayoutId id="2147483878" r:id="rId8"/>
-    <p:sldLayoutId id="2147483879" r:id="rId9"/>
-    <p:sldLayoutId id="2147483880" r:id="rId10"/>
-    <p:sldLayoutId id="2147483881" r:id="rId11"/>
-    <p:sldLayoutId id="2147483882" r:id="rId12"/>
+    <p:sldLayoutId id="2147483884" r:id="rId1"/>
+    <p:sldLayoutId id="2147483885" r:id="rId2"/>
+    <p:sldLayoutId id="2147483886" r:id="rId3"/>
+    <p:sldLayoutId id="2147483887" r:id="rId4"/>
+    <p:sldLayoutId id="2147483888" r:id="rId5"/>
+    <p:sldLayoutId id="2147483889" r:id="rId6"/>
+    <p:sldLayoutId id="2147483890" r:id="rId7"/>
+    <p:sldLayoutId id="2147483891" r:id="rId8"/>
+    <p:sldLayoutId id="2147483892" r:id="rId9"/>
+    <p:sldLayoutId id="2147483893" r:id="rId10"/>
+    <p:sldLayoutId id="2147483894" r:id="rId11"/>
+    <p:sldLayoutId id="2147483895" r:id="rId12"/>
     <p:sldLayoutId id="2147483790" r:id="rId13"/>
     <p:sldLayoutId id="2147483789" r:id="rId14"/>
   </p:sldLayoutIdLst>
@@ -4091,7 +4091,7 @@
             <a:srgbClr val="F26B43"/>
           </p15:clr>
         </p15:guide>
-        <p15:guide id="2" pos="1021" userDrawn="1">
+        <p15:guide id="2" pos="1009" userDrawn="1">
           <p15:clr>
             <a:srgbClr val="F26B43"/>
           </p15:clr>
@@ -4139,7 +4139,7 @@
         </p:nvSpPr>
         <p:spPr>
           <a:xfrm>
-            <a:off x="-706687" y="54245"/>
+            <a:off x="-724944" y="54246"/>
             <a:ext cx="2717302" cy="169277"/>
           </a:xfrm>
           <a:prstGeom prst="rect">
@@ -4192,8 +4192,8 @@
         </p:nvSpPr>
         <p:spPr>
           <a:xfrm>
-            <a:off x="173830" y="443776"/>
-            <a:ext cx="2682145" cy="954107"/>
+            <a:off x="36673" y="341862"/>
+            <a:ext cx="3259226" cy="1169551"/>
           </a:xfrm>
           <a:prstGeom prst="rect">
             <a:avLst/>
@@ -4211,35 +4211,35 @@
               <a:buChar char="§"/>
             </a:pPr>
             <a:r>
-              <a:rPr lang="ko-KR" altLang="en-US" sz="800" dirty="0">
+              <a:rPr lang="ko-KR" altLang="en-US" sz="1000" b="1" dirty="0">
                 <a:latin typeface="KoPub돋움체 Light" panose="02020603020101020101" pitchFamily="18" charset="-127"/>
                 <a:ea typeface="KoPub돋움체 Light" panose="02020603020101020101" pitchFamily="18" charset="-127"/>
               </a:rPr>
               <a:t>응급(10): “10은 전화 먼저 + 끝나면 </a:t>
             </a:r>
             <a:r>
-              <a:rPr lang="ko-KR" altLang="en-US" sz="800" dirty="0" err="1">
+              <a:rPr lang="ko-KR" altLang="en-US" sz="1000" b="1" dirty="0" err="1">
                 <a:latin typeface="KoPub돋움체 Light" panose="02020603020101020101" pitchFamily="18" charset="-127"/>
                 <a:ea typeface="KoPub돋움체 Light" panose="02020603020101020101" pitchFamily="18" charset="-127"/>
               </a:rPr>
               <a:t>A</a:t>
             </a:r>
             <a:r>
-              <a:rPr lang="ko-KR" altLang="en-US" sz="800" dirty="0">
+              <a:rPr lang="ko-KR" altLang="en-US" sz="1000" b="1" dirty="0">
                 <a:latin typeface="KoPub돋움체 Light" panose="02020603020101020101" pitchFamily="18" charset="-127"/>
                 <a:ea typeface="KoPub돋움체 Light" panose="02020603020101020101" pitchFamily="18" charset="-127"/>
               </a:rPr>
               <a:t>/</a:t>
             </a:r>
             <a:r>
-              <a:rPr lang="ko-KR" altLang="en-US" sz="800" dirty="0" err="1">
+              <a:rPr lang="ko-KR" altLang="en-US" sz="1000" b="1" dirty="0" err="1">
                 <a:latin typeface="KoPub돋움체 Light" panose="02020603020101020101" pitchFamily="18" charset="-127"/>
                 <a:ea typeface="KoPub돋움체 Light" panose="02020603020101020101" pitchFamily="18" charset="-127"/>
               </a:rPr>
               <a:t>D</a:t>
             </a:r>
             <a:r>
-              <a:rPr lang="ko-KR" altLang="en-US" sz="800" dirty="0">
+              <a:rPr lang="ko-KR" altLang="en-US" sz="1000" b="1" dirty="0">
                 <a:latin typeface="KoPub돋움체 Light" panose="02020603020101020101" pitchFamily="18" charset="-127"/>
                 <a:ea typeface="KoPub돋움체 Light" panose="02020603020101020101" pitchFamily="18" charset="-127"/>
               </a:rPr>
@@ -4251,7 +4251,7 @@
               <a:buFont typeface="Wingdings" panose="05000000000000000000" pitchFamily="2" charset="2"/>
               <a:buChar char="§"/>
             </a:pPr>
-            <a:endParaRPr lang="ko-KR" altLang="en-US" sz="800" dirty="0">
+            <a:endParaRPr lang="ko-KR" altLang="en-US" sz="1000" b="1" dirty="0">
               <a:latin typeface="KoPub돋움체 Light" panose="02020603020101020101" pitchFamily="18" charset="-127"/>
               <a:ea typeface="KoPub돋움체 Light" panose="02020603020101020101" pitchFamily="18" charset="-127"/>
             </a:endParaRPr>
@@ -4262,56 +4262,56 @@
               <a:buChar char="§"/>
             </a:pPr>
             <a:r>
-              <a:rPr lang="ko-KR" altLang="en-US" sz="800" dirty="0" err="1">
+              <a:rPr lang="ko-KR" altLang="en-US" sz="1000" b="1" dirty="0" err="1">
                 <a:latin typeface="KoPub돋움체 Light" panose="02020603020101020101" pitchFamily="18" charset="-127"/>
                 <a:ea typeface="KoPub돋움체 Light" panose="02020603020101020101" pitchFamily="18" charset="-127"/>
               </a:rPr>
               <a:t>정보성</a:t>
             </a:r>
             <a:r>
-              <a:rPr lang="ko-KR" altLang="en-US" sz="800" dirty="0">
+              <a:rPr lang="ko-KR" altLang="en-US" sz="1000" b="1" dirty="0">
                 <a:latin typeface="KoPub돋움체 Light" panose="02020603020101020101" pitchFamily="18" charset="-127"/>
                 <a:ea typeface="KoPub돋움체 Light" panose="02020603020101020101" pitchFamily="18" charset="-127"/>
               </a:rPr>
               <a:t>(</a:t>
             </a:r>
             <a:r>
-              <a:rPr lang="ko-KR" altLang="en-US" sz="800" dirty="0" err="1">
+              <a:rPr lang="ko-KR" altLang="en-US" sz="1000" b="1" dirty="0" err="1">
                 <a:latin typeface="KoPub돋움체 Light" panose="02020603020101020101" pitchFamily="18" charset="-127"/>
                 <a:ea typeface="KoPub돋움체 Light" panose="02020603020101020101" pitchFamily="18" charset="-127"/>
               </a:rPr>
               <a:t>입원·검사·자가약</a:t>
             </a:r>
             <a:r>
-              <a:rPr lang="ko-KR" altLang="en-US" sz="800" dirty="0">
+              <a:rPr lang="ko-KR" altLang="en-US" sz="1000" b="1" dirty="0">
                 <a:latin typeface="KoPub돋움체 Light" panose="02020603020101020101" pitchFamily="18" charset="-127"/>
                 <a:ea typeface="KoPub돋움체 Light" panose="02020603020101020101" pitchFamily="18" charset="-127"/>
               </a:rPr>
               <a:t>): “</a:t>
             </a:r>
             <a:r>
-              <a:rPr lang="ko-KR" altLang="en-US" sz="800" dirty="0" err="1">
+              <a:rPr lang="ko-KR" altLang="en-US" sz="1000" b="1" dirty="0" err="1">
                 <a:latin typeface="KoPub돋움체 Light" panose="02020603020101020101" pitchFamily="18" charset="-127"/>
                 <a:ea typeface="KoPub돋움체 Light" panose="02020603020101020101" pitchFamily="18" charset="-127"/>
               </a:rPr>
               <a:t>A</a:t>
             </a:r>
             <a:r>
-              <a:rPr lang="ko-KR" altLang="en-US" sz="800" dirty="0">
+              <a:rPr lang="ko-KR" altLang="en-US" sz="1000" b="1" dirty="0">
                 <a:latin typeface="KoPub돋움체 Light" panose="02020603020101020101" pitchFamily="18" charset="-127"/>
                 <a:ea typeface="KoPub돋움체 Light" panose="02020603020101020101" pitchFamily="18" charset="-127"/>
               </a:rPr>
               <a:t>(보고)/12 → </a:t>
             </a:r>
             <a:r>
-              <a:rPr lang="ko-KR" altLang="en-US" sz="800" dirty="0" err="1">
+              <a:rPr lang="ko-KR" altLang="en-US" sz="1000" b="1" dirty="0" err="1">
                 <a:latin typeface="KoPub돋움체 Light" panose="02020603020101020101" pitchFamily="18" charset="-127"/>
                 <a:ea typeface="KoPub돋움체 Light" panose="02020603020101020101" pitchFamily="18" charset="-127"/>
               </a:rPr>
               <a:t>D</a:t>
             </a:r>
             <a:r>
-              <a:rPr lang="ko-KR" altLang="en-US" sz="800" dirty="0">
+              <a:rPr lang="ko-KR" altLang="en-US" sz="1000" b="1" dirty="0">
                 <a:latin typeface="KoPub돋움체 Light" panose="02020603020101020101" pitchFamily="18" charset="-127"/>
                 <a:ea typeface="KoPub돋움체 Light" panose="02020603020101020101" pitchFamily="18" charset="-127"/>
               </a:rPr>
@@ -4323,7 +4323,7 @@
               <a:buFont typeface="Wingdings" panose="05000000000000000000" pitchFamily="2" charset="2"/>
               <a:buChar char="§"/>
             </a:pPr>
-            <a:endParaRPr lang="ko-KR" altLang="en-US" sz="800" dirty="0">
+            <a:endParaRPr lang="ko-KR" altLang="en-US" sz="1000" b="1" dirty="0">
               <a:latin typeface="KoPub돋움체 Light" panose="02020603020101020101" pitchFamily="18" charset="-127"/>
               <a:ea typeface="KoPub돋움체 Light" panose="02020603020101020101" pitchFamily="18" charset="-127"/>
             </a:endParaRPr>
@@ -4334,21 +4334,21 @@
               <a:buChar char="§"/>
             </a:pPr>
             <a:r>
-              <a:rPr lang="ko-KR" altLang="en-US" sz="800" dirty="0">
+              <a:rPr lang="ko-KR" altLang="en-US" sz="1000" b="1" dirty="0">
                 <a:latin typeface="KoPub돋움체 Light" panose="02020603020101020101" pitchFamily="18" charset="-127"/>
                 <a:ea typeface="KoPub돋움체 Light" panose="02020603020101020101" pitchFamily="18" charset="-127"/>
               </a:rPr>
               <a:t>도움/교육 요청: “교육요청은 </a:t>
             </a:r>
             <a:r>
-              <a:rPr lang="ko-KR" altLang="en-US" sz="800" dirty="0" err="1">
+              <a:rPr lang="ko-KR" altLang="en-US" sz="1000" b="1" dirty="0" err="1">
                 <a:latin typeface="KoPub돋움체 Light" panose="02020603020101020101" pitchFamily="18" charset="-127"/>
                 <a:ea typeface="KoPub돋움체 Light" panose="02020603020101020101" pitchFamily="18" charset="-127"/>
               </a:rPr>
               <a:t>QR에서</a:t>
             </a:r>
             <a:r>
-              <a:rPr lang="ko-KR" altLang="en-US" sz="800" dirty="0">
+              <a:rPr lang="ko-KR" altLang="en-US" sz="1000" b="1" dirty="0">
                 <a:latin typeface="KoPub돋움체 Light" panose="02020603020101020101" pitchFamily="18" charset="-127"/>
                 <a:ea typeface="KoPub돋움체 Light" panose="02020603020101020101" pitchFamily="18" charset="-127"/>
               </a:rPr>
@@ -4360,7 +4360,7 @@
               <a:buFont typeface="Wingdings" panose="05000000000000000000" pitchFamily="2" charset="2"/>
               <a:buChar char="§"/>
             </a:pPr>
-            <a:endParaRPr lang="ko-KR" altLang="en-US" sz="800" dirty="0">
+            <a:endParaRPr lang="ko-KR" altLang="en-US" sz="1000" b="1" dirty="0">
               <a:latin typeface="KoPub돋움체 Light" panose="02020603020101020101" pitchFamily="18" charset="-127"/>
               <a:ea typeface="KoPub돋움체 Light" panose="02020603020101020101" pitchFamily="18" charset="-127"/>
             </a:endParaRPr>
@@ -4371,42 +4371,42 @@
               <a:buChar char="§"/>
             </a:pPr>
             <a:r>
-              <a:rPr lang="ko-KR" altLang="en-US" sz="800" dirty="0" err="1">
+              <a:rPr lang="ko-KR" altLang="en-US" sz="1000" b="1" dirty="0" err="1">
                 <a:latin typeface="KoPub돋움체 Light" panose="02020603020101020101" pitchFamily="18" charset="-127"/>
                 <a:ea typeface="KoPub돋움체 Light" panose="02020603020101020101" pitchFamily="18" charset="-127"/>
               </a:rPr>
               <a:t>익명함</a:t>
             </a:r>
             <a:r>
-              <a:rPr lang="ko-KR" altLang="en-US" sz="800" dirty="0">
+              <a:rPr lang="ko-KR" altLang="en-US" sz="1000" b="1" dirty="0">
                 <a:latin typeface="KoPub돋움체 Light" panose="02020603020101020101" pitchFamily="18" charset="-127"/>
                 <a:ea typeface="KoPub돋움체 Light" panose="02020603020101020101" pitchFamily="18" charset="-127"/>
               </a:rPr>
               <a:t>/칭찬: “</a:t>
             </a:r>
             <a:r>
-              <a:rPr lang="ko-KR" altLang="en-US" sz="800" dirty="0" err="1">
+              <a:rPr lang="ko-KR" altLang="en-US" sz="1000" b="1" dirty="0" err="1">
                 <a:latin typeface="KoPub돋움체 Light" panose="02020603020101020101" pitchFamily="18" charset="-127"/>
                 <a:ea typeface="KoPub돋움체 Light" panose="02020603020101020101" pitchFamily="18" charset="-127"/>
               </a:rPr>
               <a:t>불편·제안·칭찬은</a:t>
             </a:r>
             <a:r>
-              <a:rPr lang="ko-KR" altLang="en-US" sz="800" dirty="0">
+              <a:rPr lang="ko-KR" altLang="en-US" sz="1000" b="1" dirty="0">
                 <a:latin typeface="KoPub돋움체 Light" panose="02020603020101020101" pitchFamily="18" charset="-127"/>
                 <a:ea typeface="KoPub돋움체 Light" panose="02020603020101020101" pitchFamily="18" charset="-127"/>
               </a:rPr>
               <a:t> 앞면 </a:t>
             </a:r>
             <a:r>
-              <a:rPr lang="en-US" altLang="ko-KR" sz="800" dirty="0">
+              <a:rPr lang="en-US" altLang="ko-KR" sz="1000" b="1" dirty="0">
                 <a:latin typeface="KoPub돋움체 Light" panose="02020603020101020101" pitchFamily="18" charset="-127"/>
                 <a:ea typeface="KoPub돋움체 Light" panose="02020603020101020101" pitchFamily="18" charset="-127"/>
               </a:rPr>
               <a:t>QR</a:t>
             </a:r>
             <a:r>
-              <a:rPr lang="ko-KR" altLang="en-US" sz="800" dirty="0">
+              <a:rPr lang="ko-KR" altLang="en-US" sz="1000" b="1" dirty="0">
                 <a:latin typeface="KoPub돋움체 Light" panose="02020603020101020101" pitchFamily="18" charset="-127"/>
                 <a:ea typeface="KoPub돋움체 Light" panose="02020603020101020101" pitchFamily="18" charset="-127"/>
               </a:rPr>
@@ -4436,7 +4436,7 @@
         <p:cNvPr id="1" name="">
           <a:extLst>
             <a:ext uri="{FF2B5EF4-FFF2-40B4-BE49-F238E27FC236}">
-              <a16:creationId xmlns:a16="http://schemas.microsoft.com/office/drawing/2014/main" id="{78B6F53A-0430-F559-16AC-1CB94B362177}"/>
+              <a16:creationId xmlns:a16="http://schemas.microsoft.com/office/drawing/2014/main" id="{B0D715BC-D383-FE04-A967-B1CE24C4C039}"/>
             </a:ext>
           </a:extLst>
         </p:cNvPr>
@@ -4456,7 +4456,7 @@
           <p:cNvPr id="3" name="TextBox 2">
             <a:extLst>
               <a:ext uri="{FF2B5EF4-FFF2-40B4-BE49-F238E27FC236}">
-                <a16:creationId xmlns:a16="http://schemas.microsoft.com/office/drawing/2014/main" id="{F3B48094-EFC1-0AB1-39EA-73E54998CC36}"/>
+                <a16:creationId xmlns:a16="http://schemas.microsoft.com/office/drawing/2014/main" id="{7A054BB9-70FA-24E4-D3E0-B9B521D74FC0}"/>
               </a:ext>
             </a:extLst>
           </p:cNvPr>
@@ -4465,7 +4465,7 @@
         </p:nvSpPr>
         <p:spPr>
           <a:xfrm>
-            <a:off x="-706687" y="54245"/>
+            <a:off x="-724944" y="54246"/>
             <a:ext cx="2717302" cy="169277"/>
           </a:xfrm>
           <a:prstGeom prst="rect">
@@ -4509,7 +4509,7 @@
           <p:cNvPr id="41" name="TextBox 40">
             <a:extLst>
               <a:ext uri="{FF2B5EF4-FFF2-40B4-BE49-F238E27FC236}">
-                <a16:creationId xmlns:a16="http://schemas.microsoft.com/office/drawing/2014/main" id="{E1F63B78-2249-82DE-7187-1069C91C5123}"/>
+                <a16:creationId xmlns:a16="http://schemas.microsoft.com/office/drawing/2014/main" id="{FAAEEE9B-DADF-6D19-BB8E-452D313600DC}"/>
               </a:ext>
             </a:extLst>
           </p:cNvPr>
@@ -4518,8 +4518,8 @@
         </p:nvSpPr>
         <p:spPr>
           <a:xfrm>
-            <a:off x="173830" y="443776"/>
-            <a:ext cx="2682145" cy="954107"/>
+            <a:off x="36673" y="341862"/>
+            <a:ext cx="3259226" cy="1169551"/>
           </a:xfrm>
           <a:prstGeom prst="rect">
             <a:avLst/>
@@ -4537,35 +4537,35 @@
               <a:buChar char="§"/>
             </a:pPr>
             <a:r>
-              <a:rPr lang="ko-KR" altLang="en-US" sz="800" dirty="0">
+              <a:rPr lang="ko-KR" altLang="en-US" sz="1000" b="1" dirty="0">
                 <a:latin typeface="KoPub돋움체 Light" panose="02020603020101020101" pitchFamily="18" charset="-127"/>
                 <a:ea typeface="KoPub돋움체 Light" panose="02020603020101020101" pitchFamily="18" charset="-127"/>
               </a:rPr>
               <a:t>응급(10): “10은 전화 먼저 + 끝나면 </a:t>
             </a:r>
             <a:r>
-              <a:rPr lang="ko-KR" altLang="en-US" sz="800" dirty="0" err="1">
+              <a:rPr lang="ko-KR" altLang="en-US" sz="1000" b="1" dirty="0" err="1">
                 <a:latin typeface="KoPub돋움체 Light" panose="02020603020101020101" pitchFamily="18" charset="-127"/>
                 <a:ea typeface="KoPub돋움체 Light" panose="02020603020101020101" pitchFamily="18" charset="-127"/>
               </a:rPr>
               <a:t>A</a:t>
             </a:r>
             <a:r>
-              <a:rPr lang="ko-KR" altLang="en-US" sz="800" dirty="0">
+              <a:rPr lang="ko-KR" altLang="en-US" sz="1000" b="1" dirty="0">
                 <a:latin typeface="KoPub돋움체 Light" panose="02020603020101020101" pitchFamily="18" charset="-127"/>
                 <a:ea typeface="KoPub돋움체 Light" panose="02020603020101020101" pitchFamily="18" charset="-127"/>
               </a:rPr>
               <a:t>/</a:t>
             </a:r>
             <a:r>
-              <a:rPr lang="ko-KR" altLang="en-US" sz="800" dirty="0" err="1">
+              <a:rPr lang="ko-KR" altLang="en-US" sz="1000" b="1" dirty="0" err="1">
                 <a:latin typeface="KoPub돋움체 Light" panose="02020603020101020101" pitchFamily="18" charset="-127"/>
                 <a:ea typeface="KoPub돋움체 Light" panose="02020603020101020101" pitchFamily="18" charset="-127"/>
               </a:rPr>
               <a:t>D</a:t>
             </a:r>
             <a:r>
-              <a:rPr lang="ko-KR" altLang="en-US" sz="800" dirty="0">
+              <a:rPr lang="ko-KR" altLang="en-US" sz="1000" b="1" dirty="0">
                 <a:latin typeface="KoPub돋움체 Light" panose="02020603020101020101" pitchFamily="18" charset="-127"/>
                 <a:ea typeface="KoPub돋움체 Light" panose="02020603020101020101" pitchFamily="18" charset="-127"/>
               </a:rPr>
@@ -4577,7 +4577,7 @@
               <a:buFont typeface="Wingdings" panose="05000000000000000000" pitchFamily="2" charset="2"/>
               <a:buChar char="§"/>
             </a:pPr>
-            <a:endParaRPr lang="ko-KR" altLang="en-US" sz="800" dirty="0">
+            <a:endParaRPr lang="ko-KR" altLang="en-US" sz="1000" b="1" dirty="0">
               <a:latin typeface="KoPub돋움체 Light" panose="02020603020101020101" pitchFamily="18" charset="-127"/>
               <a:ea typeface="KoPub돋움체 Light" panose="02020603020101020101" pitchFamily="18" charset="-127"/>
             </a:endParaRPr>
@@ -4588,56 +4588,56 @@
               <a:buChar char="§"/>
             </a:pPr>
             <a:r>
-              <a:rPr lang="ko-KR" altLang="en-US" sz="800" dirty="0" err="1">
+              <a:rPr lang="ko-KR" altLang="en-US" sz="1000" b="1" dirty="0" err="1">
                 <a:latin typeface="KoPub돋움체 Light" panose="02020603020101020101" pitchFamily="18" charset="-127"/>
                 <a:ea typeface="KoPub돋움체 Light" panose="02020603020101020101" pitchFamily="18" charset="-127"/>
               </a:rPr>
               <a:t>정보성</a:t>
             </a:r>
             <a:r>
-              <a:rPr lang="ko-KR" altLang="en-US" sz="800" dirty="0">
+              <a:rPr lang="ko-KR" altLang="en-US" sz="1000" b="1" dirty="0">
                 <a:latin typeface="KoPub돋움체 Light" panose="02020603020101020101" pitchFamily="18" charset="-127"/>
                 <a:ea typeface="KoPub돋움체 Light" panose="02020603020101020101" pitchFamily="18" charset="-127"/>
               </a:rPr>
               <a:t>(</a:t>
             </a:r>
             <a:r>
-              <a:rPr lang="ko-KR" altLang="en-US" sz="800" dirty="0" err="1">
+              <a:rPr lang="ko-KR" altLang="en-US" sz="1000" b="1" dirty="0" err="1">
                 <a:latin typeface="KoPub돋움체 Light" panose="02020603020101020101" pitchFamily="18" charset="-127"/>
                 <a:ea typeface="KoPub돋움체 Light" panose="02020603020101020101" pitchFamily="18" charset="-127"/>
               </a:rPr>
               <a:t>입원·검사·자가약</a:t>
             </a:r>
             <a:r>
-              <a:rPr lang="ko-KR" altLang="en-US" sz="800" dirty="0">
+              <a:rPr lang="ko-KR" altLang="en-US" sz="1000" b="1" dirty="0">
                 <a:latin typeface="KoPub돋움체 Light" panose="02020603020101020101" pitchFamily="18" charset="-127"/>
                 <a:ea typeface="KoPub돋움체 Light" panose="02020603020101020101" pitchFamily="18" charset="-127"/>
               </a:rPr>
               <a:t>): “</a:t>
             </a:r>
             <a:r>
-              <a:rPr lang="ko-KR" altLang="en-US" sz="800" dirty="0" err="1">
+              <a:rPr lang="ko-KR" altLang="en-US" sz="1000" b="1" dirty="0" err="1">
                 <a:latin typeface="KoPub돋움체 Light" panose="02020603020101020101" pitchFamily="18" charset="-127"/>
                 <a:ea typeface="KoPub돋움체 Light" panose="02020603020101020101" pitchFamily="18" charset="-127"/>
               </a:rPr>
               <a:t>A</a:t>
             </a:r>
             <a:r>
-              <a:rPr lang="ko-KR" altLang="en-US" sz="800" dirty="0">
+              <a:rPr lang="ko-KR" altLang="en-US" sz="1000" b="1" dirty="0">
                 <a:latin typeface="KoPub돋움체 Light" panose="02020603020101020101" pitchFamily="18" charset="-127"/>
                 <a:ea typeface="KoPub돋움체 Light" panose="02020603020101020101" pitchFamily="18" charset="-127"/>
               </a:rPr>
               <a:t>(보고)/12 → </a:t>
             </a:r>
             <a:r>
-              <a:rPr lang="ko-KR" altLang="en-US" sz="800" dirty="0" err="1">
+              <a:rPr lang="ko-KR" altLang="en-US" sz="1000" b="1" dirty="0" err="1">
                 <a:latin typeface="KoPub돋움체 Light" panose="02020603020101020101" pitchFamily="18" charset="-127"/>
                 <a:ea typeface="KoPub돋움체 Light" panose="02020603020101020101" pitchFamily="18" charset="-127"/>
               </a:rPr>
               <a:t>D</a:t>
             </a:r>
             <a:r>
-              <a:rPr lang="ko-KR" altLang="en-US" sz="800" dirty="0">
+              <a:rPr lang="ko-KR" altLang="en-US" sz="1000" b="1" dirty="0">
                 <a:latin typeface="KoPub돋움체 Light" panose="02020603020101020101" pitchFamily="18" charset="-127"/>
                 <a:ea typeface="KoPub돋움체 Light" panose="02020603020101020101" pitchFamily="18" charset="-127"/>
               </a:rPr>
@@ -4649,7 +4649,7 @@
               <a:buFont typeface="Wingdings" panose="05000000000000000000" pitchFamily="2" charset="2"/>
               <a:buChar char="§"/>
             </a:pPr>
-            <a:endParaRPr lang="ko-KR" altLang="en-US" sz="800" dirty="0">
+            <a:endParaRPr lang="ko-KR" altLang="en-US" sz="1000" b="1" dirty="0">
               <a:latin typeface="KoPub돋움체 Light" panose="02020603020101020101" pitchFamily="18" charset="-127"/>
               <a:ea typeface="KoPub돋움체 Light" panose="02020603020101020101" pitchFamily="18" charset="-127"/>
             </a:endParaRPr>
@@ -4660,21 +4660,21 @@
               <a:buChar char="§"/>
             </a:pPr>
             <a:r>
-              <a:rPr lang="ko-KR" altLang="en-US" sz="800" dirty="0">
+              <a:rPr lang="ko-KR" altLang="en-US" sz="1000" b="1" dirty="0">
                 <a:latin typeface="KoPub돋움체 Light" panose="02020603020101020101" pitchFamily="18" charset="-127"/>
                 <a:ea typeface="KoPub돋움체 Light" panose="02020603020101020101" pitchFamily="18" charset="-127"/>
               </a:rPr>
               <a:t>도움/교육 요청: “교육요청은 </a:t>
             </a:r>
             <a:r>
-              <a:rPr lang="ko-KR" altLang="en-US" sz="800" dirty="0" err="1">
+              <a:rPr lang="ko-KR" altLang="en-US" sz="1000" b="1" dirty="0" err="1">
                 <a:latin typeface="KoPub돋움체 Light" panose="02020603020101020101" pitchFamily="18" charset="-127"/>
                 <a:ea typeface="KoPub돋움체 Light" panose="02020603020101020101" pitchFamily="18" charset="-127"/>
               </a:rPr>
               <a:t>QR에서</a:t>
             </a:r>
             <a:r>
-              <a:rPr lang="ko-KR" altLang="en-US" sz="800" dirty="0">
+              <a:rPr lang="ko-KR" altLang="en-US" sz="1000" b="1" dirty="0">
                 <a:latin typeface="KoPub돋움체 Light" panose="02020603020101020101" pitchFamily="18" charset="-127"/>
                 <a:ea typeface="KoPub돋움체 Light" panose="02020603020101020101" pitchFamily="18" charset="-127"/>
               </a:rPr>
@@ -4686,7 +4686,7 @@
               <a:buFont typeface="Wingdings" panose="05000000000000000000" pitchFamily="2" charset="2"/>
               <a:buChar char="§"/>
             </a:pPr>
-            <a:endParaRPr lang="ko-KR" altLang="en-US" sz="800" dirty="0">
+            <a:endParaRPr lang="ko-KR" altLang="en-US" sz="1000" b="1" dirty="0">
               <a:latin typeface="KoPub돋움체 Light" panose="02020603020101020101" pitchFamily="18" charset="-127"/>
               <a:ea typeface="KoPub돋움체 Light" panose="02020603020101020101" pitchFamily="18" charset="-127"/>
             </a:endParaRPr>
@@ -4697,42 +4697,42 @@
               <a:buChar char="§"/>
             </a:pPr>
             <a:r>
-              <a:rPr lang="ko-KR" altLang="en-US" sz="800" dirty="0" err="1">
+              <a:rPr lang="ko-KR" altLang="en-US" sz="1000" b="1" dirty="0" err="1">
                 <a:latin typeface="KoPub돋움체 Light" panose="02020603020101020101" pitchFamily="18" charset="-127"/>
                 <a:ea typeface="KoPub돋움체 Light" panose="02020603020101020101" pitchFamily="18" charset="-127"/>
               </a:rPr>
               <a:t>익명함</a:t>
             </a:r>
             <a:r>
-              <a:rPr lang="ko-KR" altLang="en-US" sz="800" dirty="0">
+              <a:rPr lang="ko-KR" altLang="en-US" sz="1000" b="1" dirty="0">
                 <a:latin typeface="KoPub돋움체 Light" panose="02020603020101020101" pitchFamily="18" charset="-127"/>
                 <a:ea typeface="KoPub돋움체 Light" panose="02020603020101020101" pitchFamily="18" charset="-127"/>
               </a:rPr>
               <a:t>/칭찬: “</a:t>
             </a:r>
             <a:r>
-              <a:rPr lang="ko-KR" altLang="en-US" sz="800" dirty="0" err="1">
+              <a:rPr lang="ko-KR" altLang="en-US" sz="1000" b="1" dirty="0" err="1">
                 <a:latin typeface="KoPub돋움체 Light" panose="02020603020101020101" pitchFamily="18" charset="-127"/>
                 <a:ea typeface="KoPub돋움체 Light" panose="02020603020101020101" pitchFamily="18" charset="-127"/>
               </a:rPr>
               <a:t>불편·제안·칭찬은</a:t>
             </a:r>
             <a:r>
-              <a:rPr lang="ko-KR" altLang="en-US" sz="800" dirty="0">
+              <a:rPr lang="ko-KR" altLang="en-US" sz="1000" b="1" dirty="0">
                 <a:latin typeface="KoPub돋움체 Light" panose="02020603020101020101" pitchFamily="18" charset="-127"/>
                 <a:ea typeface="KoPub돋움체 Light" panose="02020603020101020101" pitchFamily="18" charset="-127"/>
               </a:rPr>
               <a:t> 앞면 </a:t>
             </a:r>
             <a:r>
-              <a:rPr lang="en-US" altLang="ko-KR" sz="800" dirty="0">
+              <a:rPr lang="en-US" altLang="ko-KR" sz="1000" b="1" dirty="0">
                 <a:latin typeface="KoPub돋움체 Light" panose="02020603020101020101" pitchFamily="18" charset="-127"/>
                 <a:ea typeface="KoPub돋움체 Light" panose="02020603020101020101" pitchFamily="18" charset="-127"/>
               </a:rPr>
               <a:t>QR</a:t>
             </a:r>
             <a:r>
-              <a:rPr lang="ko-KR" altLang="en-US" sz="800" dirty="0">
+              <a:rPr lang="ko-KR" altLang="en-US" sz="1000" b="1" dirty="0">
                 <a:latin typeface="KoPub돋움체 Light" panose="02020603020101020101" pitchFamily="18" charset="-127"/>
                 <a:ea typeface="KoPub돋움체 Light" panose="02020603020101020101" pitchFamily="18" charset="-127"/>
               </a:rPr>
@@ -4744,7 +4744,7 @@
     </p:spTree>
     <p:extLst>
       <p:ext uri="{BB962C8B-B14F-4D97-AF65-F5344CB8AC3E}">
-        <p14:creationId xmlns:p14="http://schemas.microsoft.com/office/powerpoint/2010/main" val="2549708592"/>
+        <p14:creationId xmlns:p14="http://schemas.microsoft.com/office/powerpoint/2010/main" val="892806788"/>
       </p:ext>
     </p:extLst>
   </p:cSld>
@@ -4762,7 +4762,7 @@
         <p:cNvPr id="1" name="">
           <a:extLst>
             <a:ext uri="{FF2B5EF4-FFF2-40B4-BE49-F238E27FC236}">
-              <a16:creationId xmlns:a16="http://schemas.microsoft.com/office/drawing/2014/main" id="{9E743C75-3C33-BBC3-E6C9-8240D1A5F1C3}"/>
+              <a16:creationId xmlns:a16="http://schemas.microsoft.com/office/drawing/2014/main" id="{7D60A7F2-B36B-31C2-B685-94C3913780BA}"/>
             </a:ext>
           </a:extLst>
         </p:cNvPr>
@@ -4782,7 +4782,7 @@
           <p:cNvPr id="3" name="TextBox 2">
             <a:extLst>
               <a:ext uri="{FF2B5EF4-FFF2-40B4-BE49-F238E27FC236}">
-                <a16:creationId xmlns:a16="http://schemas.microsoft.com/office/drawing/2014/main" id="{1A900376-78B0-AE26-3502-FF380BB4DCC5}"/>
+                <a16:creationId xmlns:a16="http://schemas.microsoft.com/office/drawing/2014/main" id="{4B1BC9AB-C143-302D-6720-D3C1BEA283F0}"/>
               </a:ext>
             </a:extLst>
           </p:cNvPr>
@@ -4791,7 +4791,7 @@
         </p:nvSpPr>
         <p:spPr>
           <a:xfrm>
-            <a:off x="-706687" y="54245"/>
+            <a:off x="-724944" y="54246"/>
             <a:ext cx="2717302" cy="169277"/>
           </a:xfrm>
           <a:prstGeom prst="rect">
@@ -4835,7 +4835,7 @@
           <p:cNvPr id="41" name="TextBox 40">
             <a:extLst>
               <a:ext uri="{FF2B5EF4-FFF2-40B4-BE49-F238E27FC236}">
-                <a16:creationId xmlns:a16="http://schemas.microsoft.com/office/drawing/2014/main" id="{8A9CB271-6F6E-7134-0EB6-3D48C6824CCF}"/>
+                <a16:creationId xmlns:a16="http://schemas.microsoft.com/office/drawing/2014/main" id="{0B585297-2FBA-81AB-4BD5-542D4D14E38B}"/>
               </a:ext>
             </a:extLst>
           </p:cNvPr>
@@ -4844,8 +4844,8 @@
         </p:nvSpPr>
         <p:spPr>
           <a:xfrm>
-            <a:off x="173830" y="443776"/>
-            <a:ext cx="2682145" cy="954107"/>
+            <a:off x="36673" y="341862"/>
+            <a:ext cx="3259226" cy="1169551"/>
           </a:xfrm>
           <a:prstGeom prst="rect">
             <a:avLst/>
@@ -4863,35 +4863,35 @@
               <a:buChar char="§"/>
             </a:pPr>
             <a:r>
-              <a:rPr lang="ko-KR" altLang="en-US" sz="800" dirty="0">
+              <a:rPr lang="ko-KR" altLang="en-US" sz="1000" b="1" dirty="0">
                 <a:latin typeface="KoPub돋움체 Light" panose="02020603020101020101" pitchFamily="18" charset="-127"/>
                 <a:ea typeface="KoPub돋움체 Light" panose="02020603020101020101" pitchFamily="18" charset="-127"/>
               </a:rPr>
               <a:t>응급(10): “10은 전화 먼저 + 끝나면 </a:t>
             </a:r>
             <a:r>
-              <a:rPr lang="ko-KR" altLang="en-US" sz="800" dirty="0" err="1">
+              <a:rPr lang="ko-KR" altLang="en-US" sz="1000" b="1" dirty="0" err="1">
                 <a:latin typeface="KoPub돋움체 Light" panose="02020603020101020101" pitchFamily="18" charset="-127"/>
                 <a:ea typeface="KoPub돋움체 Light" panose="02020603020101020101" pitchFamily="18" charset="-127"/>
               </a:rPr>
               <a:t>A</a:t>
             </a:r>
             <a:r>
-              <a:rPr lang="ko-KR" altLang="en-US" sz="800" dirty="0">
+              <a:rPr lang="ko-KR" altLang="en-US" sz="1000" b="1" dirty="0">
                 <a:latin typeface="KoPub돋움체 Light" panose="02020603020101020101" pitchFamily="18" charset="-127"/>
                 <a:ea typeface="KoPub돋움체 Light" panose="02020603020101020101" pitchFamily="18" charset="-127"/>
               </a:rPr>
               <a:t>/</a:t>
             </a:r>
             <a:r>
-              <a:rPr lang="ko-KR" altLang="en-US" sz="800" dirty="0" err="1">
+              <a:rPr lang="ko-KR" altLang="en-US" sz="1000" b="1" dirty="0" err="1">
                 <a:latin typeface="KoPub돋움체 Light" panose="02020603020101020101" pitchFamily="18" charset="-127"/>
                 <a:ea typeface="KoPub돋움체 Light" panose="02020603020101020101" pitchFamily="18" charset="-127"/>
               </a:rPr>
               <a:t>D</a:t>
             </a:r>
             <a:r>
-              <a:rPr lang="ko-KR" altLang="en-US" sz="800" dirty="0">
+              <a:rPr lang="ko-KR" altLang="en-US" sz="1000" b="1" dirty="0">
                 <a:latin typeface="KoPub돋움체 Light" panose="02020603020101020101" pitchFamily="18" charset="-127"/>
                 <a:ea typeface="KoPub돋움체 Light" panose="02020603020101020101" pitchFamily="18" charset="-127"/>
               </a:rPr>
@@ -4903,7 +4903,7 @@
               <a:buFont typeface="Wingdings" panose="05000000000000000000" pitchFamily="2" charset="2"/>
               <a:buChar char="§"/>
             </a:pPr>
-            <a:endParaRPr lang="ko-KR" altLang="en-US" sz="800" dirty="0">
+            <a:endParaRPr lang="ko-KR" altLang="en-US" sz="1000" b="1" dirty="0">
               <a:latin typeface="KoPub돋움체 Light" panose="02020603020101020101" pitchFamily="18" charset="-127"/>
               <a:ea typeface="KoPub돋움체 Light" panose="02020603020101020101" pitchFamily="18" charset="-127"/>
             </a:endParaRPr>
@@ -4914,56 +4914,56 @@
               <a:buChar char="§"/>
             </a:pPr>
             <a:r>
-              <a:rPr lang="ko-KR" altLang="en-US" sz="800" dirty="0" err="1">
+              <a:rPr lang="ko-KR" altLang="en-US" sz="1000" b="1" dirty="0" err="1">
                 <a:latin typeface="KoPub돋움체 Light" panose="02020603020101020101" pitchFamily="18" charset="-127"/>
                 <a:ea typeface="KoPub돋움체 Light" panose="02020603020101020101" pitchFamily="18" charset="-127"/>
               </a:rPr>
               <a:t>정보성</a:t>
             </a:r>
             <a:r>
-              <a:rPr lang="ko-KR" altLang="en-US" sz="800" dirty="0">
+              <a:rPr lang="ko-KR" altLang="en-US" sz="1000" b="1" dirty="0">
                 <a:latin typeface="KoPub돋움체 Light" panose="02020603020101020101" pitchFamily="18" charset="-127"/>
                 <a:ea typeface="KoPub돋움체 Light" panose="02020603020101020101" pitchFamily="18" charset="-127"/>
               </a:rPr>
               <a:t>(</a:t>
             </a:r>
             <a:r>
-              <a:rPr lang="ko-KR" altLang="en-US" sz="800" dirty="0" err="1">
+              <a:rPr lang="ko-KR" altLang="en-US" sz="1000" b="1" dirty="0" err="1">
                 <a:latin typeface="KoPub돋움체 Light" panose="02020603020101020101" pitchFamily="18" charset="-127"/>
                 <a:ea typeface="KoPub돋움체 Light" panose="02020603020101020101" pitchFamily="18" charset="-127"/>
               </a:rPr>
               <a:t>입원·검사·자가약</a:t>
             </a:r>
             <a:r>
-              <a:rPr lang="ko-KR" altLang="en-US" sz="800" dirty="0">
+              <a:rPr lang="ko-KR" altLang="en-US" sz="1000" b="1" dirty="0">
                 <a:latin typeface="KoPub돋움체 Light" panose="02020603020101020101" pitchFamily="18" charset="-127"/>
                 <a:ea typeface="KoPub돋움체 Light" panose="02020603020101020101" pitchFamily="18" charset="-127"/>
               </a:rPr>
               <a:t>): “</a:t>
             </a:r>
             <a:r>
-              <a:rPr lang="ko-KR" altLang="en-US" sz="800" dirty="0" err="1">
+              <a:rPr lang="ko-KR" altLang="en-US" sz="1000" b="1" dirty="0" err="1">
                 <a:latin typeface="KoPub돋움체 Light" panose="02020603020101020101" pitchFamily="18" charset="-127"/>
                 <a:ea typeface="KoPub돋움체 Light" panose="02020603020101020101" pitchFamily="18" charset="-127"/>
               </a:rPr>
               <a:t>A</a:t>
             </a:r>
             <a:r>
-              <a:rPr lang="ko-KR" altLang="en-US" sz="800" dirty="0">
+              <a:rPr lang="ko-KR" altLang="en-US" sz="1000" b="1" dirty="0">
                 <a:latin typeface="KoPub돋움체 Light" panose="02020603020101020101" pitchFamily="18" charset="-127"/>
                 <a:ea typeface="KoPub돋움체 Light" panose="02020603020101020101" pitchFamily="18" charset="-127"/>
               </a:rPr>
               <a:t>(보고)/12 → </a:t>
             </a:r>
             <a:r>
-              <a:rPr lang="ko-KR" altLang="en-US" sz="800" dirty="0" err="1">
+              <a:rPr lang="ko-KR" altLang="en-US" sz="1000" b="1" dirty="0" err="1">
                 <a:latin typeface="KoPub돋움체 Light" panose="02020603020101020101" pitchFamily="18" charset="-127"/>
                 <a:ea typeface="KoPub돋움체 Light" panose="02020603020101020101" pitchFamily="18" charset="-127"/>
               </a:rPr>
               <a:t>D</a:t>
             </a:r>
             <a:r>
-              <a:rPr lang="ko-KR" altLang="en-US" sz="800" dirty="0">
+              <a:rPr lang="ko-KR" altLang="en-US" sz="1000" b="1" dirty="0">
                 <a:latin typeface="KoPub돋움체 Light" panose="02020603020101020101" pitchFamily="18" charset="-127"/>
                 <a:ea typeface="KoPub돋움체 Light" panose="02020603020101020101" pitchFamily="18" charset="-127"/>
               </a:rPr>
@@ -4975,7 +4975,7 @@
               <a:buFont typeface="Wingdings" panose="05000000000000000000" pitchFamily="2" charset="2"/>
               <a:buChar char="§"/>
             </a:pPr>
-            <a:endParaRPr lang="ko-KR" altLang="en-US" sz="800" dirty="0">
+            <a:endParaRPr lang="ko-KR" altLang="en-US" sz="1000" b="1" dirty="0">
               <a:latin typeface="KoPub돋움체 Light" panose="02020603020101020101" pitchFamily="18" charset="-127"/>
               <a:ea typeface="KoPub돋움체 Light" panose="02020603020101020101" pitchFamily="18" charset="-127"/>
             </a:endParaRPr>
@@ -4986,21 +4986,21 @@
               <a:buChar char="§"/>
             </a:pPr>
             <a:r>
-              <a:rPr lang="ko-KR" altLang="en-US" sz="800" dirty="0">
+              <a:rPr lang="ko-KR" altLang="en-US" sz="1000" b="1" dirty="0">
                 <a:latin typeface="KoPub돋움체 Light" panose="02020603020101020101" pitchFamily="18" charset="-127"/>
                 <a:ea typeface="KoPub돋움체 Light" panose="02020603020101020101" pitchFamily="18" charset="-127"/>
               </a:rPr>
               <a:t>도움/교육 요청: “교육요청은 </a:t>
             </a:r>
             <a:r>
-              <a:rPr lang="ko-KR" altLang="en-US" sz="800" dirty="0" err="1">
+              <a:rPr lang="ko-KR" altLang="en-US" sz="1000" b="1" dirty="0" err="1">
                 <a:latin typeface="KoPub돋움체 Light" panose="02020603020101020101" pitchFamily="18" charset="-127"/>
                 <a:ea typeface="KoPub돋움체 Light" panose="02020603020101020101" pitchFamily="18" charset="-127"/>
               </a:rPr>
               <a:t>QR에서</a:t>
             </a:r>
             <a:r>
-              <a:rPr lang="ko-KR" altLang="en-US" sz="800" dirty="0">
+              <a:rPr lang="ko-KR" altLang="en-US" sz="1000" b="1" dirty="0">
                 <a:latin typeface="KoPub돋움체 Light" panose="02020603020101020101" pitchFamily="18" charset="-127"/>
                 <a:ea typeface="KoPub돋움체 Light" panose="02020603020101020101" pitchFamily="18" charset="-127"/>
               </a:rPr>
@@ -5012,7 +5012,7 @@
               <a:buFont typeface="Wingdings" panose="05000000000000000000" pitchFamily="2" charset="2"/>
               <a:buChar char="§"/>
             </a:pPr>
-            <a:endParaRPr lang="ko-KR" altLang="en-US" sz="800" dirty="0">
+            <a:endParaRPr lang="ko-KR" altLang="en-US" sz="1000" b="1" dirty="0">
               <a:latin typeface="KoPub돋움체 Light" panose="02020603020101020101" pitchFamily="18" charset="-127"/>
               <a:ea typeface="KoPub돋움체 Light" panose="02020603020101020101" pitchFamily="18" charset="-127"/>
             </a:endParaRPr>
@@ -5023,42 +5023,42 @@
               <a:buChar char="§"/>
             </a:pPr>
             <a:r>
-              <a:rPr lang="ko-KR" altLang="en-US" sz="800" dirty="0" err="1">
+              <a:rPr lang="ko-KR" altLang="en-US" sz="1000" b="1" dirty="0" err="1">
                 <a:latin typeface="KoPub돋움체 Light" panose="02020603020101020101" pitchFamily="18" charset="-127"/>
                 <a:ea typeface="KoPub돋움체 Light" panose="02020603020101020101" pitchFamily="18" charset="-127"/>
               </a:rPr>
               <a:t>익명함</a:t>
             </a:r>
             <a:r>
-              <a:rPr lang="ko-KR" altLang="en-US" sz="800" dirty="0">
+              <a:rPr lang="ko-KR" altLang="en-US" sz="1000" b="1" dirty="0">
                 <a:latin typeface="KoPub돋움체 Light" panose="02020603020101020101" pitchFamily="18" charset="-127"/>
                 <a:ea typeface="KoPub돋움체 Light" panose="02020603020101020101" pitchFamily="18" charset="-127"/>
               </a:rPr>
               <a:t>/칭찬: “</a:t>
             </a:r>
             <a:r>
-              <a:rPr lang="ko-KR" altLang="en-US" sz="800" dirty="0" err="1">
+              <a:rPr lang="ko-KR" altLang="en-US" sz="1000" b="1" dirty="0" err="1">
                 <a:latin typeface="KoPub돋움체 Light" panose="02020603020101020101" pitchFamily="18" charset="-127"/>
                 <a:ea typeface="KoPub돋움체 Light" panose="02020603020101020101" pitchFamily="18" charset="-127"/>
               </a:rPr>
               <a:t>불편·제안·칭찬은</a:t>
             </a:r>
             <a:r>
-              <a:rPr lang="ko-KR" altLang="en-US" sz="800" dirty="0">
+              <a:rPr lang="ko-KR" altLang="en-US" sz="1000" b="1" dirty="0">
                 <a:latin typeface="KoPub돋움체 Light" panose="02020603020101020101" pitchFamily="18" charset="-127"/>
                 <a:ea typeface="KoPub돋움체 Light" panose="02020603020101020101" pitchFamily="18" charset="-127"/>
               </a:rPr>
               <a:t> 앞면 </a:t>
             </a:r>
             <a:r>
-              <a:rPr lang="en-US" altLang="ko-KR" sz="800" dirty="0">
+              <a:rPr lang="en-US" altLang="ko-KR" sz="1000" b="1" dirty="0">
                 <a:latin typeface="KoPub돋움체 Light" panose="02020603020101020101" pitchFamily="18" charset="-127"/>
                 <a:ea typeface="KoPub돋움체 Light" panose="02020603020101020101" pitchFamily="18" charset="-127"/>
               </a:rPr>
               <a:t>QR</a:t>
             </a:r>
             <a:r>
-              <a:rPr lang="ko-KR" altLang="en-US" sz="800" dirty="0">
+              <a:rPr lang="ko-KR" altLang="en-US" sz="1000" b="1" dirty="0">
                 <a:latin typeface="KoPub돋움체 Light" panose="02020603020101020101" pitchFamily="18" charset="-127"/>
                 <a:ea typeface="KoPub돋움체 Light" panose="02020603020101020101" pitchFamily="18" charset="-127"/>
               </a:rPr>
@@ -5070,7 +5070,7 @@
     </p:spTree>
     <p:extLst>
       <p:ext uri="{BB962C8B-B14F-4D97-AF65-F5344CB8AC3E}">
-        <p14:creationId xmlns:p14="http://schemas.microsoft.com/office/powerpoint/2010/main" val="2151640820"/>
+        <p14:creationId xmlns:p14="http://schemas.microsoft.com/office/powerpoint/2010/main" val="2122011044"/>
       </p:ext>
     </p:extLst>
   </p:cSld>
@@ -5088,7 +5088,7 @@
         <p:cNvPr id="1" name="">
           <a:extLst>
             <a:ext uri="{FF2B5EF4-FFF2-40B4-BE49-F238E27FC236}">
-              <a16:creationId xmlns:a16="http://schemas.microsoft.com/office/drawing/2014/main" id="{B06371BF-37B0-1B12-AFF9-CA4F44D40FFE}"/>
+              <a16:creationId xmlns:a16="http://schemas.microsoft.com/office/drawing/2014/main" id="{C31636C1-2613-7B52-79FE-583FA04A3E2A}"/>
             </a:ext>
           </a:extLst>
         </p:cNvPr>
@@ -5108,7 +5108,7 @@
           <p:cNvPr id="3" name="TextBox 2">
             <a:extLst>
               <a:ext uri="{FF2B5EF4-FFF2-40B4-BE49-F238E27FC236}">
-                <a16:creationId xmlns:a16="http://schemas.microsoft.com/office/drawing/2014/main" id="{D1E49035-D2FB-5CD3-47D4-8B89FF8921A6}"/>
+                <a16:creationId xmlns:a16="http://schemas.microsoft.com/office/drawing/2014/main" id="{C528E5A7-5C6C-CE45-1ACA-5BA990581721}"/>
               </a:ext>
             </a:extLst>
           </p:cNvPr>
@@ -5117,7 +5117,7 @@
         </p:nvSpPr>
         <p:spPr>
           <a:xfrm>
-            <a:off x="-706687" y="54245"/>
+            <a:off x="-724944" y="54246"/>
             <a:ext cx="2717302" cy="169277"/>
           </a:xfrm>
           <a:prstGeom prst="rect">
@@ -5161,7 +5161,7 @@
           <p:cNvPr id="41" name="TextBox 40">
             <a:extLst>
               <a:ext uri="{FF2B5EF4-FFF2-40B4-BE49-F238E27FC236}">
-                <a16:creationId xmlns:a16="http://schemas.microsoft.com/office/drawing/2014/main" id="{1C886F30-AF10-2656-EADE-35846D6D76A5}"/>
+                <a16:creationId xmlns:a16="http://schemas.microsoft.com/office/drawing/2014/main" id="{86573C04-F17A-19A1-8042-788CD0F78FC6}"/>
               </a:ext>
             </a:extLst>
           </p:cNvPr>
@@ -5170,8 +5170,8 @@
         </p:nvSpPr>
         <p:spPr>
           <a:xfrm>
-            <a:off x="173830" y="443776"/>
-            <a:ext cx="2682145" cy="954107"/>
+            <a:off x="36673" y="341862"/>
+            <a:ext cx="3259226" cy="1169551"/>
           </a:xfrm>
           <a:prstGeom prst="rect">
             <a:avLst/>
@@ -5189,35 +5189,35 @@
               <a:buChar char="§"/>
             </a:pPr>
             <a:r>
-              <a:rPr lang="ko-KR" altLang="en-US" sz="800" dirty="0">
+              <a:rPr lang="ko-KR" altLang="en-US" sz="1000" b="1" dirty="0">
                 <a:latin typeface="KoPub돋움체 Light" panose="02020603020101020101" pitchFamily="18" charset="-127"/>
                 <a:ea typeface="KoPub돋움체 Light" panose="02020603020101020101" pitchFamily="18" charset="-127"/>
               </a:rPr>
               <a:t>응급(10): “10은 전화 먼저 + 끝나면 </a:t>
             </a:r>
             <a:r>
-              <a:rPr lang="ko-KR" altLang="en-US" sz="800" dirty="0" err="1">
+              <a:rPr lang="ko-KR" altLang="en-US" sz="1000" b="1" dirty="0" err="1">
                 <a:latin typeface="KoPub돋움체 Light" panose="02020603020101020101" pitchFamily="18" charset="-127"/>
                 <a:ea typeface="KoPub돋움체 Light" panose="02020603020101020101" pitchFamily="18" charset="-127"/>
               </a:rPr>
               <a:t>A</a:t>
             </a:r>
             <a:r>
-              <a:rPr lang="ko-KR" altLang="en-US" sz="800" dirty="0">
+              <a:rPr lang="ko-KR" altLang="en-US" sz="1000" b="1" dirty="0">
                 <a:latin typeface="KoPub돋움체 Light" panose="02020603020101020101" pitchFamily="18" charset="-127"/>
                 <a:ea typeface="KoPub돋움체 Light" panose="02020603020101020101" pitchFamily="18" charset="-127"/>
               </a:rPr>
               <a:t>/</a:t>
             </a:r>
             <a:r>
-              <a:rPr lang="ko-KR" altLang="en-US" sz="800" dirty="0" err="1">
+              <a:rPr lang="ko-KR" altLang="en-US" sz="1000" b="1" dirty="0" err="1">
                 <a:latin typeface="KoPub돋움체 Light" panose="02020603020101020101" pitchFamily="18" charset="-127"/>
                 <a:ea typeface="KoPub돋움체 Light" panose="02020603020101020101" pitchFamily="18" charset="-127"/>
               </a:rPr>
               <a:t>D</a:t>
             </a:r>
             <a:r>
-              <a:rPr lang="ko-KR" altLang="en-US" sz="800" dirty="0">
+              <a:rPr lang="ko-KR" altLang="en-US" sz="1000" b="1" dirty="0">
                 <a:latin typeface="KoPub돋움체 Light" panose="02020603020101020101" pitchFamily="18" charset="-127"/>
                 <a:ea typeface="KoPub돋움체 Light" panose="02020603020101020101" pitchFamily="18" charset="-127"/>
               </a:rPr>
@@ -5229,7 +5229,7 @@
               <a:buFont typeface="Wingdings" panose="05000000000000000000" pitchFamily="2" charset="2"/>
               <a:buChar char="§"/>
             </a:pPr>
-            <a:endParaRPr lang="ko-KR" altLang="en-US" sz="800" dirty="0">
+            <a:endParaRPr lang="ko-KR" altLang="en-US" sz="1000" b="1" dirty="0">
               <a:latin typeface="KoPub돋움체 Light" panose="02020603020101020101" pitchFamily="18" charset="-127"/>
               <a:ea typeface="KoPub돋움체 Light" panose="02020603020101020101" pitchFamily="18" charset="-127"/>
             </a:endParaRPr>
@@ -5240,56 +5240,56 @@
               <a:buChar char="§"/>
             </a:pPr>
             <a:r>
-              <a:rPr lang="ko-KR" altLang="en-US" sz="800" dirty="0" err="1">
+              <a:rPr lang="ko-KR" altLang="en-US" sz="1000" b="1" dirty="0" err="1">
                 <a:latin typeface="KoPub돋움체 Light" panose="02020603020101020101" pitchFamily="18" charset="-127"/>
                 <a:ea typeface="KoPub돋움체 Light" panose="02020603020101020101" pitchFamily="18" charset="-127"/>
               </a:rPr>
               <a:t>정보성</a:t>
             </a:r>
             <a:r>
-              <a:rPr lang="ko-KR" altLang="en-US" sz="800" dirty="0">
+              <a:rPr lang="ko-KR" altLang="en-US" sz="1000" b="1" dirty="0">
                 <a:latin typeface="KoPub돋움체 Light" panose="02020603020101020101" pitchFamily="18" charset="-127"/>
                 <a:ea typeface="KoPub돋움체 Light" panose="02020603020101020101" pitchFamily="18" charset="-127"/>
               </a:rPr>
               <a:t>(</a:t>
             </a:r>
             <a:r>
-              <a:rPr lang="ko-KR" altLang="en-US" sz="800" dirty="0" err="1">
+              <a:rPr lang="ko-KR" altLang="en-US" sz="1000" b="1" dirty="0" err="1">
                 <a:latin typeface="KoPub돋움체 Light" panose="02020603020101020101" pitchFamily="18" charset="-127"/>
                 <a:ea typeface="KoPub돋움체 Light" panose="02020603020101020101" pitchFamily="18" charset="-127"/>
               </a:rPr>
               <a:t>입원·검사·자가약</a:t>
             </a:r>
             <a:r>
-              <a:rPr lang="ko-KR" altLang="en-US" sz="800" dirty="0">
+              <a:rPr lang="ko-KR" altLang="en-US" sz="1000" b="1" dirty="0">
                 <a:latin typeface="KoPub돋움체 Light" panose="02020603020101020101" pitchFamily="18" charset="-127"/>
                 <a:ea typeface="KoPub돋움체 Light" panose="02020603020101020101" pitchFamily="18" charset="-127"/>
               </a:rPr>
               <a:t>): “</a:t>
             </a:r>
             <a:r>
-              <a:rPr lang="ko-KR" altLang="en-US" sz="800" dirty="0" err="1">
+              <a:rPr lang="ko-KR" altLang="en-US" sz="1000" b="1" dirty="0" err="1">
                 <a:latin typeface="KoPub돋움체 Light" panose="02020603020101020101" pitchFamily="18" charset="-127"/>
                 <a:ea typeface="KoPub돋움체 Light" panose="02020603020101020101" pitchFamily="18" charset="-127"/>
               </a:rPr>
               <a:t>A</a:t>
             </a:r>
             <a:r>
-              <a:rPr lang="ko-KR" altLang="en-US" sz="800" dirty="0">
+              <a:rPr lang="ko-KR" altLang="en-US" sz="1000" b="1" dirty="0">
                 <a:latin typeface="KoPub돋움체 Light" panose="02020603020101020101" pitchFamily="18" charset="-127"/>
                 <a:ea typeface="KoPub돋움체 Light" panose="02020603020101020101" pitchFamily="18" charset="-127"/>
               </a:rPr>
               <a:t>(보고)/12 → </a:t>
             </a:r>
             <a:r>
-              <a:rPr lang="ko-KR" altLang="en-US" sz="800" dirty="0" err="1">
+              <a:rPr lang="ko-KR" altLang="en-US" sz="1000" b="1" dirty="0" err="1">
                 <a:latin typeface="KoPub돋움체 Light" panose="02020603020101020101" pitchFamily="18" charset="-127"/>
                 <a:ea typeface="KoPub돋움체 Light" panose="02020603020101020101" pitchFamily="18" charset="-127"/>
               </a:rPr>
               <a:t>D</a:t>
             </a:r>
             <a:r>
-              <a:rPr lang="ko-KR" altLang="en-US" sz="800" dirty="0">
+              <a:rPr lang="ko-KR" altLang="en-US" sz="1000" b="1" dirty="0">
                 <a:latin typeface="KoPub돋움체 Light" panose="02020603020101020101" pitchFamily="18" charset="-127"/>
                 <a:ea typeface="KoPub돋움체 Light" panose="02020603020101020101" pitchFamily="18" charset="-127"/>
               </a:rPr>
@@ -5301,7 +5301,7 @@
               <a:buFont typeface="Wingdings" panose="05000000000000000000" pitchFamily="2" charset="2"/>
               <a:buChar char="§"/>
             </a:pPr>
-            <a:endParaRPr lang="ko-KR" altLang="en-US" sz="800" dirty="0">
+            <a:endParaRPr lang="ko-KR" altLang="en-US" sz="1000" b="1" dirty="0">
               <a:latin typeface="KoPub돋움체 Light" panose="02020603020101020101" pitchFamily="18" charset="-127"/>
               <a:ea typeface="KoPub돋움체 Light" panose="02020603020101020101" pitchFamily="18" charset="-127"/>
             </a:endParaRPr>
@@ -5312,21 +5312,21 @@
               <a:buChar char="§"/>
             </a:pPr>
             <a:r>
-              <a:rPr lang="ko-KR" altLang="en-US" sz="800" dirty="0">
+              <a:rPr lang="ko-KR" altLang="en-US" sz="1000" b="1" dirty="0">
                 <a:latin typeface="KoPub돋움체 Light" panose="02020603020101020101" pitchFamily="18" charset="-127"/>
                 <a:ea typeface="KoPub돋움체 Light" panose="02020603020101020101" pitchFamily="18" charset="-127"/>
               </a:rPr>
               <a:t>도움/교육 요청: “교육요청은 </a:t>
             </a:r>
             <a:r>
-              <a:rPr lang="ko-KR" altLang="en-US" sz="800" dirty="0" err="1">
+              <a:rPr lang="ko-KR" altLang="en-US" sz="1000" b="1" dirty="0" err="1">
                 <a:latin typeface="KoPub돋움체 Light" panose="02020603020101020101" pitchFamily="18" charset="-127"/>
                 <a:ea typeface="KoPub돋움체 Light" panose="02020603020101020101" pitchFamily="18" charset="-127"/>
               </a:rPr>
               <a:t>QR에서</a:t>
             </a:r>
             <a:r>
-              <a:rPr lang="ko-KR" altLang="en-US" sz="800" dirty="0">
+              <a:rPr lang="ko-KR" altLang="en-US" sz="1000" b="1" dirty="0">
                 <a:latin typeface="KoPub돋움체 Light" panose="02020603020101020101" pitchFamily="18" charset="-127"/>
                 <a:ea typeface="KoPub돋움체 Light" panose="02020603020101020101" pitchFamily="18" charset="-127"/>
               </a:rPr>
@@ -5338,7 +5338,7 @@
               <a:buFont typeface="Wingdings" panose="05000000000000000000" pitchFamily="2" charset="2"/>
               <a:buChar char="§"/>
             </a:pPr>
-            <a:endParaRPr lang="ko-KR" altLang="en-US" sz="800" dirty="0">
+            <a:endParaRPr lang="ko-KR" altLang="en-US" sz="1000" b="1" dirty="0">
               <a:latin typeface="KoPub돋움체 Light" panose="02020603020101020101" pitchFamily="18" charset="-127"/>
               <a:ea typeface="KoPub돋움체 Light" panose="02020603020101020101" pitchFamily="18" charset="-127"/>
             </a:endParaRPr>
@@ -5349,42 +5349,42 @@
               <a:buChar char="§"/>
             </a:pPr>
             <a:r>
-              <a:rPr lang="ko-KR" altLang="en-US" sz="800" dirty="0" err="1">
+              <a:rPr lang="ko-KR" altLang="en-US" sz="1000" b="1" dirty="0" err="1">
                 <a:latin typeface="KoPub돋움체 Light" panose="02020603020101020101" pitchFamily="18" charset="-127"/>
                 <a:ea typeface="KoPub돋움체 Light" panose="02020603020101020101" pitchFamily="18" charset="-127"/>
               </a:rPr>
               <a:t>익명함</a:t>
             </a:r>
             <a:r>
-              <a:rPr lang="ko-KR" altLang="en-US" sz="800" dirty="0">
+              <a:rPr lang="ko-KR" altLang="en-US" sz="1000" b="1" dirty="0">
                 <a:latin typeface="KoPub돋움체 Light" panose="02020603020101020101" pitchFamily="18" charset="-127"/>
                 <a:ea typeface="KoPub돋움체 Light" panose="02020603020101020101" pitchFamily="18" charset="-127"/>
               </a:rPr>
               <a:t>/칭찬: “</a:t>
             </a:r>
             <a:r>
-              <a:rPr lang="ko-KR" altLang="en-US" sz="800" dirty="0" err="1">
+              <a:rPr lang="ko-KR" altLang="en-US" sz="1000" b="1" dirty="0" err="1">
                 <a:latin typeface="KoPub돋움체 Light" panose="02020603020101020101" pitchFamily="18" charset="-127"/>
                 <a:ea typeface="KoPub돋움체 Light" panose="02020603020101020101" pitchFamily="18" charset="-127"/>
               </a:rPr>
               <a:t>불편·제안·칭찬은</a:t>
             </a:r>
             <a:r>
-              <a:rPr lang="ko-KR" altLang="en-US" sz="800" dirty="0">
+              <a:rPr lang="ko-KR" altLang="en-US" sz="1000" b="1" dirty="0">
                 <a:latin typeface="KoPub돋움체 Light" panose="02020603020101020101" pitchFamily="18" charset="-127"/>
                 <a:ea typeface="KoPub돋움체 Light" panose="02020603020101020101" pitchFamily="18" charset="-127"/>
               </a:rPr>
               <a:t> 앞면 </a:t>
             </a:r>
             <a:r>
-              <a:rPr lang="en-US" altLang="ko-KR" sz="800" dirty="0">
+              <a:rPr lang="en-US" altLang="ko-KR" sz="1000" b="1" dirty="0">
                 <a:latin typeface="KoPub돋움체 Light" panose="02020603020101020101" pitchFamily="18" charset="-127"/>
                 <a:ea typeface="KoPub돋움체 Light" panose="02020603020101020101" pitchFamily="18" charset="-127"/>
               </a:rPr>
               <a:t>QR</a:t>
             </a:r>
             <a:r>
-              <a:rPr lang="ko-KR" altLang="en-US" sz="800" dirty="0">
+              <a:rPr lang="ko-KR" altLang="en-US" sz="1000" b="1" dirty="0">
                 <a:latin typeface="KoPub돋움체 Light" panose="02020603020101020101" pitchFamily="18" charset="-127"/>
                 <a:ea typeface="KoPub돋움체 Light" panose="02020603020101020101" pitchFamily="18" charset="-127"/>
               </a:rPr>
@@ -5396,7 +5396,7 @@
     </p:spTree>
     <p:extLst>
       <p:ext uri="{BB962C8B-B14F-4D97-AF65-F5344CB8AC3E}">
-        <p14:creationId xmlns:p14="http://schemas.microsoft.com/office/powerpoint/2010/main" val="2739277754"/>
+        <p14:creationId xmlns:p14="http://schemas.microsoft.com/office/powerpoint/2010/main" val="3540984926"/>
       </p:ext>
     </p:extLst>
   </p:cSld>
@@ -5414,7 +5414,7 @@
         <p:cNvPr id="1" name="">
           <a:extLst>
             <a:ext uri="{FF2B5EF4-FFF2-40B4-BE49-F238E27FC236}">
-              <a16:creationId xmlns:a16="http://schemas.microsoft.com/office/drawing/2014/main" id="{9B035EBF-BDE0-7710-9F14-363DE5E2F9D0}"/>
+              <a16:creationId xmlns:a16="http://schemas.microsoft.com/office/drawing/2014/main" id="{88976B01-C7BA-CC25-0F4C-49D3A8DEC958}"/>
             </a:ext>
           </a:extLst>
         </p:cNvPr>
@@ -5434,7 +5434,7 @@
           <p:cNvPr id="3" name="TextBox 2">
             <a:extLst>
               <a:ext uri="{FF2B5EF4-FFF2-40B4-BE49-F238E27FC236}">
-                <a16:creationId xmlns:a16="http://schemas.microsoft.com/office/drawing/2014/main" id="{F4FCD625-F5D9-35BF-F076-2C2A26549467}"/>
+                <a16:creationId xmlns:a16="http://schemas.microsoft.com/office/drawing/2014/main" id="{3718BAC6-B3A8-9354-E61D-15F05C0B9F96}"/>
               </a:ext>
             </a:extLst>
           </p:cNvPr>
@@ -5443,7 +5443,7 @@
         </p:nvSpPr>
         <p:spPr>
           <a:xfrm>
-            <a:off x="-706687" y="54245"/>
+            <a:off x="-724944" y="54246"/>
             <a:ext cx="2717302" cy="169277"/>
           </a:xfrm>
           <a:prstGeom prst="rect">
@@ -5487,7 +5487,7 @@
           <p:cNvPr id="41" name="TextBox 40">
             <a:extLst>
               <a:ext uri="{FF2B5EF4-FFF2-40B4-BE49-F238E27FC236}">
-                <a16:creationId xmlns:a16="http://schemas.microsoft.com/office/drawing/2014/main" id="{8B16B618-DC08-86B4-A0DA-966A43AB3748}"/>
+                <a16:creationId xmlns:a16="http://schemas.microsoft.com/office/drawing/2014/main" id="{B0F29FBE-D3EE-15D4-5CBB-19820A082020}"/>
               </a:ext>
             </a:extLst>
           </p:cNvPr>
@@ -5496,8 +5496,8 @@
         </p:nvSpPr>
         <p:spPr>
           <a:xfrm>
-            <a:off x="173830" y="443776"/>
-            <a:ext cx="2682145" cy="954107"/>
+            <a:off x="36673" y="341862"/>
+            <a:ext cx="3259226" cy="1169551"/>
           </a:xfrm>
           <a:prstGeom prst="rect">
             <a:avLst/>
@@ -5515,35 +5515,35 @@
               <a:buChar char="§"/>
             </a:pPr>
             <a:r>
-              <a:rPr lang="ko-KR" altLang="en-US" sz="800" dirty="0">
+              <a:rPr lang="ko-KR" altLang="en-US" sz="1000" b="1" dirty="0">
                 <a:latin typeface="KoPub돋움체 Light" panose="02020603020101020101" pitchFamily="18" charset="-127"/>
                 <a:ea typeface="KoPub돋움체 Light" panose="02020603020101020101" pitchFamily="18" charset="-127"/>
               </a:rPr>
               <a:t>응급(10): “10은 전화 먼저 + 끝나면 </a:t>
             </a:r>
             <a:r>
-              <a:rPr lang="ko-KR" altLang="en-US" sz="800" dirty="0" err="1">
+              <a:rPr lang="ko-KR" altLang="en-US" sz="1000" b="1" dirty="0" err="1">
                 <a:latin typeface="KoPub돋움체 Light" panose="02020603020101020101" pitchFamily="18" charset="-127"/>
                 <a:ea typeface="KoPub돋움체 Light" panose="02020603020101020101" pitchFamily="18" charset="-127"/>
               </a:rPr>
               <a:t>A</a:t>
             </a:r>
             <a:r>
-              <a:rPr lang="ko-KR" altLang="en-US" sz="800" dirty="0">
+              <a:rPr lang="ko-KR" altLang="en-US" sz="1000" b="1" dirty="0">
                 <a:latin typeface="KoPub돋움체 Light" panose="02020603020101020101" pitchFamily="18" charset="-127"/>
                 <a:ea typeface="KoPub돋움체 Light" panose="02020603020101020101" pitchFamily="18" charset="-127"/>
               </a:rPr>
               <a:t>/</a:t>
             </a:r>
             <a:r>
-              <a:rPr lang="ko-KR" altLang="en-US" sz="800" dirty="0" err="1">
+              <a:rPr lang="ko-KR" altLang="en-US" sz="1000" b="1" dirty="0" err="1">
                 <a:latin typeface="KoPub돋움체 Light" panose="02020603020101020101" pitchFamily="18" charset="-127"/>
                 <a:ea typeface="KoPub돋움체 Light" panose="02020603020101020101" pitchFamily="18" charset="-127"/>
               </a:rPr>
               <a:t>D</a:t>
             </a:r>
             <a:r>
-              <a:rPr lang="ko-KR" altLang="en-US" sz="800" dirty="0">
+              <a:rPr lang="ko-KR" altLang="en-US" sz="1000" b="1" dirty="0">
                 <a:latin typeface="KoPub돋움체 Light" panose="02020603020101020101" pitchFamily="18" charset="-127"/>
                 <a:ea typeface="KoPub돋움체 Light" panose="02020603020101020101" pitchFamily="18" charset="-127"/>
               </a:rPr>
@@ -5555,7 +5555,7 @@
               <a:buFont typeface="Wingdings" panose="05000000000000000000" pitchFamily="2" charset="2"/>
               <a:buChar char="§"/>
             </a:pPr>
-            <a:endParaRPr lang="ko-KR" altLang="en-US" sz="800" dirty="0">
+            <a:endParaRPr lang="ko-KR" altLang="en-US" sz="1000" b="1" dirty="0">
               <a:latin typeface="KoPub돋움체 Light" panose="02020603020101020101" pitchFamily="18" charset="-127"/>
               <a:ea typeface="KoPub돋움체 Light" panose="02020603020101020101" pitchFamily="18" charset="-127"/>
             </a:endParaRPr>
@@ -5566,56 +5566,56 @@
               <a:buChar char="§"/>
             </a:pPr>
             <a:r>
-              <a:rPr lang="ko-KR" altLang="en-US" sz="800" dirty="0" err="1">
+              <a:rPr lang="ko-KR" altLang="en-US" sz="1000" b="1" dirty="0" err="1">
                 <a:latin typeface="KoPub돋움체 Light" panose="02020603020101020101" pitchFamily="18" charset="-127"/>
                 <a:ea typeface="KoPub돋움체 Light" panose="02020603020101020101" pitchFamily="18" charset="-127"/>
               </a:rPr>
               <a:t>정보성</a:t>
             </a:r>
             <a:r>
-              <a:rPr lang="ko-KR" altLang="en-US" sz="800" dirty="0">
+              <a:rPr lang="ko-KR" altLang="en-US" sz="1000" b="1" dirty="0">
                 <a:latin typeface="KoPub돋움체 Light" panose="02020603020101020101" pitchFamily="18" charset="-127"/>
                 <a:ea typeface="KoPub돋움체 Light" panose="02020603020101020101" pitchFamily="18" charset="-127"/>
               </a:rPr>
               <a:t>(</a:t>
             </a:r>
             <a:r>
-              <a:rPr lang="ko-KR" altLang="en-US" sz="800" dirty="0" err="1">
+              <a:rPr lang="ko-KR" altLang="en-US" sz="1000" b="1" dirty="0" err="1">
                 <a:latin typeface="KoPub돋움체 Light" panose="02020603020101020101" pitchFamily="18" charset="-127"/>
                 <a:ea typeface="KoPub돋움체 Light" panose="02020603020101020101" pitchFamily="18" charset="-127"/>
               </a:rPr>
               <a:t>입원·검사·자가약</a:t>
             </a:r>
             <a:r>
-              <a:rPr lang="ko-KR" altLang="en-US" sz="800" dirty="0">
+              <a:rPr lang="ko-KR" altLang="en-US" sz="1000" b="1" dirty="0">
                 <a:latin typeface="KoPub돋움체 Light" panose="02020603020101020101" pitchFamily="18" charset="-127"/>
                 <a:ea typeface="KoPub돋움체 Light" panose="02020603020101020101" pitchFamily="18" charset="-127"/>
               </a:rPr>
               <a:t>): “</a:t>
             </a:r>
             <a:r>
-              <a:rPr lang="ko-KR" altLang="en-US" sz="800" dirty="0" err="1">
+              <a:rPr lang="ko-KR" altLang="en-US" sz="1000" b="1" dirty="0" err="1">
                 <a:latin typeface="KoPub돋움체 Light" panose="02020603020101020101" pitchFamily="18" charset="-127"/>
                 <a:ea typeface="KoPub돋움체 Light" panose="02020603020101020101" pitchFamily="18" charset="-127"/>
               </a:rPr>
               <a:t>A</a:t>
             </a:r>
             <a:r>
-              <a:rPr lang="ko-KR" altLang="en-US" sz="800" dirty="0">
+              <a:rPr lang="ko-KR" altLang="en-US" sz="1000" b="1" dirty="0">
                 <a:latin typeface="KoPub돋움체 Light" panose="02020603020101020101" pitchFamily="18" charset="-127"/>
                 <a:ea typeface="KoPub돋움체 Light" panose="02020603020101020101" pitchFamily="18" charset="-127"/>
               </a:rPr>
               <a:t>(보고)/12 → </a:t>
             </a:r>
             <a:r>
-              <a:rPr lang="ko-KR" altLang="en-US" sz="800" dirty="0" err="1">
+              <a:rPr lang="ko-KR" altLang="en-US" sz="1000" b="1" dirty="0" err="1">
                 <a:latin typeface="KoPub돋움체 Light" panose="02020603020101020101" pitchFamily="18" charset="-127"/>
                 <a:ea typeface="KoPub돋움체 Light" panose="02020603020101020101" pitchFamily="18" charset="-127"/>
               </a:rPr>
               <a:t>D</a:t>
             </a:r>
             <a:r>
-              <a:rPr lang="ko-KR" altLang="en-US" sz="800" dirty="0">
+              <a:rPr lang="ko-KR" altLang="en-US" sz="1000" b="1" dirty="0">
                 <a:latin typeface="KoPub돋움체 Light" panose="02020603020101020101" pitchFamily="18" charset="-127"/>
                 <a:ea typeface="KoPub돋움체 Light" panose="02020603020101020101" pitchFamily="18" charset="-127"/>
               </a:rPr>
@@ -5627,7 +5627,7 @@
               <a:buFont typeface="Wingdings" panose="05000000000000000000" pitchFamily="2" charset="2"/>
               <a:buChar char="§"/>
             </a:pPr>
-            <a:endParaRPr lang="ko-KR" altLang="en-US" sz="800" dirty="0">
+            <a:endParaRPr lang="ko-KR" altLang="en-US" sz="1000" b="1" dirty="0">
               <a:latin typeface="KoPub돋움체 Light" panose="02020603020101020101" pitchFamily="18" charset="-127"/>
               <a:ea typeface="KoPub돋움체 Light" panose="02020603020101020101" pitchFamily="18" charset="-127"/>
             </a:endParaRPr>
@@ -5638,21 +5638,21 @@
               <a:buChar char="§"/>
             </a:pPr>
             <a:r>
-              <a:rPr lang="ko-KR" altLang="en-US" sz="800" dirty="0">
+              <a:rPr lang="ko-KR" altLang="en-US" sz="1000" b="1" dirty="0">
                 <a:latin typeface="KoPub돋움체 Light" panose="02020603020101020101" pitchFamily="18" charset="-127"/>
                 <a:ea typeface="KoPub돋움체 Light" panose="02020603020101020101" pitchFamily="18" charset="-127"/>
               </a:rPr>
               <a:t>도움/교육 요청: “교육요청은 </a:t>
             </a:r>
             <a:r>
-              <a:rPr lang="ko-KR" altLang="en-US" sz="800" dirty="0" err="1">
+              <a:rPr lang="ko-KR" altLang="en-US" sz="1000" b="1" dirty="0" err="1">
                 <a:latin typeface="KoPub돋움체 Light" panose="02020603020101020101" pitchFamily="18" charset="-127"/>
                 <a:ea typeface="KoPub돋움체 Light" panose="02020603020101020101" pitchFamily="18" charset="-127"/>
               </a:rPr>
               <a:t>QR에서</a:t>
             </a:r>
             <a:r>
-              <a:rPr lang="ko-KR" altLang="en-US" sz="800" dirty="0">
+              <a:rPr lang="ko-KR" altLang="en-US" sz="1000" b="1" dirty="0">
                 <a:latin typeface="KoPub돋움체 Light" panose="02020603020101020101" pitchFamily="18" charset="-127"/>
                 <a:ea typeface="KoPub돋움체 Light" panose="02020603020101020101" pitchFamily="18" charset="-127"/>
               </a:rPr>
@@ -5664,7 +5664,7 @@
               <a:buFont typeface="Wingdings" panose="05000000000000000000" pitchFamily="2" charset="2"/>
               <a:buChar char="§"/>
             </a:pPr>
-            <a:endParaRPr lang="ko-KR" altLang="en-US" sz="800" dirty="0">
+            <a:endParaRPr lang="ko-KR" altLang="en-US" sz="1000" b="1" dirty="0">
               <a:latin typeface="KoPub돋움체 Light" panose="02020603020101020101" pitchFamily="18" charset="-127"/>
               <a:ea typeface="KoPub돋움체 Light" panose="02020603020101020101" pitchFamily="18" charset="-127"/>
             </a:endParaRPr>
@@ -5675,42 +5675,42 @@
               <a:buChar char="§"/>
             </a:pPr>
             <a:r>
-              <a:rPr lang="ko-KR" altLang="en-US" sz="800" dirty="0" err="1">
+              <a:rPr lang="ko-KR" altLang="en-US" sz="1000" b="1" dirty="0" err="1">
                 <a:latin typeface="KoPub돋움체 Light" panose="02020603020101020101" pitchFamily="18" charset="-127"/>
                 <a:ea typeface="KoPub돋움체 Light" panose="02020603020101020101" pitchFamily="18" charset="-127"/>
               </a:rPr>
               <a:t>익명함</a:t>
             </a:r>
             <a:r>
-              <a:rPr lang="ko-KR" altLang="en-US" sz="800" dirty="0">
+              <a:rPr lang="ko-KR" altLang="en-US" sz="1000" b="1" dirty="0">
                 <a:latin typeface="KoPub돋움체 Light" panose="02020603020101020101" pitchFamily="18" charset="-127"/>
                 <a:ea typeface="KoPub돋움체 Light" panose="02020603020101020101" pitchFamily="18" charset="-127"/>
               </a:rPr>
               <a:t>/칭찬: “</a:t>
             </a:r>
             <a:r>
-              <a:rPr lang="ko-KR" altLang="en-US" sz="800" dirty="0" err="1">
+              <a:rPr lang="ko-KR" altLang="en-US" sz="1000" b="1" dirty="0" err="1">
                 <a:latin typeface="KoPub돋움체 Light" panose="02020603020101020101" pitchFamily="18" charset="-127"/>
                 <a:ea typeface="KoPub돋움체 Light" panose="02020603020101020101" pitchFamily="18" charset="-127"/>
               </a:rPr>
               <a:t>불편·제안·칭찬은</a:t>
             </a:r>
             <a:r>
-              <a:rPr lang="ko-KR" altLang="en-US" sz="800" dirty="0">
+              <a:rPr lang="ko-KR" altLang="en-US" sz="1000" b="1" dirty="0">
                 <a:latin typeface="KoPub돋움체 Light" panose="02020603020101020101" pitchFamily="18" charset="-127"/>
                 <a:ea typeface="KoPub돋움체 Light" panose="02020603020101020101" pitchFamily="18" charset="-127"/>
               </a:rPr>
               <a:t> 앞면 </a:t>
             </a:r>
             <a:r>
-              <a:rPr lang="en-US" altLang="ko-KR" sz="800" dirty="0">
+              <a:rPr lang="en-US" altLang="ko-KR" sz="1000" b="1" dirty="0">
                 <a:latin typeface="KoPub돋움체 Light" panose="02020603020101020101" pitchFamily="18" charset="-127"/>
                 <a:ea typeface="KoPub돋움체 Light" panose="02020603020101020101" pitchFamily="18" charset="-127"/>
               </a:rPr>
               <a:t>QR</a:t>
             </a:r>
             <a:r>
-              <a:rPr lang="ko-KR" altLang="en-US" sz="800" dirty="0">
+              <a:rPr lang="ko-KR" altLang="en-US" sz="1000" b="1" dirty="0">
                 <a:latin typeface="KoPub돋움체 Light" panose="02020603020101020101" pitchFamily="18" charset="-127"/>
                 <a:ea typeface="KoPub돋움체 Light" panose="02020603020101020101" pitchFamily="18" charset="-127"/>
               </a:rPr>
@@ -5722,7 +5722,7 @@
     </p:spTree>
     <p:extLst>
       <p:ext uri="{BB962C8B-B14F-4D97-AF65-F5344CB8AC3E}">
-        <p14:creationId xmlns:p14="http://schemas.microsoft.com/office/powerpoint/2010/main" val="464322442"/>
+        <p14:creationId xmlns:p14="http://schemas.microsoft.com/office/powerpoint/2010/main" val="143589335"/>
       </p:ext>
     </p:extLst>
   </p:cSld>
@@ -5740,7 +5740,7 @@
         <p:cNvPr id="1" name="">
           <a:extLst>
             <a:ext uri="{FF2B5EF4-FFF2-40B4-BE49-F238E27FC236}">
-              <a16:creationId xmlns:a16="http://schemas.microsoft.com/office/drawing/2014/main" id="{0D94B5E4-3E46-1F1D-D256-94661423CF66}"/>
+              <a16:creationId xmlns:a16="http://schemas.microsoft.com/office/drawing/2014/main" id="{545685EF-4C32-5D2F-6C87-3429A40E44F1}"/>
             </a:ext>
           </a:extLst>
         </p:cNvPr>
@@ -5760,7 +5760,7 @@
           <p:cNvPr id="3" name="TextBox 2">
             <a:extLst>
               <a:ext uri="{FF2B5EF4-FFF2-40B4-BE49-F238E27FC236}">
-                <a16:creationId xmlns:a16="http://schemas.microsoft.com/office/drawing/2014/main" id="{2AEE5029-A646-236D-DE54-A8709FB8A747}"/>
+                <a16:creationId xmlns:a16="http://schemas.microsoft.com/office/drawing/2014/main" id="{7A3BDE35-9A1C-76A3-0D25-EB286AAC1EF9}"/>
               </a:ext>
             </a:extLst>
           </p:cNvPr>
@@ -5769,7 +5769,7 @@
         </p:nvSpPr>
         <p:spPr>
           <a:xfrm>
-            <a:off x="-706687" y="54245"/>
+            <a:off x="-724944" y="54246"/>
             <a:ext cx="2717302" cy="169277"/>
           </a:xfrm>
           <a:prstGeom prst="rect">
@@ -5813,7 +5813,7 @@
           <p:cNvPr id="41" name="TextBox 40">
             <a:extLst>
               <a:ext uri="{FF2B5EF4-FFF2-40B4-BE49-F238E27FC236}">
-                <a16:creationId xmlns:a16="http://schemas.microsoft.com/office/drawing/2014/main" id="{0DCFD04E-7063-AFD6-86B9-3DA157A2CC78}"/>
+                <a16:creationId xmlns:a16="http://schemas.microsoft.com/office/drawing/2014/main" id="{3E469937-36F6-7FE9-B788-C48319EFFF5A}"/>
               </a:ext>
             </a:extLst>
           </p:cNvPr>
@@ -5822,8 +5822,8 @@
         </p:nvSpPr>
         <p:spPr>
           <a:xfrm>
-            <a:off x="173830" y="443776"/>
-            <a:ext cx="2682145" cy="954107"/>
+            <a:off x="36673" y="341862"/>
+            <a:ext cx="3259226" cy="1169551"/>
           </a:xfrm>
           <a:prstGeom prst="rect">
             <a:avLst/>
@@ -5841,35 +5841,35 @@
               <a:buChar char="§"/>
             </a:pPr>
             <a:r>
-              <a:rPr lang="ko-KR" altLang="en-US" sz="800" dirty="0">
+              <a:rPr lang="ko-KR" altLang="en-US" sz="1000" b="1" dirty="0">
                 <a:latin typeface="KoPub돋움체 Light" panose="02020603020101020101" pitchFamily="18" charset="-127"/>
                 <a:ea typeface="KoPub돋움체 Light" panose="02020603020101020101" pitchFamily="18" charset="-127"/>
               </a:rPr>
               <a:t>응급(10): “10은 전화 먼저 + 끝나면 </a:t>
             </a:r>
             <a:r>
-              <a:rPr lang="ko-KR" altLang="en-US" sz="800" dirty="0" err="1">
+              <a:rPr lang="ko-KR" altLang="en-US" sz="1000" b="1" dirty="0" err="1">
                 <a:latin typeface="KoPub돋움체 Light" panose="02020603020101020101" pitchFamily="18" charset="-127"/>
                 <a:ea typeface="KoPub돋움체 Light" panose="02020603020101020101" pitchFamily="18" charset="-127"/>
               </a:rPr>
               <a:t>A</a:t>
             </a:r>
             <a:r>
-              <a:rPr lang="ko-KR" altLang="en-US" sz="800" dirty="0">
+              <a:rPr lang="ko-KR" altLang="en-US" sz="1000" b="1" dirty="0">
                 <a:latin typeface="KoPub돋움체 Light" panose="02020603020101020101" pitchFamily="18" charset="-127"/>
                 <a:ea typeface="KoPub돋움체 Light" panose="02020603020101020101" pitchFamily="18" charset="-127"/>
               </a:rPr>
               <a:t>/</a:t>
             </a:r>
             <a:r>
-              <a:rPr lang="ko-KR" altLang="en-US" sz="800" dirty="0" err="1">
+              <a:rPr lang="ko-KR" altLang="en-US" sz="1000" b="1" dirty="0" err="1">
                 <a:latin typeface="KoPub돋움체 Light" panose="02020603020101020101" pitchFamily="18" charset="-127"/>
                 <a:ea typeface="KoPub돋움체 Light" panose="02020603020101020101" pitchFamily="18" charset="-127"/>
               </a:rPr>
               <a:t>D</a:t>
             </a:r>
             <a:r>
-              <a:rPr lang="ko-KR" altLang="en-US" sz="800" dirty="0">
+              <a:rPr lang="ko-KR" altLang="en-US" sz="1000" b="1" dirty="0">
                 <a:latin typeface="KoPub돋움체 Light" panose="02020603020101020101" pitchFamily="18" charset="-127"/>
                 <a:ea typeface="KoPub돋움체 Light" panose="02020603020101020101" pitchFamily="18" charset="-127"/>
               </a:rPr>
@@ -5881,7 +5881,7 @@
               <a:buFont typeface="Wingdings" panose="05000000000000000000" pitchFamily="2" charset="2"/>
               <a:buChar char="§"/>
             </a:pPr>
-            <a:endParaRPr lang="ko-KR" altLang="en-US" sz="800" dirty="0">
+            <a:endParaRPr lang="ko-KR" altLang="en-US" sz="1000" b="1" dirty="0">
               <a:latin typeface="KoPub돋움체 Light" panose="02020603020101020101" pitchFamily="18" charset="-127"/>
               <a:ea typeface="KoPub돋움체 Light" panose="02020603020101020101" pitchFamily="18" charset="-127"/>
             </a:endParaRPr>
@@ -5892,56 +5892,56 @@
               <a:buChar char="§"/>
             </a:pPr>
             <a:r>
-              <a:rPr lang="ko-KR" altLang="en-US" sz="800" dirty="0" err="1">
+              <a:rPr lang="ko-KR" altLang="en-US" sz="1000" b="1" dirty="0" err="1">
                 <a:latin typeface="KoPub돋움체 Light" panose="02020603020101020101" pitchFamily="18" charset="-127"/>
                 <a:ea typeface="KoPub돋움체 Light" panose="02020603020101020101" pitchFamily="18" charset="-127"/>
               </a:rPr>
               <a:t>정보성</a:t>
             </a:r>
             <a:r>
-              <a:rPr lang="ko-KR" altLang="en-US" sz="800" dirty="0">
+              <a:rPr lang="ko-KR" altLang="en-US" sz="1000" b="1" dirty="0">
                 <a:latin typeface="KoPub돋움체 Light" panose="02020603020101020101" pitchFamily="18" charset="-127"/>
                 <a:ea typeface="KoPub돋움체 Light" panose="02020603020101020101" pitchFamily="18" charset="-127"/>
               </a:rPr>
               <a:t>(</a:t>
             </a:r>
             <a:r>
-              <a:rPr lang="ko-KR" altLang="en-US" sz="800" dirty="0" err="1">
+              <a:rPr lang="ko-KR" altLang="en-US" sz="1000" b="1" dirty="0" err="1">
                 <a:latin typeface="KoPub돋움체 Light" panose="02020603020101020101" pitchFamily="18" charset="-127"/>
                 <a:ea typeface="KoPub돋움체 Light" panose="02020603020101020101" pitchFamily="18" charset="-127"/>
               </a:rPr>
               <a:t>입원·검사·자가약</a:t>
             </a:r>
             <a:r>
-              <a:rPr lang="ko-KR" altLang="en-US" sz="800" dirty="0">
+              <a:rPr lang="ko-KR" altLang="en-US" sz="1000" b="1" dirty="0">
                 <a:latin typeface="KoPub돋움체 Light" panose="02020603020101020101" pitchFamily="18" charset="-127"/>
                 <a:ea typeface="KoPub돋움체 Light" panose="02020603020101020101" pitchFamily="18" charset="-127"/>
               </a:rPr>
               <a:t>): “</a:t>
             </a:r>
             <a:r>
-              <a:rPr lang="ko-KR" altLang="en-US" sz="800" dirty="0" err="1">
+              <a:rPr lang="ko-KR" altLang="en-US" sz="1000" b="1" dirty="0" err="1">
                 <a:latin typeface="KoPub돋움체 Light" panose="02020603020101020101" pitchFamily="18" charset="-127"/>
                 <a:ea typeface="KoPub돋움체 Light" panose="02020603020101020101" pitchFamily="18" charset="-127"/>
               </a:rPr>
               <a:t>A</a:t>
             </a:r>
             <a:r>
-              <a:rPr lang="ko-KR" altLang="en-US" sz="800" dirty="0">
+              <a:rPr lang="ko-KR" altLang="en-US" sz="1000" b="1" dirty="0">
                 <a:latin typeface="KoPub돋움체 Light" panose="02020603020101020101" pitchFamily="18" charset="-127"/>
                 <a:ea typeface="KoPub돋움체 Light" panose="02020603020101020101" pitchFamily="18" charset="-127"/>
               </a:rPr>
               <a:t>(보고)/12 → </a:t>
             </a:r>
             <a:r>
-              <a:rPr lang="ko-KR" altLang="en-US" sz="800" dirty="0" err="1">
+              <a:rPr lang="ko-KR" altLang="en-US" sz="1000" b="1" dirty="0" err="1">
                 <a:latin typeface="KoPub돋움체 Light" panose="02020603020101020101" pitchFamily="18" charset="-127"/>
                 <a:ea typeface="KoPub돋움체 Light" panose="02020603020101020101" pitchFamily="18" charset="-127"/>
               </a:rPr>
               <a:t>D</a:t>
             </a:r>
             <a:r>
-              <a:rPr lang="ko-KR" altLang="en-US" sz="800" dirty="0">
+              <a:rPr lang="ko-KR" altLang="en-US" sz="1000" b="1" dirty="0">
                 <a:latin typeface="KoPub돋움체 Light" panose="02020603020101020101" pitchFamily="18" charset="-127"/>
                 <a:ea typeface="KoPub돋움체 Light" panose="02020603020101020101" pitchFamily="18" charset="-127"/>
               </a:rPr>
@@ -5953,7 +5953,7 @@
               <a:buFont typeface="Wingdings" panose="05000000000000000000" pitchFamily="2" charset="2"/>
               <a:buChar char="§"/>
             </a:pPr>
-            <a:endParaRPr lang="ko-KR" altLang="en-US" sz="800" dirty="0">
+            <a:endParaRPr lang="ko-KR" altLang="en-US" sz="1000" b="1" dirty="0">
               <a:latin typeface="KoPub돋움체 Light" panose="02020603020101020101" pitchFamily="18" charset="-127"/>
               <a:ea typeface="KoPub돋움체 Light" panose="02020603020101020101" pitchFamily="18" charset="-127"/>
             </a:endParaRPr>
@@ -5964,21 +5964,21 @@
               <a:buChar char="§"/>
             </a:pPr>
             <a:r>
-              <a:rPr lang="ko-KR" altLang="en-US" sz="800" dirty="0">
+              <a:rPr lang="ko-KR" altLang="en-US" sz="1000" b="1" dirty="0">
                 <a:latin typeface="KoPub돋움체 Light" panose="02020603020101020101" pitchFamily="18" charset="-127"/>
                 <a:ea typeface="KoPub돋움체 Light" panose="02020603020101020101" pitchFamily="18" charset="-127"/>
               </a:rPr>
               <a:t>도움/교육 요청: “교육요청은 </a:t>
             </a:r>
             <a:r>
-              <a:rPr lang="ko-KR" altLang="en-US" sz="800" dirty="0" err="1">
+              <a:rPr lang="ko-KR" altLang="en-US" sz="1000" b="1" dirty="0" err="1">
                 <a:latin typeface="KoPub돋움체 Light" panose="02020603020101020101" pitchFamily="18" charset="-127"/>
                 <a:ea typeface="KoPub돋움체 Light" panose="02020603020101020101" pitchFamily="18" charset="-127"/>
               </a:rPr>
               <a:t>QR에서</a:t>
             </a:r>
             <a:r>
-              <a:rPr lang="ko-KR" altLang="en-US" sz="800" dirty="0">
+              <a:rPr lang="ko-KR" altLang="en-US" sz="1000" b="1" dirty="0">
                 <a:latin typeface="KoPub돋움체 Light" panose="02020603020101020101" pitchFamily="18" charset="-127"/>
                 <a:ea typeface="KoPub돋움체 Light" panose="02020603020101020101" pitchFamily="18" charset="-127"/>
               </a:rPr>
@@ -5990,7 +5990,7 @@
               <a:buFont typeface="Wingdings" panose="05000000000000000000" pitchFamily="2" charset="2"/>
               <a:buChar char="§"/>
             </a:pPr>
-            <a:endParaRPr lang="ko-KR" altLang="en-US" sz="800" dirty="0">
+            <a:endParaRPr lang="ko-KR" altLang="en-US" sz="1000" b="1" dirty="0">
               <a:latin typeface="KoPub돋움체 Light" panose="02020603020101020101" pitchFamily="18" charset="-127"/>
               <a:ea typeface="KoPub돋움체 Light" panose="02020603020101020101" pitchFamily="18" charset="-127"/>
             </a:endParaRPr>
@@ -6001,42 +6001,42 @@
               <a:buChar char="§"/>
             </a:pPr>
             <a:r>
-              <a:rPr lang="ko-KR" altLang="en-US" sz="800" dirty="0" err="1">
+              <a:rPr lang="ko-KR" altLang="en-US" sz="1000" b="1" dirty="0" err="1">
                 <a:latin typeface="KoPub돋움체 Light" panose="02020603020101020101" pitchFamily="18" charset="-127"/>
                 <a:ea typeface="KoPub돋움체 Light" panose="02020603020101020101" pitchFamily="18" charset="-127"/>
               </a:rPr>
               <a:t>익명함</a:t>
             </a:r>
             <a:r>
-              <a:rPr lang="ko-KR" altLang="en-US" sz="800" dirty="0">
+              <a:rPr lang="ko-KR" altLang="en-US" sz="1000" b="1" dirty="0">
                 <a:latin typeface="KoPub돋움체 Light" panose="02020603020101020101" pitchFamily="18" charset="-127"/>
                 <a:ea typeface="KoPub돋움체 Light" panose="02020603020101020101" pitchFamily="18" charset="-127"/>
               </a:rPr>
               <a:t>/칭찬: “</a:t>
             </a:r>
             <a:r>
-              <a:rPr lang="ko-KR" altLang="en-US" sz="800" dirty="0" err="1">
+              <a:rPr lang="ko-KR" altLang="en-US" sz="1000" b="1" dirty="0" err="1">
                 <a:latin typeface="KoPub돋움체 Light" panose="02020603020101020101" pitchFamily="18" charset="-127"/>
                 <a:ea typeface="KoPub돋움체 Light" panose="02020603020101020101" pitchFamily="18" charset="-127"/>
               </a:rPr>
               <a:t>불편·제안·칭찬은</a:t>
             </a:r>
             <a:r>
-              <a:rPr lang="ko-KR" altLang="en-US" sz="800" dirty="0">
+              <a:rPr lang="ko-KR" altLang="en-US" sz="1000" b="1" dirty="0">
                 <a:latin typeface="KoPub돋움체 Light" panose="02020603020101020101" pitchFamily="18" charset="-127"/>
                 <a:ea typeface="KoPub돋움체 Light" panose="02020603020101020101" pitchFamily="18" charset="-127"/>
               </a:rPr>
               <a:t> 앞면 </a:t>
             </a:r>
             <a:r>
-              <a:rPr lang="en-US" altLang="ko-KR" sz="800" dirty="0">
+              <a:rPr lang="en-US" altLang="ko-KR" sz="1000" b="1" dirty="0">
                 <a:latin typeface="KoPub돋움체 Light" panose="02020603020101020101" pitchFamily="18" charset="-127"/>
                 <a:ea typeface="KoPub돋움체 Light" panose="02020603020101020101" pitchFamily="18" charset="-127"/>
               </a:rPr>
               <a:t>QR</a:t>
             </a:r>
             <a:r>
-              <a:rPr lang="ko-KR" altLang="en-US" sz="800" dirty="0">
+              <a:rPr lang="ko-KR" altLang="en-US" sz="1000" b="1" dirty="0">
                 <a:latin typeface="KoPub돋움체 Light" panose="02020603020101020101" pitchFamily="18" charset="-127"/>
                 <a:ea typeface="KoPub돋움체 Light" panose="02020603020101020101" pitchFamily="18" charset="-127"/>
               </a:rPr>
@@ -6048,7 +6048,7 @@
     </p:spTree>
     <p:extLst>
       <p:ext uri="{BB962C8B-B14F-4D97-AF65-F5344CB8AC3E}">
-        <p14:creationId xmlns:p14="http://schemas.microsoft.com/office/powerpoint/2010/main" val="1576876339"/>
+        <p14:creationId xmlns:p14="http://schemas.microsoft.com/office/powerpoint/2010/main" val="2288311154"/>
       </p:ext>
     </p:extLst>
   </p:cSld>

--- a/documents/명함제작/[2026 우리가치(WeValue) QI 활동 프로젝트 명함1(뒤).pptx
+++ b/documents/명함제작/[2026 우리가치(WeValue) QI 활동 프로젝트 명함1(뒤).pptx
@@ -8,12 +8,12 @@
     <p:notesMasterId r:id="rId8"/>
   </p:notesMasterIdLst>
   <p:sldIdLst>
-    <p:sldId id="262" r:id="rId2"/>
-    <p:sldId id="263" r:id="rId3"/>
-    <p:sldId id="264" r:id="rId4"/>
-    <p:sldId id="265" r:id="rId5"/>
-    <p:sldId id="266" r:id="rId6"/>
-    <p:sldId id="267" r:id="rId7"/>
+    <p:sldId id="308" r:id="rId2"/>
+    <p:sldId id="309" r:id="rId3"/>
+    <p:sldId id="310" r:id="rId4"/>
+    <p:sldId id="311" r:id="rId5"/>
+    <p:sldId id="312" r:id="rId6"/>
+    <p:sldId id="313" r:id="rId7"/>
   </p:sldIdLst>
   <p:sldSz cx="3203575" cy="1800225"/>
   <p:notesSz cx="6858000" cy="9945688"/>
@@ -233,7 +233,7 @@
           <a:p>
             <a:fld id="{F929F65E-AEE7-45C5-814B-4468CAF1E537}" type="datetimeFigureOut">
               <a:rPr lang="ko-KR" altLang="en-US" smtClean="0"/>
-              <a:t>2026-04-09</a:t>
+              <a:t>2026-04-29</a:t>
             </a:fld>
             <a:endParaRPr lang="ko-KR" altLang="en-US"/>
           </a:p>
@@ -631,7 +631,7 @@
           <a:p>
             <a:fld id="{149F34B4-7175-41BD-B98B-2E7021201D7D}" type="datetimeFigureOut">
               <a:rPr lang="ko-KR" altLang="en-US" smtClean="0"/>
-              <a:t>2026-04-09</a:t>
+              <a:t>2026-04-29</a:t>
             </a:fld>
             <a:endParaRPr lang="ko-KR" altLang="en-US"/>
           </a:p>
@@ -801,7 +801,7 @@
           <a:p>
             <a:fld id="{149F34B4-7175-41BD-B98B-2E7021201D7D}" type="datetimeFigureOut">
               <a:rPr lang="ko-KR" altLang="en-US" smtClean="0"/>
-              <a:t>2026-04-09</a:t>
+              <a:t>2026-04-29</a:t>
             </a:fld>
             <a:endParaRPr lang="ko-KR" altLang="en-US"/>
           </a:p>
@@ -981,7 +981,7 @@
           <a:p>
             <a:fld id="{149F34B4-7175-41BD-B98B-2E7021201D7D}" type="datetimeFigureOut">
               <a:rPr lang="ko-KR" altLang="en-US" smtClean="0"/>
-              <a:t>2026-04-09</a:t>
+              <a:t>2026-04-29</a:t>
             </a:fld>
             <a:endParaRPr lang="ko-KR" altLang="en-US"/>
           </a:p>
@@ -1043,242 +1043,6 @@
 </file>
 
 <file path=ppt/slideLayouts/slideLayout12.xml><?xml version="1.0" encoding="utf-8"?>
-<p:sldLayout xmlns:a="http://schemas.openxmlformats.org/drawingml/2006/main" xmlns:r="http://schemas.openxmlformats.org/officeDocument/2006/relationships" xmlns:p="http://schemas.openxmlformats.org/presentationml/2006/main" userDrawn="1">
-  <p:cSld name="1_제목 슬라이드">
-    <p:spTree>
-      <p:nvGrpSpPr>
-        <p:cNvPr id="1" name=""/>
-        <p:cNvGrpSpPr/>
-        <p:nvPr/>
-      </p:nvGrpSpPr>
-      <p:grpSpPr>
-        <a:xfrm>
-          <a:off x="0" y="0"/>
-          <a:ext cx="0" cy="0"/>
-          <a:chOff x="0" y="0"/>
-          <a:chExt cx="0" cy="0"/>
-        </a:xfrm>
-      </p:grpSpPr>
-      <p:sp>
-        <p:nvSpPr>
-          <p:cNvPr id="7" name="직사각형 6">
-            <a:extLst>
-              <a:ext uri="{FF2B5EF4-FFF2-40B4-BE49-F238E27FC236}">
-                <a16:creationId xmlns:a16="http://schemas.microsoft.com/office/drawing/2014/main" id="{3E62ED5C-FF61-A53B-4625-47CAC86DF448}"/>
-              </a:ext>
-            </a:extLst>
-          </p:cNvPr>
-          <p:cNvSpPr/>
-          <p:nvPr userDrawn="1"/>
-        </p:nvSpPr>
-        <p:spPr>
-          <a:xfrm>
-            <a:off x="1" y="1"/>
-            <a:ext cx="3210250" cy="1800225"/>
-          </a:xfrm>
-          <a:prstGeom prst="rect">
-            <a:avLst/>
-          </a:prstGeom>
-          <a:solidFill>
-            <a:schemeClr val="accent5">
-              <a:lumMod val="75000"/>
-            </a:schemeClr>
-          </a:solidFill>
-          <a:ln>
-            <a:noFill/>
-          </a:ln>
-        </p:spPr>
-        <p:style>
-          <a:lnRef idx="2">
-            <a:schemeClr val="accent1">
-              <a:shade val="15000"/>
-            </a:schemeClr>
-          </a:lnRef>
-          <a:fillRef idx="1">
-            <a:schemeClr val="accent1"/>
-          </a:fillRef>
-          <a:effectRef idx="0">
-            <a:schemeClr val="accent1"/>
-          </a:effectRef>
-          <a:fontRef idx="minor">
-            <a:schemeClr val="lt1"/>
-          </a:fontRef>
-        </p:style>
-        <p:txBody>
-          <a:bodyPr rtlCol="0" anchor="ctr"/>
-          <a:lstStyle/>
-          <a:p>
-            <a:pPr algn="ctr"/>
-            <a:endParaRPr lang="ko-KR" altLang="en-US" sz="119" dirty="0"/>
-          </a:p>
-        </p:txBody>
-      </p:sp>
-      <p:sp>
-        <p:nvSpPr>
-          <p:cNvPr id="8" name="직사각형 7">
-            <a:extLst>
-              <a:ext uri="{FF2B5EF4-FFF2-40B4-BE49-F238E27FC236}">
-                <a16:creationId xmlns:a16="http://schemas.microsoft.com/office/drawing/2014/main" id="{810793EE-E7D0-EF83-74D1-BEF25BB9304F}"/>
-              </a:ext>
-            </a:extLst>
-          </p:cNvPr>
-          <p:cNvSpPr/>
-          <p:nvPr userDrawn="1"/>
-        </p:nvSpPr>
-        <p:spPr>
-          <a:xfrm>
-            <a:off x="29572" y="30483"/>
-            <a:ext cx="3146404" cy="1728467"/>
-          </a:xfrm>
-          <a:prstGeom prst="rect">
-            <a:avLst/>
-          </a:prstGeom>
-          <a:solidFill>
-            <a:schemeClr val="bg1"/>
-          </a:solidFill>
-          <a:ln>
-            <a:noFill/>
-          </a:ln>
-        </p:spPr>
-        <p:style>
-          <a:lnRef idx="2">
-            <a:schemeClr val="accent1">
-              <a:shade val="15000"/>
-            </a:schemeClr>
-          </a:lnRef>
-          <a:fillRef idx="1">
-            <a:schemeClr val="accent1"/>
-          </a:fillRef>
-          <a:effectRef idx="0">
-            <a:schemeClr val="accent1"/>
-          </a:effectRef>
-          <a:fontRef idx="minor">
-            <a:schemeClr val="lt1"/>
-          </a:fontRef>
-        </p:style>
-        <p:txBody>
-          <a:bodyPr rtlCol="0" anchor="ctr"/>
-          <a:lstStyle/>
-          <a:p>
-            <a:pPr algn="ctr"/>
-            <a:endParaRPr lang="ko-KR" altLang="en-US" sz="119"/>
-          </a:p>
-        </p:txBody>
-      </p:sp>
-      <p:pic>
-        <p:nvPicPr>
-          <p:cNvPr id="9" name="Picture 1">
-            <a:extLst>
-              <a:ext uri="{FF2B5EF4-FFF2-40B4-BE49-F238E27FC236}">
-                <a16:creationId xmlns:a16="http://schemas.microsoft.com/office/drawing/2014/main" id="{5C76C7A1-71AE-1C7D-2C36-7DEA1D47FF0E}"/>
-              </a:ext>
-            </a:extLst>
-          </p:cNvPr>
-          <p:cNvPicPr>
-            <a:picLocks noChangeAspect="1"/>
-          </p:cNvPicPr>
-          <p:nvPr userDrawn="1"/>
-        </p:nvPicPr>
-        <p:blipFill>
-          <a:blip r:embed="rId2"/>
-          <a:stretch>
-            <a:fillRect/>
-          </a:stretch>
-        </p:blipFill>
-        <p:spPr>
-          <a:xfrm>
-            <a:off x="2759375" y="81588"/>
-            <a:ext cx="359069" cy="203042"/>
-          </a:xfrm>
-          <a:prstGeom prst="rect">
-            <a:avLst/>
-          </a:prstGeom>
-          <a:noFill/>
-          <a:ln>
-            <a:noFill/>
-          </a:ln>
-          <a:effectLst/>
-        </p:spPr>
-      </p:pic>
-      <p:sp>
-        <p:nvSpPr>
-          <p:cNvPr id="3" name="TextBox 2">
-            <a:extLst>
-              <a:ext uri="{FF2B5EF4-FFF2-40B4-BE49-F238E27FC236}">
-                <a16:creationId xmlns:a16="http://schemas.microsoft.com/office/drawing/2014/main" id="{49BA0C91-E2D0-A166-2BE8-3501CE9BABF8}"/>
-              </a:ext>
-            </a:extLst>
-          </p:cNvPr>
-          <p:cNvSpPr txBox="1"/>
-          <p:nvPr userDrawn="1"/>
-        </p:nvSpPr>
-        <p:spPr>
-          <a:xfrm>
-            <a:off x="2074628" y="1569906"/>
-            <a:ext cx="1128948" cy="169277"/>
-          </a:xfrm>
-          <a:prstGeom prst="rect">
-            <a:avLst/>
-          </a:prstGeom>
-          <a:noFill/>
-        </p:spPr>
-        <p:txBody>
-          <a:bodyPr wrap="square" rtlCol="0">
-            <a:spAutoFit/>
-          </a:bodyPr>
-          <a:lstStyle/>
-          <a:p>
-            <a:pPr algn="r"/>
-            <a:r>
-              <a:rPr lang="ko-KR" altLang="en-US" sz="500" b="1" dirty="0">
-                <a:solidFill>
-                  <a:srgbClr val="4472C4"/>
-                </a:solidFill>
-                <a:latin typeface="KoPub돋움체 Bold" panose="02020603020101020101" pitchFamily="18" charset="-127"/>
-                <a:ea typeface="KoPub돋움체 Bold" panose="02020603020101020101" pitchFamily="18" charset="-127"/>
-              </a:rPr>
-              <a:t>진료지원간호팀</a:t>
-            </a:r>
-            <a:endParaRPr lang="ko-KR" altLang="en-US" sz="600" b="1" dirty="0">
-              <a:solidFill>
-                <a:srgbClr val="4472C4"/>
-              </a:solidFill>
-              <a:latin typeface="KoPub돋움체 Bold" panose="02020603020101020101" pitchFamily="18" charset="-127"/>
-              <a:ea typeface="KoPub돋움체 Bold" panose="02020603020101020101" pitchFamily="18" charset="-127"/>
-            </a:endParaRPr>
-          </a:p>
-        </p:txBody>
-      </p:sp>
-    </p:spTree>
-    <p:extLst>
-      <p:ext uri="{BB962C8B-B14F-4D97-AF65-F5344CB8AC3E}">
-        <p14:creationId xmlns:p14="http://schemas.microsoft.com/office/powerpoint/2010/main" val="2626730532"/>
-      </p:ext>
-    </p:extLst>
-  </p:cSld>
-  <p:clrMapOvr>
-    <a:masterClrMapping/>
-  </p:clrMapOvr>
-  <p:extLst>
-    <p:ext uri="{DCECCB84-F9BA-43D5-87BE-67443E8EF086}">
-      <p15:sldGuideLst xmlns:p15="http://schemas.microsoft.com/office/powerpoint/2012/main">
-        <p15:guide id="1" orient="horz" pos="567">
-          <p15:clr>
-            <a:srgbClr val="FBAE40"/>
-          </p15:clr>
-        </p15:guide>
-        <p15:guide id="2" pos="1009">
-          <p15:clr>
-            <a:srgbClr val="FBAE40"/>
-          </p15:clr>
-        </p15:guide>
-      </p15:sldGuideLst>
-    </p:ext>
-  </p:extLst>
-</p:sldLayout>
-</file>
-
-<file path=ppt/slideLayouts/slideLayout13.xml><?xml version="1.0" encoding="utf-8"?>
 <p:sldLayout xmlns:a="http://schemas.openxmlformats.org/drawingml/2006/main" xmlns:r="http://schemas.openxmlformats.org/officeDocument/2006/relationships" xmlns:p="http://schemas.openxmlformats.org/presentationml/2006/main" preserve="1" userDrawn="1">
   <p:cSld name="3_제목 슬라이드">
     <p:spTree>
@@ -1527,7 +1291,7 @@
 </p:sldLayout>
 </file>
 
-<file path=ppt/slideLayouts/slideLayout14.xml><?xml version="1.0" encoding="utf-8"?>
+<file path=ppt/slideLayouts/slideLayout13.xml><?xml version="1.0" encoding="utf-8"?>
 <p:sldLayout xmlns:a="http://schemas.openxmlformats.org/drawingml/2006/main" xmlns:r="http://schemas.openxmlformats.org/officeDocument/2006/relationships" xmlns:p="http://schemas.openxmlformats.org/presentationml/2006/main" preserve="1" userDrawn="1">
   <p:cSld name="2_제목 슬라이드">
     <p:spTree>
@@ -1890,7 +1654,7 @@
           <a:p>
             <a:fld id="{149F34B4-7175-41BD-B98B-2E7021201D7D}" type="datetimeFigureOut">
               <a:rPr lang="ko-KR" altLang="en-US" smtClean="0"/>
-              <a:t>2026-04-09</a:t>
+              <a:t>2026-04-29</a:t>
             </a:fld>
             <a:endParaRPr lang="ko-KR" altLang="en-US"/>
           </a:p>
@@ -2136,7 +1900,7 @@
           <a:p>
             <a:fld id="{149F34B4-7175-41BD-B98B-2E7021201D7D}" type="datetimeFigureOut">
               <a:rPr lang="ko-KR" altLang="en-US" smtClean="0"/>
-              <a:t>2026-04-09</a:t>
+              <a:t>2026-04-29</a:t>
             </a:fld>
             <a:endParaRPr lang="ko-KR" altLang="en-US"/>
           </a:p>
@@ -2368,7 +2132,7 @@
           <a:p>
             <a:fld id="{149F34B4-7175-41BD-B98B-2E7021201D7D}" type="datetimeFigureOut">
               <a:rPr lang="ko-KR" altLang="en-US" smtClean="0"/>
-              <a:t>2026-04-09</a:t>
+              <a:t>2026-04-29</a:t>
             </a:fld>
             <a:endParaRPr lang="ko-KR" altLang="en-US"/>
           </a:p>
@@ -2735,7 +2499,7 @@
           <a:p>
             <a:fld id="{149F34B4-7175-41BD-B98B-2E7021201D7D}" type="datetimeFigureOut">
               <a:rPr lang="ko-KR" altLang="en-US" smtClean="0"/>
-              <a:t>2026-04-09</a:t>
+              <a:t>2026-04-29</a:t>
             </a:fld>
             <a:endParaRPr lang="ko-KR" altLang="en-US"/>
           </a:p>
@@ -2853,7 +2617,7 @@
           <a:p>
             <a:fld id="{149F34B4-7175-41BD-B98B-2E7021201D7D}" type="datetimeFigureOut">
               <a:rPr lang="ko-KR" altLang="en-US" smtClean="0"/>
-              <a:t>2026-04-09</a:t>
+              <a:t>2026-04-29</a:t>
             </a:fld>
             <a:endParaRPr lang="ko-KR" altLang="en-US"/>
           </a:p>
@@ -2948,7 +2712,7 @@
           <a:p>
             <a:fld id="{149F34B4-7175-41BD-B98B-2E7021201D7D}" type="datetimeFigureOut">
               <a:rPr lang="ko-KR" altLang="en-US" smtClean="0"/>
-              <a:t>2026-04-09</a:t>
+              <a:t>2026-04-29</a:t>
             </a:fld>
             <a:endParaRPr lang="ko-KR" altLang="en-US"/>
           </a:p>
@@ -3225,7 +2989,7 @@
           <a:p>
             <a:fld id="{149F34B4-7175-41BD-B98B-2E7021201D7D}" type="datetimeFigureOut">
               <a:rPr lang="ko-KR" altLang="en-US" smtClean="0"/>
-              <a:t>2026-04-09</a:t>
+              <a:t>2026-04-29</a:t>
             </a:fld>
             <a:endParaRPr lang="ko-KR" altLang="en-US"/>
           </a:p>
@@ -3482,7 +3246,7 @@
           <a:p>
             <a:fld id="{149F34B4-7175-41BD-B98B-2E7021201D7D}" type="datetimeFigureOut">
               <a:rPr lang="ko-KR" altLang="en-US" smtClean="0"/>
-              <a:t>2026-04-09</a:t>
+              <a:t>2026-04-29</a:t>
             </a:fld>
             <a:endParaRPr lang="ko-KR" altLang="en-US"/>
           </a:p>
@@ -3695,7 +3459,7 @@
           <a:p>
             <a:fld id="{149F34B4-7175-41BD-B98B-2E7021201D7D}" type="datetimeFigureOut">
               <a:rPr lang="ko-KR" altLang="en-US" smtClean="0"/>
-              <a:t>2026-04-09</a:t>
+              <a:t>2026-04-29</a:t>
             </a:fld>
             <a:endParaRPr lang="ko-KR" altLang="en-US"/>
           </a:p>
@@ -3799,9 +3563,8 @@
     <p:sldLayoutId id="2147483892" r:id="rId9"/>
     <p:sldLayoutId id="2147483893" r:id="rId10"/>
     <p:sldLayoutId id="2147483894" r:id="rId11"/>
-    <p:sldLayoutId id="2147483895" r:id="rId12"/>
-    <p:sldLayoutId id="2147483790" r:id="rId13"/>
-    <p:sldLayoutId id="2147483789" r:id="rId14"/>
+    <p:sldLayoutId id="2147483790" r:id="rId12"/>
+    <p:sldLayoutId id="2147483789" r:id="rId13"/>
   </p:sldLayoutIdLst>
   <p:txStyles>
     <p:titleStyle>
@@ -4125,12 +3888,47 @@
           <a:chExt cx="0" cy="0"/>
         </a:xfrm>
       </p:grpSpPr>
-      <p:sp>
-        <p:nvSpPr>
-          <p:cNvPr id="3" name="TextBox 2">
+      <p:pic>
+        <p:nvPicPr>
+          <p:cNvPr id="4" name="Picture 1">
             <a:extLst>
               <a:ext uri="{FF2B5EF4-FFF2-40B4-BE49-F238E27FC236}">
-                <a16:creationId xmlns:a16="http://schemas.microsoft.com/office/drawing/2014/main" id="{0C74A5D6-3A56-B177-2B3C-9C02CC585860}"/>
+                <a16:creationId xmlns:a16="http://schemas.microsoft.com/office/drawing/2014/main" id="{480AF66F-CB5C-451A-847A-EB60BA58025A}"/>
+              </a:ext>
+            </a:extLst>
+          </p:cNvPr>
+          <p:cNvPicPr>
+            <a:picLocks noChangeAspect="1"/>
+          </p:cNvPicPr>
+          <p:nvPr/>
+        </p:nvPicPr>
+        <p:blipFill>
+          <a:blip r:embed="rId2"/>
+          <a:stretch>
+            <a:fillRect/>
+          </a:stretch>
+        </p:blipFill>
+        <p:spPr>
+          <a:xfrm>
+            <a:off x="834546" y="1018696"/>
+            <a:ext cx="355023" cy="200754"/>
+          </a:xfrm>
+          <a:prstGeom prst="rect">
+            <a:avLst/>
+          </a:prstGeom>
+          <a:noFill/>
+          <a:ln>
+            <a:noFill/>
+          </a:ln>
+          <a:effectLst/>
+        </p:spPr>
+      </p:pic>
+      <p:sp>
+        <p:nvSpPr>
+          <p:cNvPr id="5" name="TextBox 4">
+            <a:extLst>
+              <a:ext uri="{FF2B5EF4-FFF2-40B4-BE49-F238E27FC236}">
+                <a16:creationId xmlns:a16="http://schemas.microsoft.com/office/drawing/2014/main" id="{5D20D6DC-7FD8-414D-8D41-7397E6AB51D5}"/>
               </a:ext>
             </a:extLst>
           </p:cNvPr>
@@ -4139,8 +3937,8 @@
         </p:nvSpPr>
         <p:spPr>
           <a:xfrm>
-            <a:off x="-724944" y="54246"/>
-            <a:ext cx="2717302" cy="169277"/>
+            <a:off x="1138753" y="1035390"/>
+            <a:ext cx="1233714" cy="167369"/>
           </a:xfrm>
           <a:prstGeom prst="rect">
             <a:avLst/>
@@ -4148,42 +3946,58 @@
           <a:noFill/>
         </p:spPr>
         <p:txBody>
-          <a:bodyPr wrap="square">
+          <a:bodyPr wrap="square" rtlCol="0">
             <a:spAutoFit/>
           </a:bodyPr>
           <a:lstStyle/>
           <a:p>
             <a:pPr algn="ctr"/>
             <a:r>
-              <a:rPr lang="ko-KR" altLang="en-US" sz="500" spc="-11" dirty="0">
-                <a:latin typeface="KoPub돋움체 Light" panose="02020603020101020101" pitchFamily="18" charset="-127"/>
-                <a:ea typeface="KoPub돋움체 Light" panose="02020603020101020101" pitchFamily="18" charset="-127"/>
+              <a:rPr lang="ko-KR" altLang="en-US" sz="494" b="1" dirty="0">
+                <a:solidFill>
+                  <a:srgbClr val="4472C4"/>
+                </a:solidFill>
+                <a:latin typeface="KoPub돋움체 Bold" panose="02020603020101020101" pitchFamily="18" charset="-127"/>
+                <a:ea typeface="KoPub돋움체 Bold" panose="02020603020101020101" pitchFamily="18" charset="-127"/>
               </a:rPr>
               <a:t>순천향대학교 천안병원 </a:t>
             </a:r>
             <a:r>
-              <a:rPr lang="en-US" altLang="ko-KR" sz="500" spc="-11" dirty="0">
-                <a:latin typeface="KoPub돋움체 Light" panose="02020603020101020101" pitchFamily="18" charset="-127"/>
-                <a:ea typeface="KoPub돋움체 Light" panose="02020603020101020101" pitchFamily="18" charset="-127"/>
+              <a:rPr lang="en-US" altLang="ko-KR" sz="494" b="1" dirty="0">
+                <a:solidFill>
+                  <a:srgbClr val="4472C4"/>
+                </a:solidFill>
+                <a:latin typeface="KoPub돋움체 Bold" panose="02020603020101020101" pitchFamily="18" charset="-127"/>
+                <a:ea typeface="KoPub돋움체 Bold" panose="02020603020101020101" pitchFamily="18" charset="-127"/>
               </a:rPr>
               <a:t>| </a:t>
             </a:r>
             <a:r>
-              <a:rPr lang="ko-KR" altLang="en-US" sz="500" spc="-11" dirty="0">
-                <a:latin typeface="KoPub돋움체 Light" panose="02020603020101020101" pitchFamily="18" charset="-127"/>
-                <a:ea typeface="KoPub돋움체 Light" panose="02020603020101020101" pitchFamily="18" charset="-127"/>
-              </a:rPr>
-              <a:t>진료지원간호팀 </a:t>
-            </a:r>
-          </a:p>
-        </p:txBody>
-      </p:sp>
-      <p:sp>
-        <p:nvSpPr>
-          <p:cNvPr id="41" name="TextBox 40">
+              <a:rPr lang="ko-KR" altLang="en-US" sz="494" b="1" dirty="0">
+                <a:solidFill>
+                  <a:srgbClr val="4472C4"/>
+                </a:solidFill>
+                <a:latin typeface="KoPub돋움체 Bold" panose="02020603020101020101" pitchFamily="18" charset="-127"/>
+                <a:ea typeface="KoPub돋움체 Bold" panose="02020603020101020101" pitchFamily="18" charset="-127"/>
+              </a:rPr>
+              <a:t>진료지원간호팀</a:t>
+            </a:r>
+            <a:endParaRPr lang="ko-KR" altLang="en-US" sz="593" b="1" dirty="0">
+              <a:solidFill>
+                <a:srgbClr val="4472C4"/>
+              </a:solidFill>
+              <a:latin typeface="KoPub돋움체 Bold" panose="02020603020101020101" pitchFamily="18" charset="-127"/>
+              <a:ea typeface="KoPub돋움체 Bold" panose="02020603020101020101" pitchFamily="18" charset="-127"/>
+            </a:endParaRPr>
+          </a:p>
+        </p:txBody>
+      </p:sp>
+      <p:sp>
+        <p:nvSpPr>
+          <p:cNvPr id="7" name="TextBox 6">
             <a:extLst>
               <a:ext uri="{FF2B5EF4-FFF2-40B4-BE49-F238E27FC236}">
-                <a16:creationId xmlns:a16="http://schemas.microsoft.com/office/drawing/2014/main" id="{91474189-057B-B9B1-6224-A28E5BF62A39}"/>
+                <a16:creationId xmlns:a16="http://schemas.microsoft.com/office/drawing/2014/main" id="{568CE481-19EF-4F97-AF73-265FDB83283E}"/>
               </a:ext>
             </a:extLst>
           </p:cNvPr>
@@ -4192,8 +4006,8 @@
         </p:nvSpPr>
         <p:spPr>
           <a:xfrm>
-            <a:off x="36673" y="341862"/>
-            <a:ext cx="3259226" cy="1169551"/>
+            <a:off x="1007527" y="671882"/>
+            <a:ext cx="1090755" cy="228231"/>
           </a:xfrm>
           <a:prstGeom prst="rect">
             <a:avLst/>
@@ -4206,219 +4020,191 @@
           </a:bodyPr>
           <a:lstStyle/>
           <a:p>
-            <a:pPr marL="171450" indent="-171450">
-              <a:buFont typeface="Wingdings" panose="05000000000000000000" pitchFamily="2" charset="2"/>
-              <a:buChar char="§"/>
-            </a:pPr>
-            <a:r>
-              <a:rPr lang="ko-KR" altLang="en-US" sz="1000" b="1" dirty="0">
-                <a:latin typeface="KoPub돋움체 Light" panose="02020603020101020101" pitchFamily="18" charset="-127"/>
-                <a:ea typeface="KoPub돋움체 Light" panose="02020603020101020101" pitchFamily="18" charset="-127"/>
-              </a:rPr>
-              <a:t>응급(10): “10은 전화 먼저 + 끝나면 </a:t>
-            </a:r>
-            <a:r>
-              <a:rPr lang="ko-KR" altLang="en-US" sz="1000" b="1" dirty="0" err="1">
-                <a:latin typeface="KoPub돋움체 Light" panose="02020603020101020101" pitchFamily="18" charset="-127"/>
-                <a:ea typeface="KoPub돋움체 Light" panose="02020603020101020101" pitchFamily="18" charset="-127"/>
-              </a:rPr>
-              <a:t>A</a:t>
-            </a:r>
-            <a:r>
-              <a:rPr lang="ko-KR" altLang="en-US" sz="1000" b="1" dirty="0">
-                <a:latin typeface="KoPub돋움체 Light" panose="02020603020101020101" pitchFamily="18" charset="-127"/>
-                <a:ea typeface="KoPub돋움체 Light" panose="02020603020101020101" pitchFamily="18" charset="-127"/>
-              </a:rPr>
-              <a:t>/</a:t>
-            </a:r>
-            <a:r>
-              <a:rPr lang="ko-KR" altLang="en-US" sz="1000" b="1" dirty="0" err="1">
-                <a:latin typeface="KoPub돋움체 Light" panose="02020603020101020101" pitchFamily="18" charset="-127"/>
-                <a:ea typeface="KoPub돋움체 Light" panose="02020603020101020101" pitchFamily="18" charset="-127"/>
-              </a:rPr>
-              <a:t>D</a:t>
-            </a:r>
-            <a:r>
-              <a:rPr lang="ko-KR" altLang="en-US" sz="1000" b="1" dirty="0">
-                <a:latin typeface="KoPub돋움체 Light" panose="02020603020101020101" pitchFamily="18" charset="-127"/>
-                <a:ea typeface="KoPub돋움체 Light" panose="02020603020101020101" pitchFamily="18" charset="-127"/>
-              </a:rPr>
-              <a:t> 1줄”</a:t>
-            </a:r>
-          </a:p>
-          <a:p>
-            <a:pPr marL="171450" indent="-171450">
-              <a:buFont typeface="Wingdings" panose="05000000000000000000" pitchFamily="2" charset="2"/>
-              <a:buChar char="§"/>
-            </a:pPr>
-            <a:endParaRPr lang="ko-KR" altLang="en-US" sz="1000" b="1" dirty="0">
-              <a:latin typeface="KoPub돋움체 Light" panose="02020603020101020101" pitchFamily="18" charset="-127"/>
-              <a:ea typeface="KoPub돋움체 Light" panose="02020603020101020101" pitchFamily="18" charset="-127"/>
+            <a:pPr algn="ctr"/>
+            <a:r>
+              <a:rPr lang="ko-KR" altLang="en-US" sz="890" dirty="0" err="1">
+                <a:solidFill>
+                  <a:srgbClr val="00B0F0"/>
+                </a:solidFill>
+                <a:latin typeface="KoPub돋움체 Bold" panose="00000800000000000000" pitchFamily="2" charset="-127"/>
+                <a:ea typeface="KoPub돋움체 Bold" panose="00000800000000000000" pitchFamily="2" charset="-127"/>
+              </a:rPr>
+              <a:t>우리가치</a:t>
+            </a:r>
+            <a:r>
+              <a:rPr lang="ko-KR" altLang="en-US" sz="890" dirty="0">
+                <a:solidFill>
+                  <a:schemeClr val="accent1">
+                    <a:lumMod val="50000"/>
+                  </a:schemeClr>
+                </a:solidFill>
+                <a:latin typeface="KoPub돋움체 Bold" panose="02020603020101020101" pitchFamily="18" charset="-127"/>
+                <a:ea typeface="KoPub돋움체 Bold" panose="02020603020101020101" pitchFamily="18" charset="-127"/>
+              </a:rPr>
+              <a:t> </a:t>
+            </a:r>
+            <a:r>
+              <a:rPr lang="en-US" altLang="ko-KR" sz="890" dirty="0" err="1">
+                <a:solidFill>
+                  <a:schemeClr val="accent1">
+                    <a:lumMod val="50000"/>
+                  </a:schemeClr>
+                </a:solidFill>
+                <a:latin typeface="Franklin Gothic Heavy" panose="020B0903020102020204" pitchFamily="34" charset="0"/>
+                <a:ea typeface="KoPub돋움체 Bold" panose="02020603020101020101" pitchFamily="18" charset="-127"/>
+              </a:rPr>
+              <a:t>WeValue</a:t>
+            </a:r>
+            <a:endParaRPr lang="en-US" altLang="ko-KR" sz="890" dirty="0">
+              <a:solidFill>
+                <a:schemeClr val="accent1">
+                  <a:lumMod val="50000"/>
+                </a:schemeClr>
+              </a:solidFill>
+              <a:latin typeface="Franklin Gothic Heavy" panose="020B0903020102020204" pitchFamily="34" charset="0"/>
+              <a:ea typeface="KoPub돋움체 Bold" panose="02020603020101020101" pitchFamily="18" charset="-127"/>
             </a:endParaRPr>
           </a:p>
-          <a:p>
-            <a:pPr marL="171450" indent="-171450">
-              <a:buFont typeface="Wingdings" panose="05000000000000000000" pitchFamily="2" charset="2"/>
-              <a:buChar char="§"/>
-            </a:pPr>
-            <a:r>
-              <a:rPr lang="ko-KR" altLang="en-US" sz="1000" b="1" dirty="0" err="1">
-                <a:latin typeface="KoPub돋움체 Light" panose="02020603020101020101" pitchFamily="18" charset="-127"/>
-                <a:ea typeface="KoPub돋움체 Light" panose="02020603020101020101" pitchFamily="18" charset="-127"/>
-              </a:rPr>
-              <a:t>정보성</a:t>
-            </a:r>
-            <a:r>
-              <a:rPr lang="ko-KR" altLang="en-US" sz="1000" b="1" dirty="0">
-                <a:latin typeface="KoPub돋움체 Light" panose="02020603020101020101" pitchFamily="18" charset="-127"/>
-                <a:ea typeface="KoPub돋움체 Light" panose="02020603020101020101" pitchFamily="18" charset="-127"/>
-              </a:rPr>
-              <a:t>(</a:t>
-            </a:r>
-            <a:r>
-              <a:rPr lang="ko-KR" altLang="en-US" sz="1000" b="1" dirty="0" err="1">
-                <a:latin typeface="KoPub돋움체 Light" panose="02020603020101020101" pitchFamily="18" charset="-127"/>
-                <a:ea typeface="KoPub돋움체 Light" panose="02020603020101020101" pitchFamily="18" charset="-127"/>
-              </a:rPr>
-              <a:t>입원·검사·자가약</a:t>
-            </a:r>
-            <a:r>
-              <a:rPr lang="ko-KR" altLang="en-US" sz="1000" b="1" dirty="0">
-                <a:latin typeface="KoPub돋움체 Light" panose="02020603020101020101" pitchFamily="18" charset="-127"/>
-                <a:ea typeface="KoPub돋움체 Light" panose="02020603020101020101" pitchFamily="18" charset="-127"/>
-              </a:rPr>
-              <a:t>): “</a:t>
-            </a:r>
-            <a:r>
-              <a:rPr lang="ko-KR" altLang="en-US" sz="1000" b="1" dirty="0" err="1">
-                <a:latin typeface="KoPub돋움체 Light" panose="02020603020101020101" pitchFamily="18" charset="-127"/>
-                <a:ea typeface="KoPub돋움체 Light" panose="02020603020101020101" pitchFamily="18" charset="-127"/>
-              </a:rPr>
-              <a:t>A</a:t>
-            </a:r>
-            <a:r>
-              <a:rPr lang="ko-KR" altLang="en-US" sz="1000" b="1" dirty="0">
-                <a:latin typeface="KoPub돋움체 Light" panose="02020603020101020101" pitchFamily="18" charset="-127"/>
-                <a:ea typeface="KoPub돋움체 Light" panose="02020603020101020101" pitchFamily="18" charset="-127"/>
-              </a:rPr>
-              <a:t>(보고)/12 → </a:t>
-            </a:r>
-            <a:r>
-              <a:rPr lang="ko-KR" altLang="en-US" sz="1000" b="1" dirty="0" err="1">
-                <a:latin typeface="KoPub돋움체 Light" panose="02020603020101020101" pitchFamily="18" charset="-127"/>
-                <a:ea typeface="KoPub돋움체 Light" panose="02020603020101020101" pitchFamily="18" charset="-127"/>
-              </a:rPr>
-              <a:t>D</a:t>
-            </a:r>
-            <a:r>
-              <a:rPr lang="ko-KR" altLang="en-US" sz="1000" b="1" dirty="0">
-                <a:latin typeface="KoPub돋움체 Light" panose="02020603020101020101" pitchFamily="18" charset="-127"/>
-                <a:ea typeface="KoPub돋움체 Light" panose="02020603020101020101" pitchFamily="18" charset="-127"/>
-              </a:rPr>
-              <a:t>(확인완료)”</a:t>
-            </a:r>
-          </a:p>
-          <a:p>
-            <a:pPr marL="171450" indent="-171450">
-              <a:buFont typeface="Wingdings" panose="05000000000000000000" pitchFamily="2" charset="2"/>
-              <a:buChar char="§"/>
-            </a:pPr>
-            <a:endParaRPr lang="ko-KR" altLang="en-US" sz="1000" b="1" dirty="0">
-              <a:latin typeface="KoPub돋움체 Light" panose="02020603020101020101" pitchFamily="18" charset="-127"/>
-              <a:ea typeface="KoPub돋움체 Light" panose="02020603020101020101" pitchFamily="18" charset="-127"/>
-            </a:endParaRPr>
-          </a:p>
-          <a:p>
-            <a:pPr marL="171450" indent="-171450">
-              <a:buFont typeface="Wingdings" panose="05000000000000000000" pitchFamily="2" charset="2"/>
-              <a:buChar char="§"/>
-            </a:pPr>
-            <a:r>
-              <a:rPr lang="ko-KR" altLang="en-US" sz="1000" b="1" dirty="0">
-                <a:latin typeface="KoPub돋움체 Light" panose="02020603020101020101" pitchFamily="18" charset="-127"/>
-                <a:ea typeface="KoPub돋움체 Light" panose="02020603020101020101" pitchFamily="18" charset="-127"/>
-              </a:rPr>
-              <a:t>도움/교육 요청: “교육요청은 </a:t>
-            </a:r>
-            <a:r>
-              <a:rPr lang="ko-KR" altLang="en-US" sz="1000" b="1" dirty="0" err="1">
-                <a:latin typeface="KoPub돋움체 Light" panose="02020603020101020101" pitchFamily="18" charset="-127"/>
-                <a:ea typeface="KoPub돋움체 Light" panose="02020603020101020101" pitchFamily="18" charset="-127"/>
-              </a:rPr>
-              <a:t>QR에서</a:t>
-            </a:r>
-            <a:r>
-              <a:rPr lang="ko-KR" altLang="en-US" sz="1000" b="1" dirty="0">
-                <a:latin typeface="KoPub돋움체 Light" panose="02020603020101020101" pitchFamily="18" charset="-127"/>
-                <a:ea typeface="KoPub돋움체 Light" panose="02020603020101020101" pitchFamily="18" charset="-127"/>
-              </a:rPr>
-              <a:t> 1번”</a:t>
-            </a:r>
-          </a:p>
-          <a:p>
-            <a:pPr marL="171450" indent="-171450">
-              <a:buFont typeface="Wingdings" panose="05000000000000000000" pitchFamily="2" charset="2"/>
-              <a:buChar char="§"/>
-            </a:pPr>
-            <a:endParaRPr lang="ko-KR" altLang="en-US" sz="1000" b="1" dirty="0">
-              <a:latin typeface="KoPub돋움체 Light" panose="02020603020101020101" pitchFamily="18" charset="-127"/>
-              <a:ea typeface="KoPub돋움체 Light" panose="02020603020101020101" pitchFamily="18" charset="-127"/>
-            </a:endParaRPr>
-          </a:p>
-          <a:p>
-            <a:pPr marL="171450" indent="-171450">
-              <a:buFont typeface="Wingdings" panose="05000000000000000000" pitchFamily="2" charset="2"/>
-              <a:buChar char="§"/>
-            </a:pPr>
-            <a:r>
-              <a:rPr lang="ko-KR" altLang="en-US" sz="1000" b="1" dirty="0" err="1">
-                <a:latin typeface="KoPub돋움체 Light" panose="02020603020101020101" pitchFamily="18" charset="-127"/>
-                <a:ea typeface="KoPub돋움체 Light" panose="02020603020101020101" pitchFamily="18" charset="-127"/>
-              </a:rPr>
-              <a:t>익명함</a:t>
-            </a:r>
-            <a:r>
-              <a:rPr lang="ko-KR" altLang="en-US" sz="1000" b="1" dirty="0">
-                <a:latin typeface="KoPub돋움체 Light" panose="02020603020101020101" pitchFamily="18" charset="-127"/>
-                <a:ea typeface="KoPub돋움체 Light" panose="02020603020101020101" pitchFamily="18" charset="-127"/>
-              </a:rPr>
-              <a:t>/칭찬: “</a:t>
-            </a:r>
-            <a:r>
-              <a:rPr lang="ko-KR" altLang="en-US" sz="1000" b="1" dirty="0" err="1">
-                <a:latin typeface="KoPub돋움체 Light" panose="02020603020101020101" pitchFamily="18" charset="-127"/>
-                <a:ea typeface="KoPub돋움체 Light" panose="02020603020101020101" pitchFamily="18" charset="-127"/>
-              </a:rPr>
-              <a:t>불편·제안·칭찬은</a:t>
-            </a:r>
-            <a:r>
-              <a:rPr lang="ko-KR" altLang="en-US" sz="1000" b="1" dirty="0">
-                <a:latin typeface="KoPub돋움체 Light" panose="02020603020101020101" pitchFamily="18" charset="-127"/>
-                <a:ea typeface="KoPub돋움체 Light" panose="02020603020101020101" pitchFamily="18" charset="-127"/>
-              </a:rPr>
-              <a:t> 앞면 </a:t>
-            </a:r>
-            <a:r>
-              <a:rPr lang="en-US" altLang="ko-KR" sz="1000" b="1" dirty="0">
-                <a:latin typeface="KoPub돋움체 Light" panose="02020603020101020101" pitchFamily="18" charset="-127"/>
-                <a:ea typeface="KoPub돋움체 Light" panose="02020603020101020101" pitchFamily="18" charset="-127"/>
-              </a:rPr>
-              <a:t>QR</a:t>
-            </a:r>
-            <a:r>
-              <a:rPr lang="ko-KR" altLang="en-US" sz="1000" b="1" dirty="0">
-                <a:latin typeface="KoPub돋움체 Light" panose="02020603020101020101" pitchFamily="18" charset="-127"/>
-                <a:ea typeface="KoPub돋움체 Light" panose="02020603020101020101" pitchFamily="18" charset="-127"/>
-              </a:rPr>
-              <a:t>(비난 금지)”</a:t>
-            </a:r>
-          </a:p>
-        </p:txBody>
-      </p:sp>
+        </p:txBody>
+      </p:sp>
+      <p:sp>
+        <p:nvSpPr>
+          <p:cNvPr id="8" name="TextBox 7">
+            <a:extLst>
+              <a:ext uri="{FF2B5EF4-FFF2-40B4-BE49-F238E27FC236}">
+                <a16:creationId xmlns:a16="http://schemas.microsoft.com/office/drawing/2014/main" id="{DAA9A54C-F797-44FB-AB3D-27BD433EFBED}"/>
+              </a:ext>
+            </a:extLst>
+          </p:cNvPr>
+          <p:cNvSpPr txBox="1"/>
+          <p:nvPr/>
+        </p:nvSpPr>
+        <p:spPr>
+          <a:xfrm>
+            <a:off x="914015" y="817009"/>
+            <a:ext cx="1277778" cy="167369"/>
+          </a:xfrm>
+          <a:prstGeom prst="rect">
+            <a:avLst/>
+          </a:prstGeom>
+          <a:noFill/>
+        </p:spPr>
+        <p:txBody>
+          <a:bodyPr wrap="none">
+            <a:spAutoFit/>
+          </a:bodyPr>
+          <a:lstStyle/>
+          <a:p>
+            <a:pPr algn="ctr"/>
+            <a:r>
+              <a:rPr lang="en-US" altLang="ko-KR" sz="494" b="1" dirty="0">
+                <a:latin typeface="KoPub돋움체 Bold" panose="00000800000000000000" pitchFamily="2" charset="-127"/>
+                <a:ea typeface="KoPub돋움체 Bold" panose="00000800000000000000" pitchFamily="2" charset="-127"/>
+              </a:rPr>
+              <a:t>[</a:t>
+            </a:r>
+            <a:r>
+              <a:rPr lang="ko-KR" altLang="en-US" sz="494" b="1" dirty="0">
+                <a:latin typeface="KoPub돋움체 Bold" panose="00000800000000000000" pitchFamily="2" charset="-127"/>
+                <a:ea typeface="KoPub돋움체 Bold" panose="00000800000000000000" pitchFamily="2" charset="-127"/>
+              </a:rPr>
+              <a:t>우리가 가치를 만드는 공간</a:t>
+            </a:r>
+            <a:r>
+              <a:rPr lang="en-US" altLang="ko-KR" sz="494" b="1" dirty="0">
+                <a:latin typeface="KoPub돋움체 Bold" panose="00000800000000000000" pitchFamily="2" charset="-127"/>
+                <a:ea typeface="KoPub돋움체 Bold" panose="00000800000000000000" pitchFamily="2" charset="-127"/>
+              </a:rPr>
+              <a:t>, </a:t>
+            </a:r>
+            <a:r>
+              <a:rPr lang="ko-KR" altLang="en-US" sz="494" b="1" dirty="0" err="1">
+                <a:latin typeface="KoPub돋움체 Bold" panose="00000800000000000000" pitchFamily="2" charset="-127"/>
+                <a:ea typeface="KoPub돋움체 Bold" panose="00000800000000000000" pitchFamily="2" charset="-127"/>
+              </a:rPr>
+              <a:t>우리가치</a:t>
+            </a:r>
+            <a:r>
+              <a:rPr lang="ko-KR" altLang="en-US" sz="494" b="1" dirty="0">
+                <a:latin typeface="KoPub돋움체 Bold" panose="00000800000000000000" pitchFamily="2" charset="-127"/>
+                <a:ea typeface="KoPub돋움체 Bold" panose="00000800000000000000" pitchFamily="2" charset="-127"/>
+              </a:rPr>
+              <a:t> 허브</a:t>
+            </a:r>
+            <a:r>
+              <a:rPr lang="en-US" altLang="ko-KR" sz="494" b="1" dirty="0">
+                <a:latin typeface="KoPub돋움체 Bold" panose="00000800000000000000" pitchFamily="2" charset="-127"/>
+                <a:ea typeface="KoPub돋움체 Bold" panose="00000800000000000000" pitchFamily="2" charset="-127"/>
+              </a:rPr>
+              <a:t>]</a:t>
+            </a:r>
+          </a:p>
+        </p:txBody>
+      </p:sp>
+      <p:pic>
+        <p:nvPicPr>
+          <p:cNvPr id="9" name="그림 8">
+            <a:extLst>
+              <a:ext uri="{FF2B5EF4-FFF2-40B4-BE49-F238E27FC236}">
+                <a16:creationId xmlns:a16="http://schemas.microsoft.com/office/drawing/2014/main" id="{F3A7A373-FECD-4243-98D0-B228302974CA}"/>
+              </a:ext>
+            </a:extLst>
+          </p:cNvPr>
+          <p:cNvPicPr>
+            <a:picLocks noChangeAspect="1"/>
+          </p:cNvPicPr>
+          <p:nvPr/>
+        </p:nvPicPr>
+        <p:blipFill>
+          <a:blip r:embed="rId3"/>
+          <a:stretch>
+            <a:fillRect/>
+          </a:stretch>
+        </p:blipFill>
+        <p:spPr>
+          <a:xfrm>
+            <a:off x="896601" y="716227"/>
+            <a:ext cx="145755" cy="127277"/>
+          </a:xfrm>
+          <a:prstGeom prst="rect">
+            <a:avLst/>
+          </a:prstGeom>
+        </p:spPr>
+      </p:pic>
+      <p:pic>
+        <p:nvPicPr>
+          <p:cNvPr id="11" name="그림 10">
+            <a:extLst>
+              <a:ext uri="{FF2B5EF4-FFF2-40B4-BE49-F238E27FC236}">
+                <a16:creationId xmlns:a16="http://schemas.microsoft.com/office/drawing/2014/main" id="{25D16522-22F0-487F-BE90-3035E8C29235}"/>
+              </a:ext>
+            </a:extLst>
+          </p:cNvPr>
+          <p:cNvPicPr>
+            <a:picLocks noChangeAspect="1"/>
+          </p:cNvPicPr>
+          <p:nvPr/>
+        </p:nvPicPr>
+        <p:blipFill>
+          <a:blip r:embed="rId3"/>
+          <a:stretch>
+            <a:fillRect/>
+          </a:stretch>
+        </p:blipFill>
+        <p:spPr>
+          <a:xfrm rot="10800000">
+            <a:off x="2030965" y="721574"/>
+            <a:ext cx="145753" cy="127277"/>
+          </a:xfrm>
+          <a:prstGeom prst="rect">
+            <a:avLst/>
+          </a:prstGeom>
+        </p:spPr>
+      </p:pic>
     </p:spTree>
     <p:extLst>
       <p:ext uri="{BB962C8B-B14F-4D97-AF65-F5344CB8AC3E}">
-        <p14:creationId xmlns:p14="http://schemas.microsoft.com/office/powerpoint/2010/main" val="4161560652"/>
+        <p14:creationId xmlns:p14="http://schemas.microsoft.com/office/powerpoint/2010/main" val="1592464754"/>
       </p:ext>
     </p:extLst>
   </p:cSld>
@@ -4436,7 +4222,7 @@
         <p:cNvPr id="1" name="">
           <a:extLst>
             <a:ext uri="{FF2B5EF4-FFF2-40B4-BE49-F238E27FC236}">
-              <a16:creationId xmlns:a16="http://schemas.microsoft.com/office/drawing/2014/main" id="{B0D715BC-D383-FE04-A967-B1CE24C4C039}"/>
+              <a16:creationId xmlns:a16="http://schemas.microsoft.com/office/drawing/2014/main" id="{4B91BF69-B73E-E52D-A273-34695C83C39D}"/>
             </a:ext>
           </a:extLst>
         </p:cNvPr>
@@ -4451,12 +4237,47 @@
           <a:chExt cx="0" cy="0"/>
         </a:xfrm>
       </p:grpSpPr>
-      <p:sp>
-        <p:nvSpPr>
-          <p:cNvPr id="3" name="TextBox 2">
+      <p:pic>
+        <p:nvPicPr>
+          <p:cNvPr id="4" name="Picture 1">
             <a:extLst>
               <a:ext uri="{FF2B5EF4-FFF2-40B4-BE49-F238E27FC236}">
-                <a16:creationId xmlns:a16="http://schemas.microsoft.com/office/drawing/2014/main" id="{7A054BB9-70FA-24E4-D3E0-B9B521D74FC0}"/>
+                <a16:creationId xmlns:a16="http://schemas.microsoft.com/office/drawing/2014/main" id="{480AF66F-CB5C-451A-847A-EB60BA58025A}"/>
+              </a:ext>
+            </a:extLst>
+          </p:cNvPr>
+          <p:cNvPicPr>
+            <a:picLocks noChangeAspect="1"/>
+          </p:cNvPicPr>
+          <p:nvPr/>
+        </p:nvPicPr>
+        <p:blipFill>
+          <a:blip r:embed="rId2"/>
+          <a:stretch>
+            <a:fillRect/>
+          </a:stretch>
+        </p:blipFill>
+        <p:spPr>
+          <a:xfrm>
+            <a:off x="834546" y="1018696"/>
+            <a:ext cx="355023" cy="200754"/>
+          </a:xfrm>
+          <a:prstGeom prst="rect">
+            <a:avLst/>
+          </a:prstGeom>
+          <a:noFill/>
+          <a:ln>
+            <a:noFill/>
+          </a:ln>
+          <a:effectLst/>
+        </p:spPr>
+      </p:pic>
+      <p:sp>
+        <p:nvSpPr>
+          <p:cNvPr id="5" name="TextBox 4">
+            <a:extLst>
+              <a:ext uri="{FF2B5EF4-FFF2-40B4-BE49-F238E27FC236}">
+                <a16:creationId xmlns:a16="http://schemas.microsoft.com/office/drawing/2014/main" id="{5D20D6DC-7FD8-414D-8D41-7397E6AB51D5}"/>
               </a:ext>
             </a:extLst>
           </p:cNvPr>
@@ -4465,8 +4286,8 @@
         </p:nvSpPr>
         <p:spPr>
           <a:xfrm>
-            <a:off x="-724944" y="54246"/>
-            <a:ext cx="2717302" cy="169277"/>
+            <a:off x="1138753" y="1035390"/>
+            <a:ext cx="1233714" cy="167369"/>
           </a:xfrm>
           <a:prstGeom prst="rect">
             <a:avLst/>
@@ -4474,42 +4295,58 @@
           <a:noFill/>
         </p:spPr>
         <p:txBody>
-          <a:bodyPr wrap="square">
+          <a:bodyPr wrap="square" rtlCol="0">
             <a:spAutoFit/>
           </a:bodyPr>
           <a:lstStyle/>
           <a:p>
             <a:pPr algn="ctr"/>
             <a:r>
-              <a:rPr lang="ko-KR" altLang="en-US" sz="500" spc="-11" dirty="0">
-                <a:latin typeface="KoPub돋움체 Light" panose="02020603020101020101" pitchFamily="18" charset="-127"/>
-                <a:ea typeface="KoPub돋움체 Light" panose="02020603020101020101" pitchFamily="18" charset="-127"/>
+              <a:rPr lang="ko-KR" altLang="en-US" sz="494" b="1" dirty="0">
+                <a:solidFill>
+                  <a:srgbClr val="4472C4"/>
+                </a:solidFill>
+                <a:latin typeface="KoPub돋움체 Bold" panose="02020603020101020101" pitchFamily="18" charset="-127"/>
+                <a:ea typeface="KoPub돋움체 Bold" panose="02020603020101020101" pitchFamily="18" charset="-127"/>
               </a:rPr>
               <a:t>순천향대학교 천안병원 </a:t>
             </a:r>
             <a:r>
-              <a:rPr lang="en-US" altLang="ko-KR" sz="500" spc="-11" dirty="0">
-                <a:latin typeface="KoPub돋움체 Light" panose="02020603020101020101" pitchFamily="18" charset="-127"/>
-                <a:ea typeface="KoPub돋움체 Light" panose="02020603020101020101" pitchFamily="18" charset="-127"/>
+              <a:rPr lang="en-US" altLang="ko-KR" sz="494" b="1" dirty="0">
+                <a:solidFill>
+                  <a:srgbClr val="4472C4"/>
+                </a:solidFill>
+                <a:latin typeface="KoPub돋움체 Bold" panose="02020603020101020101" pitchFamily="18" charset="-127"/>
+                <a:ea typeface="KoPub돋움체 Bold" panose="02020603020101020101" pitchFamily="18" charset="-127"/>
               </a:rPr>
               <a:t>| </a:t>
             </a:r>
             <a:r>
-              <a:rPr lang="ko-KR" altLang="en-US" sz="500" spc="-11" dirty="0">
-                <a:latin typeface="KoPub돋움체 Light" panose="02020603020101020101" pitchFamily="18" charset="-127"/>
-                <a:ea typeface="KoPub돋움체 Light" panose="02020603020101020101" pitchFamily="18" charset="-127"/>
-              </a:rPr>
-              <a:t>진료지원간호팀 </a:t>
-            </a:r>
-          </a:p>
-        </p:txBody>
-      </p:sp>
-      <p:sp>
-        <p:nvSpPr>
-          <p:cNvPr id="41" name="TextBox 40">
+              <a:rPr lang="ko-KR" altLang="en-US" sz="494" b="1" dirty="0">
+                <a:solidFill>
+                  <a:srgbClr val="4472C4"/>
+                </a:solidFill>
+                <a:latin typeface="KoPub돋움체 Bold" panose="02020603020101020101" pitchFamily="18" charset="-127"/>
+                <a:ea typeface="KoPub돋움체 Bold" panose="02020603020101020101" pitchFamily="18" charset="-127"/>
+              </a:rPr>
+              <a:t>진료지원간호팀</a:t>
+            </a:r>
+            <a:endParaRPr lang="ko-KR" altLang="en-US" sz="593" b="1" dirty="0">
+              <a:solidFill>
+                <a:srgbClr val="4472C4"/>
+              </a:solidFill>
+              <a:latin typeface="KoPub돋움체 Bold" panose="02020603020101020101" pitchFamily="18" charset="-127"/>
+              <a:ea typeface="KoPub돋움체 Bold" panose="02020603020101020101" pitchFamily="18" charset="-127"/>
+            </a:endParaRPr>
+          </a:p>
+        </p:txBody>
+      </p:sp>
+      <p:sp>
+        <p:nvSpPr>
+          <p:cNvPr id="7" name="TextBox 6">
             <a:extLst>
               <a:ext uri="{FF2B5EF4-FFF2-40B4-BE49-F238E27FC236}">
-                <a16:creationId xmlns:a16="http://schemas.microsoft.com/office/drawing/2014/main" id="{FAAEEE9B-DADF-6D19-BB8E-452D313600DC}"/>
+                <a16:creationId xmlns:a16="http://schemas.microsoft.com/office/drawing/2014/main" id="{568CE481-19EF-4F97-AF73-265FDB83283E}"/>
               </a:ext>
             </a:extLst>
           </p:cNvPr>
@@ -4518,8 +4355,8 @@
         </p:nvSpPr>
         <p:spPr>
           <a:xfrm>
-            <a:off x="36673" y="341862"/>
-            <a:ext cx="3259226" cy="1169551"/>
+            <a:off x="1007527" y="671882"/>
+            <a:ext cx="1090755" cy="228231"/>
           </a:xfrm>
           <a:prstGeom prst="rect">
             <a:avLst/>
@@ -4532,219 +4369,191 @@
           </a:bodyPr>
           <a:lstStyle/>
           <a:p>
-            <a:pPr marL="171450" indent="-171450">
-              <a:buFont typeface="Wingdings" panose="05000000000000000000" pitchFamily="2" charset="2"/>
-              <a:buChar char="§"/>
-            </a:pPr>
-            <a:r>
-              <a:rPr lang="ko-KR" altLang="en-US" sz="1000" b="1" dirty="0">
-                <a:latin typeface="KoPub돋움체 Light" panose="02020603020101020101" pitchFamily="18" charset="-127"/>
-                <a:ea typeface="KoPub돋움체 Light" panose="02020603020101020101" pitchFamily="18" charset="-127"/>
-              </a:rPr>
-              <a:t>응급(10): “10은 전화 먼저 + 끝나면 </a:t>
-            </a:r>
-            <a:r>
-              <a:rPr lang="ko-KR" altLang="en-US" sz="1000" b="1" dirty="0" err="1">
-                <a:latin typeface="KoPub돋움체 Light" panose="02020603020101020101" pitchFamily="18" charset="-127"/>
-                <a:ea typeface="KoPub돋움체 Light" panose="02020603020101020101" pitchFamily="18" charset="-127"/>
-              </a:rPr>
-              <a:t>A</a:t>
-            </a:r>
-            <a:r>
-              <a:rPr lang="ko-KR" altLang="en-US" sz="1000" b="1" dirty="0">
-                <a:latin typeface="KoPub돋움체 Light" panose="02020603020101020101" pitchFamily="18" charset="-127"/>
-                <a:ea typeface="KoPub돋움체 Light" panose="02020603020101020101" pitchFamily="18" charset="-127"/>
-              </a:rPr>
-              <a:t>/</a:t>
-            </a:r>
-            <a:r>
-              <a:rPr lang="ko-KR" altLang="en-US" sz="1000" b="1" dirty="0" err="1">
-                <a:latin typeface="KoPub돋움체 Light" panose="02020603020101020101" pitchFamily="18" charset="-127"/>
-                <a:ea typeface="KoPub돋움체 Light" panose="02020603020101020101" pitchFamily="18" charset="-127"/>
-              </a:rPr>
-              <a:t>D</a:t>
-            </a:r>
-            <a:r>
-              <a:rPr lang="ko-KR" altLang="en-US" sz="1000" b="1" dirty="0">
-                <a:latin typeface="KoPub돋움체 Light" panose="02020603020101020101" pitchFamily="18" charset="-127"/>
-                <a:ea typeface="KoPub돋움체 Light" panose="02020603020101020101" pitchFamily="18" charset="-127"/>
-              </a:rPr>
-              <a:t> 1줄”</a:t>
-            </a:r>
-          </a:p>
-          <a:p>
-            <a:pPr marL="171450" indent="-171450">
-              <a:buFont typeface="Wingdings" panose="05000000000000000000" pitchFamily="2" charset="2"/>
-              <a:buChar char="§"/>
-            </a:pPr>
-            <a:endParaRPr lang="ko-KR" altLang="en-US" sz="1000" b="1" dirty="0">
-              <a:latin typeface="KoPub돋움체 Light" panose="02020603020101020101" pitchFamily="18" charset="-127"/>
-              <a:ea typeface="KoPub돋움체 Light" panose="02020603020101020101" pitchFamily="18" charset="-127"/>
+            <a:pPr algn="ctr"/>
+            <a:r>
+              <a:rPr lang="ko-KR" altLang="en-US" sz="890" dirty="0" err="1">
+                <a:solidFill>
+                  <a:srgbClr val="00B0F0"/>
+                </a:solidFill>
+                <a:latin typeface="KoPub돋움체 Bold" panose="00000800000000000000" pitchFamily="2" charset="-127"/>
+                <a:ea typeface="KoPub돋움체 Bold" panose="00000800000000000000" pitchFamily="2" charset="-127"/>
+              </a:rPr>
+              <a:t>우리가치</a:t>
+            </a:r>
+            <a:r>
+              <a:rPr lang="ko-KR" altLang="en-US" sz="890" dirty="0">
+                <a:solidFill>
+                  <a:schemeClr val="accent1">
+                    <a:lumMod val="50000"/>
+                  </a:schemeClr>
+                </a:solidFill>
+                <a:latin typeface="KoPub돋움체 Bold" panose="02020603020101020101" pitchFamily="18" charset="-127"/>
+                <a:ea typeface="KoPub돋움체 Bold" panose="02020603020101020101" pitchFamily="18" charset="-127"/>
+              </a:rPr>
+              <a:t> </a:t>
+            </a:r>
+            <a:r>
+              <a:rPr lang="en-US" altLang="ko-KR" sz="890" dirty="0" err="1">
+                <a:solidFill>
+                  <a:schemeClr val="accent1">
+                    <a:lumMod val="50000"/>
+                  </a:schemeClr>
+                </a:solidFill>
+                <a:latin typeface="Franklin Gothic Heavy" panose="020B0903020102020204" pitchFamily="34" charset="0"/>
+                <a:ea typeface="KoPub돋움체 Bold" panose="02020603020101020101" pitchFamily="18" charset="-127"/>
+              </a:rPr>
+              <a:t>WeValue</a:t>
+            </a:r>
+            <a:endParaRPr lang="en-US" altLang="ko-KR" sz="890" dirty="0">
+              <a:solidFill>
+                <a:schemeClr val="accent1">
+                  <a:lumMod val="50000"/>
+                </a:schemeClr>
+              </a:solidFill>
+              <a:latin typeface="Franklin Gothic Heavy" panose="020B0903020102020204" pitchFamily="34" charset="0"/>
+              <a:ea typeface="KoPub돋움체 Bold" panose="02020603020101020101" pitchFamily="18" charset="-127"/>
             </a:endParaRPr>
           </a:p>
-          <a:p>
-            <a:pPr marL="171450" indent="-171450">
-              <a:buFont typeface="Wingdings" panose="05000000000000000000" pitchFamily="2" charset="2"/>
-              <a:buChar char="§"/>
-            </a:pPr>
-            <a:r>
-              <a:rPr lang="ko-KR" altLang="en-US" sz="1000" b="1" dirty="0" err="1">
-                <a:latin typeface="KoPub돋움체 Light" panose="02020603020101020101" pitchFamily="18" charset="-127"/>
-                <a:ea typeface="KoPub돋움체 Light" panose="02020603020101020101" pitchFamily="18" charset="-127"/>
-              </a:rPr>
-              <a:t>정보성</a:t>
-            </a:r>
-            <a:r>
-              <a:rPr lang="ko-KR" altLang="en-US" sz="1000" b="1" dirty="0">
-                <a:latin typeface="KoPub돋움체 Light" panose="02020603020101020101" pitchFamily="18" charset="-127"/>
-                <a:ea typeface="KoPub돋움체 Light" panose="02020603020101020101" pitchFamily="18" charset="-127"/>
-              </a:rPr>
-              <a:t>(</a:t>
-            </a:r>
-            <a:r>
-              <a:rPr lang="ko-KR" altLang="en-US" sz="1000" b="1" dirty="0" err="1">
-                <a:latin typeface="KoPub돋움체 Light" panose="02020603020101020101" pitchFamily="18" charset="-127"/>
-                <a:ea typeface="KoPub돋움체 Light" panose="02020603020101020101" pitchFamily="18" charset="-127"/>
-              </a:rPr>
-              <a:t>입원·검사·자가약</a:t>
-            </a:r>
-            <a:r>
-              <a:rPr lang="ko-KR" altLang="en-US" sz="1000" b="1" dirty="0">
-                <a:latin typeface="KoPub돋움체 Light" panose="02020603020101020101" pitchFamily="18" charset="-127"/>
-                <a:ea typeface="KoPub돋움체 Light" panose="02020603020101020101" pitchFamily="18" charset="-127"/>
-              </a:rPr>
-              <a:t>): “</a:t>
-            </a:r>
-            <a:r>
-              <a:rPr lang="ko-KR" altLang="en-US" sz="1000" b="1" dirty="0" err="1">
-                <a:latin typeface="KoPub돋움체 Light" panose="02020603020101020101" pitchFamily="18" charset="-127"/>
-                <a:ea typeface="KoPub돋움체 Light" panose="02020603020101020101" pitchFamily="18" charset="-127"/>
-              </a:rPr>
-              <a:t>A</a:t>
-            </a:r>
-            <a:r>
-              <a:rPr lang="ko-KR" altLang="en-US" sz="1000" b="1" dirty="0">
-                <a:latin typeface="KoPub돋움체 Light" panose="02020603020101020101" pitchFamily="18" charset="-127"/>
-                <a:ea typeface="KoPub돋움체 Light" panose="02020603020101020101" pitchFamily="18" charset="-127"/>
-              </a:rPr>
-              <a:t>(보고)/12 → </a:t>
-            </a:r>
-            <a:r>
-              <a:rPr lang="ko-KR" altLang="en-US" sz="1000" b="1" dirty="0" err="1">
-                <a:latin typeface="KoPub돋움체 Light" panose="02020603020101020101" pitchFamily="18" charset="-127"/>
-                <a:ea typeface="KoPub돋움체 Light" panose="02020603020101020101" pitchFamily="18" charset="-127"/>
-              </a:rPr>
-              <a:t>D</a:t>
-            </a:r>
-            <a:r>
-              <a:rPr lang="ko-KR" altLang="en-US" sz="1000" b="1" dirty="0">
-                <a:latin typeface="KoPub돋움체 Light" panose="02020603020101020101" pitchFamily="18" charset="-127"/>
-                <a:ea typeface="KoPub돋움체 Light" panose="02020603020101020101" pitchFamily="18" charset="-127"/>
-              </a:rPr>
-              <a:t>(확인완료)”</a:t>
-            </a:r>
-          </a:p>
-          <a:p>
-            <a:pPr marL="171450" indent="-171450">
-              <a:buFont typeface="Wingdings" panose="05000000000000000000" pitchFamily="2" charset="2"/>
-              <a:buChar char="§"/>
-            </a:pPr>
-            <a:endParaRPr lang="ko-KR" altLang="en-US" sz="1000" b="1" dirty="0">
-              <a:latin typeface="KoPub돋움체 Light" panose="02020603020101020101" pitchFamily="18" charset="-127"/>
-              <a:ea typeface="KoPub돋움체 Light" panose="02020603020101020101" pitchFamily="18" charset="-127"/>
-            </a:endParaRPr>
-          </a:p>
-          <a:p>
-            <a:pPr marL="171450" indent="-171450">
-              <a:buFont typeface="Wingdings" panose="05000000000000000000" pitchFamily="2" charset="2"/>
-              <a:buChar char="§"/>
-            </a:pPr>
-            <a:r>
-              <a:rPr lang="ko-KR" altLang="en-US" sz="1000" b="1" dirty="0">
-                <a:latin typeface="KoPub돋움체 Light" panose="02020603020101020101" pitchFamily="18" charset="-127"/>
-                <a:ea typeface="KoPub돋움체 Light" panose="02020603020101020101" pitchFamily="18" charset="-127"/>
-              </a:rPr>
-              <a:t>도움/교육 요청: “교육요청은 </a:t>
-            </a:r>
-            <a:r>
-              <a:rPr lang="ko-KR" altLang="en-US" sz="1000" b="1" dirty="0" err="1">
-                <a:latin typeface="KoPub돋움체 Light" panose="02020603020101020101" pitchFamily="18" charset="-127"/>
-                <a:ea typeface="KoPub돋움체 Light" panose="02020603020101020101" pitchFamily="18" charset="-127"/>
-              </a:rPr>
-              <a:t>QR에서</a:t>
-            </a:r>
-            <a:r>
-              <a:rPr lang="ko-KR" altLang="en-US" sz="1000" b="1" dirty="0">
-                <a:latin typeface="KoPub돋움체 Light" panose="02020603020101020101" pitchFamily="18" charset="-127"/>
-                <a:ea typeface="KoPub돋움체 Light" panose="02020603020101020101" pitchFamily="18" charset="-127"/>
-              </a:rPr>
-              <a:t> 1번”</a:t>
-            </a:r>
-          </a:p>
-          <a:p>
-            <a:pPr marL="171450" indent="-171450">
-              <a:buFont typeface="Wingdings" panose="05000000000000000000" pitchFamily="2" charset="2"/>
-              <a:buChar char="§"/>
-            </a:pPr>
-            <a:endParaRPr lang="ko-KR" altLang="en-US" sz="1000" b="1" dirty="0">
-              <a:latin typeface="KoPub돋움체 Light" panose="02020603020101020101" pitchFamily="18" charset="-127"/>
-              <a:ea typeface="KoPub돋움체 Light" panose="02020603020101020101" pitchFamily="18" charset="-127"/>
-            </a:endParaRPr>
-          </a:p>
-          <a:p>
-            <a:pPr marL="171450" indent="-171450">
-              <a:buFont typeface="Wingdings" panose="05000000000000000000" pitchFamily="2" charset="2"/>
-              <a:buChar char="§"/>
-            </a:pPr>
-            <a:r>
-              <a:rPr lang="ko-KR" altLang="en-US" sz="1000" b="1" dirty="0" err="1">
-                <a:latin typeface="KoPub돋움체 Light" panose="02020603020101020101" pitchFamily="18" charset="-127"/>
-                <a:ea typeface="KoPub돋움체 Light" panose="02020603020101020101" pitchFamily="18" charset="-127"/>
-              </a:rPr>
-              <a:t>익명함</a:t>
-            </a:r>
-            <a:r>
-              <a:rPr lang="ko-KR" altLang="en-US" sz="1000" b="1" dirty="0">
-                <a:latin typeface="KoPub돋움체 Light" panose="02020603020101020101" pitchFamily="18" charset="-127"/>
-                <a:ea typeface="KoPub돋움체 Light" panose="02020603020101020101" pitchFamily="18" charset="-127"/>
-              </a:rPr>
-              <a:t>/칭찬: “</a:t>
-            </a:r>
-            <a:r>
-              <a:rPr lang="ko-KR" altLang="en-US" sz="1000" b="1" dirty="0" err="1">
-                <a:latin typeface="KoPub돋움체 Light" panose="02020603020101020101" pitchFamily="18" charset="-127"/>
-                <a:ea typeface="KoPub돋움체 Light" panose="02020603020101020101" pitchFamily="18" charset="-127"/>
-              </a:rPr>
-              <a:t>불편·제안·칭찬은</a:t>
-            </a:r>
-            <a:r>
-              <a:rPr lang="ko-KR" altLang="en-US" sz="1000" b="1" dirty="0">
-                <a:latin typeface="KoPub돋움체 Light" panose="02020603020101020101" pitchFamily="18" charset="-127"/>
-                <a:ea typeface="KoPub돋움체 Light" panose="02020603020101020101" pitchFamily="18" charset="-127"/>
-              </a:rPr>
-              <a:t> 앞면 </a:t>
-            </a:r>
-            <a:r>
-              <a:rPr lang="en-US" altLang="ko-KR" sz="1000" b="1" dirty="0">
-                <a:latin typeface="KoPub돋움체 Light" panose="02020603020101020101" pitchFamily="18" charset="-127"/>
-                <a:ea typeface="KoPub돋움체 Light" panose="02020603020101020101" pitchFamily="18" charset="-127"/>
-              </a:rPr>
-              <a:t>QR</a:t>
-            </a:r>
-            <a:r>
-              <a:rPr lang="ko-KR" altLang="en-US" sz="1000" b="1" dirty="0">
-                <a:latin typeface="KoPub돋움체 Light" panose="02020603020101020101" pitchFamily="18" charset="-127"/>
-                <a:ea typeface="KoPub돋움체 Light" panose="02020603020101020101" pitchFamily="18" charset="-127"/>
-              </a:rPr>
-              <a:t>(비난 금지)”</a:t>
-            </a:r>
-          </a:p>
-        </p:txBody>
-      </p:sp>
+        </p:txBody>
+      </p:sp>
+      <p:sp>
+        <p:nvSpPr>
+          <p:cNvPr id="8" name="TextBox 7">
+            <a:extLst>
+              <a:ext uri="{FF2B5EF4-FFF2-40B4-BE49-F238E27FC236}">
+                <a16:creationId xmlns:a16="http://schemas.microsoft.com/office/drawing/2014/main" id="{DAA9A54C-F797-44FB-AB3D-27BD433EFBED}"/>
+              </a:ext>
+            </a:extLst>
+          </p:cNvPr>
+          <p:cNvSpPr txBox="1"/>
+          <p:nvPr/>
+        </p:nvSpPr>
+        <p:spPr>
+          <a:xfrm>
+            <a:off x="914015" y="817009"/>
+            <a:ext cx="1277778" cy="167369"/>
+          </a:xfrm>
+          <a:prstGeom prst="rect">
+            <a:avLst/>
+          </a:prstGeom>
+          <a:noFill/>
+        </p:spPr>
+        <p:txBody>
+          <a:bodyPr wrap="none">
+            <a:spAutoFit/>
+          </a:bodyPr>
+          <a:lstStyle/>
+          <a:p>
+            <a:pPr algn="ctr"/>
+            <a:r>
+              <a:rPr lang="en-US" altLang="ko-KR" sz="494" b="1" dirty="0">
+                <a:latin typeface="KoPub돋움체 Bold" panose="00000800000000000000" pitchFamily="2" charset="-127"/>
+                <a:ea typeface="KoPub돋움체 Bold" panose="00000800000000000000" pitchFamily="2" charset="-127"/>
+              </a:rPr>
+              <a:t>[</a:t>
+            </a:r>
+            <a:r>
+              <a:rPr lang="ko-KR" altLang="en-US" sz="494" b="1" dirty="0">
+                <a:latin typeface="KoPub돋움체 Bold" panose="00000800000000000000" pitchFamily="2" charset="-127"/>
+                <a:ea typeface="KoPub돋움체 Bold" panose="00000800000000000000" pitchFamily="2" charset="-127"/>
+              </a:rPr>
+              <a:t>우리가 가치를 만드는 공간</a:t>
+            </a:r>
+            <a:r>
+              <a:rPr lang="en-US" altLang="ko-KR" sz="494" b="1" dirty="0">
+                <a:latin typeface="KoPub돋움체 Bold" panose="00000800000000000000" pitchFamily="2" charset="-127"/>
+                <a:ea typeface="KoPub돋움체 Bold" panose="00000800000000000000" pitchFamily="2" charset="-127"/>
+              </a:rPr>
+              <a:t>, </a:t>
+            </a:r>
+            <a:r>
+              <a:rPr lang="ko-KR" altLang="en-US" sz="494" b="1" dirty="0" err="1">
+                <a:latin typeface="KoPub돋움체 Bold" panose="00000800000000000000" pitchFamily="2" charset="-127"/>
+                <a:ea typeface="KoPub돋움체 Bold" panose="00000800000000000000" pitchFamily="2" charset="-127"/>
+              </a:rPr>
+              <a:t>우리가치</a:t>
+            </a:r>
+            <a:r>
+              <a:rPr lang="ko-KR" altLang="en-US" sz="494" b="1" dirty="0">
+                <a:latin typeface="KoPub돋움체 Bold" panose="00000800000000000000" pitchFamily="2" charset="-127"/>
+                <a:ea typeface="KoPub돋움체 Bold" panose="00000800000000000000" pitchFamily="2" charset="-127"/>
+              </a:rPr>
+              <a:t> 허브</a:t>
+            </a:r>
+            <a:r>
+              <a:rPr lang="en-US" altLang="ko-KR" sz="494" b="1" dirty="0">
+                <a:latin typeface="KoPub돋움체 Bold" panose="00000800000000000000" pitchFamily="2" charset="-127"/>
+                <a:ea typeface="KoPub돋움체 Bold" panose="00000800000000000000" pitchFamily="2" charset="-127"/>
+              </a:rPr>
+              <a:t>]</a:t>
+            </a:r>
+          </a:p>
+        </p:txBody>
+      </p:sp>
+      <p:pic>
+        <p:nvPicPr>
+          <p:cNvPr id="9" name="그림 8">
+            <a:extLst>
+              <a:ext uri="{FF2B5EF4-FFF2-40B4-BE49-F238E27FC236}">
+                <a16:creationId xmlns:a16="http://schemas.microsoft.com/office/drawing/2014/main" id="{F3A7A373-FECD-4243-98D0-B228302974CA}"/>
+              </a:ext>
+            </a:extLst>
+          </p:cNvPr>
+          <p:cNvPicPr>
+            <a:picLocks noChangeAspect="1"/>
+          </p:cNvPicPr>
+          <p:nvPr/>
+        </p:nvPicPr>
+        <p:blipFill>
+          <a:blip r:embed="rId3"/>
+          <a:stretch>
+            <a:fillRect/>
+          </a:stretch>
+        </p:blipFill>
+        <p:spPr>
+          <a:xfrm>
+            <a:off x="896601" y="716227"/>
+            <a:ext cx="145755" cy="127277"/>
+          </a:xfrm>
+          <a:prstGeom prst="rect">
+            <a:avLst/>
+          </a:prstGeom>
+        </p:spPr>
+      </p:pic>
+      <p:pic>
+        <p:nvPicPr>
+          <p:cNvPr id="11" name="그림 10">
+            <a:extLst>
+              <a:ext uri="{FF2B5EF4-FFF2-40B4-BE49-F238E27FC236}">
+                <a16:creationId xmlns:a16="http://schemas.microsoft.com/office/drawing/2014/main" id="{25D16522-22F0-487F-BE90-3035E8C29235}"/>
+              </a:ext>
+            </a:extLst>
+          </p:cNvPr>
+          <p:cNvPicPr>
+            <a:picLocks noChangeAspect="1"/>
+          </p:cNvPicPr>
+          <p:nvPr/>
+        </p:nvPicPr>
+        <p:blipFill>
+          <a:blip r:embed="rId3"/>
+          <a:stretch>
+            <a:fillRect/>
+          </a:stretch>
+        </p:blipFill>
+        <p:spPr>
+          <a:xfrm rot="10800000">
+            <a:off x="2030965" y="721574"/>
+            <a:ext cx="145753" cy="127277"/>
+          </a:xfrm>
+          <a:prstGeom prst="rect">
+            <a:avLst/>
+          </a:prstGeom>
+        </p:spPr>
+      </p:pic>
     </p:spTree>
     <p:extLst>
       <p:ext uri="{BB962C8B-B14F-4D97-AF65-F5344CB8AC3E}">
-        <p14:creationId xmlns:p14="http://schemas.microsoft.com/office/powerpoint/2010/main" val="892806788"/>
+        <p14:creationId xmlns:p14="http://schemas.microsoft.com/office/powerpoint/2010/main" val="1720875430"/>
       </p:ext>
     </p:extLst>
   </p:cSld>
@@ -4762,7 +4571,7 @@
         <p:cNvPr id="1" name="">
           <a:extLst>
             <a:ext uri="{FF2B5EF4-FFF2-40B4-BE49-F238E27FC236}">
-              <a16:creationId xmlns:a16="http://schemas.microsoft.com/office/drawing/2014/main" id="{7D60A7F2-B36B-31C2-B685-94C3913780BA}"/>
+              <a16:creationId xmlns:a16="http://schemas.microsoft.com/office/drawing/2014/main" id="{4B91BF69-B73E-E52D-A273-34695C83C39D}"/>
             </a:ext>
           </a:extLst>
         </p:cNvPr>
@@ -4777,12 +4586,47 @@
           <a:chExt cx="0" cy="0"/>
         </a:xfrm>
       </p:grpSpPr>
-      <p:sp>
-        <p:nvSpPr>
-          <p:cNvPr id="3" name="TextBox 2">
+      <p:pic>
+        <p:nvPicPr>
+          <p:cNvPr id="4" name="Picture 1">
             <a:extLst>
               <a:ext uri="{FF2B5EF4-FFF2-40B4-BE49-F238E27FC236}">
-                <a16:creationId xmlns:a16="http://schemas.microsoft.com/office/drawing/2014/main" id="{4B1BC9AB-C143-302D-6720-D3C1BEA283F0}"/>
+                <a16:creationId xmlns:a16="http://schemas.microsoft.com/office/drawing/2014/main" id="{480AF66F-CB5C-451A-847A-EB60BA58025A}"/>
+              </a:ext>
+            </a:extLst>
+          </p:cNvPr>
+          <p:cNvPicPr>
+            <a:picLocks noChangeAspect="1"/>
+          </p:cNvPicPr>
+          <p:nvPr/>
+        </p:nvPicPr>
+        <p:blipFill>
+          <a:blip r:embed="rId2"/>
+          <a:stretch>
+            <a:fillRect/>
+          </a:stretch>
+        </p:blipFill>
+        <p:spPr>
+          <a:xfrm>
+            <a:off x="834546" y="1018696"/>
+            <a:ext cx="355023" cy="200754"/>
+          </a:xfrm>
+          <a:prstGeom prst="rect">
+            <a:avLst/>
+          </a:prstGeom>
+          <a:noFill/>
+          <a:ln>
+            <a:noFill/>
+          </a:ln>
+          <a:effectLst/>
+        </p:spPr>
+      </p:pic>
+      <p:sp>
+        <p:nvSpPr>
+          <p:cNvPr id="5" name="TextBox 4">
+            <a:extLst>
+              <a:ext uri="{FF2B5EF4-FFF2-40B4-BE49-F238E27FC236}">
+                <a16:creationId xmlns:a16="http://schemas.microsoft.com/office/drawing/2014/main" id="{5D20D6DC-7FD8-414D-8D41-7397E6AB51D5}"/>
               </a:ext>
             </a:extLst>
           </p:cNvPr>
@@ -4791,8 +4635,8 @@
         </p:nvSpPr>
         <p:spPr>
           <a:xfrm>
-            <a:off x="-724944" y="54246"/>
-            <a:ext cx="2717302" cy="169277"/>
+            <a:off x="1138753" y="1035390"/>
+            <a:ext cx="1233714" cy="167369"/>
           </a:xfrm>
           <a:prstGeom prst="rect">
             <a:avLst/>
@@ -4800,42 +4644,58 @@
           <a:noFill/>
         </p:spPr>
         <p:txBody>
-          <a:bodyPr wrap="square">
+          <a:bodyPr wrap="square" rtlCol="0">
             <a:spAutoFit/>
           </a:bodyPr>
           <a:lstStyle/>
           <a:p>
             <a:pPr algn="ctr"/>
             <a:r>
-              <a:rPr lang="ko-KR" altLang="en-US" sz="500" spc="-11" dirty="0">
-                <a:latin typeface="KoPub돋움체 Light" panose="02020603020101020101" pitchFamily="18" charset="-127"/>
-                <a:ea typeface="KoPub돋움체 Light" panose="02020603020101020101" pitchFamily="18" charset="-127"/>
+              <a:rPr lang="ko-KR" altLang="en-US" sz="494" b="1" dirty="0">
+                <a:solidFill>
+                  <a:srgbClr val="4472C4"/>
+                </a:solidFill>
+                <a:latin typeface="KoPub돋움체 Bold" panose="02020603020101020101" pitchFamily="18" charset="-127"/>
+                <a:ea typeface="KoPub돋움체 Bold" panose="02020603020101020101" pitchFamily="18" charset="-127"/>
               </a:rPr>
               <a:t>순천향대학교 천안병원 </a:t>
             </a:r>
             <a:r>
-              <a:rPr lang="en-US" altLang="ko-KR" sz="500" spc="-11" dirty="0">
-                <a:latin typeface="KoPub돋움체 Light" panose="02020603020101020101" pitchFamily="18" charset="-127"/>
-                <a:ea typeface="KoPub돋움체 Light" panose="02020603020101020101" pitchFamily="18" charset="-127"/>
+              <a:rPr lang="en-US" altLang="ko-KR" sz="494" b="1" dirty="0">
+                <a:solidFill>
+                  <a:srgbClr val="4472C4"/>
+                </a:solidFill>
+                <a:latin typeface="KoPub돋움체 Bold" panose="02020603020101020101" pitchFamily="18" charset="-127"/>
+                <a:ea typeface="KoPub돋움체 Bold" panose="02020603020101020101" pitchFamily="18" charset="-127"/>
               </a:rPr>
               <a:t>| </a:t>
             </a:r>
             <a:r>
-              <a:rPr lang="ko-KR" altLang="en-US" sz="500" spc="-11" dirty="0">
-                <a:latin typeface="KoPub돋움체 Light" panose="02020603020101020101" pitchFamily="18" charset="-127"/>
-                <a:ea typeface="KoPub돋움체 Light" panose="02020603020101020101" pitchFamily="18" charset="-127"/>
-              </a:rPr>
-              <a:t>진료지원간호팀 </a:t>
-            </a:r>
-          </a:p>
-        </p:txBody>
-      </p:sp>
-      <p:sp>
-        <p:nvSpPr>
-          <p:cNvPr id="41" name="TextBox 40">
+              <a:rPr lang="ko-KR" altLang="en-US" sz="494" b="1" dirty="0">
+                <a:solidFill>
+                  <a:srgbClr val="4472C4"/>
+                </a:solidFill>
+                <a:latin typeface="KoPub돋움체 Bold" panose="02020603020101020101" pitchFamily="18" charset="-127"/>
+                <a:ea typeface="KoPub돋움체 Bold" panose="02020603020101020101" pitchFamily="18" charset="-127"/>
+              </a:rPr>
+              <a:t>진료지원간호팀</a:t>
+            </a:r>
+            <a:endParaRPr lang="ko-KR" altLang="en-US" sz="593" b="1" dirty="0">
+              <a:solidFill>
+                <a:srgbClr val="4472C4"/>
+              </a:solidFill>
+              <a:latin typeface="KoPub돋움체 Bold" panose="02020603020101020101" pitchFamily="18" charset="-127"/>
+              <a:ea typeface="KoPub돋움체 Bold" panose="02020603020101020101" pitchFamily="18" charset="-127"/>
+            </a:endParaRPr>
+          </a:p>
+        </p:txBody>
+      </p:sp>
+      <p:sp>
+        <p:nvSpPr>
+          <p:cNvPr id="7" name="TextBox 6">
             <a:extLst>
               <a:ext uri="{FF2B5EF4-FFF2-40B4-BE49-F238E27FC236}">
-                <a16:creationId xmlns:a16="http://schemas.microsoft.com/office/drawing/2014/main" id="{0B585297-2FBA-81AB-4BD5-542D4D14E38B}"/>
+                <a16:creationId xmlns:a16="http://schemas.microsoft.com/office/drawing/2014/main" id="{568CE481-19EF-4F97-AF73-265FDB83283E}"/>
               </a:ext>
             </a:extLst>
           </p:cNvPr>
@@ -4844,8 +4704,8 @@
         </p:nvSpPr>
         <p:spPr>
           <a:xfrm>
-            <a:off x="36673" y="341862"/>
-            <a:ext cx="3259226" cy="1169551"/>
+            <a:off x="1007527" y="671882"/>
+            <a:ext cx="1090755" cy="228231"/>
           </a:xfrm>
           <a:prstGeom prst="rect">
             <a:avLst/>
@@ -4858,219 +4718,191 @@
           </a:bodyPr>
           <a:lstStyle/>
           <a:p>
-            <a:pPr marL="171450" indent="-171450">
-              <a:buFont typeface="Wingdings" panose="05000000000000000000" pitchFamily="2" charset="2"/>
-              <a:buChar char="§"/>
-            </a:pPr>
-            <a:r>
-              <a:rPr lang="ko-KR" altLang="en-US" sz="1000" b="1" dirty="0">
-                <a:latin typeface="KoPub돋움체 Light" panose="02020603020101020101" pitchFamily="18" charset="-127"/>
-                <a:ea typeface="KoPub돋움체 Light" panose="02020603020101020101" pitchFamily="18" charset="-127"/>
-              </a:rPr>
-              <a:t>응급(10): “10은 전화 먼저 + 끝나면 </a:t>
-            </a:r>
-            <a:r>
-              <a:rPr lang="ko-KR" altLang="en-US" sz="1000" b="1" dirty="0" err="1">
-                <a:latin typeface="KoPub돋움체 Light" panose="02020603020101020101" pitchFamily="18" charset="-127"/>
-                <a:ea typeface="KoPub돋움체 Light" panose="02020603020101020101" pitchFamily="18" charset="-127"/>
-              </a:rPr>
-              <a:t>A</a:t>
-            </a:r>
-            <a:r>
-              <a:rPr lang="ko-KR" altLang="en-US" sz="1000" b="1" dirty="0">
-                <a:latin typeface="KoPub돋움체 Light" panose="02020603020101020101" pitchFamily="18" charset="-127"/>
-                <a:ea typeface="KoPub돋움체 Light" panose="02020603020101020101" pitchFamily="18" charset="-127"/>
-              </a:rPr>
-              <a:t>/</a:t>
-            </a:r>
-            <a:r>
-              <a:rPr lang="ko-KR" altLang="en-US" sz="1000" b="1" dirty="0" err="1">
-                <a:latin typeface="KoPub돋움체 Light" panose="02020603020101020101" pitchFamily="18" charset="-127"/>
-                <a:ea typeface="KoPub돋움체 Light" panose="02020603020101020101" pitchFamily="18" charset="-127"/>
-              </a:rPr>
-              <a:t>D</a:t>
-            </a:r>
-            <a:r>
-              <a:rPr lang="ko-KR" altLang="en-US" sz="1000" b="1" dirty="0">
-                <a:latin typeface="KoPub돋움체 Light" panose="02020603020101020101" pitchFamily="18" charset="-127"/>
-                <a:ea typeface="KoPub돋움체 Light" panose="02020603020101020101" pitchFamily="18" charset="-127"/>
-              </a:rPr>
-              <a:t> 1줄”</a:t>
-            </a:r>
-          </a:p>
-          <a:p>
-            <a:pPr marL="171450" indent="-171450">
-              <a:buFont typeface="Wingdings" panose="05000000000000000000" pitchFamily="2" charset="2"/>
-              <a:buChar char="§"/>
-            </a:pPr>
-            <a:endParaRPr lang="ko-KR" altLang="en-US" sz="1000" b="1" dirty="0">
-              <a:latin typeface="KoPub돋움체 Light" panose="02020603020101020101" pitchFamily="18" charset="-127"/>
-              <a:ea typeface="KoPub돋움체 Light" panose="02020603020101020101" pitchFamily="18" charset="-127"/>
+            <a:pPr algn="ctr"/>
+            <a:r>
+              <a:rPr lang="ko-KR" altLang="en-US" sz="890" dirty="0" err="1">
+                <a:solidFill>
+                  <a:srgbClr val="00B0F0"/>
+                </a:solidFill>
+                <a:latin typeface="KoPub돋움체 Bold" panose="00000800000000000000" pitchFamily="2" charset="-127"/>
+                <a:ea typeface="KoPub돋움체 Bold" panose="00000800000000000000" pitchFamily="2" charset="-127"/>
+              </a:rPr>
+              <a:t>우리가치</a:t>
+            </a:r>
+            <a:r>
+              <a:rPr lang="ko-KR" altLang="en-US" sz="890" dirty="0">
+                <a:solidFill>
+                  <a:schemeClr val="accent1">
+                    <a:lumMod val="50000"/>
+                  </a:schemeClr>
+                </a:solidFill>
+                <a:latin typeface="KoPub돋움체 Bold" panose="02020603020101020101" pitchFamily="18" charset="-127"/>
+                <a:ea typeface="KoPub돋움체 Bold" panose="02020603020101020101" pitchFamily="18" charset="-127"/>
+              </a:rPr>
+              <a:t> </a:t>
+            </a:r>
+            <a:r>
+              <a:rPr lang="en-US" altLang="ko-KR" sz="890" dirty="0" err="1">
+                <a:solidFill>
+                  <a:schemeClr val="accent1">
+                    <a:lumMod val="50000"/>
+                  </a:schemeClr>
+                </a:solidFill>
+                <a:latin typeface="Franklin Gothic Heavy" panose="020B0903020102020204" pitchFamily="34" charset="0"/>
+                <a:ea typeface="KoPub돋움체 Bold" panose="02020603020101020101" pitchFamily="18" charset="-127"/>
+              </a:rPr>
+              <a:t>WeValue</a:t>
+            </a:r>
+            <a:endParaRPr lang="en-US" altLang="ko-KR" sz="890" dirty="0">
+              <a:solidFill>
+                <a:schemeClr val="accent1">
+                  <a:lumMod val="50000"/>
+                </a:schemeClr>
+              </a:solidFill>
+              <a:latin typeface="Franklin Gothic Heavy" panose="020B0903020102020204" pitchFamily="34" charset="0"/>
+              <a:ea typeface="KoPub돋움체 Bold" panose="02020603020101020101" pitchFamily="18" charset="-127"/>
             </a:endParaRPr>
           </a:p>
-          <a:p>
-            <a:pPr marL="171450" indent="-171450">
-              <a:buFont typeface="Wingdings" panose="05000000000000000000" pitchFamily="2" charset="2"/>
-              <a:buChar char="§"/>
-            </a:pPr>
-            <a:r>
-              <a:rPr lang="ko-KR" altLang="en-US" sz="1000" b="1" dirty="0" err="1">
-                <a:latin typeface="KoPub돋움체 Light" panose="02020603020101020101" pitchFamily="18" charset="-127"/>
-                <a:ea typeface="KoPub돋움체 Light" panose="02020603020101020101" pitchFamily="18" charset="-127"/>
-              </a:rPr>
-              <a:t>정보성</a:t>
-            </a:r>
-            <a:r>
-              <a:rPr lang="ko-KR" altLang="en-US" sz="1000" b="1" dirty="0">
-                <a:latin typeface="KoPub돋움체 Light" panose="02020603020101020101" pitchFamily="18" charset="-127"/>
-                <a:ea typeface="KoPub돋움체 Light" panose="02020603020101020101" pitchFamily="18" charset="-127"/>
-              </a:rPr>
-              <a:t>(</a:t>
-            </a:r>
-            <a:r>
-              <a:rPr lang="ko-KR" altLang="en-US" sz="1000" b="1" dirty="0" err="1">
-                <a:latin typeface="KoPub돋움체 Light" panose="02020603020101020101" pitchFamily="18" charset="-127"/>
-                <a:ea typeface="KoPub돋움체 Light" panose="02020603020101020101" pitchFamily="18" charset="-127"/>
-              </a:rPr>
-              <a:t>입원·검사·자가약</a:t>
-            </a:r>
-            <a:r>
-              <a:rPr lang="ko-KR" altLang="en-US" sz="1000" b="1" dirty="0">
-                <a:latin typeface="KoPub돋움체 Light" panose="02020603020101020101" pitchFamily="18" charset="-127"/>
-                <a:ea typeface="KoPub돋움체 Light" panose="02020603020101020101" pitchFamily="18" charset="-127"/>
-              </a:rPr>
-              <a:t>): “</a:t>
-            </a:r>
-            <a:r>
-              <a:rPr lang="ko-KR" altLang="en-US" sz="1000" b="1" dirty="0" err="1">
-                <a:latin typeface="KoPub돋움체 Light" panose="02020603020101020101" pitchFamily="18" charset="-127"/>
-                <a:ea typeface="KoPub돋움체 Light" panose="02020603020101020101" pitchFamily="18" charset="-127"/>
-              </a:rPr>
-              <a:t>A</a:t>
-            </a:r>
-            <a:r>
-              <a:rPr lang="ko-KR" altLang="en-US" sz="1000" b="1" dirty="0">
-                <a:latin typeface="KoPub돋움체 Light" panose="02020603020101020101" pitchFamily="18" charset="-127"/>
-                <a:ea typeface="KoPub돋움체 Light" panose="02020603020101020101" pitchFamily="18" charset="-127"/>
-              </a:rPr>
-              <a:t>(보고)/12 → </a:t>
-            </a:r>
-            <a:r>
-              <a:rPr lang="ko-KR" altLang="en-US" sz="1000" b="1" dirty="0" err="1">
-                <a:latin typeface="KoPub돋움체 Light" panose="02020603020101020101" pitchFamily="18" charset="-127"/>
-                <a:ea typeface="KoPub돋움체 Light" panose="02020603020101020101" pitchFamily="18" charset="-127"/>
-              </a:rPr>
-              <a:t>D</a:t>
-            </a:r>
-            <a:r>
-              <a:rPr lang="ko-KR" altLang="en-US" sz="1000" b="1" dirty="0">
-                <a:latin typeface="KoPub돋움체 Light" panose="02020603020101020101" pitchFamily="18" charset="-127"/>
-                <a:ea typeface="KoPub돋움체 Light" panose="02020603020101020101" pitchFamily="18" charset="-127"/>
-              </a:rPr>
-              <a:t>(확인완료)”</a:t>
-            </a:r>
-          </a:p>
-          <a:p>
-            <a:pPr marL="171450" indent="-171450">
-              <a:buFont typeface="Wingdings" panose="05000000000000000000" pitchFamily="2" charset="2"/>
-              <a:buChar char="§"/>
-            </a:pPr>
-            <a:endParaRPr lang="ko-KR" altLang="en-US" sz="1000" b="1" dirty="0">
-              <a:latin typeface="KoPub돋움체 Light" panose="02020603020101020101" pitchFamily="18" charset="-127"/>
-              <a:ea typeface="KoPub돋움체 Light" panose="02020603020101020101" pitchFamily="18" charset="-127"/>
-            </a:endParaRPr>
-          </a:p>
-          <a:p>
-            <a:pPr marL="171450" indent="-171450">
-              <a:buFont typeface="Wingdings" panose="05000000000000000000" pitchFamily="2" charset="2"/>
-              <a:buChar char="§"/>
-            </a:pPr>
-            <a:r>
-              <a:rPr lang="ko-KR" altLang="en-US" sz="1000" b="1" dirty="0">
-                <a:latin typeface="KoPub돋움체 Light" panose="02020603020101020101" pitchFamily="18" charset="-127"/>
-                <a:ea typeface="KoPub돋움체 Light" panose="02020603020101020101" pitchFamily="18" charset="-127"/>
-              </a:rPr>
-              <a:t>도움/교육 요청: “교육요청은 </a:t>
-            </a:r>
-            <a:r>
-              <a:rPr lang="ko-KR" altLang="en-US" sz="1000" b="1" dirty="0" err="1">
-                <a:latin typeface="KoPub돋움체 Light" panose="02020603020101020101" pitchFamily="18" charset="-127"/>
-                <a:ea typeface="KoPub돋움체 Light" panose="02020603020101020101" pitchFamily="18" charset="-127"/>
-              </a:rPr>
-              <a:t>QR에서</a:t>
-            </a:r>
-            <a:r>
-              <a:rPr lang="ko-KR" altLang="en-US" sz="1000" b="1" dirty="0">
-                <a:latin typeface="KoPub돋움체 Light" panose="02020603020101020101" pitchFamily="18" charset="-127"/>
-                <a:ea typeface="KoPub돋움체 Light" panose="02020603020101020101" pitchFamily="18" charset="-127"/>
-              </a:rPr>
-              <a:t> 1번”</a:t>
-            </a:r>
-          </a:p>
-          <a:p>
-            <a:pPr marL="171450" indent="-171450">
-              <a:buFont typeface="Wingdings" panose="05000000000000000000" pitchFamily="2" charset="2"/>
-              <a:buChar char="§"/>
-            </a:pPr>
-            <a:endParaRPr lang="ko-KR" altLang="en-US" sz="1000" b="1" dirty="0">
-              <a:latin typeface="KoPub돋움체 Light" panose="02020603020101020101" pitchFamily="18" charset="-127"/>
-              <a:ea typeface="KoPub돋움체 Light" panose="02020603020101020101" pitchFamily="18" charset="-127"/>
-            </a:endParaRPr>
-          </a:p>
-          <a:p>
-            <a:pPr marL="171450" indent="-171450">
-              <a:buFont typeface="Wingdings" panose="05000000000000000000" pitchFamily="2" charset="2"/>
-              <a:buChar char="§"/>
-            </a:pPr>
-            <a:r>
-              <a:rPr lang="ko-KR" altLang="en-US" sz="1000" b="1" dirty="0" err="1">
-                <a:latin typeface="KoPub돋움체 Light" panose="02020603020101020101" pitchFamily="18" charset="-127"/>
-                <a:ea typeface="KoPub돋움체 Light" panose="02020603020101020101" pitchFamily="18" charset="-127"/>
-              </a:rPr>
-              <a:t>익명함</a:t>
-            </a:r>
-            <a:r>
-              <a:rPr lang="ko-KR" altLang="en-US" sz="1000" b="1" dirty="0">
-                <a:latin typeface="KoPub돋움체 Light" panose="02020603020101020101" pitchFamily="18" charset="-127"/>
-                <a:ea typeface="KoPub돋움체 Light" panose="02020603020101020101" pitchFamily="18" charset="-127"/>
-              </a:rPr>
-              <a:t>/칭찬: “</a:t>
-            </a:r>
-            <a:r>
-              <a:rPr lang="ko-KR" altLang="en-US" sz="1000" b="1" dirty="0" err="1">
-                <a:latin typeface="KoPub돋움체 Light" panose="02020603020101020101" pitchFamily="18" charset="-127"/>
-                <a:ea typeface="KoPub돋움체 Light" panose="02020603020101020101" pitchFamily="18" charset="-127"/>
-              </a:rPr>
-              <a:t>불편·제안·칭찬은</a:t>
-            </a:r>
-            <a:r>
-              <a:rPr lang="ko-KR" altLang="en-US" sz="1000" b="1" dirty="0">
-                <a:latin typeface="KoPub돋움체 Light" panose="02020603020101020101" pitchFamily="18" charset="-127"/>
-                <a:ea typeface="KoPub돋움체 Light" panose="02020603020101020101" pitchFamily="18" charset="-127"/>
-              </a:rPr>
-              <a:t> 앞면 </a:t>
-            </a:r>
-            <a:r>
-              <a:rPr lang="en-US" altLang="ko-KR" sz="1000" b="1" dirty="0">
-                <a:latin typeface="KoPub돋움체 Light" panose="02020603020101020101" pitchFamily="18" charset="-127"/>
-                <a:ea typeface="KoPub돋움체 Light" panose="02020603020101020101" pitchFamily="18" charset="-127"/>
-              </a:rPr>
-              <a:t>QR</a:t>
-            </a:r>
-            <a:r>
-              <a:rPr lang="ko-KR" altLang="en-US" sz="1000" b="1" dirty="0">
-                <a:latin typeface="KoPub돋움체 Light" panose="02020603020101020101" pitchFamily="18" charset="-127"/>
-                <a:ea typeface="KoPub돋움체 Light" panose="02020603020101020101" pitchFamily="18" charset="-127"/>
-              </a:rPr>
-              <a:t>(비난 금지)”</a:t>
-            </a:r>
-          </a:p>
-        </p:txBody>
-      </p:sp>
+        </p:txBody>
+      </p:sp>
+      <p:sp>
+        <p:nvSpPr>
+          <p:cNvPr id="8" name="TextBox 7">
+            <a:extLst>
+              <a:ext uri="{FF2B5EF4-FFF2-40B4-BE49-F238E27FC236}">
+                <a16:creationId xmlns:a16="http://schemas.microsoft.com/office/drawing/2014/main" id="{DAA9A54C-F797-44FB-AB3D-27BD433EFBED}"/>
+              </a:ext>
+            </a:extLst>
+          </p:cNvPr>
+          <p:cNvSpPr txBox="1"/>
+          <p:nvPr/>
+        </p:nvSpPr>
+        <p:spPr>
+          <a:xfrm>
+            <a:off x="914015" y="817009"/>
+            <a:ext cx="1277778" cy="167369"/>
+          </a:xfrm>
+          <a:prstGeom prst="rect">
+            <a:avLst/>
+          </a:prstGeom>
+          <a:noFill/>
+        </p:spPr>
+        <p:txBody>
+          <a:bodyPr wrap="none">
+            <a:spAutoFit/>
+          </a:bodyPr>
+          <a:lstStyle/>
+          <a:p>
+            <a:pPr algn="ctr"/>
+            <a:r>
+              <a:rPr lang="en-US" altLang="ko-KR" sz="494" b="1" dirty="0">
+                <a:latin typeface="KoPub돋움체 Bold" panose="00000800000000000000" pitchFamily="2" charset="-127"/>
+                <a:ea typeface="KoPub돋움체 Bold" panose="00000800000000000000" pitchFamily="2" charset="-127"/>
+              </a:rPr>
+              <a:t>[</a:t>
+            </a:r>
+            <a:r>
+              <a:rPr lang="ko-KR" altLang="en-US" sz="494" b="1" dirty="0">
+                <a:latin typeface="KoPub돋움체 Bold" panose="00000800000000000000" pitchFamily="2" charset="-127"/>
+                <a:ea typeface="KoPub돋움체 Bold" panose="00000800000000000000" pitchFamily="2" charset="-127"/>
+              </a:rPr>
+              <a:t>우리가 가치를 만드는 공간</a:t>
+            </a:r>
+            <a:r>
+              <a:rPr lang="en-US" altLang="ko-KR" sz="494" b="1" dirty="0">
+                <a:latin typeface="KoPub돋움체 Bold" panose="00000800000000000000" pitchFamily="2" charset="-127"/>
+                <a:ea typeface="KoPub돋움체 Bold" panose="00000800000000000000" pitchFamily="2" charset="-127"/>
+              </a:rPr>
+              <a:t>, </a:t>
+            </a:r>
+            <a:r>
+              <a:rPr lang="ko-KR" altLang="en-US" sz="494" b="1" dirty="0" err="1">
+                <a:latin typeface="KoPub돋움체 Bold" panose="00000800000000000000" pitchFamily="2" charset="-127"/>
+                <a:ea typeface="KoPub돋움체 Bold" panose="00000800000000000000" pitchFamily="2" charset="-127"/>
+              </a:rPr>
+              <a:t>우리가치</a:t>
+            </a:r>
+            <a:r>
+              <a:rPr lang="ko-KR" altLang="en-US" sz="494" b="1" dirty="0">
+                <a:latin typeface="KoPub돋움체 Bold" panose="00000800000000000000" pitchFamily="2" charset="-127"/>
+                <a:ea typeface="KoPub돋움체 Bold" panose="00000800000000000000" pitchFamily="2" charset="-127"/>
+              </a:rPr>
+              <a:t> 허브</a:t>
+            </a:r>
+            <a:r>
+              <a:rPr lang="en-US" altLang="ko-KR" sz="494" b="1" dirty="0">
+                <a:latin typeface="KoPub돋움체 Bold" panose="00000800000000000000" pitchFamily="2" charset="-127"/>
+                <a:ea typeface="KoPub돋움체 Bold" panose="00000800000000000000" pitchFamily="2" charset="-127"/>
+              </a:rPr>
+              <a:t>]</a:t>
+            </a:r>
+          </a:p>
+        </p:txBody>
+      </p:sp>
+      <p:pic>
+        <p:nvPicPr>
+          <p:cNvPr id="9" name="그림 8">
+            <a:extLst>
+              <a:ext uri="{FF2B5EF4-FFF2-40B4-BE49-F238E27FC236}">
+                <a16:creationId xmlns:a16="http://schemas.microsoft.com/office/drawing/2014/main" id="{F3A7A373-FECD-4243-98D0-B228302974CA}"/>
+              </a:ext>
+            </a:extLst>
+          </p:cNvPr>
+          <p:cNvPicPr>
+            <a:picLocks noChangeAspect="1"/>
+          </p:cNvPicPr>
+          <p:nvPr/>
+        </p:nvPicPr>
+        <p:blipFill>
+          <a:blip r:embed="rId3"/>
+          <a:stretch>
+            <a:fillRect/>
+          </a:stretch>
+        </p:blipFill>
+        <p:spPr>
+          <a:xfrm>
+            <a:off x="896601" y="716227"/>
+            <a:ext cx="145755" cy="127277"/>
+          </a:xfrm>
+          <a:prstGeom prst="rect">
+            <a:avLst/>
+          </a:prstGeom>
+        </p:spPr>
+      </p:pic>
+      <p:pic>
+        <p:nvPicPr>
+          <p:cNvPr id="11" name="그림 10">
+            <a:extLst>
+              <a:ext uri="{FF2B5EF4-FFF2-40B4-BE49-F238E27FC236}">
+                <a16:creationId xmlns:a16="http://schemas.microsoft.com/office/drawing/2014/main" id="{25D16522-22F0-487F-BE90-3035E8C29235}"/>
+              </a:ext>
+            </a:extLst>
+          </p:cNvPr>
+          <p:cNvPicPr>
+            <a:picLocks noChangeAspect="1"/>
+          </p:cNvPicPr>
+          <p:nvPr/>
+        </p:nvPicPr>
+        <p:blipFill>
+          <a:blip r:embed="rId3"/>
+          <a:stretch>
+            <a:fillRect/>
+          </a:stretch>
+        </p:blipFill>
+        <p:spPr>
+          <a:xfrm rot="10800000">
+            <a:off x="2030965" y="721574"/>
+            <a:ext cx="145753" cy="127277"/>
+          </a:xfrm>
+          <a:prstGeom prst="rect">
+            <a:avLst/>
+          </a:prstGeom>
+        </p:spPr>
+      </p:pic>
     </p:spTree>
     <p:extLst>
       <p:ext uri="{BB962C8B-B14F-4D97-AF65-F5344CB8AC3E}">
-        <p14:creationId xmlns:p14="http://schemas.microsoft.com/office/powerpoint/2010/main" val="2122011044"/>
+        <p14:creationId xmlns:p14="http://schemas.microsoft.com/office/powerpoint/2010/main" val="2476893507"/>
       </p:ext>
     </p:extLst>
   </p:cSld>
@@ -5088,7 +4920,7 @@
         <p:cNvPr id="1" name="">
           <a:extLst>
             <a:ext uri="{FF2B5EF4-FFF2-40B4-BE49-F238E27FC236}">
-              <a16:creationId xmlns:a16="http://schemas.microsoft.com/office/drawing/2014/main" id="{C31636C1-2613-7B52-79FE-583FA04A3E2A}"/>
+              <a16:creationId xmlns:a16="http://schemas.microsoft.com/office/drawing/2014/main" id="{4B91BF69-B73E-E52D-A273-34695C83C39D}"/>
             </a:ext>
           </a:extLst>
         </p:cNvPr>
@@ -5103,12 +4935,47 @@
           <a:chExt cx="0" cy="0"/>
         </a:xfrm>
       </p:grpSpPr>
-      <p:sp>
-        <p:nvSpPr>
-          <p:cNvPr id="3" name="TextBox 2">
+      <p:pic>
+        <p:nvPicPr>
+          <p:cNvPr id="4" name="Picture 1">
             <a:extLst>
               <a:ext uri="{FF2B5EF4-FFF2-40B4-BE49-F238E27FC236}">
-                <a16:creationId xmlns:a16="http://schemas.microsoft.com/office/drawing/2014/main" id="{C528E5A7-5C6C-CE45-1ACA-5BA990581721}"/>
+                <a16:creationId xmlns:a16="http://schemas.microsoft.com/office/drawing/2014/main" id="{480AF66F-CB5C-451A-847A-EB60BA58025A}"/>
+              </a:ext>
+            </a:extLst>
+          </p:cNvPr>
+          <p:cNvPicPr>
+            <a:picLocks noChangeAspect="1"/>
+          </p:cNvPicPr>
+          <p:nvPr/>
+        </p:nvPicPr>
+        <p:blipFill>
+          <a:blip r:embed="rId2"/>
+          <a:stretch>
+            <a:fillRect/>
+          </a:stretch>
+        </p:blipFill>
+        <p:spPr>
+          <a:xfrm>
+            <a:off x="834546" y="1018696"/>
+            <a:ext cx="355023" cy="200754"/>
+          </a:xfrm>
+          <a:prstGeom prst="rect">
+            <a:avLst/>
+          </a:prstGeom>
+          <a:noFill/>
+          <a:ln>
+            <a:noFill/>
+          </a:ln>
+          <a:effectLst/>
+        </p:spPr>
+      </p:pic>
+      <p:sp>
+        <p:nvSpPr>
+          <p:cNvPr id="5" name="TextBox 4">
+            <a:extLst>
+              <a:ext uri="{FF2B5EF4-FFF2-40B4-BE49-F238E27FC236}">
+                <a16:creationId xmlns:a16="http://schemas.microsoft.com/office/drawing/2014/main" id="{5D20D6DC-7FD8-414D-8D41-7397E6AB51D5}"/>
               </a:ext>
             </a:extLst>
           </p:cNvPr>
@@ -5117,8 +4984,8 @@
         </p:nvSpPr>
         <p:spPr>
           <a:xfrm>
-            <a:off x="-724944" y="54246"/>
-            <a:ext cx="2717302" cy="169277"/>
+            <a:off x="1138753" y="1035390"/>
+            <a:ext cx="1233714" cy="167369"/>
           </a:xfrm>
           <a:prstGeom prst="rect">
             <a:avLst/>
@@ -5126,42 +4993,58 @@
           <a:noFill/>
         </p:spPr>
         <p:txBody>
-          <a:bodyPr wrap="square">
+          <a:bodyPr wrap="square" rtlCol="0">
             <a:spAutoFit/>
           </a:bodyPr>
           <a:lstStyle/>
           <a:p>
             <a:pPr algn="ctr"/>
             <a:r>
-              <a:rPr lang="ko-KR" altLang="en-US" sz="500" spc="-11" dirty="0">
-                <a:latin typeface="KoPub돋움체 Light" panose="02020603020101020101" pitchFamily="18" charset="-127"/>
-                <a:ea typeface="KoPub돋움체 Light" panose="02020603020101020101" pitchFamily="18" charset="-127"/>
+              <a:rPr lang="ko-KR" altLang="en-US" sz="494" b="1" dirty="0">
+                <a:solidFill>
+                  <a:srgbClr val="4472C4"/>
+                </a:solidFill>
+                <a:latin typeface="KoPub돋움체 Bold" panose="02020603020101020101" pitchFamily="18" charset="-127"/>
+                <a:ea typeface="KoPub돋움체 Bold" panose="02020603020101020101" pitchFamily="18" charset="-127"/>
               </a:rPr>
               <a:t>순천향대학교 천안병원 </a:t>
             </a:r>
             <a:r>
-              <a:rPr lang="en-US" altLang="ko-KR" sz="500" spc="-11" dirty="0">
-                <a:latin typeface="KoPub돋움체 Light" panose="02020603020101020101" pitchFamily="18" charset="-127"/>
-                <a:ea typeface="KoPub돋움체 Light" panose="02020603020101020101" pitchFamily="18" charset="-127"/>
+              <a:rPr lang="en-US" altLang="ko-KR" sz="494" b="1" dirty="0">
+                <a:solidFill>
+                  <a:srgbClr val="4472C4"/>
+                </a:solidFill>
+                <a:latin typeface="KoPub돋움체 Bold" panose="02020603020101020101" pitchFamily="18" charset="-127"/>
+                <a:ea typeface="KoPub돋움체 Bold" panose="02020603020101020101" pitchFamily="18" charset="-127"/>
               </a:rPr>
               <a:t>| </a:t>
             </a:r>
             <a:r>
-              <a:rPr lang="ko-KR" altLang="en-US" sz="500" spc="-11" dirty="0">
-                <a:latin typeface="KoPub돋움체 Light" panose="02020603020101020101" pitchFamily="18" charset="-127"/>
-                <a:ea typeface="KoPub돋움체 Light" panose="02020603020101020101" pitchFamily="18" charset="-127"/>
-              </a:rPr>
-              <a:t>진료지원간호팀 </a:t>
-            </a:r>
-          </a:p>
-        </p:txBody>
-      </p:sp>
-      <p:sp>
-        <p:nvSpPr>
-          <p:cNvPr id="41" name="TextBox 40">
+              <a:rPr lang="ko-KR" altLang="en-US" sz="494" b="1" dirty="0">
+                <a:solidFill>
+                  <a:srgbClr val="4472C4"/>
+                </a:solidFill>
+                <a:latin typeface="KoPub돋움체 Bold" panose="02020603020101020101" pitchFamily="18" charset="-127"/>
+                <a:ea typeface="KoPub돋움체 Bold" panose="02020603020101020101" pitchFamily="18" charset="-127"/>
+              </a:rPr>
+              <a:t>진료지원간호팀</a:t>
+            </a:r>
+            <a:endParaRPr lang="ko-KR" altLang="en-US" sz="593" b="1" dirty="0">
+              <a:solidFill>
+                <a:srgbClr val="4472C4"/>
+              </a:solidFill>
+              <a:latin typeface="KoPub돋움체 Bold" panose="02020603020101020101" pitchFamily="18" charset="-127"/>
+              <a:ea typeface="KoPub돋움체 Bold" panose="02020603020101020101" pitchFamily="18" charset="-127"/>
+            </a:endParaRPr>
+          </a:p>
+        </p:txBody>
+      </p:sp>
+      <p:sp>
+        <p:nvSpPr>
+          <p:cNvPr id="7" name="TextBox 6">
             <a:extLst>
               <a:ext uri="{FF2B5EF4-FFF2-40B4-BE49-F238E27FC236}">
-                <a16:creationId xmlns:a16="http://schemas.microsoft.com/office/drawing/2014/main" id="{86573C04-F17A-19A1-8042-788CD0F78FC6}"/>
+                <a16:creationId xmlns:a16="http://schemas.microsoft.com/office/drawing/2014/main" id="{568CE481-19EF-4F97-AF73-265FDB83283E}"/>
               </a:ext>
             </a:extLst>
           </p:cNvPr>
@@ -5170,8 +5053,8 @@
         </p:nvSpPr>
         <p:spPr>
           <a:xfrm>
-            <a:off x="36673" y="341862"/>
-            <a:ext cx="3259226" cy="1169551"/>
+            <a:off x="1007527" y="671882"/>
+            <a:ext cx="1090755" cy="228231"/>
           </a:xfrm>
           <a:prstGeom prst="rect">
             <a:avLst/>
@@ -5184,219 +5067,191 @@
           </a:bodyPr>
           <a:lstStyle/>
           <a:p>
-            <a:pPr marL="171450" indent="-171450">
-              <a:buFont typeface="Wingdings" panose="05000000000000000000" pitchFamily="2" charset="2"/>
-              <a:buChar char="§"/>
-            </a:pPr>
-            <a:r>
-              <a:rPr lang="ko-KR" altLang="en-US" sz="1000" b="1" dirty="0">
-                <a:latin typeface="KoPub돋움체 Light" panose="02020603020101020101" pitchFamily="18" charset="-127"/>
-                <a:ea typeface="KoPub돋움체 Light" panose="02020603020101020101" pitchFamily="18" charset="-127"/>
-              </a:rPr>
-              <a:t>응급(10): “10은 전화 먼저 + 끝나면 </a:t>
-            </a:r>
-            <a:r>
-              <a:rPr lang="ko-KR" altLang="en-US" sz="1000" b="1" dirty="0" err="1">
-                <a:latin typeface="KoPub돋움체 Light" panose="02020603020101020101" pitchFamily="18" charset="-127"/>
-                <a:ea typeface="KoPub돋움체 Light" panose="02020603020101020101" pitchFamily="18" charset="-127"/>
-              </a:rPr>
-              <a:t>A</a:t>
-            </a:r>
-            <a:r>
-              <a:rPr lang="ko-KR" altLang="en-US" sz="1000" b="1" dirty="0">
-                <a:latin typeface="KoPub돋움체 Light" panose="02020603020101020101" pitchFamily="18" charset="-127"/>
-                <a:ea typeface="KoPub돋움체 Light" panose="02020603020101020101" pitchFamily="18" charset="-127"/>
-              </a:rPr>
-              <a:t>/</a:t>
-            </a:r>
-            <a:r>
-              <a:rPr lang="ko-KR" altLang="en-US" sz="1000" b="1" dirty="0" err="1">
-                <a:latin typeface="KoPub돋움체 Light" panose="02020603020101020101" pitchFamily="18" charset="-127"/>
-                <a:ea typeface="KoPub돋움체 Light" panose="02020603020101020101" pitchFamily="18" charset="-127"/>
-              </a:rPr>
-              <a:t>D</a:t>
-            </a:r>
-            <a:r>
-              <a:rPr lang="ko-KR" altLang="en-US" sz="1000" b="1" dirty="0">
-                <a:latin typeface="KoPub돋움체 Light" panose="02020603020101020101" pitchFamily="18" charset="-127"/>
-                <a:ea typeface="KoPub돋움체 Light" panose="02020603020101020101" pitchFamily="18" charset="-127"/>
-              </a:rPr>
-              <a:t> 1줄”</a:t>
-            </a:r>
-          </a:p>
-          <a:p>
-            <a:pPr marL="171450" indent="-171450">
-              <a:buFont typeface="Wingdings" panose="05000000000000000000" pitchFamily="2" charset="2"/>
-              <a:buChar char="§"/>
-            </a:pPr>
-            <a:endParaRPr lang="ko-KR" altLang="en-US" sz="1000" b="1" dirty="0">
-              <a:latin typeface="KoPub돋움체 Light" panose="02020603020101020101" pitchFamily="18" charset="-127"/>
-              <a:ea typeface="KoPub돋움체 Light" panose="02020603020101020101" pitchFamily="18" charset="-127"/>
+            <a:pPr algn="ctr"/>
+            <a:r>
+              <a:rPr lang="ko-KR" altLang="en-US" sz="890" dirty="0" err="1">
+                <a:solidFill>
+                  <a:srgbClr val="00B0F0"/>
+                </a:solidFill>
+                <a:latin typeface="KoPub돋움체 Bold" panose="00000800000000000000" pitchFamily="2" charset="-127"/>
+                <a:ea typeface="KoPub돋움체 Bold" panose="00000800000000000000" pitchFamily="2" charset="-127"/>
+              </a:rPr>
+              <a:t>우리가치</a:t>
+            </a:r>
+            <a:r>
+              <a:rPr lang="ko-KR" altLang="en-US" sz="890" dirty="0">
+                <a:solidFill>
+                  <a:schemeClr val="accent1">
+                    <a:lumMod val="50000"/>
+                  </a:schemeClr>
+                </a:solidFill>
+                <a:latin typeface="KoPub돋움체 Bold" panose="02020603020101020101" pitchFamily="18" charset="-127"/>
+                <a:ea typeface="KoPub돋움체 Bold" panose="02020603020101020101" pitchFamily="18" charset="-127"/>
+              </a:rPr>
+              <a:t> </a:t>
+            </a:r>
+            <a:r>
+              <a:rPr lang="en-US" altLang="ko-KR" sz="890" dirty="0" err="1">
+                <a:solidFill>
+                  <a:schemeClr val="accent1">
+                    <a:lumMod val="50000"/>
+                  </a:schemeClr>
+                </a:solidFill>
+                <a:latin typeface="Franklin Gothic Heavy" panose="020B0903020102020204" pitchFamily="34" charset="0"/>
+                <a:ea typeface="KoPub돋움체 Bold" panose="02020603020101020101" pitchFamily="18" charset="-127"/>
+              </a:rPr>
+              <a:t>WeValue</a:t>
+            </a:r>
+            <a:endParaRPr lang="en-US" altLang="ko-KR" sz="890" dirty="0">
+              <a:solidFill>
+                <a:schemeClr val="accent1">
+                  <a:lumMod val="50000"/>
+                </a:schemeClr>
+              </a:solidFill>
+              <a:latin typeface="Franklin Gothic Heavy" panose="020B0903020102020204" pitchFamily="34" charset="0"/>
+              <a:ea typeface="KoPub돋움체 Bold" panose="02020603020101020101" pitchFamily="18" charset="-127"/>
             </a:endParaRPr>
           </a:p>
-          <a:p>
-            <a:pPr marL="171450" indent="-171450">
-              <a:buFont typeface="Wingdings" panose="05000000000000000000" pitchFamily="2" charset="2"/>
-              <a:buChar char="§"/>
-            </a:pPr>
-            <a:r>
-              <a:rPr lang="ko-KR" altLang="en-US" sz="1000" b="1" dirty="0" err="1">
-                <a:latin typeface="KoPub돋움체 Light" panose="02020603020101020101" pitchFamily="18" charset="-127"/>
-                <a:ea typeface="KoPub돋움체 Light" panose="02020603020101020101" pitchFamily="18" charset="-127"/>
-              </a:rPr>
-              <a:t>정보성</a:t>
-            </a:r>
-            <a:r>
-              <a:rPr lang="ko-KR" altLang="en-US" sz="1000" b="1" dirty="0">
-                <a:latin typeface="KoPub돋움체 Light" panose="02020603020101020101" pitchFamily="18" charset="-127"/>
-                <a:ea typeface="KoPub돋움체 Light" panose="02020603020101020101" pitchFamily="18" charset="-127"/>
-              </a:rPr>
-              <a:t>(</a:t>
-            </a:r>
-            <a:r>
-              <a:rPr lang="ko-KR" altLang="en-US" sz="1000" b="1" dirty="0" err="1">
-                <a:latin typeface="KoPub돋움체 Light" panose="02020603020101020101" pitchFamily="18" charset="-127"/>
-                <a:ea typeface="KoPub돋움체 Light" panose="02020603020101020101" pitchFamily="18" charset="-127"/>
-              </a:rPr>
-              <a:t>입원·검사·자가약</a:t>
-            </a:r>
-            <a:r>
-              <a:rPr lang="ko-KR" altLang="en-US" sz="1000" b="1" dirty="0">
-                <a:latin typeface="KoPub돋움체 Light" panose="02020603020101020101" pitchFamily="18" charset="-127"/>
-                <a:ea typeface="KoPub돋움체 Light" panose="02020603020101020101" pitchFamily="18" charset="-127"/>
-              </a:rPr>
-              <a:t>): “</a:t>
-            </a:r>
-            <a:r>
-              <a:rPr lang="ko-KR" altLang="en-US" sz="1000" b="1" dirty="0" err="1">
-                <a:latin typeface="KoPub돋움체 Light" panose="02020603020101020101" pitchFamily="18" charset="-127"/>
-                <a:ea typeface="KoPub돋움체 Light" panose="02020603020101020101" pitchFamily="18" charset="-127"/>
-              </a:rPr>
-              <a:t>A</a:t>
-            </a:r>
-            <a:r>
-              <a:rPr lang="ko-KR" altLang="en-US" sz="1000" b="1" dirty="0">
-                <a:latin typeface="KoPub돋움체 Light" panose="02020603020101020101" pitchFamily="18" charset="-127"/>
-                <a:ea typeface="KoPub돋움체 Light" panose="02020603020101020101" pitchFamily="18" charset="-127"/>
-              </a:rPr>
-              <a:t>(보고)/12 → </a:t>
-            </a:r>
-            <a:r>
-              <a:rPr lang="ko-KR" altLang="en-US" sz="1000" b="1" dirty="0" err="1">
-                <a:latin typeface="KoPub돋움체 Light" panose="02020603020101020101" pitchFamily="18" charset="-127"/>
-                <a:ea typeface="KoPub돋움체 Light" panose="02020603020101020101" pitchFamily="18" charset="-127"/>
-              </a:rPr>
-              <a:t>D</a:t>
-            </a:r>
-            <a:r>
-              <a:rPr lang="ko-KR" altLang="en-US" sz="1000" b="1" dirty="0">
-                <a:latin typeface="KoPub돋움체 Light" panose="02020603020101020101" pitchFamily="18" charset="-127"/>
-                <a:ea typeface="KoPub돋움체 Light" panose="02020603020101020101" pitchFamily="18" charset="-127"/>
-              </a:rPr>
-              <a:t>(확인완료)”</a:t>
-            </a:r>
-          </a:p>
-          <a:p>
-            <a:pPr marL="171450" indent="-171450">
-              <a:buFont typeface="Wingdings" panose="05000000000000000000" pitchFamily="2" charset="2"/>
-              <a:buChar char="§"/>
-            </a:pPr>
-            <a:endParaRPr lang="ko-KR" altLang="en-US" sz="1000" b="1" dirty="0">
-              <a:latin typeface="KoPub돋움체 Light" panose="02020603020101020101" pitchFamily="18" charset="-127"/>
-              <a:ea typeface="KoPub돋움체 Light" panose="02020603020101020101" pitchFamily="18" charset="-127"/>
-            </a:endParaRPr>
-          </a:p>
-          <a:p>
-            <a:pPr marL="171450" indent="-171450">
-              <a:buFont typeface="Wingdings" panose="05000000000000000000" pitchFamily="2" charset="2"/>
-              <a:buChar char="§"/>
-            </a:pPr>
-            <a:r>
-              <a:rPr lang="ko-KR" altLang="en-US" sz="1000" b="1" dirty="0">
-                <a:latin typeface="KoPub돋움체 Light" panose="02020603020101020101" pitchFamily="18" charset="-127"/>
-                <a:ea typeface="KoPub돋움체 Light" panose="02020603020101020101" pitchFamily="18" charset="-127"/>
-              </a:rPr>
-              <a:t>도움/교육 요청: “교육요청은 </a:t>
-            </a:r>
-            <a:r>
-              <a:rPr lang="ko-KR" altLang="en-US" sz="1000" b="1" dirty="0" err="1">
-                <a:latin typeface="KoPub돋움체 Light" panose="02020603020101020101" pitchFamily="18" charset="-127"/>
-                <a:ea typeface="KoPub돋움체 Light" panose="02020603020101020101" pitchFamily="18" charset="-127"/>
-              </a:rPr>
-              <a:t>QR에서</a:t>
-            </a:r>
-            <a:r>
-              <a:rPr lang="ko-KR" altLang="en-US" sz="1000" b="1" dirty="0">
-                <a:latin typeface="KoPub돋움체 Light" panose="02020603020101020101" pitchFamily="18" charset="-127"/>
-                <a:ea typeface="KoPub돋움체 Light" panose="02020603020101020101" pitchFamily="18" charset="-127"/>
-              </a:rPr>
-              <a:t> 1번”</a:t>
-            </a:r>
-          </a:p>
-          <a:p>
-            <a:pPr marL="171450" indent="-171450">
-              <a:buFont typeface="Wingdings" panose="05000000000000000000" pitchFamily="2" charset="2"/>
-              <a:buChar char="§"/>
-            </a:pPr>
-            <a:endParaRPr lang="ko-KR" altLang="en-US" sz="1000" b="1" dirty="0">
-              <a:latin typeface="KoPub돋움체 Light" panose="02020603020101020101" pitchFamily="18" charset="-127"/>
-              <a:ea typeface="KoPub돋움체 Light" panose="02020603020101020101" pitchFamily="18" charset="-127"/>
-            </a:endParaRPr>
-          </a:p>
-          <a:p>
-            <a:pPr marL="171450" indent="-171450">
-              <a:buFont typeface="Wingdings" panose="05000000000000000000" pitchFamily="2" charset="2"/>
-              <a:buChar char="§"/>
-            </a:pPr>
-            <a:r>
-              <a:rPr lang="ko-KR" altLang="en-US" sz="1000" b="1" dirty="0" err="1">
-                <a:latin typeface="KoPub돋움체 Light" panose="02020603020101020101" pitchFamily="18" charset="-127"/>
-                <a:ea typeface="KoPub돋움체 Light" panose="02020603020101020101" pitchFamily="18" charset="-127"/>
-              </a:rPr>
-              <a:t>익명함</a:t>
-            </a:r>
-            <a:r>
-              <a:rPr lang="ko-KR" altLang="en-US" sz="1000" b="1" dirty="0">
-                <a:latin typeface="KoPub돋움체 Light" panose="02020603020101020101" pitchFamily="18" charset="-127"/>
-                <a:ea typeface="KoPub돋움체 Light" panose="02020603020101020101" pitchFamily="18" charset="-127"/>
-              </a:rPr>
-              <a:t>/칭찬: “</a:t>
-            </a:r>
-            <a:r>
-              <a:rPr lang="ko-KR" altLang="en-US" sz="1000" b="1" dirty="0" err="1">
-                <a:latin typeface="KoPub돋움체 Light" panose="02020603020101020101" pitchFamily="18" charset="-127"/>
-                <a:ea typeface="KoPub돋움체 Light" panose="02020603020101020101" pitchFamily="18" charset="-127"/>
-              </a:rPr>
-              <a:t>불편·제안·칭찬은</a:t>
-            </a:r>
-            <a:r>
-              <a:rPr lang="ko-KR" altLang="en-US" sz="1000" b="1" dirty="0">
-                <a:latin typeface="KoPub돋움체 Light" panose="02020603020101020101" pitchFamily="18" charset="-127"/>
-                <a:ea typeface="KoPub돋움체 Light" panose="02020603020101020101" pitchFamily="18" charset="-127"/>
-              </a:rPr>
-              <a:t> 앞면 </a:t>
-            </a:r>
-            <a:r>
-              <a:rPr lang="en-US" altLang="ko-KR" sz="1000" b="1" dirty="0">
-                <a:latin typeface="KoPub돋움체 Light" panose="02020603020101020101" pitchFamily="18" charset="-127"/>
-                <a:ea typeface="KoPub돋움체 Light" panose="02020603020101020101" pitchFamily="18" charset="-127"/>
-              </a:rPr>
-              <a:t>QR</a:t>
-            </a:r>
-            <a:r>
-              <a:rPr lang="ko-KR" altLang="en-US" sz="1000" b="1" dirty="0">
-                <a:latin typeface="KoPub돋움체 Light" panose="02020603020101020101" pitchFamily="18" charset="-127"/>
-                <a:ea typeface="KoPub돋움체 Light" panose="02020603020101020101" pitchFamily="18" charset="-127"/>
-              </a:rPr>
-              <a:t>(비난 금지)”</a:t>
-            </a:r>
-          </a:p>
-        </p:txBody>
-      </p:sp>
+        </p:txBody>
+      </p:sp>
+      <p:sp>
+        <p:nvSpPr>
+          <p:cNvPr id="8" name="TextBox 7">
+            <a:extLst>
+              <a:ext uri="{FF2B5EF4-FFF2-40B4-BE49-F238E27FC236}">
+                <a16:creationId xmlns:a16="http://schemas.microsoft.com/office/drawing/2014/main" id="{DAA9A54C-F797-44FB-AB3D-27BD433EFBED}"/>
+              </a:ext>
+            </a:extLst>
+          </p:cNvPr>
+          <p:cNvSpPr txBox="1"/>
+          <p:nvPr/>
+        </p:nvSpPr>
+        <p:spPr>
+          <a:xfrm>
+            <a:off x="914015" y="817009"/>
+            <a:ext cx="1277778" cy="167369"/>
+          </a:xfrm>
+          <a:prstGeom prst="rect">
+            <a:avLst/>
+          </a:prstGeom>
+          <a:noFill/>
+        </p:spPr>
+        <p:txBody>
+          <a:bodyPr wrap="none">
+            <a:spAutoFit/>
+          </a:bodyPr>
+          <a:lstStyle/>
+          <a:p>
+            <a:pPr algn="ctr"/>
+            <a:r>
+              <a:rPr lang="en-US" altLang="ko-KR" sz="494" b="1" dirty="0">
+                <a:latin typeface="KoPub돋움체 Bold" panose="00000800000000000000" pitchFamily="2" charset="-127"/>
+                <a:ea typeface="KoPub돋움체 Bold" panose="00000800000000000000" pitchFamily="2" charset="-127"/>
+              </a:rPr>
+              <a:t>[</a:t>
+            </a:r>
+            <a:r>
+              <a:rPr lang="ko-KR" altLang="en-US" sz="494" b="1" dirty="0">
+                <a:latin typeface="KoPub돋움체 Bold" panose="00000800000000000000" pitchFamily="2" charset="-127"/>
+                <a:ea typeface="KoPub돋움체 Bold" panose="00000800000000000000" pitchFamily="2" charset="-127"/>
+              </a:rPr>
+              <a:t>우리가 가치를 만드는 공간</a:t>
+            </a:r>
+            <a:r>
+              <a:rPr lang="en-US" altLang="ko-KR" sz="494" b="1" dirty="0">
+                <a:latin typeface="KoPub돋움체 Bold" panose="00000800000000000000" pitchFamily="2" charset="-127"/>
+                <a:ea typeface="KoPub돋움체 Bold" panose="00000800000000000000" pitchFamily="2" charset="-127"/>
+              </a:rPr>
+              <a:t>, </a:t>
+            </a:r>
+            <a:r>
+              <a:rPr lang="ko-KR" altLang="en-US" sz="494" b="1" dirty="0" err="1">
+                <a:latin typeface="KoPub돋움체 Bold" panose="00000800000000000000" pitchFamily="2" charset="-127"/>
+                <a:ea typeface="KoPub돋움체 Bold" panose="00000800000000000000" pitchFamily="2" charset="-127"/>
+              </a:rPr>
+              <a:t>우리가치</a:t>
+            </a:r>
+            <a:r>
+              <a:rPr lang="ko-KR" altLang="en-US" sz="494" b="1" dirty="0">
+                <a:latin typeface="KoPub돋움체 Bold" panose="00000800000000000000" pitchFamily="2" charset="-127"/>
+                <a:ea typeface="KoPub돋움체 Bold" panose="00000800000000000000" pitchFamily="2" charset="-127"/>
+              </a:rPr>
+              <a:t> 허브</a:t>
+            </a:r>
+            <a:r>
+              <a:rPr lang="en-US" altLang="ko-KR" sz="494" b="1" dirty="0">
+                <a:latin typeface="KoPub돋움체 Bold" panose="00000800000000000000" pitchFamily="2" charset="-127"/>
+                <a:ea typeface="KoPub돋움체 Bold" panose="00000800000000000000" pitchFamily="2" charset="-127"/>
+              </a:rPr>
+              <a:t>]</a:t>
+            </a:r>
+          </a:p>
+        </p:txBody>
+      </p:sp>
+      <p:pic>
+        <p:nvPicPr>
+          <p:cNvPr id="9" name="그림 8">
+            <a:extLst>
+              <a:ext uri="{FF2B5EF4-FFF2-40B4-BE49-F238E27FC236}">
+                <a16:creationId xmlns:a16="http://schemas.microsoft.com/office/drawing/2014/main" id="{F3A7A373-FECD-4243-98D0-B228302974CA}"/>
+              </a:ext>
+            </a:extLst>
+          </p:cNvPr>
+          <p:cNvPicPr>
+            <a:picLocks noChangeAspect="1"/>
+          </p:cNvPicPr>
+          <p:nvPr/>
+        </p:nvPicPr>
+        <p:blipFill>
+          <a:blip r:embed="rId3"/>
+          <a:stretch>
+            <a:fillRect/>
+          </a:stretch>
+        </p:blipFill>
+        <p:spPr>
+          <a:xfrm>
+            <a:off x="896601" y="716227"/>
+            <a:ext cx="145755" cy="127277"/>
+          </a:xfrm>
+          <a:prstGeom prst="rect">
+            <a:avLst/>
+          </a:prstGeom>
+        </p:spPr>
+      </p:pic>
+      <p:pic>
+        <p:nvPicPr>
+          <p:cNvPr id="11" name="그림 10">
+            <a:extLst>
+              <a:ext uri="{FF2B5EF4-FFF2-40B4-BE49-F238E27FC236}">
+                <a16:creationId xmlns:a16="http://schemas.microsoft.com/office/drawing/2014/main" id="{25D16522-22F0-487F-BE90-3035E8C29235}"/>
+              </a:ext>
+            </a:extLst>
+          </p:cNvPr>
+          <p:cNvPicPr>
+            <a:picLocks noChangeAspect="1"/>
+          </p:cNvPicPr>
+          <p:nvPr/>
+        </p:nvPicPr>
+        <p:blipFill>
+          <a:blip r:embed="rId3"/>
+          <a:stretch>
+            <a:fillRect/>
+          </a:stretch>
+        </p:blipFill>
+        <p:spPr>
+          <a:xfrm rot="10800000">
+            <a:off x="2030965" y="721574"/>
+            <a:ext cx="145753" cy="127277"/>
+          </a:xfrm>
+          <a:prstGeom prst="rect">
+            <a:avLst/>
+          </a:prstGeom>
+        </p:spPr>
+      </p:pic>
     </p:spTree>
     <p:extLst>
       <p:ext uri="{BB962C8B-B14F-4D97-AF65-F5344CB8AC3E}">
-        <p14:creationId xmlns:p14="http://schemas.microsoft.com/office/powerpoint/2010/main" val="3540984926"/>
+        <p14:creationId xmlns:p14="http://schemas.microsoft.com/office/powerpoint/2010/main" val="1752469808"/>
       </p:ext>
     </p:extLst>
   </p:cSld>
@@ -5414,7 +5269,7 @@
         <p:cNvPr id="1" name="">
           <a:extLst>
             <a:ext uri="{FF2B5EF4-FFF2-40B4-BE49-F238E27FC236}">
-              <a16:creationId xmlns:a16="http://schemas.microsoft.com/office/drawing/2014/main" id="{88976B01-C7BA-CC25-0F4C-49D3A8DEC958}"/>
+              <a16:creationId xmlns:a16="http://schemas.microsoft.com/office/drawing/2014/main" id="{4B91BF69-B73E-E52D-A273-34695C83C39D}"/>
             </a:ext>
           </a:extLst>
         </p:cNvPr>
@@ -5429,12 +5284,47 @@
           <a:chExt cx="0" cy="0"/>
         </a:xfrm>
       </p:grpSpPr>
-      <p:sp>
-        <p:nvSpPr>
-          <p:cNvPr id="3" name="TextBox 2">
+      <p:pic>
+        <p:nvPicPr>
+          <p:cNvPr id="4" name="Picture 1">
             <a:extLst>
               <a:ext uri="{FF2B5EF4-FFF2-40B4-BE49-F238E27FC236}">
-                <a16:creationId xmlns:a16="http://schemas.microsoft.com/office/drawing/2014/main" id="{3718BAC6-B3A8-9354-E61D-15F05C0B9F96}"/>
+                <a16:creationId xmlns:a16="http://schemas.microsoft.com/office/drawing/2014/main" id="{480AF66F-CB5C-451A-847A-EB60BA58025A}"/>
+              </a:ext>
+            </a:extLst>
+          </p:cNvPr>
+          <p:cNvPicPr>
+            <a:picLocks noChangeAspect="1"/>
+          </p:cNvPicPr>
+          <p:nvPr/>
+        </p:nvPicPr>
+        <p:blipFill>
+          <a:blip r:embed="rId2"/>
+          <a:stretch>
+            <a:fillRect/>
+          </a:stretch>
+        </p:blipFill>
+        <p:spPr>
+          <a:xfrm>
+            <a:off x="834546" y="1018696"/>
+            <a:ext cx="355023" cy="200754"/>
+          </a:xfrm>
+          <a:prstGeom prst="rect">
+            <a:avLst/>
+          </a:prstGeom>
+          <a:noFill/>
+          <a:ln>
+            <a:noFill/>
+          </a:ln>
+          <a:effectLst/>
+        </p:spPr>
+      </p:pic>
+      <p:sp>
+        <p:nvSpPr>
+          <p:cNvPr id="5" name="TextBox 4">
+            <a:extLst>
+              <a:ext uri="{FF2B5EF4-FFF2-40B4-BE49-F238E27FC236}">
+                <a16:creationId xmlns:a16="http://schemas.microsoft.com/office/drawing/2014/main" id="{5D20D6DC-7FD8-414D-8D41-7397E6AB51D5}"/>
               </a:ext>
             </a:extLst>
           </p:cNvPr>
@@ -5443,8 +5333,8 @@
         </p:nvSpPr>
         <p:spPr>
           <a:xfrm>
-            <a:off x="-724944" y="54246"/>
-            <a:ext cx="2717302" cy="169277"/>
+            <a:off x="1138753" y="1035390"/>
+            <a:ext cx="1233714" cy="167369"/>
           </a:xfrm>
           <a:prstGeom prst="rect">
             <a:avLst/>
@@ -5452,42 +5342,58 @@
           <a:noFill/>
         </p:spPr>
         <p:txBody>
-          <a:bodyPr wrap="square">
+          <a:bodyPr wrap="square" rtlCol="0">
             <a:spAutoFit/>
           </a:bodyPr>
           <a:lstStyle/>
           <a:p>
             <a:pPr algn="ctr"/>
             <a:r>
-              <a:rPr lang="ko-KR" altLang="en-US" sz="500" spc="-11" dirty="0">
-                <a:latin typeface="KoPub돋움체 Light" panose="02020603020101020101" pitchFamily="18" charset="-127"/>
-                <a:ea typeface="KoPub돋움체 Light" panose="02020603020101020101" pitchFamily="18" charset="-127"/>
+              <a:rPr lang="ko-KR" altLang="en-US" sz="494" b="1" dirty="0">
+                <a:solidFill>
+                  <a:srgbClr val="4472C4"/>
+                </a:solidFill>
+                <a:latin typeface="KoPub돋움체 Bold" panose="02020603020101020101" pitchFamily="18" charset="-127"/>
+                <a:ea typeface="KoPub돋움체 Bold" panose="02020603020101020101" pitchFamily="18" charset="-127"/>
               </a:rPr>
               <a:t>순천향대학교 천안병원 </a:t>
             </a:r>
             <a:r>
-              <a:rPr lang="en-US" altLang="ko-KR" sz="500" spc="-11" dirty="0">
-                <a:latin typeface="KoPub돋움체 Light" panose="02020603020101020101" pitchFamily="18" charset="-127"/>
-                <a:ea typeface="KoPub돋움체 Light" panose="02020603020101020101" pitchFamily="18" charset="-127"/>
+              <a:rPr lang="en-US" altLang="ko-KR" sz="494" b="1" dirty="0">
+                <a:solidFill>
+                  <a:srgbClr val="4472C4"/>
+                </a:solidFill>
+                <a:latin typeface="KoPub돋움체 Bold" panose="02020603020101020101" pitchFamily="18" charset="-127"/>
+                <a:ea typeface="KoPub돋움체 Bold" panose="02020603020101020101" pitchFamily="18" charset="-127"/>
               </a:rPr>
               <a:t>| </a:t>
             </a:r>
             <a:r>
-              <a:rPr lang="ko-KR" altLang="en-US" sz="500" spc="-11" dirty="0">
-                <a:latin typeface="KoPub돋움체 Light" panose="02020603020101020101" pitchFamily="18" charset="-127"/>
-                <a:ea typeface="KoPub돋움체 Light" panose="02020603020101020101" pitchFamily="18" charset="-127"/>
-              </a:rPr>
-              <a:t>진료지원간호팀 </a:t>
-            </a:r>
-          </a:p>
-        </p:txBody>
-      </p:sp>
-      <p:sp>
-        <p:nvSpPr>
-          <p:cNvPr id="41" name="TextBox 40">
+              <a:rPr lang="ko-KR" altLang="en-US" sz="494" b="1" dirty="0">
+                <a:solidFill>
+                  <a:srgbClr val="4472C4"/>
+                </a:solidFill>
+                <a:latin typeface="KoPub돋움체 Bold" panose="02020603020101020101" pitchFamily="18" charset="-127"/>
+                <a:ea typeface="KoPub돋움체 Bold" panose="02020603020101020101" pitchFamily="18" charset="-127"/>
+              </a:rPr>
+              <a:t>진료지원간호팀</a:t>
+            </a:r>
+            <a:endParaRPr lang="ko-KR" altLang="en-US" sz="593" b="1" dirty="0">
+              <a:solidFill>
+                <a:srgbClr val="4472C4"/>
+              </a:solidFill>
+              <a:latin typeface="KoPub돋움체 Bold" panose="02020603020101020101" pitchFamily="18" charset="-127"/>
+              <a:ea typeface="KoPub돋움체 Bold" panose="02020603020101020101" pitchFamily="18" charset="-127"/>
+            </a:endParaRPr>
+          </a:p>
+        </p:txBody>
+      </p:sp>
+      <p:sp>
+        <p:nvSpPr>
+          <p:cNvPr id="7" name="TextBox 6">
             <a:extLst>
               <a:ext uri="{FF2B5EF4-FFF2-40B4-BE49-F238E27FC236}">
-                <a16:creationId xmlns:a16="http://schemas.microsoft.com/office/drawing/2014/main" id="{B0F29FBE-D3EE-15D4-5CBB-19820A082020}"/>
+                <a16:creationId xmlns:a16="http://schemas.microsoft.com/office/drawing/2014/main" id="{568CE481-19EF-4F97-AF73-265FDB83283E}"/>
               </a:ext>
             </a:extLst>
           </p:cNvPr>
@@ -5496,8 +5402,8 @@
         </p:nvSpPr>
         <p:spPr>
           <a:xfrm>
-            <a:off x="36673" y="341862"/>
-            <a:ext cx="3259226" cy="1169551"/>
+            <a:off x="1007527" y="671882"/>
+            <a:ext cx="1090755" cy="228231"/>
           </a:xfrm>
           <a:prstGeom prst="rect">
             <a:avLst/>
@@ -5510,219 +5416,191 @@
           </a:bodyPr>
           <a:lstStyle/>
           <a:p>
-            <a:pPr marL="171450" indent="-171450">
-              <a:buFont typeface="Wingdings" panose="05000000000000000000" pitchFamily="2" charset="2"/>
-              <a:buChar char="§"/>
-            </a:pPr>
-            <a:r>
-              <a:rPr lang="ko-KR" altLang="en-US" sz="1000" b="1" dirty="0">
-                <a:latin typeface="KoPub돋움체 Light" panose="02020603020101020101" pitchFamily="18" charset="-127"/>
-                <a:ea typeface="KoPub돋움체 Light" panose="02020603020101020101" pitchFamily="18" charset="-127"/>
-              </a:rPr>
-              <a:t>응급(10): “10은 전화 먼저 + 끝나면 </a:t>
-            </a:r>
-            <a:r>
-              <a:rPr lang="ko-KR" altLang="en-US" sz="1000" b="1" dirty="0" err="1">
-                <a:latin typeface="KoPub돋움체 Light" panose="02020603020101020101" pitchFamily="18" charset="-127"/>
-                <a:ea typeface="KoPub돋움체 Light" panose="02020603020101020101" pitchFamily="18" charset="-127"/>
-              </a:rPr>
-              <a:t>A</a:t>
-            </a:r>
-            <a:r>
-              <a:rPr lang="ko-KR" altLang="en-US" sz="1000" b="1" dirty="0">
-                <a:latin typeface="KoPub돋움체 Light" panose="02020603020101020101" pitchFamily="18" charset="-127"/>
-                <a:ea typeface="KoPub돋움체 Light" panose="02020603020101020101" pitchFamily="18" charset="-127"/>
-              </a:rPr>
-              <a:t>/</a:t>
-            </a:r>
-            <a:r>
-              <a:rPr lang="ko-KR" altLang="en-US" sz="1000" b="1" dirty="0" err="1">
-                <a:latin typeface="KoPub돋움체 Light" panose="02020603020101020101" pitchFamily="18" charset="-127"/>
-                <a:ea typeface="KoPub돋움체 Light" panose="02020603020101020101" pitchFamily="18" charset="-127"/>
-              </a:rPr>
-              <a:t>D</a:t>
-            </a:r>
-            <a:r>
-              <a:rPr lang="ko-KR" altLang="en-US" sz="1000" b="1" dirty="0">
-                <a:latin typeface="KoPub돋움체 Light" panose="02020603020101020101" pitchFamily="18" charset="-127"/>
-                <a:ea typeface="KoPub돋움체 Light" panose="02020603020101020101" pitchFamily="18" charset="-127"/>
-              </a:rPr>
-              <a:t> 1줄”</a:t>
-            </a:r>
-          </a:p>
-          <a:p>
-            <a:pPr marL="171450" indent="-171450">
-              <a:buFont typeface="Wingdings" panose="05000000000000000000" pitchFamily="2" charset="2"/>
-              <a:buChar char="§"/>
-            </a:pPr>
-            <a:endParaRPr lang="ko-KR" altLang="en-US" sz="1000" b="1" dirty="0">
-              <a:latin typeface="KoPub돋움체 Light" panose="02020603020101020101" pitchFamily="18" charset="-127"/>
-              <a:ea typeface="KoPub돋움체 Light" panose="02020603020101020101" pitchFamily="18" charset="-127"/>
+            <a:pPr algn="ctr"/>
+            <a:r>
+              <a:rPr lang="ko-KR" altLang="en-US" sz="890" dirty="0" err="1">
+                <a:solidFill>
+                  <a:srgbClr val="00B0F0"/>
+                </a:solidFill>
+                <a:latin typeface="KoPub돋움체 Bold" panose="00000800000000000000" pitchFamily="2" charset="-127"/>
+                <a:ea typeface="KoPub돋움체 Bold" panose="00000800000000000000" pitchFamily="2" charset="-127"/>
+              </a:rPr>
+              <a:t>우리가치</a:t>
+            </a:r>
+            <a:r>
+              <a:rPr lang="ko-KR" altLang="en-US" sz="890" dirty="0">
+                <a:solidFill>
+                  <a:schemeClr val="accent1">
+                    <a:lumMod val="50000"/>
+                  </a:schemeClr>
+                </a:solidFill>
+                <a:latin typeface="KoPub돋움체 Bold" panose="02020603020101020101" pitchFamily="18" charset="-127"/>
+                <a:ea typeface="KoPub돋움체 Bold" panose="02020603020101020101" pitchFamily="18" charset="-127"/>
+              </a:rPr>
+              <a:t> </a:t>
+            </a:r>
+            <a:r>
+              <a:rPr lang="en-US" altLang="ko-KR" sz="890" dirty="0" err="1">
+                <a:solidFill>
+                  <a:schemeClr val="accent1">
+                    <a:lumMod val="50000"/>
+                  </a:schemeClr>
+                </a:solidFill>
+                <a:latin typeface="Franklin Gothic Heavy" panose="020B0903020102020204" pitchFamily="34" charset="0"/>
+                <a:ea typeface="KoPub돋움체 Bold" panose="02020603020101020101" pitchFamily="18" charset="-127"/>
+              </a:rPr>
+              <a:t>WeValue</a:t>
+            </a:r>
+            <a:endParaRPr lang="en-US" altLang="ko-KR" sz="890" dirty="0">
+              <a:solidFill>
+                <a:schemeClr val="accent1">
+                  <a:lumMod val="50000"/>
+                </a:schemeClr>
+              </a:solidFill>
+              <a:latin typeface="Franklin Gothic Heavy" panose="020B0903020102020204" pitchFamily="34" charset="0"/>
+              <a:ea typeface="KoPub돋움체 Bold" panose="02020603020101020101" pitchFamily="18" charset="-127"/>
             </a:endParaRPr>
           </a:p>
-          <a:p>
-            <a:pPr marL="171450" indent="-171450">
-              <a:buFont typeface="Wingdings" panose="05000000000000000000" pitchFamily="2" charset="2"/>
-              <a:buChar char="§"/>
-            </a:pPr>
-            <a:r>
-              <a:rPr lang="ko-KR" altLang="en-US" sz="1000" b="1" dirty="0" err="1">
-                <a:latin typeface="KoPub돋움체 Light" panose="02020603020101020101" pitchFamily="18" charset="-127"/>
-                <a:ea typeface="KoPub돋움체 Light" panose="02020603020101020101" pitchFamily="18" charset="-127"/>
-              </a:rPr>
-              <a:t>정보성</a:t>
-            </a:r>
-            <a:r>
-              <a:rPr lang="ko-KR" altLang="en-US" sz="1000" b="1" dirty="0">
-                <a:latin typeface="KoPub돋움체 Light" panose="02020603020101020101" pitchFamily="18" charset="-127"/>
-                <a:ea typeface="KoPub돋움체 Light" panose="02020603020101020101" pitchFamily="18" charset="-127"/>
-              </a:rPr>
-              <a:t>(</a:t>
-            </a:r>
-            <a:r>
-              <a:rPr lang="ko-KR" altLang="en-US" sz="1000" b="1" dirty="0" err="1">
-                <a:latin typeface="KoPub돋움체 Light" panose="02020603020101020101" pitchFamily="18" charset="-127"/>
-                <a:ea typeface="KoPub돋움체 Light" panose="02020603020101020101" pitchFamily="18" charset="-127"/>
-              </a:rPr>
-              <a:t>입원·검사·자가약</a:t>
-            </a:r>
-            <a:r>
-              <a:rPr lang="ko-KR" altLang="en-US" sz="1000" b="1" dirty="0">
-                <a:latin typeface="KoPub돋움체 Light" panose="02020603020101020101" pitchFamily="18" charset="-127"/>
-                <a:ea typeface="KoPub돋움체 Light" panose="02020603020101020101" pitchFamily="18" charset="-127"/>
-              </a:rPr>
-              <a:t>): “</a:t>
-            </a:r>
-            <a:r>
-              <a:rPr lang="ko-KR" altLang="en-US" sz="1000" b="1" dirty="0" err="1">
-                <a:latin typeface="KoPub돋움체 Light" panose="02020603020101020101" pitchFamily="18" charset="-127"/>
-                <a:ea typeface="KoPub돋움체 Light" panose="02020603020101020101" pitchFamily="18" charset="-127"/>
-              </a:rPr>
-              <a:t>A</a:t>
-            </a:r>
-            <a:r>
-              <a:rPr lang="ko-KR" altLang="en-US" sz="1000" b="1" dirty="0">
-                <a:latin typeface="KoPub돋움체 Light" panose="02020603020101020101" pitchFamily="18" charset="-127"/>
-                <a:ea typeface="KoPub돋움체 Light" panose="02020603020101020101" pitchFamily="18" charset="-127"/>
-              </a:rPr>
-              <a:t>(보고)/12 → </a:t>
-            </a:r>
-            <a:r>
-              <a:rPr lang="ko-KR" altLang="en-US" sz="1000" b="1" dirty="0" err="1">
-                <a:latin typeface="KoPub돋움체 Light" panose="02020603020101020101" pitchFamily="18" charset="-127"/>
-                <a:ea typeface="KoPub돋움체 Light" panose="02020603020101020101" pitchFamily="18" charset="-127"/>
-              </a:rPr>
-              <a:t>D</a:t>
-            </a:r>
-            <a:r>
-              <a:rPr lang="ko-KR" altLang="en-US" sz="1000" b="1" dirty="0">
-                <a:latin typeface="KoPub돋움체 Light" panose="02020603020101020101" pitchFamily="18" charset="-127"/>
-                <a:ea typeface="KoPub돋움체 Light" panose="02020603020101020101" pitchFamily="18" charset="-127"/>
-              </a:rPr>
-              <a:t>(확인완료)”</a:t>
-            </a:r>
-          </a:p>
-          <a:p>
-            <a:pPr marL="171450" indent="-171450">
-              <a:buFont typeface="Wingdings" panose="05000000000000000000" pitchFamily="2" charset="2"/>
-              <a:buChar char="§"/>
-            </a:pPr>
-            <a:endParaRPr lang="ko-KR" altLang="en-US" sz="1000" b="1" dirty="0">
-              <a:latin typeface="KoPub돋움체 Light" panose="02020603020101020101" pitchFamily="18" charset="-127"/>
-              <a:ea typeface="KoPub돋움체 Light" panose="02020603020101020101" pitchFamily="18" charset="-127"/>
-            </a:endParaRPr>
-          </a:p>
-          <a:p>
-            <a:pPr marL="171450" indent="-171450">
-              <a:buFont typeface="Wingdings" panose="05000000000000000000" pitchFamily="2" charset="2"/>
-              <a:buChar char="§"/>
-            </a:pPr>
-            <a:r>
-              <a:rPr lang="ko-KR" altLang="en-US" sz="1000" b="1" dirty="0">
-                <a:latin typeface="KoPub돋움체 Light" panose="02020603020101020101" pitchFamily="18" charset="-127"/>
-                <a:ea typeface="KoPub돋움체 Light" panose="02020603020101020101" pitchFamily="18" charset="-127"/>
-              </a:rPr>
-              <a:t>도움/교육 요청: “교육요청은 </a:t>
-            </a:r>
-            <a:r>
-              <a:rPr lang="ko-KR" altLang="en-US" sz="1000" b="1" dirty="0" err="1">
-                <a:latin typeface="KoPub돋움체 Light" panose="02020603020101020101" pitchFamily="18" charset="-127"/>
-                <a:ea typeface="KoPub돋움체 Light" panose="02020603020101020101" pitchFamily="18" charset="-127"/>
-              </a:rPr>
-              <a:t>QR에서</a:t>
-            </a:r>
-            <a:r>
-              <a:rPr lang="ko-KR" altLang="en-US" sz="1000" b="1" dirty="0">
-                <a:latin typeface="KoPub돋움체 Light" panose="02020603020101020101" pitchFamily="18" charset="-127"/>
-                <a:ea typeface="KoPub돋움체 Light" panose="02020603020101020101" pitchFamily="18" charset="-127"/>
-              </a:rPr>
-              <a:t> 1번”</a:t>
-            </a:r>
-          </a:p>
-          <a:p>
-            <a:pPr marL="171450" indent="-171450">
-              <a:buFont typeface="Wingdings" panose="05000000000000000000" pitchFamily="2" charset="2"/>
-              <a:buChar char="§"/>
-            </a:pPr>
-            <a:endParaRPr lang="ko-KR" altLang="en-US" sz="1000" b="1" dirty="0">
-              <a:latin typeface="KoPub돋움체 Light" panose="02020603020101020101" pitchFamily="18" charset="-127"/>
-              <a:ea typeface="KoPub돋움체 Light" panose="02020603020101020101" pitchFamily="18" charset="-127"/>
-            </a:endParaRPr>
-          </a:p>
-          <a:p>
-            <a:pPr marL="171450" indent="-171450">
-              <a:buFont typeface="Wingdings" panose="05000000000000000000" pitchFamily="2" charset="2"/>
-              <a:buChar char="§"/>
-            </a:pPr>
-            <a:r>
-              <a:rPr lang="ko-KR" altLang="en-US" sz="1000" b="1" dirty="0" err="1">
-                <a:latin typeface="KoPub돋움체 Light" panose="02020603020101020101" pitchFamily="18" charset="-127"/>
-                <a:ea typeface="KoPub돋움체 Light" panose="02020603020101020101" pitchFamily="18" charset="-127"/>
-              </a:rPr>
-              <a:t>익명함</a:t>
-            </a:r>
-            <a:r>
-              <a:rPr lang="ko-KR" altLang="en-US" sz="1000" b="1" dirty="0">
-                <a:latin typeface="KoPub돋움체 Light" panose="02020603020101020101" pitchFamily="18" charset="-127"/>
-                <a:ea typeface="KoPub돋움체 Light" panose="02020603020101020101" pitchFamily="18" charset="-127"/>
-              </a:rPr>
-              <a:t>/칭찬: “</a:t>
-            </a:r>
-            <a:r>
-              <a:rPr lang="ko-KR" altLang="en-US" sz="1000" b="1" dirty="0" err="1">
-                <a:latin typeface="KoPub돋움체 Light" panose="02020603020101020101" pitchFamily="18" charset="-127"/>
-                <a:ea typeface="KoPub돋움체 Light" panose="02020603020101020101" pitchFamily="18" charset="-127"/>
-              </a:rPr>
-              <a:t>불편·제안·칭찬은</a:t>
-            </a:r>
-            <a:r>
-              <a:rPr lang="ko-KR" altLang="en-US" sz="1000" b="1" dirty="0">
-                <a:latin typeface="KoPub돋움체 Light" panose="02020603020101020101" pitchFamily="18" charset="-127"/>
-                <a:ea typeface="KoPub돋움체 Light" panose="02020603020101020101" pitchFamily="18" charset="-127"/>
-              </a:rPr>
-              <a:t> 앞면 </a:t>
-            </a:r>
-            <a:r>
-              <a:rPr lang="en-US" altLang="ko-KR" sz="1000" b="1" dirty="0">
-                <a:latin typeface="KoPub돋움체 Light" panose="02020603020101020101" pitchFamily="18" charset="-127"/>
-                <a:ea typeface="KoPub돋움체 Light" panose="02020603020101020101" pitchFamily="18" charset="-127"/>
-              </a:rPr>
-              <a:t>QR</a:t>
-            </a:r>
-            <a:r>
-              <a:rPr lang="ko-KR" altLang="en-US" sz="1000" b="1" dirty="0">
-                <a:latin typeface="KoPub돋움체 Light" panose="02020603020101020101" pitchFamily="18" charset="-127"/>
-                <a:ea typeface="KoPub돋움체 Light" panose="02020603020101020101" pitchFamily="18" charset="-127"/>
-              </a:rPr>
-              <a:t>(비난 금지)”</a:t>
-            </a:r>
-          </a:p>
-        </p:txBody>
-      </p:sp>
+        </p:txBody>
+      </p:sp>
+      <p:sp>
+        <p:nvSpPr>
+          <p:cNvPr id="8" name="TextBox 7">
+            <a:extLst>
+              <a:ext uri="{FF2B5EF4-FFF2-40B4-BE49-F238E27FC236}">
+                <a16:creationId xmlns:a16="http://schemas.microsoft.com/office/drawing/2014/main" id="{DAA9A54C-F797-44FB-AB3D-27BD433EFBED}"/>
+              </a:ext>
+            </a:extLst>
+          </p:cNvPr>
+          <p:cNvSpPr txBox="1"/>
+          <p:nvPr/>
+        </p:nvSpPr>
+        <p:spPr>
+          <a:xfrm>
+            <a:off x="914015" y="817009"/>
+            <a:ext cx="1277778" cy="167369"/>
+          </a:xfrm>
+          <a:prstGeom prst="rect">
+            <a:avLst/>
+          </a:prstGeom>
+          <a:noFill/>
+        </p:spPr>
+        <p:txBody>
+          <a:bodyPr wrap="none">
+            <a:spAutoFit/>
+          </a:bodyPr>
+          <a:lstStyle/>
+          <a:p>
+            <a:pPr algn="ctr"/>
+            <a:r>
+              <a:rPr lang="en-US" altLang="ko-KR" sz="494" b="1" dirty="0">
+                <a:latin typeface="KoPub돋움체 Bold" panose="00000800000000000000" pitchFamily="2" charset="-127"/>
+                <a:ea typeface="KoPub돋움체 Bold" panose="00000800000000000000" pitchFamily="2" charset="-127"/>
+              </a:rPr>
+              <a:t>[</a:t>
+            </a:r>
+            <a:r>
+              <a:rPr lang="ko-KR" altLang="en-US" sz="494" b="1" dirty="0">
+                <a:latin typeface="KoPub돋움체 Bold" panose="00000800000000000000" pitchFamily="2" charset="-127"/>
+                <a:ea typeface="KoPub돋움체 Bold" panose="00000800000000000000" pitchFamily="2" charset="-127"/>
+              </a:rPr>
+              <a:t>우리가 가치를 만드는 공간</a:t>
+            </a:r>
+            <a:r>
+              <a:rPr lang="en-US" altLang="ko-KR" sz="494" b="1" dirty="0">
+                <a:latin typeface="KoPub돋움체 Bold" panose="00000800000000000000" pitchFamily="2" charset="-127"/>
+                <a:ea typeface="KoPub돋움체 Bold" panose="00000800000000000000" pitchFamily="2" charset="-127"/>
+              </a:rPr>
+              <a:t>, </a:t>
+            </a:r>
+            <a:r>
+              <a:rPr lang="ko-KR" altLang="en-US" sz="494" b="1" dirty="0" err="1">
+                <a:latin typeface="KoPub돋움체 Bold" panose="00000800000000000000" pitchFamily="2" charset="-127"/>
+                <a:ea typeface="KoPub돋움체 Bold" panose="00000800000000000000" pitchFamily="2" charset="-127"/>
+              </a:rPr>
+              <a:t>우리가치</a:t>
+            </a:r>
+            <a:r>
+              <a:rPr lang="ko-KR" altLang="en-US" sz="494" b="1" dirty="0">
+                <a:latin typeface="KoPub돋움체 Bold" panose="00000800000000000000" pitchFamily="2" charset="-127"/>
+                <a:ea typeface="KoPub돋움체 Bold" panose="00000800000000000000" pitchFamily="2" charset="-127"/>
+              </a:rPr>
+              <a:t> 허브</a:t>
+            </a:r>
+            <a:r>
+              <a:rPr lang="en-US" altLang="ko-KR" sz="494" b="1" dirty="0">
+                <a:latin typeface="KoPub돋움체 Bold" panose="00000800000000000000" pitchFamily="2" charset="-127"/>
+                <a:ea typeface="KoPub돋움체 Bold" panose="00000800000000000000" pitchFamily="2" charset="-127"/>
+              </a:rPr>
+              <a:t>]</a:t>
+            </a:r>
+          </a:p>
+        </p:txBody>
+      </p:sp>
+      <p:pic>
+        <p:nvPicPr>
+          <p:cNvPr id="9" name="그림 8">
+            <a:extLst>
+              <a:ext uri="{FF2B5EF4-FFF2-40B4-BE49-F238E27FC236}">
+                <a16:creationId xmlns:a16="http://schemas.microsoft.com/office/drawing/2014/main" id="{F3A7A373-FECD-4243-98D0-B228302974CA}"/>
+              </a:ext>
+            </a:extLst>
+          </p:cNvPr>
+          <p:cNvPicPr>
+            <a:picLocks noChangeAspect="1"/>
+          </p:cNvPicPr>
+          <p:nvPr/>
+        </p:nvPicPr>
+        <p:blipFill>
+          <a:blip r:embed="rId3"/>
+          <a:stretch>
+            <a:fillRect/>
+          </a:stretch>
+        </p:blipFill>
+        <p:spPr>
+          <a:xfrm>
+            <a:off x="896601" y="716227"/>
+            <a:ext cx="145755" cy="127277"/>
+          </a:xfrm>
+          <a:prstGeom prst="rect">
+            <a:avLst/>
+          </a:prstGeom>
+        </p:spPr>
+      </p:pic>
+      <p:pic>
+        <p:nvPicPr>
+          <p:cNvPr id="11" name="그림 10">
+            <a:extLst>
+              <a:ext uri="{FF2B5EF4-FFF2-40B4-BE49-F238E27FC236}">
+                <a16:creationId xmlns:a16="http://schemas.microsoft.com/office/drawing/2014/main" id="{25D16522-22F0-487F-BE90-3035E8C29235}"/>
+              </a:ext>
+            </a:extLst>
+          </p:cNvPr>
+          <p:cNvPicPr>
+            <a:picLocks noChangeAspect="1"/>
+          </p:cNvPicPr>
+          <p:nvPr/>
+        </p:nvPicPr>
+        <p:blipFill>
+          <a:blip r:embed="rId3"/>
+          <a:stretch>
+            <a:fillRect/>
+          </a:stretch>
+        </p:blipFill>
+        <p:spPr>
+          <a:xfrm rot="10800000">
+            <a:off x="2030965" y="721574"/>
+            <a:ext cx="145753" cy="127277"/>
+          </a:xfrm>
+          <a:prstGeom prst="rect">
+            <a:avLst/>
+          </a:prstGeom>
+        </p:spPr>
+      </p:pic>
     </p:spTree>
     <p:extLst>
       <p:ext uri="{BB962C8B-B14F-4D97-AF65-F5344CB8AC3E}">
-        <p14:creationId xmlns:p14="http://schemas.microsoft.com/office/powerpoint/2010/main" val="143589335"/>
+        <p14:creationId xmlns:p14="http://schemas.microsoft.com/office/powerpoint/2010/main" val="127331357"/>
       </p:ext>
     </p:extLst>
   </p:cSld>
@@ -5740,7 +5618,7 @@
         <p:cNvPr id="1" name="">
           <a:extLst>
             <a:ext uri="{FF2B5EF4-FFF2-40B4-BE49-F238E27FC236}">
-              <a16:creationId xmlns:a16="http://schemas.microsoft.com/office/drawing/2014/main" id="{545685EF-4C32-5D2F-6C87-3429A40E44F1}"/>
+              <a16:creationId xmlns:a16="http://schemas.microsoft.com/office/drawing/2014/main" id="{4B91BF69-B73E-E52D-A273-34695C83C39D}"/>
             </a:ext>
           </a:extLst>
         </p:cNvPr>
@@ -5755,12 +5633,47 @@
           <a:chExt cx="0" cy="0"/>
         </a:xfrm>
       </p:grpSpPr>
-      <p:sp>
-        <p:nvSpPr>
-          <p:cNvPr id="3" name="TextBox 2">
+      <p:pic>
+        <p:nvPicPr>
+          <p:cNvPr id="4" name="Picture 1">
             <a:extLst>
               <a:ext uri="{FF2B5EF4-FFF2-40B4-BE49-F238E27FC236}">
-                <a16:creationId xmlns:a16="http://schemas.microsoft.com/office/drawing/2014/main" id="{7A3BDE35-9A1C-76A3-0D25-EB286AAC1EF9}"/>
+                <a16:creationId xmlns:a16="http://schemas.microsoft.com/office/drawing/2014/main" id="{480AF66F-CB5C-451A-847A-EB60BA58025A}"/>
+              </a:ext>
+            </a:extLst>
+          </p:cNvPr>
+          <p:cNvPicPr>
+            <a:picLocks noChangeAspect="1"/>
+          </p:cNvPicPr>
+          <p:nvPr/>
+        </p:nvPicPr>
+        <p:blipFill>
+          <a:blip r:embed="rId2"/>
+          <a:stretch>
+            <a:fillRect/>
+          </a:stretch>
+        </p:blipFill>
+        <p:spPr>
+          <a:xfrm>
+            <a:off x="834546" y="1018696"/>
+            <a:ext cx="355023" cy="200754"/>
+          </a:xfrm>
+          <a:prstGeom prst="rect">
+            <a:avLst/>
+          </a:prstGeom>
+          <a:noFill/>
+          <a:ln>
+            <a:noFill/>
+          </a:ln>
+          <a:effectLst/>
+        </p:spPr>
+      </p:pic>
+      <p:sp>
+        <p:nvSpPr>
+          <p:cNvPr id="5" name="TextBox 4">
+            <a:extLst>
+              <a:ext uri="{FF2B5EF4-FFF2-40B4-BE49-F238E27FC236}">
+                <a16:creationId xmlns:a16="http://schemas.microsoft.com/office/drawing/2014/main" id="{5D20D6DC-7FD8-414D-8D41-7397E6AB51D5}"/>
               </a:ext>
             </a:extLst>
           </p:cNvPr>
@@ -5769,8 +5682,8 @@
         </p:nvSpPr>
         <p:spPr>
           <a:xfrm>
-            <a:off x="-724944" y="54246"/>
-            <a:ext cx="2717302" cy="169277"/>
+            <a:off x="1138753" y="1035390"/>
+            <a:ext cx="1233714" cy="167369"/>
           </a:xfrm>
           <a:prstGeom prst="rect">
             <a:avLst/>
@@ -5778,42 +5691,58 @@
           <a:noFill/>
         </p:spPr>
         <p:txBody>
-          <a:bodyPr wrap="square">
+          <a:bodyPr wrap="square" rtlCol="0">
             <a:spAutoFit/>
           </a:bodyPr>
           <a:lstStyle/>
           <a:p>
             <a:pPr algn="ctr"/>
             <a:r>
-              <a:rPr lang="ko-KR" altLang="en-US" sz="500" spc="-11" dirty="0">
-                <a:latin typeface="KoPub돋움체 Light" panose="02020603020101020101" pitchFamily="18" charset="-127"/>
-                <a:ea typeface="KoPub돋움체 Light" panose="02020603020101020101" pitchFamily="18" charset="-127"/>
+              <a:rPr lang="ko-KR" altLang="en-US" sz="494" b="1" dirty="0">
+                <a:solidFill>
+                  <a:srgbClr val="4472C4"/>
+                </a:solidFill>
+                <a:latin typeface="KoPub돋움체 Bold" panose="02020603020101020101" pitchFamily="18" charset="-127"/>
+                <a:ea typeface="KoPub돋움체 Bold" panose="02020603020101020101" pitchFamily="18" charset="-127"/>
               </a:rPr>
               <a:t>순천향대학교 천안병원 </a:t>
             </a:r>
             <a:r>
-              <a:rPr lang="en-US" altLang="ko-KR" sz="500" spc="-11" dirty="0">
-                <a:latin typeface="KoPub돋움체 Light" panose="02020603020101020101" pitchFamily="18" charset="-127"/>
-                <a:ea typeface="KoPub돋움체 Light" panose="02020603020101020101" pitchFamily="18" charset="-127"/>
+              <a:rPr lang="en-US" altLang="ko-KR" sz="494" b="1" dirty="0">
+                <a:solidFill>
+                  <a:srgbClr val="4472C4"/>
+                </a:solidFill>
+                <a:latin typeface="KoPub돋움체 Bold" panose="02020603020101020101" pitchFamily="18" charset="-127"/>
+                <a:ea typeface="KoPub돋움체 Bold" panose="02020603020101020101" pitchFamily="18" charset="-127"/>
               </a:rPr>
               <a:t>| </a:t>
             </a:r>
             <a:r>
-              <a:rPr lang="ko-KR" altLang="en-US" sz="500" spc="-11" dirty="0">
-                <a:latin typeface="KoPub돋움체 Light" panose="02020603020101020101" pitchFamily="18" charset="-127"/>
-                <a:ea typeface="KoPub돋움체 Light" panose="02020603020101020101" pitchFamily="18" charset="-127"/>
-              </a:rPr>
-              <a:t>진료지원간호팀 </a:t>
-            </a:r>
-          </a:p>
-        </p:txBody>
-      </p:sp>
-      <p:sp>
-        <p:nvSpPr>
-          <p:cNvPr id="41" name="TextBox 40">
+              <a:rPr lang="ko-KR" altLang="en-US" sz="494" b="1" dirty="0">
+                <a:solidFill>
+                  <a:srgbClr val="4472C4"/>
+                </a:solidFill>
+                <a:latin typeface="KoPub돋움체 Bold" panose="02020603020101020101" pitchFamily="18" charset="-127"/>
+                <a:ea typeface="KoPub돋움체 Bold" panose="02020603020101020101" pitchFamily="18" charset="-127"/>
+              </a:rPr>
+              <a:t>진료지원간호팀</a:t>
+            </a:r>
+            <a:endParaRPr lang="ko-KR" altLang="en-US" sz="593" b="1" dirty="0">
+              <a:solidFill>
+                <a:srgbClr val="4472C4"/>
+              </a:solidFill>
+              <a:latin typeface="KoPub돋움체 Bold" panose="02020603020101020101" pitchFamily="18" charset="-127"/>
+              <a:ea typeface="KoPub돋움체 Bold" panose="02020603020101020101" pitchFamily="18" charset="-127"/>
+            </a:endParaRPr>
+          </a:p>
+        </p:txBody>
+      </p:sp>
+      <p:sp>
+        <p:nvSpPr>
+          <p:cNvPr id="7" name="TextBox 6">
             <a:extLst>
               <a:ext uri="{FF2B5EF4-FFF2-40B4-BE49-F238E27FC236}">
-                <a16:creationId xmlns:a16="http://schemas.microsoft.com/office/drawing/2014/main" id="{3E469937-36F6-7FE9-B788-C48319EFFF5A}"/>
+                <a16:creationId xmlns:a16="http://schemas.microsoft.com/office/drawing/2014/main" id="{568CE481-19EF-4F97-AF73-265FDB83283E}"/>
               </a:ext>
             </a:extLst>
           </p:cNvPr>
@@ -5822,8 +5751,8 @@
         </p:nvSpPr>
         <p:spPr>
           <a:xfrm>
-            <a:off x="36673" y="341862"/>
-            <a:ext cx="3259226" cy="1169551"/>
+            <a:off x="1007527" y="671882"/>
+            <a:ext cx="1090755" cy="228231"/>
           </a:xfrm>
           <a:prstGeom prst="rect">
             <a:avLst/>
@@ -5836,219 +5765,191 @@
           </a:bodyPr>
           <a:lstStyle/>
           <a:p>
-            <a:pPr marL="171450" indent="-171450">
-              <a:buFont typeface="Wingdings" panose="05000000000000000000" pitchFamily="2" charset="2"/>
-              <a:buChar char="§"/>
-            </a:pPr>
-            <a:r>
-              <a:rPr lang="ko-KR" altLang="en-US" sz="1000" b="1" dirty="0">
-                <a:latin typeface="KoPub돋움체 Light" panose="02020603020101020101" pitchFamily="18" charset="-127"/>
-                <a:ea typeface="KoPub돋움체 Light" panose="02020603020101020101" pitchFamily="18" charset="-127"/>
-              </a:rPr>
-              <a:t>응급(10): “10은 전화 먼저 + 끝나면 </a:t>
-            </a:r>
-            <a:r>
-              <a:rPr lang="ko-KR" altLang="en-US" sz="1000" b="1" dirty="0" err="1">
-                <a:latin typeface="KoPub돋움체 Light" panose="02020603020101020101" pitchFamily="18" charset="-127"/>
-                <a:ea typeface="KoPub돋움체 Light" panose="02020603020101020101" pitchFamily="18" charset="-127"/>
-              </a:rPr>
-              <a:t>A</a:t>
-            </a:r>
-            <a:r>
-              <a:rPr lang="ko-KR" altLang="en-US" sz="1000" b="1" dirty="0">
-                <a:latin typeface="KoPub돋움체 Light" panose="02020603020101020101" pitchFamily="18" charset="-127"/>
-                <a:ea typeface="KoPub돋움체 Light" panose="02020603020101020101" pitchFamily="18" charset="-127"/>
-              </a:rPr>
-              <a:t>/</a:t>
-            </a:r>
-            <a:r>
-              <a:rPr lang="ko-KR" altLang="en-US" sz="1000" b="1" dirty="0" err="1">
-                <a:latin typeface="KoPub돋움체 Light" panose="02020603020101020101" pitchFamily="18" charset="-127"/>
-                <a:ea typeface="KoPub돋움체 Light" panose="02020603020101020101" pitchFamily="18" charset="-127"/>
-              </a:rPr>
-              <a:t>D</a:t>
-            </a:r>
-            <a:r>
-              <a:rPr lang="ko-KR" altLang="en-US" sz="1000" b="1" dirty="0">
-                <a:latin typeface="KoPub돋움체 Light" panose="02020603020101020101" pitchFamily="18" charset="-127"/>
-                <a:ea typeface="KoPub돋움체 Light" panose="02020603020101020101" pitchFamily="18" charset="-127"/>
-              </a:rPr>
-              <a:t> 1줄”</a:t>
-            </a:r>
-          </a:p>
-          <a:p>
-            <a:pPr marL="171450" indent="-171450">
-              <a:buFont typeface="Wingdings" panose="05000000000000000000" pitchFamily="2" charset="2"/>
-              <a:buChar char="§"/>
-            </a:pPr>
-            <a:endParaRPr lang="ko-KR" altLang="en-US" sz="1000" b="1" dirty="0">
-              <a:latin typeface="KoPub돋움체 Light" panose="02020603020101020101" pitchFamily="18" charset="-127"/>
-              <a:ea typeface="KoPub돋움체 Light" panose="02020603020101020101" pitchFamily="18" charset="-127"/>
+            <a:pPr algn="ctr"/>
+            <a:r>
+              <a:rPr lang="ko-KR" altLang="en-US" sz="890" dirty="0" err="1">
+                <a:solidFill>
+                  <a:srgbClr val="00B0F0"/>
+                </a:solidFill>
+                <a:latin typeface="KoPub돋움체 Bold" panose="00000800000000000000" pitchFamily="2" charset="-127"/>
+                <a:ea typeface="KoPub돋움체 Bold" panose="00000800000000000000" pitchFamily="2" charset="-127"/>
+              </a:rPr>
+              <a:t>우리가치</a:t>
+            </a:r>
+            <a:r>
+              <a:rPr lang="ko-KR" altLang="en-US" sz="890" dirty="0">
+                <a:solidFill>
+                  <a:schemeClr val="accent1">
+                    <a:lumMod val="50000"/>
+                  </a:schemeClr>
+                </a:solidFill>
+                <a:latin typeface="KoPub돋움체 Bold" panose="02020603020101020101" pitchFamily="18" charset="-127"/>
+                <a:ea typeface="KoPub돋움체 Bold" panose="02020603020101020101" pitchFamily="18" charset="-127"/>
+              </a:rPr>
+              <a:t> </a:t>
+            </a:r>
+            <a:r>
+              <a:rPr lang="en-US" altLang="ko-KR" sz="890" dirty="0" err="1">
+                <a:solidFill>
+                  <a:schemeClr val="accent1">
+                    <a:lumMod val="50000"/>
+                  </a:schemeClr>
+                </a:solidFill>
+                <a:latin typeface="Franklin Gothic Heavy" panose="020B0903020102020204" pitchFamily="34" charset="0"/>
+                <a:ea typeface="KoPub돋움체 Bold" panose="02020603020101020101" pitchFamily="18" charset="-127"/>
+              </a:rPr>
+              <a:t>WeValue</a:t>
+            </a:r>
+            <a:endParaRPr lang="en-US" altLang="ko-KR" sz="890" dirty="0">
+              <a:solidFill>
+                <a:schemeClr val="accent1">
+                  <a:lumMod val="50000"/>
+                </a:schemeClr>
+              </a:solidFill>
+              <a:latin typeface="Franklin Gothic Heavy" panose="020B0903020102020204" pitchFamily="34" charset="0"/>
+              <a:ea typeface="KoPub돋움체 Bold" panose="02020603020101020101" pitchFamily="18" charset="-127"/>
             </a:endParaRPr>
           </a:p>
-          <a:p>
-            <a:pPr marL="171450" indent="-171450">
-              <a:buFont typeface="Wingdings" panose="05000000000000000000" pitchFamily="2" charset="2"/>
-              <a:buChar char="§"/>
-            </a:pPr>
-            <a:r>
-              <a:rPr lang="ko-KR" altLang="en-US" sz="1000" b="1" dirty="0" err="1">
-                <a:latin typeface="KoPub돋움체 Light" panose="02020603020101020101" pitchFamily="18" charset="-127"/>
-                <a:ea typeface="KoPub돋움체 Light" panose="02020603020101020101" pitchFamily="18" charset="-127"/>
-              </a:rPr>
-              <a:t>정보성</a:t>
-            </a:r>
-            <a:r>
-              <a:rPr lang="ko-KR" altLang="en-US" sz="1000" b="1" dirty="0">
-                <a:latin typeface="KoPub돋움체 Light" panose="02020603020101020101" pitchFamily="18" charset="-127"/>
-                <a:ea typeface="KoPub돋움체 Light" panose="02020603020101020101" pitchFamily="18" charset="-127"/>
-              </a:rPr>
-              <a:t>(</a:t>
-            </a:r>
-            <a:r>
-              <a:rPr lang="ko-KR" altLang="en-US" sz="1000" b="1" dirty="0" err="1">
-                <a:latin typeface="KoPub돋움체 Light" panose="02020603020101020101" pitchFamily="18" charset="-127"/>
-                <a:ea typeface="KoPub돋움체 Light" panose="02020603020101020101" pitchFamily="18" charset="-127"/>
-              </a:rPr>
-              <a:t>입원·검사·자가약</a:t>
-            </a:r>
-            <a:r>
-              <a:rPr lang="ko-KR" altLang="en-US" sz="1000" b="1" dirty="0">
-                <a:latin typeface="KoPub돋움체 Light" panose="02020603020101020101" pitchFamily="18" charset="-127"/>
-                <a:ea typeface="KoPub돋움체 Light" panose="02020603020101020101" pitchFamily="18" charset="-127"/>
-              </a:rPr>
-              <a:t>): “</a:t>
-            </a:r>
-            <a:r>
-              <a:rPr lang="ko-KR" altLang="en-US" sz="1000" b="1" dirty="0" err="1">
-                <a:latin typeface="KoPub돋움체 Light" panose="02020603020101020101" pitchFamily="18" charset="-127"/>
-                <a:ea typeface="KoPub돋움체 Light" panose="02020603020101020101" pitchFamily="18" charset="-127"/>
-              </a:rPr>
-              <a:t>A</a:t>
-            </a:r>
-            <a:r>
-              <a:rPr lang="ko-KR" altLang="en-US" sz="1000" b="1" dirty="0">
-                <a:latin typeface="KoPub돋움체 Light" panose="02020603020101020101" pitchFamily="18" charset="-127"/>
-                <a:ea typeface="KoPub돋움체 Light" panose="02020603020101020101" pitchFamily="18" charset="-127"/>
-              </a:rPr>
-              <a:t>(보고)/12 → </a:t>
-            </a:r>
-            <a:r>
-              <a:rPr lang="ko-KR" altLang="en-US" sz="1000" b="1" dirty="0" err="1">
-                <a:latin typeface="KoPub돋움체 Light" panose="02020603020101020101" pitchFamily="18" charset="-127"/>
-                <a:ea typeface="KoPub돋움체 Light" panose="02020603020101020101" pitchFamily="18" charset="-127"/>
-              </a:rPr>
-              <a:t>D</a:t>
-            </a:r>
-            <a:r>
-              <a:rPr lang="ko-KR" altLang="en-US" sz="1000" b="1" dirty="0">
-                <a:latin typeface="KoPub돋움체 Light" panose="02020603020101020101" pitchFamily="18" charset="-127"/>
-                <a:ea typeface="KoPub돋움체 Light" panose="02020603020101020101" pitchFamily="18" charset="-127"/>
-              </a:rPr>
-              <a:t>(확인완료)”</a:t>
-            </a:r>
-          </a:p>
-          <a:p>
-            <a:pPr marL="171450" indent="-171450">
-              <a:buFont typeface="Wingdings" panose="05000000000000000000" pitchFamily="2" charset="2"/>
-              <a:buChar char="§"/>
-            </a:pPr>
-            <a:endParaRPr lang="ko-KR" altLang="en-US" sz="1000" b="1" dirty="0">
-              <a:latin typeface="KoPub돋움체 Light" panose="02020603020101020101" pitchFamily="18" charset="-127"/>
-              <a:ea typeface="KoPub돋움체 Light" panose="02020603020101020101" pitchFamily="18" charset="-127"/>
-            </a:endParaRPr>
-          </a:p>
-          <a:p>
-            <a:pPr marL="171450" indent="-171450">
-              <a:buFont typeface="Wingdings" panose="05000000000000000000" pitchFamily="2" charset="2"/>
-              <a:buChar char="§"/>
-            </a:pPr>
-            <a:r>
-              <a:rPr lang="ko-KR" altLang="en-US" sz="1000" b="1" dirty="0">
-                <a:latin typeface="KoPub돋움체 Light" panose="02020603020101020101" pitchFamily="18" charset="-127"/>
-                <a:ea typeface="KoPub돋움체 Light" panose="02020603020101020101" pitchFamily="18" charset="-127"/>
-              </a:rPr>
-              <a:t>도움/교육 요청: “교육요청은 </a:t>
-            </a:r>
-            <a:r>
-              <a:rPr lang="ko-KR" altLang="en-US" sz="1000" b="1" dirty="0" err="1">
-                <a:latin typeface="KoPub돋움체 Light" panose="02020603020101020101" pitchFamily="18" charset="-127"/>
-                <a:ea typeface="KoPub돋움체 Light" panose="02020603020101020101" pitchFamily="18" charset="-127"/>
-              </a:rPr>
-              <a:t>QR에서</a:t>
-            </a:r>
-            <a:r>
-              <a:rPr lang="ko-KR" altLang="en-US" sz="1000" b="1" dirty="0">
-                <a:latin typeface="KoPub돋움체 Light" panose="02020603020101020101" pitchFamily="18" charset="-127"/>
-                <a:ea typeface="KoPub돋움체 Light" panose="02020603020101020101" pitchFamily="18" charset="-127"/>
-              </a:rPr>
-              <a:t> 1번”</a:t>
-            </a:r>
-          </a:p>
-          <a:p>
-            <a:pPr marL="171450" indent="-171450">
-              <a:buFont typeface="Wingdings" panose="05000000000000000000" pitchFamily="2" charset="2"/>
-              <a:buChar char="§"/>
-            </a:pPr>
-            <a:endParaRPr lang="ko-KR" altLang="en-US" sz="1000" b="1" dirty="0">
-              <a:latin typeface="KoPub돋움체 Light" panose="02020603020101020101" pitchFamily="18" charset="-127"/>
-              <a:ea typeface="KoPub돋움체 Light" panose="02020603020101020101" pitchFamily="18" charset="-127"/>
-            </a:endParaRPr>
-          </a:p>
-          <a:p>
-            <a:pPr marL="171450" indent="-171450">
-              <a:buFont typeface="Wingdings" panose="05000000000000000000" pitchFamily="2" charset="2"/>
-              <a:buChar char="§"/>
-            </a:pPr>
-            <a:r>
-              <a:rPr lang="ko-KR" altLang="en-US" sz="1000" b="1" dirty="0" err="1">
-                <a:latin typeface="KoPub돋움체 Light" panose="02020603020101020101" pitchFamily="18" charset="-127"/>
-                <a:ea typeface="KoPub돋움체 Light" panose="02020603020101020101" pitchFamily="18" charset="-127"/>
-              </a:rPr>
-              <a:t>익명함</a:t>
-            </a:r>
-            <a:r>
-              <a:rPr lang="ko-KR" altLang="en-US" sz="1000" b="1" dirty="0">
-                <a:latin typeface="KoPub돋움체 Light" panose="02020603020101020101" pitchFamily="18" charset="-127"/>
-                <a:ea typeface="KoPub돋움체 Light" panose="02020603020101020101" pitchFamily="18" charset="-127"/>
-              </a:rPr>
-              <a:t>/칭찬: “</a:t>
-            </a:r>
-            <a:r>
-              <a:rPr lang="ko-KR" altLang="en-US" sz="1000" b="1" dirty="0" err="1">
-                <a:latin typeface="KoPub돋움체 Light" panose="02020603020101020101" pitchFamily="18" charset="-127"/>
-                <a:ea typeface="KoPub돋움체 Light" panose="02020603020101020101" pitchFamily="18" charset="-127"/>
-              </a:rPr>
-              <a:t>불편·제안·칭찬은</a:t>
-            </a:r>
-            <a:r>
-              <a:rPr lang="ko-KR" altLang="en-US" sz="1000" b="1" dirty="0">
-                <a:latin typeface="KoPub돋움체 Light" panose="02020603020101020101" pitchFamily="18" charset="-127"/>
-                <a:ea typeface="KoPub돋움체 Light" panose="02020603020101020101" pitchFamily="18" charset="-127"/>
-              </a:rPr>
-              <a:t> 앞면 </a:t>
-            </a:r>
-            <a:r>
-              <a:rPr lang="en-US" altLang="ko-KR" sz="1000" b="1" dirty="0">
-                <a:latin typeface="KoPub돋움체 Light" panose="02020603020101020101" pitchFamily="18" charset="-127"/>
-                <a:ea typeface="KoPub돋움체 Light" panose="02020603020101020101" pitchFamily="18" charset="-127"/>
-              </a:rPr>
-              <a:t>QR</a:t>
-            </a:r>
-            <a:r>
-              <a:rPr lang="ko-KR" altLang="en-US" sz="1000" b="1" dirty="0">
-                <a:latin typeface="KoPub돋움체 Light" panose="02020603020101020101" pitchFamily="18" charset="-127"/>
-                <a:ea typeface="KoPub돋움체 Light" panose="02020603020101020101" pitchFamily="18" charset="-127"/>
-              </a:rPr>
-              <a:t>(비난 금지)”</a:t>
-            </a:r>
-          </a:p>
-        </p:txBody>
-      </p:sp>
+        </p:txBody>
+      </p:sp>
+      <p:sp>
+        <p:nvSpPr>
+          <p:cNvPr id="8" name="TextBox 7">
+            <a:extLst>
+              <a:ext uri="{FF2B5EF4-FFF2-40B4-BE49-F238E27FC236}">
+                <a16:creationId xmlns:a16="http://schemas.microsoft.com/office/drawing/2014/main" id="{DAA9A54C-F797-44FB-AB3D-27BD433EFBED}"/>
+              </a:ext>
+            </a:extLst>
+          </p:cNvPr>
+          <p:cNvSpPr txBox="1"/>
+          <p:nvPr/>
+        </p:nvSpPr>
+        <p:spPr>
+          <a:xfrm>
+            <a:off x="914015" y="817009"/>
+            <a:ext cx="1277778" cy="167369"/>
+          </a:xfrm>
+          <a:prstGeom prst="rect">
+            <a:avLst/>
+          </a:prstGeom>
+          <a:noFill/>
+        </p:spPr>
+        <p:txBody>
+          <a:bodyPr wrap="none">
+            <a:spAutoFit/>
+          </a:bodyPr>
+          <a:lstStyle/>
+          <a:p>
+            <a:pPr algn="ctr"/>
+            <a:r>
+              <a:rPr lang="en-US" altLang="ko-KR" sz="494" b="1" dirty="0">
+                <a:latin typeface="KoPub돋움체 Bold" panose="00000800000000000000" pitchFamily="2" charset="-127"/>
+                <a:ea typeface="KoPub돋움체 Bold" panose="00000800000000000000" pitchFamily="2" charset="-127"/>
+              </a:rPr>
+              <a:t>[</a:t>
+            </a:r>
+            <a:r>
+              <a:rPr lang="ko-KR" altLang="en-US" sz="494" b="1" dirty="0">
+                <a:latin typeface="KoPub돋움체 Bold" panose="00000800000000000000" pitchFamily="2" charset="-127"/>
+                <a:ea typeface="KoPub돋움체 Bold" panose="00000800000000000000" pitchFamily="2" charset="-127"/>
+              </a:rPr>
+              <a:t>우리가 가치를 만드는 공간</a:t>
+            </a:r>
+            <a:r>
+              <a:rPr lang="en-US" altLang="ko-KR" sz="494" b="1" dirty="0">
+                <a:latin typeface="KoPub돋움체 Bold" panose="00000800000000000000" pitchFamily="2" charset="-127"/>
+                <a:ea typeface="KoPub돋움체 Bold" panose="00000800000000000000" pitchFamily="2" charset="-127"/>
+              </a:rPr>
+              <a:t>, </a:t>
+            </a:r>
+            <a:r>
+              <a:rPr lang="ko-KR" altLang="en-US" sz="494" b="1" dirty="0" err="1">
+                <a:latin typeface="KoPub돋움체 Bold" panose="00000800000000000000" pitchFamily="2" charset="-127"/>
+                <a:ea typeface="KoPub돋움체 Bold" panose="00000800000000000000" pitchFamily="2" charset="-127"/>
+              </a:rPr>
+              <a:t>우리가치</a:t>
+            </a:r>
+            <a:r>
+              <a:rPr lang="ko-KR" altLang="en-US" sz="494" b="1" dirty="0">
+                <a:latin typeface="KoPub돋움체 Bold" panose="00000800000000000000" pitchFamily="2" charset="-127"/>
+                <a:ea typeface="KoPub돋움체 Bold" panose="00000800000000000000" pitchFamily="2" charset="-127"/>
+              </a:rPr>
+              <a:t> 허브</a:t>
+            </a:r>
+            <a:r>
+              <a:rPr lang="en-US" altLang="ko-KR" sz="494" b="1" dirty="0">
+                <a:latin typeface="KoPub돋움체 Bold" panose="00000800000000000000" pitchFamily="2" charset="-127"/>
+                <a:ea typeface="KoPub돋움체 Bold" panose="00000800000000000000" pitchFamily="2" charset="-127"/>
+              </a:rPr>
+              <a:t>]</a:t>
+            </a:r>
+          </a:p>
+        </p:txBody>
+      </p:sp>
+      <p:pic>
+        <p:nvPicPr>
+          <p:cNvPr id="9" name="그림 8">
+            <a:extLst>
+              <a:ext uri="{FF2B5EF4-FFF2-40B4-BE49-F238E27FC236}">
+                <a16:creationId xmlns:a16="http://schemas.microsoft.com/office/drawing/2014/main" id="{F3A7A373-FECD-4243-98D0-B228302974CA}"/>
+              </a:ext>
+            </a:extLst>
+          </p:cNvPr>
+          <p:cNvPicPr>
+            <a:picLocks noChangeAspect="1"/>
+          </p:cNvPicPr>
+          <p:nvPr/>
+        </p:nvPicPr>
+        <p:blipFill>
+          <a:blip r:embed="rId3"/>
+          <a:stretch>
+            <a:fillRect/>
+          </a:stretch>
+        </p:blipFill>
+        <p:spPr>
+          <a:xfrm>
+            <a:off x="896601" y="716227"/>
+            <a:ext cx="145755" cy="127277"/>
+          </a:xfrm>
+          <a:prstGeom prst="rect">
+            <a:avLst/>
+          </a:prstGeom>
+        </p:spPr>
+      </p:pic>
+      <p:pic>
+        <p:nvPicPr>
+          <p:cNvPr id="11" name="그림 10">
+            <a:extLst>
+              <a:ext uri="{FF2B5EF4-FFF2-40B4-BE49-F238E27FC236}">
+                <a16:creationId xmlns:a16="http://schemas.microsoft.com/office/drawing/2014/main" id="{25D16522-22F0-487F-BE90-3035E8C29235}"/>
+              </a:ext>
+            </a:extLst>
+          </p:cNvPr>
+          <p:cNvPicPr>
+            <a:picLocks noChangeAspect="1"/>
+          </p:cNvPicPr>
+          <p:nvPr/>
+        </p:nvPicPr>
+        <p:blipFill>
+          <a:blip r:embed="rId3"/>
+          <a:stretch>
+            <a:fillRect/>
+          </a:stretch>
+        </p:blipFill>
+        <p:spPr>
+          <a:xfrm rot="10800000">
+            <a:off x="2030965" y="721574"/>
+            <a:ext cx="145753" cy="127277"/>
+          </a:xfrm>
+          <a:prstGeom prst="rect">
+            <a:avLst/>
+          </a:prstGeom>
+        </p:spPr>
+      </p:pic>
     </p:spTree>
     <p:extLst>
       <p:ext uri="{BB962C8B-B14F-4D97-AF65-F5344CB8AC3E}">
-        <p14:creationId xmlns:p14="http://schemas.microsoft.com/office/powerpoint/2010/main" val="2288311154"/>
+        <p14:creationId xmlns:p14="http://schemas.microsoft.com/office/powerpoint/2010/main" val="276754522"/>
       </p:ext>
     </p:extLst>
   </p:cSld>

--- a/documents/명함제작/[2026 우리가치(WeValue) QI 활동 프로젝트 명함1(뒤).pptx
+++ b/documents/명함제작/[2026 우리가치(WeValue) QI 활동 프로젝트 명함1(뒤).pptx
@@ -8,12 +8,12 @@
     <p:notesMasterId r:id="rId8"/>
   </p:notesMasterIdLst>
   <p:sldIdLst>
-    <p:sldId id="308" r:id="rId2"/>
-    <p:sldId id="309" r:id="rId3"/>
-    <p:sldId id="310" r:id="rId4"/>
-    <p:sldId id="311" r:id="rId5"/>
-    <p:sldId id="312" r:id="rId6"/>
-    <p:sldId id="313" r:id="rId7"/>
+    <p:sldId id="313" r:id="rId2"/>
+    <p:sldId id="314" r:id="rId3"/>
+    <p:sldId id="315" r:id="rId4"/>
+    <p:sldId id="316" r:id="rId5"/>
+    <p:sldId id="317" r:id="rId6"/>
+    <p:sldId id="318" r:id="rId7"/>
   </p:sldIdLst>
   <p:sldSz cx="3203575" cy="1800225"/>
   <p:notesSz cx="6858000" cy="9945688"/>
@@ -233,7 +233,7 @@
           <a:p>
             <a:fld id="{F929F65E-AEE7-45C5-814B-4468CAF1E537}" type="datetimeFigureOut">
               <a:rPr lang="ko-KR" altLang="en-US" smtClean="0"/>
-              <a:t>2026-04-29</a:t>
+              <a:t>2026-05-14</a:t>
             </a:fld>
             <a:endParaRPr lang="ko-KR" altLang="en-US"/>
           </a:p>
@@ -631,7 +631,7 @@
           <a:p>
             <a:fld id="{149F34B4-7175-41BD-B98B-2E7021201D7D}" type="datetimeFigureOut">
               <a:rPr lang="ko-KR" altLang="en-US" smtClean="0"/>
-              <a:t>2026-04-29</a:t>
+              <a:t>2026-05-14</a:t>
             </a:fld>
             <a:endParaRPr lang="ko-KR" altLang="en-US"/>
           </a:p>
@@ -801,7 +801,7 @@
           <a:p>
             <a:fld id="{149F34B4-7175-41BD-B98B-2E7021201D7D}" type="datetimeFigureOut">
               <a:rPr lang="ko-KR" altLang="en-US" smtClean="0"/>
-              <a:t>2026-04-29</a:t>
+              <a:t>2026-05-14</a:t>
             </a:fld>
             <a:endParaRPr lang="ko-KR" altLang="en-US"/>
           </a:p>
@@ -981,7 +981,7 @@
           <a:p>
             <a:fld id="{149F34B4-7175-41BD-B98B-2E7021201D7D}" type="datetimeFigureOut">
               <a:rPr lang="ko-KR" altLang="en-US" smtClean="0"/>
-              <a:t>2026-04-29</a:t>
+              <a:t>2026-05-14</a:t>
             </a:fld>
             <a:endParaRPr lang="ko-KR" altLang="en-US"/>
           </a:p>
@@ -1654,7 +1654,7 @@
           <a:p>
             <a:fld id="{149F34B4-7175-41BD-B98B-2E7021201D7D}" type="datetimeFigureOut">
               <a:rPr lang="ko-KR" altLang="en-US" smtClean="0"/>
-              <a:t>2026-04-29</a:t>
+              <a:t>2026-05-14</a:t>
             </a:fld>
             <a:endParaRPr lang="ko-KR" altLang="en-US"/>
           </a:p>
@@ -1900,7 +1900,7 @@
           <a:p>
             <a:fld id="{149F34B4-7175-41BD-B98B-2E7021201D7D}" type="datetimeFigureOut">
               <a:rPr lang="ko-KR" altLang="en-US" smtClean="0"/>
-              <a:t>2026-04-29</a:t>
+              <a:t>2026-05-14</a:t>
             </a:fld>
             <a:endParaRPr lang="ko-KR" altLang="en-US"/>
           </a:p>
@@ -2132,7 +2132,7 @@
           <a:p>
             <a:fld id="{149F34B4-7175-41BD-B98B-2E7021201D7D}" type="datetimeFigureOut">
               <a:rPr lang="ko-KR" altLang="en-US" smtClean="0"/>
-              <a:t>2026-04-29</a:t>
+              <a:t>2026-05-14</a:t>
             </a:fld>
             <a:endParaRPr lang="ko-KR" altLang="en-US"/>
           </a:p>
@@ -2499,7 +2499,7 @@
           <a:p>
             <a:fld id="{149F34B4-7175-41BD-B98B-2E7021201D7D}" type="datetimeFigureOut">
               <a:rPr lang="ko-KR" altLang="en-US" smtClean="0"/>
-              <a:t>2026-04-29</a:t>
+              <a:t>2026-05-14</a:t>
             </a:fld>
             <a:endParaRPr lang="ko-KR" altLang="en-US"/>
           </a:p>
@@ -2617,7 +2617,7 @@
           <a:p>
             <a:fld id="{149F34B4-7175-41BD-B98B-2E7021201D7D}" type="datetimeFigureOut">
               <a:rPr lang="ko-KR" altLang="en-US" smtClean="0"/>
-              <a:t>2026-04-29</a:t>
+              <a:t>2026-05-14</a:t>
             </a:fld>
             <a:endParaRPr lang="ko-KR" altLang="en-US"/>
           </a:p>
@@ -2712,7 +2712,7 @@
           <a:p>
             <a:fld id="{149F34B4-7175-41BD-B98B-2E7021201D7D}" type="datetimeFigureOut">
               <a:rPr lang="ko-KR" altLang="en-US" smtClean="0"/>
-              <a:t>2026-04-29</a:t>
+              <a:t>2026-05-14</a:t>
             </a:fld>
             <a:endParaRPr lang="ko-KR" altLang="en-US"/>
           </a:p>
@@ -2989,7 +2989,7 @@
           <a:p>
             <a:fld id="{149F34B4-7175-41BD-B98B-2E7021201D7D}" type="datetimeFigureOut">
               <a:rPr lang="ko-KR" altLang="en-US" smtClean="0"/>
-              <a:t>2026-04-29</a:t>
+              <a:t>2026-05-14</a:t>
             </a:fld>
             <a:endParaRPr lang="ko-KR" altLang="en-US"/>
           </a:p>
@@ -3246,7 +3246,7 @@
           <a:p>
             <a:fld id="{149F34B4-7175-41BD-B98B-2E7021201D7D}" type="datetimeFigureOut">
               <a:rPr lang="ko-KR" altLang="en-US" smtClean="0"/>
-              <a:t>2026-04-29</a:t>
+              <a:t>2026-05-14</a:t>
             </a:fld>
             <a:endParaRPr lang="ko-KR" altLang="en-US"/>
           </a:p>
@@ -3459,7 +3459,7 @@
           <a:p>
             <a:fld id="{149F34B4-7175-41BD-B98B-2E7021201D7D}" type="datetimeFigureOut">
               <a:rPr lang="ko-KR" altLang="en-US" smtClean="0"/>
-              <a:t>2026-04-29</a:t>
+              <a:t>2026-05-14</a:t>
             </a:fld>
             <a:endParaRPr lang="ko-KR" altLang="en-US"/>
           </a:p>
@@ -3873,7 +3873,7 @@
         <p:cNvPr id="1" name="">
           <a:extLst>
             <a:ext uri="{FF2B5EF4-FFF2-40B4-BE49-F238E27FC236}">
-              <a16:creationId xmlns:a16="http://schemas.microsoft.com/office/drawing/2014/main" id="{4B91BF69-B73E-E52D-A273-34695C83C39D}"/>
+              <a16:creationId xmlns:a16="http://schemas.microsoft.com/office/drawing/2014/main" id="{8EC986D4-BAF5-DEE8-7F99-1274EA61B13A}"/>
             </a:ext>
           </a:extLst>
         </p:cNvPr>
@@ -3893,7 +3893,7 @@
           <p:cNvPr id="4" name="Picture 1">
             <a:extLst>
               <a:ext uri="{FF2B5EF4-FFF2-40B4-BE49-F238E27FC236}">
-                <a16:creationId xmlns:a16="http://schemas.microsoft.com/office/drawing/2014/main" id="{480AF66F-CB5C-451A-847A-EB60BA58025A}"/>
+                <a16:creationId xmlns:a16="http://schemas.microsoft.com/office/drawing/2014/main" id="{AF22DEA8-A306-34D0-1F99-0F31BB7F57C6}"/>
               </a:ext>
             </a:extLst>
           </p:cNvPr>
@@ -3910,8 +3910,8 @@
         </p:blipFill>
         <p:spPr>
           <a:xfrm>
-            <a:off x="834546" y="1018696"/>
-            <a:ext cx="355023" cy="200754"/>
+            <a:off x="147393" y="129534"/>
+            <a:ext cx="544284" cy="307776"/>
           </a:xfrm>
           <a:prstGeom prst="rect">
             <a:avLst/>
@@ -3928,7 +3928,7 @@
           <p:cNvPr id="5" name="TextBox 4">
             <a:extLst>
               <a:ext uri="{FF2B5EF4-FFF2-40B4-BE49-F238E27FC236}">
-                <a16:creationId xmlns:a16="http://schemas.microsoft.com/office/drawing/2014/main" id="{5D20D6DC-7FD8-414D-8D41-7397E6AB51D5}"/>
+                <a16:creationId xmlns:a16="http://schemas.microsoft.com/office/drawing/2014/main" id="{D380C6B7-6760-F865-BECF-4D4E1585194B}"/>
               </a:ext>
             </a:extLst>
           </p:cNvPr>
@@ -3937,8 +3937,8 @@
         </p:nvSpPr>
         <p:spPr>
           <a:xfrm>
-            <a:off x="1138753" y="1035390"/>
-            <a:ext cx="1233714" cy="167369"/>
+            <a:off x="1402907" y="1475898"/>
+            <a:ext cx="1590324" cy="200055"/>
           </a:xfrm>
           <a:prstGeom prst="rect">
             <a:avLst/>
@@ -3953,86 +3953,7 @@
           <a:p>
             <a:pPr algn="ctr"/>
             <a:r>
-              <a:rPr lang="ko-KR" altLang="en-US" sz="494" b="1" dirty="0">
-                <a:solidFill>
-                  <a:srgbClr val="4472C4"/>
-                </a:solidFill>
-                <a:latin typeface="KoPub돋움체 Bold" panose="02020603020101020101" pitchFamily="18" charset="-127"/>
-                <a:ea typeface="KoPub돋움체 Bold" panose="02020603020101020101" pitchFamily="18" charset="-127"/>
-              </a:rPr>
-              <a:t>순천향대학교 천안병원 </a:t>
-            </a:r>
-            <a:r>
-              <a:rPr lang="en-US" altLang="ko-KR" sz="494" b="1" dirty="0">
-                <a:solidFill>
-                  <a:srgbClr val="4472C4"/>
-                </a:solidFill>
-                <a:latin typeface="KoPub돋움체 Bold" panose="02020603020101020101" pitchFamily="18" charset="-127"/>
-                <a:ea typeface="KoPub돋움체 Bold" panose="02020603020101020101" pitchFamily="18" charset="-127"/>
-              </a:rPr>
-              <a:t>| </a:t>
-            </a:r>
-            <a:r>
-              <a:rPr lang="ko-KR" altLang="en-US" sz="494" b="1" dirty="0">
-                <a:solidFill>
-                  <a:srgbClr val="4472C4"/>
-                </a:solidFill>
-                <a:latin typeface="KoPub돋움체 Bold" panose="02020603020101020101" pitchFamily="18" charset="-127"/>
-                <a:ea typeface="KoPub돋움체 Bold" panose="02020603020101020101" pitchFamily="18" charset="-127"/>
-              </a:rPr>
-              <a:t>진료지원간호팀</a:t>
-            </a:r>
-            <a:endParaRPr lang="ko-KR" altLang="en-US" sz="593" b="1" dirty="0">
-              <a:solidFill>
-                <a:srgbClr val="4472C4"/>
-              </a:solidFill>
-              <a:latin typeface="KoPub돋움체 Bold" panose="02020603020101020101" pitchFamily="18" charset="-127"/>
-              <a:ea typeface="KoPub돋움체 Bold" panose="02020603020101020101" pitchFamily="18" charset="-127"/>
-            </a:endParaRPr>
-          </a:p>
-        </p:txBody>
-      </p:sp>
-      <p:sp>
-        <p:nvSpPr>
-          <p:cNvPr id="7" name="TextBox 6">
-            <a:extLst>
-              <a:ext uri="{FF2B5EF4-FFF2-40B4-BE49-F238E27FC236}">
-                <a16:creationId xmlns:a16="http://schemas.microsoft.com/office/drawing/2014/main" id="{568CE481-19EF-4F97-AF73-265FDB83283E}"/>
-              </a:ext>
-            </a:extLst>
-          </p:cNvPr>
-          <p:cNvSpPr txBox="1"/>
-          <p:nvPr/>
-        </p:nvSpPr>
-        <p:spPr>
-          <a:xfrm>
-            <a:off x="1007527" y="671882"/>
-            <a:ext cx="1090755" cy="228231"/>
-          </a:xfrm>
-          <a:prstGeom prst="rect">
-            <a:avLst/>
-          </a:prstGeom>
-          <a:noFill/>
-        </p:spPr>
-        <p:txBody>
-          <a:bodyPr wrap="none">
-            <a:spAutoFit/>
-          </a:bodyPr>
-          <a:lstStyle/>
-          <a:p>
-            <a:pPr algn="ctr"/>
-            <a:r>
-              <a:rPr lang="ko-KR" altLang="en-US" sz="890" dirty="0" err="1">
-                <a:solidFill>
-                  <a:srgbClr val="00B0F0"/>
-                </a:solidFill>
-                <a:latin typeface="KoPub돋움체 Bold" panose="00000800000000000000" pitchFamily="2" charset="-127"/>
-                <a:ea typeface="KoPub돋움체 Bold" panose="00000800000000000000" pitchFamily="2" charset="-127"/>
-              </a:rPr>
-              <a:t>우리가치</a:t>
-            </a:r>
-            <a:r>
-              <a:rPr lang="ko-KR" altLang="en-US" sz="890" dirty="0">
+              <a:rPr lang="ko-KR" altLang="en-US" sz="700" b="1" dirty="0">
                 <a:solidFill>
                   <a:schemeClr val="accent1">
                     <a:lumMod val="50000"/>
@@ -4041,10 +3962,97 @@
                 <a:latin typeface="KoPub돋움체 Bold" panose="02020603020101020101" pitchFamily="18" charset="-127"/>
                 <a:ea typeface="KoPub돋움체 Bold" panose="02020603020101020101" pitchFamily="18" charset="-127"/>
               </a:rPr>
+              <a:t>순천향대학교 천안병원</a:t>
+            </a:r>
+            <a:r>
+              <a:rPr lang="en-US" altLang="ko-KR" sz="700" b="1" dirty="0">
+                <a:solidFill>
+                  <a:schemeClr val="accent1">
+                    <a:lumMod val="50000"/>
+                  </a:schemeClr>
+                </a:solidFill>
+                <a:latin typeface="KoPub돋움체 Bold" panose="02020603020101020101" pitchFamily="18" charset="-127"/>
+                <a:ea typeface="KoPub돋움체 Bold" panose="02020603020101020101" pitchFamily="18" charset="-127"/>
+              </a:rPr>
               <a:t> </a:t>
             </a:r>
             <a:r>
-              <a:rPr lang="en-US" altLang="ko-KR" sz="890" dirty="0" err="1">
+              <a:rPr lang="ko-KR" altLang="en-US" sz="700" b="1" dirty="0">
+                <a:solidFill>
+                  <a:schemeClr val="accent1">
+                    <a:lumMod val="50000"/>
+                  </a:schemeClr>
+                </a:solidFill>
+                <a:latin typeface="KoPub돋움체 Bold" panose="02020603020101020101" pitchFamily="18" charset="-127"/>
+                <a:ea typeface="KoPub돋움체 Bold" panose="02020603020101020101" pitchFamily="18" charset="-127"/>
+              </a:rPr>
+              <a:t>진료지원간호팀</a:t>
+            </a:r>
+            <a:endParaRPr lang="ko-KR" altLang="en-US" sz="800" b="1" dirty="0">
+              <a:solidFill>
+                <a:schemeClr val="accent1">
+                  <a:lumMod val="50000"/>
+                </a:schemeClr>
+              </a:solidFill>
+              <a:latin typeface="KoPub돋움체 Bold" panose="02020603020101020101" pitchFamily="18" charset="-127"/>
+              <a:ea typeface="KoPub돋움체 Bold" panose="02020603020101020101" pitchFamily="18" charset="-127"/>
+            </a:endParaRPr>
+          </a:p>
+        </p:txBody>
+      </p:sp>
+      <p:sp>
+        <p:nvSpPr>
+          <p:cNvPr id="7" name="TextBox 6">
+            <a:extLst>
+              <a:ext uri="{FF2B5EF4-FFF2-40B4-BE49-F238E27FC236}">
+                <a16:creationId xmlns:a16="http://schemas.microsoft.com/office/drawing/2014/main" id="{D28D80AE-03D3-F2B8-8A05-3F7A1BA6DCF9}"/>
+              </a:ext>
+            </a:extLst>
+          </p:cNvPr>
+          <p:cNvSpPr txBox="1"/>
+          <p:nvPr/>
+        </p:nvSpPr>
+        <p:spPr>
+          <a:xfrm>
+            <a:off x="675817" y="642967"/>
+            <a:ext cx="1845506" cy="338554"/>
+          </a:xfrm>
+          <a:prstGeom prst="rect">
+            <a:avLst/>
+          </a:prstGeom>
+          <a:noFill/>
+        </p:spPr>
+        <p:txBody>
+          <a:bodyPr wrap="none">
+            <a:spAutoFit/>
+          </a:bodyPr>
+          <a:lstStyle/>
+          <a:p>
+            <a:pPr algn="ctr"/>
+            <a:r>
+              <a:rPr lang="ko-KR" altLang="en-US" sz="1600" dirty="0" err="1">
+                <a:solidFill>
+                  <a:srgbClr val="00B0F0"/>
+                </a:solidFill>
+                <a:latin typeface="Noto Sans KR Black" panose="020B0200000000000000" pitchFamily="50" charset="-127"/>
+                <a:ea typeface="Noto Sans KR Black" panose="020B0200000000000000" pitchFamily="50" charset="-127"/>
+              </a:rPr>
+              <a:t>우리가치</a:t>
+            </a:r>
+            <a:r>
+              <a:rPr lang="ko-KR" altLang="en-US" sz="1600" dirty="0">
+                <a:solidFill>
+                  <a:schemeClr val="accent1">
+                    <a:lumMod val="50000"/>
+                  </a:schemeClr>
+                </a:solidFill>
+                <a:latin typeface="KoPub돋움체 Bold" panose="02020603020101020101" pitchFamily="18" charset="-127"/>
+                <a:ea typeface="KoPub돋움체 Bold" panose="02020603020101020101" pitchFamily="18" charset="-127"/>
+              </a:rPr>
+              <a:t> </a:t>
+            </a:r>
+            <a:r>
+              <a:rPr lang="en-US" altLang="ko-KR" sz="1600" dirty="0" err="1">
                 <a:solidFill>
                   <a:schemeClr val="accent1">
                     <a:lumMod val="50000"/>
@@ -4055,7 +4063,7 @@
               </a:rPr>
               <a:t>WeValue</a:t>
             </a:r>
-            <a:endParaRPr lang="en-US" altLang="ko-KR" sz="890" dirty="0">
+            <a:endParaRPr lang="en-US" altLang="ko-KR" sz="1600" dirty="0">
               <a:solidFill>
                 <a:schemeClr val="accent1">
                   <a:lumMod val="50000"/>
@@ -4072,7 +4080,7 @@
           <p:cNvPr id="8" name="TextBox 7">
             <a:extLst>
               <a:ext uri="{FF2B5EF4-FFF2-40B4-BE49-F238E27FC236}">
-                <a16:creationId xmlns:a16="http://schemas.microsoft.com/office/drawing/2014/main" id="{DAA9A54C-F797-44FB-AB3D-27BD433EFBED}"/>
+                <a16:creationId xmlns:a16="http://schemas.microsoft.com/office/drawing/2014/main" id="{52DDB2F9-FF05-08A5-57BD-1D2DD06502A8}"/>
               </a:ext>
             </a:extLst>
           </p:cNvPr>
@@ -4081,8 +4089,8 @@
         </p:nvSpPr>
         <p:spPr>
           <a:xfrm>
-            <a:off x="914015" y="817009"/>
-            <a:ext cx="1277778" cy="167369"/>
+            <a:off x="619776" y="900112"/>
+            <a:ext cx="1957587" cy="215444"/>
           </a:xfrm>
           <a:prstGeom prst="rect">
             <a:avLst/>
@@ -4097,42 +4105,42 @@
           <a:p>
             <a:pPr algn="ctr"/>
             <a:r>
-              <a:rPr lang="en-US" altLang="ko-KR" sz="494" b="1" dirty="0">
+              <a:rPr lang="en-US" altLang="ko-KR" sz="800" b="1" dirty="0">
                 <a:latin typeface="KoPub돋움체 Bold" panose="00000800000000000000" pitchFamily="2" charset="-127"/>
                 <a:ea typeface="KoPub돋움체 Bold" panose="00000800000000000000" pitchFamily="2" charset="-127"/>
               </a:rPr>
               <a:t>[</a:t>
             </a:r>
             <a:r>
-              <a:rPr lang="ko-KR" altLang="en-US" sz="494" b="1" dirty="0">
+              <a:rPr lang="ko-KR" altLang="en-US" sz="800" b="1" dirty="0">
                 <a:latin typeface="KoPub돋움체 Bold" panose="00000800000000000000" pitchFamily="2" charset="-127"/>
                 <a:ea typeface="KoPub돋움체 Bold" panose="00000800000000000000" pitchFamily="2" charset="-127"/>
               </a:rPr>
               <a:t>우리가 가치를 만드는 공간</a:t>
             </a:r>
             <a:r>
-              <a:rPr lang="en-US" altLang="ko-KR" sz="494" b="1" dirty="0">
+              <a:rPr lang="en-US" altLang="ko-KR" sz="800" b="1" dirty="0">
                 <a:latin typeface="KoPub돋움체 Bold" panose="00000800000000000000" pitchFamily="2" charset="-127"/>
                 <a:ea typeface="KoPub돋움체 Bold" panose="00000800000000000000" pitchFamily="2" charset="-127"/>
               </a:rPr>
               <a:t>, </a:t>
             </a:r>
             <a:r>
-              <a:rPr lang="ko-KR" altLang="en-US" sz="494" b="1" dirty="0" err="1">
+              <a:rPr lang="ko-KR" altLang="en-US" sz="800" b="1" dirty="0" err="1">
                 <a:latin typeface="KoPub돋움체 Bold" panose="00000800000000000000" pitchFamily="2" charset="-127"/>
                 <a:ea typeface="KoPub돋움체 Bold" panose="00000800000000000000" pitchFamily="2" charset="-127"/>
               </a:rPr>
               <a:t>우리가치</a:t>
             </a:r>
             <a:r>
-              <a:rPr lang="ko-KR" altLang="en-US" sz="494" b="1" dirty="0">
+              <a:rPr lang="ko-KR" altLang="en-US" sz="800" b="1" dirty="0">
                 <a:latin typeface="KoPub돋움체 Bold" panose="00000800000000000000" pitchFamily="2" charset="-127"/>
                 <a:ea typeface="KoPub돋움체 Bold" panose="00000800000000000000" pitchFamily="2" charset="-127"/>
               </a:rPr>
               <a:t> 허브</a:t>
             </a:r>
             <a:r>
-              <a:rPr lang="en-US" altLang="ko-KR" sz="494" b="1" dirty="0">
+              <a:rPr lang="en-US" altLang="ko-KR" sz="800" b="1" dirty="0">
                 <a:latin typeface="KoPub돋움체 Bold" panose="00000800000000000000" pitchFamily="2" charset="-127"/>
                 <a:ea typeface="KoPub돋움체 Bold" panose="00000800000000000000" pitchFamily="2" charset="-127"/>
               </a:rPr>
@@ -4146,7 +4154,7 @@
           <p:cNvPr id="9" name="그림 8">
             <a:extLst>
               <a:ext uri="{FF2B5EF4-FFF2-40B4-BE49-F238E27FC236}">
-                <a16:creationId xmlns:a16="http://schemas.microsoft.com/office/drawing/2014/main" id="{F3A7A373-FECD-4243-98D0-B228302974CA}"/>
+                <a16:creationId xmlns:a16="http://schemas.microsoft.com/office/drawing/2014/main" id="{FCD1B85C-B062-B8A7-819F-32DA94B53AA1}"/>
               </a:ext>
             </a:extLst>
           </p:cNvPr>
@@ -4163,8 +4171,8 @@
         </p:blipFill>
         <p:spPr>
           <a:xfrm>
-            <a:off x="896601" y="716227"/>
-            <a:ext cx="145755" cy="127277"/>
+            <a:off x="603724" y="642969"/>
+            <a:ext cx="175906" cy="153604"/>
           </a:xfrm>
           <a:prstGeom prst="rect">
             <a:avLst/>
@@ -4176,7 +4184,7 @@
           <p:cNvPr id="11" name="그림 10">
             <a:extLst>
               <a:ext uri="{FF2B5EF4-FFF2-40B4-BE49-F238E27FC236}">
-                <a16:creationId xmlns:a16="http://schemas.microsoft.com/office/drawing/2014/main" id="{25D16522-22F0-487F-BE90-3035E8C29235}"/>
+                <a16:creationId xmlns:a16="http://schemas.microsoft.com/office/drawing/2014/main" id="{D353123D-53AF-85A4-0726-2067D1069614}"/>
               </a:ext>
             </a:extLst>
           </p:cNvPr>
@@ -4193,8 +4201,8 @@
         </p:blipFill>
         <p:spPr>
           <a:xfrm rot="10800000">
-            <a:off x="2030965" y="721574"/>
-            <a:ext cx="145753" cy="127277"/>
+            <a:off x="2423948" y="642967"/>
+            <a:ext cx="175902" cy="153606"/>
           </a:xfrm>
           <a:prstGeom prst="rect">
             <a:avLst/>
@@ -4204,7 +4212,7 @@
     </p:spTree>
     <p:extLst>
       <p:ext uri="{BB962C8B-B14F-4D97-AF65-F5344CB8AC3E}">
-        <p14:creationId xmlns:p14="http://schemas.microsoft.com/office/powerpoint/2010/main" val="1592464754"/>
+        <p14:creationId xmlns:p14="http://schemas.microsoft.com/office/powerpoint/2010/main" val="2147805790"/>
       </p:ext>
     </p:extLst>
   </p:cSld>
@@ -4222,7 +4230,7 @@
         <p:cNvPr id="1" name="">
           <a:extLst>
             <a:ext uri="{FF2B5EF4-FFF2-40B4-BE49-F238E27FC236}">
-              <a16:creationId xmlns:a16="http://schemas.microsoft.com/office/drawing/2014/main" id="{4B91BF69-B73E-E52D-A273-34695C83C39D}"/>
+              <a16:creationId xmlns:a16="http://schemas.microsoft.com/office/drawing/2014/main" id="{52F88161-BA4B-95A6-3012-9B3EA1F5127B}"/>
             </a:ext>
           </a:extLst>
         </p:cNvPr>
@@ -4242,7 +4250,7 @@
           <p:cNvPr id="4" name="Picture 1">
             <a:extLst>
               <a:ext uri="{FF2B5EF4-FFF2-40B4-BE49-F238E27FC236}">
-                <a16:creationId xmlns:a16="http://schemas.microsoft.com/office/drawing/2014/main" id="{480AF66F-CB5C-451A-847A-EB60BA58025A}"/>
+                <a16:creationId xmlns:a16="http://schemas.microsoft.com/office/drawing/2014/main" id="{08107745-8B12-8357-0A2F-461F3E33DBFD}"/>
               </a:ext>
             </a:extLst>
           </p:cNvPr>
@@ -4259,8 +4267,8 @@
         </p:blipFill>
         <p:spPr>
           <a:xfrm>
-            <a:off x="834546" y="1018696"/>
-            <a:ext cx="355023" cy="200754"/>
+            <a:off x="147393" y="129534"/>
+            <a:ext cx="544284" cy="307776"/>
           </a:xfrm>
           <a:prstGeom prst="rect">
             <a:avLst/>
@@ -4277,7 +4285,7 @@
           <p:cNvPr id="5" name="TextBox 4">
             <a:extLst>
               <a:ext uri="{FF2B5EF4-FFF2-40B4-BE49-F238E27FC236}">
-                <a16:creationId xmlns:a16="http://schemas.microsoft.com/office/drawing/2014/main" id="{5D20D6DC-7FD8-414D-8D41-7397E6AB51D5}"/>
+                <a16:creationId xmlns:a16="http://schemas.microsoft.com/office/drawing/2014/main" id="{2262E1BD-F7DC-A961-8DA6-DABE1EC3DDB7}"/>
               </a:ext>
             </a:extLst>
           </p:cNvPr>
@@ -4286,8 +4294,8 @@
         </p:nvSpPr>
         <p:spPr>
           <a:xfrm>
-            <a:off x="1138753" y="1035390"/>
-            <a:ext cx="1233714" cy="167369"/>
+            <a:off x="1402907" y="1475898"/>
+            <a:ext cx="1590324" cy="200055"/>
           </a:xfrm>
           <a:prstGeom prst="rect">
             <a:avLst/>
@@ -4302,86 +4310,7 @@
           <a:p>
             <a:pPr algn="ctr"/>
             <a:r>
-              <a:rPr lang="ko-KR" altLang="en-US" sz="494" b="1" dirty="0">
-                <a:solidFill>
-                  <a:srgbClr val="4472C4"/>
-                </a:solidFill>
-                <a:latin typeface="KoPub돋움체 Bold" panose="02020603020101020101" pitchFamily="18" charset="-127"/>
-                <a:ea typeface="KoPub돋움체 Bold" panose="02020603020101020101" pitchFamily="18" charset="-127"/>
-              </a:rPr>
-              <a:t>순천향대학교 천안병원 </a:t>
-            </a:r>
-            <a:r>
-              <a:rPr lang="en-US" altLang="ko-KR" sz="494" b="1" dirty="0">
-                <a:solidFill>
-                  <a:srgbClr val="4472C4"/>
-                </a:solidFill>
-                <a:latin typeface="KoPub돋움체 Bold" panose="02020603020101020101" pitchFamily="18" charset="-127"/>
-                <a:ea typeface="KoPub돋움체 Bold" panose="02020603020101020101" pitchFamily="18" charset="-127"/>
-              </a:rPr>
-              <a:t>| </a:t>
-            </a:r>
-            <a:r>
-              <a:rPr lang="ko-KR" altLang="en-US" sz="494" b="1" dirty="0">
-                <a:solidFill>
-                  <a:srgbClr val="4472C4"/>
-                </a:solidFill>
-                <a:latin typeface="KoPub돋움체 Bold" panose="02020603020101020101" pitchFamily="18" charset="-127"/>
-                <a:ea typeface="KoPub돋움체 Bold" panose="02020603020101020101" pitchFamily="18" charset="-127"/>
-              </a:rPr>
-              <a:t>진료지원간호팀</a:t>
-            </a:r>
-            <a:endParaRPr lang="ko-KR" altLang="en-US" sz="593" b="1" dirty="0">
-              <a:solidFill>
-                <a:srgbClr val="4472C4"/>
-              </a:solidFill>
-              <a:latin typeface="KoPub돋움체 Bold" panose="02020603020101020101" pitchFamily="18" charset="-127"/>
-              <a:ea typeface="KoPub돋움체 Bold" panose="02020603020101020101" pitchFamily="18" charset="-127"/>
-            </a:endParaRPr>
-          </a:p>
-        </p:txBody>
-      </p:sp>
-      <p:sp>
-        <p:nvSpPr>
-          <p:cNvPr id="7" name="TextBox 6">
-            <a:extLst>
-              <a:ext uri="{FF2B5EF4-FFF2-40B4-BE49-F238E27FC236}">
-                <a16:creationId xmlns:a16="http://schemas.microsoft.com/office/drawing/2014/main" id="{568CE481-19EF-4F97-AF73-265FDB83283E}"/>
-              </a:ext>
-            </a:extLst>
-          </p:cNvPr>
-          <p:cNvSpPr txBox="1"/>
-          <p:nvPr/>
-        </p:nvSpPr>
-        <p:spPr>
-          <a:xfrm>
-            <a:off x="1007527" y="671882"/>
-            <a:ext cx="1090755" cy="228231"/>
-          </a:xfrm>
-          <a:prstGeom prst="rect">
-            <a:avLst/>
-          </a:prstGeom>
-          <a:noFill/>
-        </p:spPr>
-        <p:txBody>
-          <a:bodyPr wrap="none">
-            <a:spAutoFit/>
-          </a:bodyPr>
-          <a:lstStyle/>
-          <a:p>
-            <a:pPr algn="ctr"/>
-            <a:r>
-              <a:rPr lang="ko-KR" altLang="en-US" sz="890" dirty="0" err="1">
-                <a:solidFill>
-                  <a:srgbClr val="00B0F0"/>
-                </a:solidFill>
-                <a:latin typeface="KoPub돋움체 Bold" panose="00000800000000000000" pitchFamily="2" charset="-127"/>
-                <a:ea typeface="KoPub돋움체 Bold" panose="00000800000000000000" pitchFamily="2" charset="-127"/>
-              </a:rPr>
-              <a:t>우리가치</a:t>
-            </a:r>
-            <a:r>
-              <a:rPr lang="ko-KR" altLang="en-US" sz="890" dirty="0">
+              <a:rPr lang="ko-KR" altLang="en-US" sz="700" b="1" dirty="0">
                 <a:solidFill>
                   <a:schemeClr val="accent1">
                     <a:lumMod val="50000"/>
@@ -4390,10 +4319,97 @@
                 <a:latin typeface="KoPub돋움체 Bold" panose="02020603020101020101" pitchFamily="18" charset="-127"/>
                 <a:ea typeface="KoPub돋움체 Bold" panose="02020603020101020101" pitchFamily="18" charset="-127"/>
               </a:rPr>
+              <a:t>순천향대학교 천안병원</a:t>
+            </a:r>
+            <a:r>
+              <a:rPr lang="en-US" altLang="ko-KR" sz="700" b="1" dirty="0">
+                <a:solidFill>
+                  <a:schemeClr val="accent1">
+                    <a:lumMod val="50000"/>
+                  </a:schemeClr>
+                </a:solidFill>
+                <a:latin typeface="KoPub돋움체 Bold" panose="02020603020101020101" pitchFamily="18" charset="-127"/>
+                <a:ea typeface="KoPub돋움체 Bold" panose="02020603020101020101" pitchFamily="18" charset="-127"/>
+              </a:rPr>
               <a:t> </a:t>
             </a:r>
             <a:r>
-              <a:rPr lang="en-US" altLang="ko-KR" sz="890" dirty="0" err="1">
+              <a:rPr lang="ko-KR" altLang="en-US" sz="700" b="1" dirty="0">
+                <a:solidFill>
+                  <a:schemeClr val="accent1">
+                    <a:lumMod val="50000"/>
+                  </a:schemeClr>
+                </a:solidFill>
+                <a:latin typeface="KoPub돋움체 Bold" panose="02020603020101020101" pitchFamily="18" charset="-127"/>
+                <a:ea typeface="KoPub돋움체 Bold" panose="02020603020101020101" pitchFamily="18" charset="-127"/>
+              </a:rPr>
+              <a:t>진료지원간호팀</a:t>
+            </a:r>
+            <a:endParaRPr lang="ko-KR" altLang="en-US" sz="800" b="1" dirty="0">
+              <a:solidFill>
+                <a:schemeClr val="accent1">
+                  <a:lumMod val="50000"/>
+                </a:schemeClr>
+              </a:solidFill>
+              <a:latin typeface="KoPub돋움체 Bold" panose="02020603020101020101" pitchFamily="18" charset="-127"/>
+              <a:ea typeface="KoPub돋움체 Bold" panose="02020603020101020101" pitchFamily="18" charset="-127"/>
+            </a:endParaRPr>
+          </a:p>
+        </p:txBody>
+      </p:sp>
+      <p:sp>
+        <p:nvSpPr>
+          <p:cNvPr id="7" name="TextBox 6">
+            <a:extLst>
+              <a:ext uri="{FF2B5EF4-FFF2-40B4-BE49-F238E27FC236}">
+                <a16:creationId xmlns:a16="http://schemas.microsoft.com/office/drawing/2014/main" id="{8958C8E4-6F7C-FE0C-CE8A-5D19C1C7CECC}"/>
+              </a:ext>
+            </a:extLst>
+          </p:cNvPr>
+          <p:cNvSpPr txBox="1"/>
+          <p:nvPr/>
+        </p:nvSpPr>
+        <p:spPr>
+          <a:xfrm>
+            <a:off x="675817" y="642967"/>
+            <a:ext cx="1845506" cy="338554"/>
+          </a:xfrm>
+          <a:prstGeom prst="rect">
+            <a:avLst/>
+          </a:prstGeom>
+          <a:noFill/>
+        </p:spPr>
+        <p:txBody>
+          <a:bodyPr wrap="none">
+            <a:spAutoFit/>
+          </a:bodyPr>
+          <a:lstStyle/>
+          <a:p>
+            <a:pPr algn="ctr"/>
+            <a:r>
+              <a:rPr lang="ko-KR" altLang="en-US" sz="1600" dirty="0" err="1">
+                <a:solidFill>
+                  <a:srgbClr val="00B0F0"/>
+                </a:solidFill>
+                <a:latin typeface="Noto Sans KR Black" panose="020B0200000000000000" pitchFamily="50" charset="-127"/>
+                <a:ea typeface="Noto Sans KR Black" panose="020B0200000000000000" pitchFamily="50" charset="-127"/>
+              </a:rPr>
+              <a:t>우리가치</a:t>
+            </a:r>
+            <a:r>
+              <a:rPr lang="ko-KR" altLang="en-US" sz="1600" dirty="0">
+                <a:solidFill>
+                  <a:schemeClr val="accent1">
+                    <a:lumMod val="50000"/>
+                  </a:schemeClr>
+                </a:solidFill>
+                <a:latin typeface="KoPub돋움체 Bold" panose="02020603020101020101" pitchFamily="18" charset="-127"/>
+                <a:ea typeface="KoPub돋움체 Bold" panose="02020603020101020101" pitchFamily="18" charset="-127"/>
+              </a:rPr>
+              <a:t> </a:t>
+            </a:r>
+            <a:r>
+              <a:rPr lang="en-US" altLang="ko-KR" sz="1600" dirty="0" err="1">
                 <a:solidFill>
                   <a:schemeClr val="accent1">
                     <a:lumMod val="50000"/>
@@ -4404,7 +4420,7 @@
               </a:rPr>
               <a:t>WeValue</a:t>
             </a:r>
-            <a:endParaRPr lang="en-US" altLang="ko-KR" sz="890" dirty="0">
+            <a:endParaRPr lang="en-US" altLang="ko-KR" sz="1600" dirty="0">
               <a:solidFill>
                 <a:schemeClr val="accent1">
                   <a:lumMod val="50000"/>
@@ -4421,7 +4437,7 @@
           <p:cNvPr id="8" name="TextBox 7">
             <a:extLst>
               <a:ext uri="{FF2B5EF4-FFF2-40B4-BE49-F238E27FC236}">
-                <a16:creationId xmlns:a16="http://schemas.microsoft.com/office/drawing/2014/main" id="{DAA9A54C-F797-44FB-AB3D-27BD433EFBED}"/>
+                <a16:creationId xmlns:a16="http://schemas.microsoft.com/office/drawing/2014/main" id="{D6220925-B894-D490-340D-A4AF2853075D}"/>
               </a:ext>
             </a:extLst>
           </p:cNvPr>
@@ -4430,8 +4446,8 @@
         </p:nvSpPr>
         <p:spPr>
           <a:xfrm>
-            <a:off x="914015" y="817009"/>
-            <a:ext cx="1277778" cy="167369"/>
+            <a:off x="619776" y="900112"/>
+            <a:ext cx="1957587" cy="215444"/>
           </a:xfrm>
           <a:prstGeom prst="rect">
             <a:avLst/>
@@ -4446,42 +4462,42 @@
           <a:p>
             <a:pPr algn="ctr"/>
             <a:r>
-              <a:rPr lang="en-US" altLang="ko-KR" sz="494" b="1" dirty="0">
+              <a:rPr lang="en-US" altLang="ko-KR" sz="800" b="1" dirty="0">
                 <a:latin typeface="KoPub돋움체 Bold" panose="00000800000000000000" pitchFamily="2" charset="-127"/>
                 <a:ea typeface="KoPub돋움체 Bold" panose="00000800000000000000" pitchFamily="2" charset="-127"/>
               </a:rPr>
               <a:t>[</a:t>
             </a:r>
             <a:r>
-              <a:rPr lang="ko-KR" altLang="en-US" sz="494" b="1" dirty="0">
+              <a:rPr lang="ko-KR" altLang="en-US" sz="800" b="1" dirty="0">
                 <a:latin typeface="KoPub돋움체 Bold" panose="00000800000000000000" pitchFamily="2" charset="-127"/>
                 <a:ea typeface="KoPub돋움체 Bold" panose="00000800000000000000" pitchFamily="2" charset="-127"/>
               </a:rPr>
               <a:t>우리가 가치를 만드는 공간</a:t>
             </a:r>
             <a:r>
-              <a:rPr lang="en-US" altLang="ko-KR" sz="494" b="1" dirty="0">
+              <a:rPr lang="en-US" altLang="ko-KR" sz="800" b="1" dirty="0">
                 <a:latin typeface="KoPub돋움체 Bold" panose="00000800000000000000" pitchFamily="2" charset="-127"/>
                 <a:ea typeface="KoPub돋움체 Bold" panose="00000800000000000000" pitchFamily="2" charset="-127"/>
               </a:rPr>
               <a:t>, </a:t>
             </a:r>
             <a:r>
-              <a:rPr lang="ko-KR" altLang="en-US" sz="494" b="1" dirty="0" err="1">
+              <a:rPr lang="ko-KR" altLang="en-US" sz="800" b="1" dirty="0" err="1">
                 <a:latin typeface="KoPub돋움체 Bold" panose="00000800000000000000" pitchFamily="2" charset="-127"/>
                 <a:ea typeface="KoPub돋움체 Bold" panose="00000800000000000000" pitchFamily="2" charset="-127"/>
               </a:rPr>
               <a:t>우리가치</a:t>
             </a:r>
             <a:r>
-              <a:rPr lang="ko-KR" altLang="en-US" sz="494" b="1" dirty="0">
+              <a:rPr lang="ko-KR" altLang="en-US" sz="800" b="1" dirty="0">
                 <a:latin typeface="KoPub돋움체 Bold" panose="00000800000000000000" pitchFamily="2" charset="-127"/>
                 <a:ea typeface="KoPub돋움체 Bold" panose="00000800000000000000" pitchFamily="2" charset="-127"/>
               </a:rPr>
               <a:t> 허브</a:t>
             </a:r>
             <a:r>
-              <a:rPr lang="en-US" altLang="ko-KR" sz="494" b="1" dirty="0">
+              <a:rPr lang="en-US" altLang="ko-KR" sz="800" b="1" dirty="0">
                 <a:latin typeface="KoPub돋움체 Bold" panose="00000800000000000000" pitchFamily="2" charset="-127"/>
                 <a:ea typeface="KoPub돋움체 Bold" panose="00000800000000000000" pitchFamily="2" charset="-127"/>
               </a:rPr>
@@ -4495,7 +4511,7 @@
           <p:cNvPr id="9" name="그림 8">
             <a:extLst>
               <a:ext uri="{FF2B5EF4-FFF2-40B4-BE49-F238E27FC236}">
-                <a16:creationId xmlns:a16="http://schemas.microsoft.com/office/drawing/2014/main" id="{F3A7A373-FECD-4243-98D0-B228302974CA}"/>
+                <a16:creationId xmlns:a16="http://schemas.microsoft.com/office/drawing/2014/main" id="{0F8037F7-CD2C-AD03-E6D4-667BBCE54FDC}"/>
               </a:ext>
             </a:extLst>
           </p:cNvPr>
@@ -4512,8 +4528,8 @@
         </p:blipFill>
         <p:spPr>
           <a:xfrm>
-            <a:off x="896601" y="716227"/>
-            <a:ext cx="145755" cy="127277"/>
+            <a:off x="603724" y="642969"/>
+            <a:ext cx="175906" cy="153604"/>
           </a:xfrm>
           <a:prstGeom prst="rect">
             <a:avLst/>
@@ -4525,7 +4541,7 @@
           <p:cNvPr id="11" name="그림 10">
             <a:extLst>
               <a:ext uri="{FF2B5EF4-FFF2-40B4-BE49-F238E27FC236}">
-                <a16:creationId xmlns:a16="http://schemas.microsoft.com/office/drawing/2014/main" id="{25D16522-22F0-487F-BE90-3035E8C29235}"/>
+                <a16:creationId xmlns:a16="http://schemas.microsoft.com/office/drawing/2014/main" id="{B40926DE-15CC-A314-C876-EC3702DBF077}"/>
               </a:ext>
             </a:extLst>
           </p:cNvPr>
@@ -4542,8 +4558,8 @@
         </p:blipFill>
         <p:spPr>
           <a:xfrm rot="10800000">
-            <a:off x="2030965" y="721574"/>
-            <a:ext cx="145753" cy="127277"/>
+            <a:off x="2423948" y="642967"/>
+            <a:ext cx="175902" cy="153606"/>
           </a:xfrm>
           <a:prstGeom prst="rect">
             <a:avLst/>
@@ -4553,7 +4569,7 @@
     </p:spTree>
     <p:extLst>
       <p:ext uri="{BB962C8B-B14F-4D97-AF65-F5344CB8AC3E}">
-        <p14:creationId xmlns:p14="http://schemas.microsoft.com/office/powerpoint/2010/main" val="1720875430"/>
+        <p14:creationId xmlns:p14="http://schemas.microsoft.com/office/powerpoint/2010/main" val="2582257656"/>
       </p:ext>
     </p:extLst>
   </p:cSld>
@@ -4571,7 +4587,7 @@
         <p:cNvPr id="1" name="">
           <a:extLst>
             <a:ext uri="{FF2B5EF4-FFF2-40B4-BE49-F238E27FC236}">
-              <a16:creationId xmlns:a16="http://schemas.microsoft.com/office/drawing/2014/main" id="{4B91BF69-B73E-E52D-A273-34695C83C39D}"/>
+              <a16:creationId xmlns:a16="http://schemas.microsoft.com/office/drawing/2014/main" id="{5136E58B-5C66-B0F9-802A-AC54450BC0CA}"/>
             </a:ext>
           </a:extLst>
         </p:cNvPr>
@@ -4591,7 +4607,7 @@
           <p:cNvPr id="4" name="Picture 1">
             <a:extLst>
               <a:ext uri="{FF2B5EF4-FFF2-40B4-BE49-F238E27FC236}">
-                <a16:creationId xmlns:a16="http://schemas.microsoft.com/office/drawing/2014/main" id="{480AF66F-CB5C-451A-847A-EB60BA58025A}"/>
+                <a16:creationId xmlns:a16="http://schemas.microsoft.com/office/drawing/2014/main" id="{943F86AF-C6C6-364A-3119-286C9A6E0DB3}"/>
               </a:ext>
             </a:extLst>
           </p:cNvPr>
@@ -4608,8 +4624,8 @@
         </p:blipFill>
         <p:spPr>
           <a:xfrm>
-            <a:off x="834546" y="1018696"/>
-            <a:ext cx="355023" cy="200754"/>
+            <a:off x="147393" y="129534"/>
+            <a:ext cx="544284" cy="307776"/>
           </a:xfrm>
           <a:prstGeom prst="rect">
             <a:avLst/>
@@ -4626,7 +4642,7 @@
           <p:cNvPr id="5" name="TextBox 4">
             <a:extLst>
               <a:ext uri="{FF2B5EF4-FFF2-40B4-BE49-F238E27FC236}">
-                <a16:creationId xmlns:a16="http://schemas.microsoft.com/office/drawing/2014/main" id="{5D20D6DC-7FD8-414D-8D41-7397E6AB51D5}"/>
+                <a16:creationId xmlns:a16="http://schemas.microsoft.com/office/drawing/2014/main" id="{EDF1CA3D-408B-3CD3-BDE1-3A1CACE52831}"/>
               </a:ext>
             </a:extLst>
           </p:cNvPr>
@@ -4635,8 +4651,8 @@
         </p:nvSpPr>
         <p:spPr>
           <a:xfrm>
-            <a:off x="1138753" y="1035390"/>
-            <a:ext cx="1233714" cy="167369"/>
+            <a:off x="1402907" y="1475898"/>
+            <a:ext cx="1590324" cy="200055"/>
           </a:xfrm>
           <a:prstGeom prst="rect">
             <a:avLst/>
@@ -4651,86 +4667,7 @@
           <a:p>
             <a:pPr algn="ctr"/>
             <a:r>
-              <a:rPr lang="ko-KR" altLang="en-US" sz="494" b="1" dirty="0">
-                <a:solidFill>
-                  <a:srgbClr val="4472C4"/>
-                </a:solidFill>
-                <a:latin typeface="KoPub돋움체 Bold" panose="02020603020101020101" pitchFamily="18" charset="-127"/>
-                <a:ea typeface="KoPub돋움체 Bold" panose="02020603020101020101" pitchFamily="18" charset="-127"/>
-              </a:rPr>
-              <a:t>순천향대학교 천안병원 </a:t>
-            </a:r>
-            <a:r>
-              <a:rPr lang="en-US" altLang="ko-KR" sz="494" b="1" dirty="0">
-                <a:solidFill>
-                  <a:srgbClr val="4472C4"/>
-                </a:solidFill>
-                <a:latin typeface="KoPub돋움체 Bold" panose="02020603020101020101" pitchFamily="18" charset="-127"/>
-                <a:ea typeface="KoPub돋움체 Bold" panose="02020603020101020101" pitchFamily="18" charset="-127"/>
-              </a:rPr>
-              <a:t>| </a:t>
-            </a:r>
-            <a:r>
-              <a:rPr lang="ko-KR" altLang="en-US" sz="494" b="1" dirty="0">
-                <a:solidFill>
-                  <a:srgbClr val="4472C4"/>
-                </a:solidFill>
-                <a:latin typeface="KoPub돋움체 Bold" panose="02020603020101020101" pitchFamily="18" charset="-127"/>
-                <a:ea typeface="KoPub돋움체 Bold" panose="02020603020101020101" pitchFamily="18" charset="-127"/>
-              </a:rPr>
-              <a:t>진료지원간호팀</a:t>
-            </a:r>
-            <a:endParaRPr lang="ko-KR" altLang="en-US" sz="593" b="1" dirty="0">
-              <a:solidFill>
-                <a:srgbClr val="4472C4"/>
-              </a:solidFill>
-              <a:latin typeface="KoPub돋움체 Bold" panose="02020603020101020101" pitchFamily="18" charset="-127"/>
-              <a:ea typeface="KoPub돋움체 Bold" panose="02020603020101020101" pitchFamily="18" charset="-127"/>
-            </a:endParaRPr>
-          </a:p>
-        </p:txBody>
-      </p:sp>
-      <p:sp>
-        <p:nvSpPr>
-          <p:cNvPr id="7" name="TextBox 6">
-            <a:extLst>
-              <a:ext uri="{FF2B5EF4-FFF2-40B4-BE49-F238E27FC236}">
-                <a16:creationId xmlns:a16="http://schemas.microsoft.com/office/drawing/2014/main" id="{568CE481-19EF-4F97-AF73-265FDB83283E}"/>
-              </a:ext>
-            </a:extLst>
-          </p:cNvPr>
-          <p:cNvSpPr txBox="1"/>
-          <p:nvPr/>
-        </p:nvSpPr>
-        <p:spPr>
-          <a:xfrm>
-            <a:off x="1007527" y="671882"/>
-            <a:ext cx="1090755" cy="228231"/>
-          </a:xfrm>
-          <a:prstGeom prst="rect">
-            <a:avLst/>
-          </a:prstGeom>
-          <a:noFill/>
-        </p:spPr>
-        <p:txBody>
-          <a:bodyPr wrap="none">
-            <a:spAutoFit/>
-          </a:bodyPr>
-          <a:lstStyle/>
-          <a:p>
-            <a:pPr algn="ctr"/>
-            <a:r>
-              <a:rPr lang="ko-KR" altLang="en-US" sz="890" dirty="0" err="1">
-                <a:solidFill>
-                  <a:srgbClr val="00B0F0"/>
-                </a:solidFill>
-                <a:latin typeface="KoPub돋움체 Bold" panose="00000800000000000000" pitchFamily="2" charset="-127"/>
-                <a:ea typeface="KoPub돋움체 Bold" panose="00000800000000000000" pitchFamily="2" charset="-127"/>
-              </a:rPr>
-              <a:t>우리가치</a:t>
-            </a:r>
-            <a:r>
-              <a:rPr lang="ko-KR" altLang="en-US" sz="890" dirty="0">
+              <a:rPr lang="ko-KR" altLang="en-US" sz="700" b="1" dirty="0">
                 <a:solidFill>
                   <a:schemeClr val="accent1">
                     <a:lumMod val="50000"/>
@@ -4739,10 +4676,97 @@
                 <a:latin typeface="KoPub돋움체 Bold" panose="02020603020101020101" pitchFamily="18" charset="-127"/>
                 <a:ea typeface="KoPub돋움체 Bold" panose="02020603020101020101" pitchFamily="18" charset="-127"/>
               </a:rPr>
+              <a:t>순천향대학교 천안병원</a:t>
+            </a:r>
+            <a:r>
+              <a:rPr lang="en-US" altLang="ko-KR" sz="700" b="1" dirty="0">
+                <a:solidFill>
+                  <a:schemeClr val="accent1">
+                    <a:lumMod val="50000"/>
+                  </a:schemeClr>
+                </a:solidFill>
+                <a:latin typeface="KoPub돋움체 Bold" panose="02020603020101020101" pitchFamily="18" charset="-127"/>
+                <a:ea typeface="KoPub돋움체 Bold" panose="02020603020101020101" pitchFamily="18" charset="-127"/>
+              </a:rPr>
               <a:t> </a:t>
             </a:r>
             <a:r>
-              <a:rPr lang="en-US" altLang="ko-KR" sz="890" dirty="0" err="1">
+              <a:rPr lang="ko-KR" altLang="en-US" sz="700" b="1" dirty="0">
+                <a:solidFill>
+                  <a:schemeClr val="accent1">
+                    <a:lumMod val="50000"/>
+                  </a:schemeClr>
+                </a:solidFill>
+                <a:latin typeface="KoPub돋움체 Bold" panose="02020603020101020101" pitchFamily="18" charset="-127"/>
+                <a:ea typeface="KoPub돋움체 Bold" panose="02020603020101020101" pitchFamily="18" charset="-127"/>
+              </a:rPr>
+              <a:t>진료지원간호팀</a:t>
+            </a:r>
+            <a:endParaRPr lang="ko-KR" altLang="en-US" sz="800" b="1" dirty="0">
+              <a:solidFill>
+                <a:schemeClr val="accent1">
+                  <a:lumMod val="50000"/>
+                </a:schemeClr>
+              </a:solidFill>
+              <a:latin typeface="KoPub돋움체 Bold" panose="02020603020101020101" pitchFamily="18" charset="-127"/>
+              <a:ea typeface="KoPub돋움체 Bold" panose="02020603020101020101" pitchFamily="18" charset="-127"/>
+            </a:endParaRPr>
+          </a:p>
+        </p:txBody>
+      </p:sp>
+      <p:sp>
+        <p:nvSpPr>
+          <p:cNvPr id="7" name="TextBox 6">
+            <a:extLst>
+              <a:ext uri="{FF2B5EF4-FFF2-40B4-BE49-F238E27FC236}">
+                <a16:creationId xmlns:a16="http://schemas.microsoft.com/office/drawing/2014/main" id="{382E980D-2DDA-B2B3-6E70-61C61F380890}"/>
+              </a:ext>
+            </a:extLst>
+          </p:cNvPr>
+          <p:cNvSpPr txBox="1"/>
+          <p:nvPr/>
+        </p:nvSpPr>
+        <p:spPr>
+          <a:xfrm>
+            <a:off x="675817" y="642967"/>
+            <a:ext cx="1845506" cy="338554"/>
+          </a:xfrm>
+          <a:prstGeom prst="rect">
+            <a:avLst/>
+          </a:prstGeom>
+          <a:noFill/>
+        </p:spPr>
+        <p:txBody>
+          <a:bodyPr wrap="none">
+            <a:spAutoFit/>
+          </a:bodyPr>
+          <a:lstStyle/>
+          <a:p>
+            <a:pPr algn="ctr"/>
+            <a:r>
+              <a:rPr lang="ko-KR" altLang="en-US" sz="1600" dirty="0" err="1">
+                <a:solidFill>
+                  <a:srgbClr val="00B0F0"/>
+                </a:solidFill>
+                <a:latin typeface="Noto Sans KR Black" panose="020B0200000000000000" pitchFamily="50" charset="-127"/>
+                <a:ea typeface="Noto Sans KR Black" panose="020B0200000000000000" pitchFamily="50" charset="-127"/>
+              </a:rPr>
+              <a:t>우리가치</a:t>
+            </a:r>
+            <a:r>
+              <a:rPr lang="ko-KR" altLang="en-US" sz="1600" dirty="0">
+                <a:solidFill>
+                  <a:schemeClr val="accent1">
+                    <a:lumMod val="50000"/>
+                  </a:schemeClr>
+                </a:solidFill>
+                <a:latin typeface="KoPub돋움체 Bold" panose="02020603020101020101" pitchFamily="18" charset="-127"/>
+                <a:ea typeface="KoPub돋움체 Bold" panose="02020603020101020101" pitchFamily="18" charset="-127"/>
+              </a:rPr>
+              <a:t> </a:t>
+            </a:r>
+            <a:r>
+              <a:rPr lang="en-US" altLang="ko-KR" sz="1600" dirty="0" err="1">
                 <a:solidFill>
                   <a:schemeClr val="accent1">
                     <a:lumMod val="50000"/>
@@ -4753,7 +4777,7 @@
               </a:rPr>
               <a:t>WeValue</a:t>
             </a:r>
-            <a:endParaRPr lang="en-US" altLang="ko-KR" sz="890" dirty="0">
+            <a:endParaRPr lang="en-US" altLang="ko-KR" sz="1600" dirty="0">
               <a:solidFill>
                 <a:schemeClr val="accent1">
                   <a:lumMod val="50000"/>
@@ -4770,7 +4794,7 @@
           <p:cNvPr id="8" name="TextBox 7">
             <a:extLst>
               <a:ext uri="{FF2B5EF4-FFF2-40B4-BE49-F238E27FC236}">
-                <a16:creationId xmlns:a16="http://schemas.microsoft.com/office/drawing/2014/main" id="{DAA9A54C-F797-44FB-AB3D-27BD433EFBED}"/>
+                <a16:creationId xmlns:a16="http://schemas.microsoft.com/office/drawing/2014/main" id="{A1477554-1A37-1EE5-2C62-077C1144CCD2}"/>
               </a:ext>
             </a:extLst>
           </p:cNvPr>
@@ -4779,8 +4803,8 @@
         </p:nvSpPr>
         <p:spPr>
           <a:xfrm>
-            <a:off x="914015" y="817009"/>
-            <a:ext cx="1277778" cy="167369"/>
+            <a:off x="619776" y="900112"/>
+            <a:ext cx="1957587" cy="215444"/>
           </a:xfrm>
           <a:prstGeom prst="rect">
             <a:avLst/>
@@ -4795,42 +4819,42 @@
           <a:p>
             <a:pPr algn="ctr"/>
             <a:r>
-              <a:rPr lang="en-US" altLang="ko-KR" sz="494" b="1" dirty="0">
+              <a:rPr lang="en-US" altLang="ko-KR" sz="800" b="1" dirty="0">
                 <a:latin typeface="KoPub돋움체 Bold" panose="00000800000000000000" pitchFamily="2" charset="-127"/>
                 <a:ea typeface="KoPub돋움체 Bold" panose="00000800000000000000" pitchFamily="2" charset="-127"/>
               </a:rPr>
               <a:t>[</a:t>
             </a:r>
             <a:r>
-              <a:rPr lang="ko-KR" altLang="en-US" sz="494" b="1" dirty="0">
+              <a:rPr lang="ko-KR" altLang="en-US" sz="800" b="1" dirty="0">
                 <a:latin typeface="KoPub돋움체 Bold" panose="00000800000000000000" pitchFamily="2" charset="-127"/>
                 <a:ea typeface="KoPub돋움체 Bold" panose="00000800000000000000" pitchFamily="2" charset="-127"/>
               </a:rPr>
               <a:t>우리가 가치를 만드는 공간</a:t>
             </a:r>
             <a:r>
-              <a:rPr lang="en-US" altLang="ko-KR" sz="494" b="1" dirty="0">
+              <a:rPr lang="en-US" altLang="ko-KR" sz="800" b="1" dirty="0">
                 <a:latin typeface="KoPub돋움체 Bold" panose="00000800000000000000" pitchFamily="2" charset="-127"/>
                 <a:ea typeface="KoPub돋움체 Bold" panose="00000800000000000000" pitchFamily="2" charset="-127"/>
               </a:rPr>
               <a:t>, </a:t>
             </a:r>
             <a:r>
-              <a:rPr lang="ko-KR" altLang="en-US" sz="494" b="1" dirty="0" err="1">
+              <a:rPr lang="ko-KR" altLang="en-US" sz="800" b="1" dirty="0" err="1">
                 <a:latin typeface="KoPub돋움체 Bold" panose="00000800000000000000" pitchFamily="2" charset="-127"/>
                 <a:ea typeface="KoPub돋움체 Bold" panose="00000800000000000000" pitchFamily="2" charset="-127"/>
               </a:rPr>
               <a:t>우리가치</a:t>
             </a:r>
             <a:r>
-              <a:rPr lang="ko-KR" altLang="en-US" sz="494" b="1" dirty="0">
+              <a:rPr lang="ko-KR" altLang="en-US" sz="800" b="1" dirty="0">
                 <a:latin typeface="KoPub돋움체 Bold" panose="00000800000000000000" pitchFamily="2" charset="-127"/>
                 <a:ea typeface="KoPub돋움체 Bold" panose="00000800000000000000" pitchFamily="2" charset="-127"/>
               </a:rPr>
               <a:t> 허브</a:t>
             </a:r>
             <a:r>
-              <a:rPr lang="en-US" altLang="ko-KR" sz="494" b="1" dirty="0">
+              <a:rPr lang="en-US" altLang="ko-KR" sz="800" b="1" dirty="0">
                 <a:latin typeface="KoPub돋움체 Bold" panose="00000800000000000000" pitchFamily="2" charset="-127"/>
                 <a:ea typeface="KoPub돋움체 Bold" panose="00000800000000000000" pitchFamily="2" charset="-127"/>
               </a:rPr>
@@ -4844,7 +4868,7 @@
           <p:cNvPr id="9" name="그림 8">
             <a:extLst>
               <a:ext uri="{FF2B5EF4-FFF2-40B4-BE49-F238E27FC236}">
-                <a16:creationId xmlns:a16="http://schemas.microsoft.com/office/drawing/2014/main" id="{F3A7A373-FECD-4243-98D0-B228302974CA}"/>
+                <a16:creationId xmlns:a16="http://schemas.microsoft.com/office/drawing/2014/main" id="{609A144E-68B8-D5BB-5731-26BC4181C0C9}"/>
               </a:ext>
             </a:extLst>
           </p:cNvPr>
@@ -4861,8 +4885,8 @@
         </p:blipFill>
         <p:spPr>
           <a:xfrm>
-            <a:off x="896601" y="716227"/>
-            <a:ext cx="145755" cy="127277"/>
+            <a:off x="603724" y="642969"/>
+            <a:ext cx="175906" cy="153604"/>
           </a:xfrm>
           <a:prstGeom prst="rect">
             <a:avLst/>
@@ -4874,7 +4898,7 @@
           <p:cNvPr id="11" name="그림 10">
             <a:extLst>
               <a:ext uri="{FF2B5EF4-FFF2-40B4-BE49-F238E27FC236}">
-                <a16:creationId xmlns:a16="http://schemas.microsoft.com/office/drawing/2014/main" id="{25D16522-22F0-487F-BE90-3035E8C29235}"/>
+                <a16:creationId xmlns:a16="http://schemas.microsoft.com/office/drawing/2014/main" id="{4AE1B9F2-2C3E-371E-E521-391BA8839E63}"/>
               </a:ext>
             </a:extLst>
           </p:cNvPr>
@@ -4891,8 +4915,8 @@
         </p:blipFill>
         <p:spPr>
           <a:xfrm rot="10800000">
-            <a:off x="2030965" y="721574"/>
-            <a:ext cx="145753" cy="127277"/>
+            <a:off x="2423948" y="642967"/>
+            <a:ext cx="175902" cy="153606"/>
           </a:xfrm>
           <a:prstGeom prst="rect">
             <a:avLst/>
@@ -4902,7 +4926,7 @@
     </p:spTree>
     <p:extLst>
       <p:ext uri="{BB962C8B-B14F-4D97-AF65-F5344CB8AC3E}">
-        <p14:creationId xmlns:p14="http://schemas.microsoft.com/office/powerpoint/2010/main" val="2476893507"/>
+        <p14:creationId xmlns:p14="http://schemas.microsoft.com/office/powerpoint/2010/main" val="194795576"/>
       </p:ext>
     </p:extLst>
   </p:cSld>
@@ -4920,7 +4944,7 @@
         <p:cNvPr id="1" name="">
           <a:extLst>
             <a:ext uri="{FF2B5EF4-FFF2-40B4-BE49-F238E27FC236}">
-              <a16:creationId xmlns:a16="http://schemas.microsoft.com/office/drawing/2014/main" id="{4B91BF69-B73E-E52D-A273-34695C83C39D}"/>
+              <a16:creationId xmlns:a16="http://schemas.microsoft.com/office/drawing/2014/main" id="{78039DC5-E956-5B49-5CA7-94E076A5CC83}"/>
             </a:ext>
           </a:extLst>
         </p:cNvPr>
@@ -4940,7 +4964,7 @@
           <p:cNvPr id="4" name="Picture 1">
             <a:extLst>
               <a:ext uri="{FF2B5EF4-FFF2-40B4-BE49-F238E27FC236}">
-                <a16:creationId xmlns:a16="http://schemas.microsoft.com/office/drawing/2014/main" id="{480AF66F-CB5C-451A-847A-EB60BA58025A}"/>
+                <a16:creationId xmlns:a16="http://schemas.microsoft.com/office/drawing/2014/main" id="{328B5BC9-DEFC-EE92-C5E7-2248E55972BA}"/>
               </a:ext>
             </a:extLst>
           </p:cNvPr>
@@ -4957,8 +4981,8 @@
         </p:blipFill>
         <p:spPr>
           <a:xfrm>
-            <a:off x="834546" y="1018696"/>
-            <a:ext cx="355023" cy="200754"/>
+            <a:off x="147393" y="129534"/>
+            <a:ext cx="544284" cy="307776"/>
           </a:xfrm>
           <a:prstGeom prst="rect">
             <a:avLst/>
@@ -4975,7 +4999,7 @@
           <p:cNvPr id="5" name="TextBox 4">
             <a:extLst>
               <a:ext uri="{FF2B5EF4-FFF2-40B4-BE49-F238E27FC236}">
-                <a16:creationId xmlns:a16="http://schemas.microsoft.com/office/drawing/2014/main" id="{5D20D6DC-7FD8-414D-8D41-7397E6AB51D5}"/>
+                <a16:creationId xmlns:a16="http://schemas.microsoft.com/office/drawing/2014/main" id="{B2417798-018E-90CA-94E9-D9B361C67A78}"/>
               </a:ext>
             </a:extLst>
           </p:cNvPr>
@@ -4984,8 +5008,8 @@
         </p:nvSpPr>
         <p:spPr>
           <a:xfrm>
-            <a:off x="1138753" y="1035390"/>
-            <a:ext cx="1233714" cy="167369"/>
+            <a:off x="1402907" y="1475898"/>
+            <a:ext cx="1590324" cy="200055"/>
           </a:xfrm>
           <a:prstGeom prst="rect">
             <a:avLst/>
@@ -5000,86 +5024,7 @@
           <a:p>
             <a:pPr algn="ctr"/>
             <a:r>
-              <a:rPr lang="ko-KR" altLang="en-US" sz="494" b="1" dirty="0">
-                <a:solidFill>
-                  <a:srgbClr val="4472C4"/>
-                </a:solidFill>
-                <a:latin typeface="KoPub돋움체 Bold" panose="02020603020101020101" pitchFamily="18" charset="-127"/>
-                <a:ea typeface="KoPub돋움체 Bold" panose="02020603020101020101" pitchFamily="18" charset="-127"/>
-              </a:rPr>
-              <a:t>순천향대학교 천안병원 </a:t>
-            </a:r>
-            <a:r>
-              <a:rPr lang="en-US" altLang="ko-KR" sz="494" b="1" dirty="0">
-                <a:solidFill>
-                  <a:srgbClr val="4472C4"/>
-                </a:solidFill>
-                <a:latin typeface="KoPub돋움체 Bold" panose="02020603020101020101" pitchFamily="18" charset="-127"/>
-                <a:ea typeface="KoPub돋움체 Bold" panose="02020603020101020101" pitchFamily="18" charset="-127"/>
-              </a:rPr>
-              <a:t>| </a:t>
-            </a:r>
-            <a:r>
-              <a:rPr lang="ko-KR" altLang="en-US" sz="494" b="1" dirty="0">
-                <a:solidFill>
-                  <a:srgbClr val="4472C4"/>
-                </a:solidFill>
-                <a:latin typeface="KoPub돋움체 Bold" panose="02020603020101020101" pitchFamily="18" charset="-127"/>
-                <a:ea typeface="KoPub돋움체 Bold" panose="02020603020101020101" pitchFamily="18" charset="-127"/>
-              </a:rPr>
-              <a:t>진료지원간호팀</a:t>
-            </a:r>
-            <a:endParaRPr lang="ko-KR" altLang="en-US" sz="593" b="1" dirty="0">
-              <a:solidFill>
-                <a:srgbClr val="4472C4"/>
-              </a:solidFill>
-              <a:latin typeface="KoPub돋움체 Bold" panose="02020603020101020101" pitchFamily="18" charset="-127"/>
-              <a:ea typeface="KoPub돋움체 Bold" panose="02020603020101020101" pitchFamily="18" charset="-127"/>
-            </a:endParaRPr>
-          </a:p>
-        </p:txBody>
-      </p:sp>
-      <p:sp>
-        <p:nvSpPr>
-          <p:cNvPr id="7" name="TextBox 6">
-            <a:extLst>
-              <a:ext uri="{FF2B5EF4-FFF2-40B4-BE49-F238E27FC236}">
-                <a16:creationId xmlns:a16="http://schemas.microsoft.com/office/drawing/2014/main" id="{568CE481-19EF-4F97-AF73-265FDB83283E}"/>
-              </a:ext>
-            </a:extLst>
-          </p:cNvPr>
-          <p:cNvSpPr txBox="1"/>
-          <p:nvPr/>
-        </p:nvSpPr>
-        <p:spPr>
-          <a:xfrm>
-            <a:off x="1007527" y="671882"/>
-            <a:ext cx="1090755" cy="228231"/>
-          </a:xfrm>
-          <a:prstGeom prst="rect">
-            <a:avLst/>
-          </a:prstGeom>
-          <a:noFill/>
-        </p:spPr>
-        <p:txBody>
-          <a:bodyPr wrap="none">
-            <a:spAutoFit/>
-          </a:bodyPr>
-          <a:lstStyle/>
-          <a:p>
-            <a:pPr algn="ctr"/>
-            <a:r>
-              <a:rPr lang="ko-KR" altLang="en-US" sz="890" dirty="0" err="1">
-                <a:solidFill>
-                  <a:srgbClr val="00B0F0"/>
-                </a:solidFill>
-                <a:latin typeface="KoPub돋움체 Bold" panose="00000800000000000000" pitchFamily="2" charset="-127"/>
-                <a:ea typeface="KoPub돋움체 Bold" panose="00000800000000000000" pitchFamily="2" charset="-127"/>
-              </a:rPr>
-              <a:t>우리가치</a:t>
-            </a:r>
-            <a:r>
-              <a:rPr lang="ko-KR" altLang="en-US" sz="890" dirty="0">
+              <a:rPr lang="ko-KR" altLang="en-US" sz="700" b="1" dirty="0">
                 <a:solidFill>
                   <a:schemeClr val="accent1">
                     <a:lumMod val="50000"/>
@@ -5088,10 +5033,97 @@
                 <a:latin typeface="KoPub돋움체 Bold" panose="02020603020101020101" pitchFamily="18" charset="-127"/>
                 <a:ea typeface="KoPub돋움체 Bold" panose="02020603020101020101" pitchFamily="18" charset="-127"/>
               </a:rPr>
+              <a:t>순천향대학교 천안병원</a:t>
+            </a:r>
+            <a:r>
+              <a:rPr lang="en-US" altLang="ko-KR" sz="700" b="1" dirty="0">
+                <a:solidFill>
+                  <a:schemeClr val="accent1">
+                    <a:lumMod val="50000"/>
+                  </a:schemeClr>
+                </a:solidFill>
+                <a:latin typeface="KoPub돋움체 Bold" panose="02020603020101020101" pitchFamily="18" charset="-127"/>
+                <a:ea typeface="KoPub돋움체 Bold" panose="02020603020101020101" pitchFamily="18" charset="-127"/>
+              </a:rPr>
               <a:t> </a:t>
             </a:r>
             <a:r>
-              <a:rPr lang="en-US" altLang="ko-KR" sz="890" dirty="0" err="1">
+              <a:rPr lang="ko-KR" altLang="en-US" sz="700" b="1" dirty="0">
+                <a:solidFill>
+                  <a:schemeClr val="accent1">
+                    <a:lumMod val="50000"/>
+                  </a:schemeClr>
+                </a:solidFill>
+                <a:latin typeface="KoPub돋움체 Bold" panose="02020603020101020101" pitchFamily="18" charset="-127"/>
+                <a:ea typeface="KoPub돋움체 Bold" panose="02020603020101020101" pitchFamily="18" charset="-127"/>
+              </a:rPr>
+              <a:t>진료지원간호팀</a:t>
+            </a:r>
+            <a:endParaRPr lang="ko-KR" altLang="en-US" sz="800" b="1" dirty="0">
+              <a:solidFill>
+                <a:schemeClr val="accent1">
+                  <a:lumMod val="50000"/>
+                </a:schemeClr>
+              </a:solidFill>
+              <a:latin typeface="KoPub돋움체 Bold" panose="02020603020101020101" pitchFamily="18" charset="-127"/>
+              <a:ea typeface="KoPub돋움체 Bold" panose="02020603020101020101" pitchFamily="18" charset="-127"/>
+            </a:endParaRPr>
+          </a:p>
+        </p:txBody>
+      </p:sp>
+      <p:sp>
+        <p:nvSpPr>
+          <p:cNvPr id="7" name="TextBox 6">
+            <a:extLst>
+              <a:ext uri="{FF2B5EF4-FFF2-40B4-BE49-F238E27FC236}">
+                <a16:creationId xmlns:a16="http://schemas.microsoft.com/office/drawing/2014/main" id="{A2E669AB-BE1E-2E9A-2EA6-0906B93346D8}"/>
+              </a:ext>
+            </a:extLst>
+          </p:cNvPr>
+          <p:cNvSpPr txBox="1"/>
+          <p:nvPr/>
+        </p:nvSpPr>
+        <p:spPr>
+          <a:xfrm>
+            <a:off x="675817" y="642967"/>
+            <a:ext cx="1845506" cy="338554"/>
+          </a:xfrm>
+          <a:prstGeom prst="rect">
+            <a:avLst/>
+          </a:prstGeom>
+          <a:noFill/>
+        </p:spPr>
+        <p:txBody>
+          <a:bodyPr wrap="none">
+            <a:spAutoFit/>
+          </a:bodyPr>
+          <a:lstStyle/>
+          <a:p>
+            <a:pPr algn="ctr"/>
+            <a:r>
+              <a:rPr lang="ko-KR" altLang="en-US" sz="1600" dirty="0" err="1">
+                <a:solidFill>
+                  <a:srgbClr val="00B0F0"/>
+                </a:solidFill>
+                <a:latin typeface="Noto Sans KR Black" panose="020B0200000000000000" pitchFamily="50" charset="-127"/>
+                <a:ea typeface="Noto Sans KR Black" panose="020B0200000000000000" pitchFamily="50" charset="-127"/>
+              </a:rPr>
+              <a:t>우리가치</a:t>
+            </a:r>
+            <a:r>
+              <a:rPr lang="ko-KR" altLang="en-US" sz="1600" dirty="0">
+                <a:solidFill>
+                  <a:schemeClr val="accent1">
+                    <a:lumMod val="50000"/>
+                  </a:schemeClr>
+                </a:solidFill>
+                <a:latin typeface="KoPub돋움체 Bold" panose="02020603020101020101" pitchFamily="18" charset="-127"/>
+                <a:ea typeface="KoPub돋움체 Bold" panose="02020603020101020101" pitchFamily="18" charset="-127"/>
+              </a:rPr>
+              <a:t> </a:t>
+            </a:r>
+            <a:r>
+              <a:rPr lang="en-US" altLang="ko-KR" sz="1600" dirty="0" err="1">
                 <a:solidFill>
                   <a:schemeClr val="accent1">
                     <a:lumMod val="50000"/>
@@ -5102,7 +5134,7 @@
               </a:rPr>
               <a:t>WeValue</a:t>
             </a:r>
-            <a:endParaRPr lang="en-US" altLang="ko-KR" sz="890" dirty="0">
+            <a:endParaRPr lang="en-US" altLang="ko-KR" sz="1600" dirty="0">
               <a:solidFill>
                 <a:schemeClr val="accent1">
                   <a:lumMod val="50000"/>
@@ -5119,7 +5151,7 @@
           <p:cNvPr id="8" name="TextBox 7">
             <a:extLst>
               <a:ext uri="{FF2B5EF4-FFF2-40B4-BE49-F238E27FC236}">
-                <a16:creationId xmlns:a16="http://schemas.microsoft.com/office/drawing/2014/main" id="{DAA9A54C-F797-44FB-AB3D-27BD433EFBED}"/>
+                <a16:creationId xmlns:a16="http://schemas.microsoft.com/office/drawing/2014/main" id="{FC429CDB-3B23-42A3-9704-5F748573D5B3}"/>
               </a:ext>
             </a:extLst>
           </p:cNvPr>
@@ -5128,8 +5160,8 @@
         </p:nvSpPr>
         <p:spPr>
           <a:xfrm>
-            <a:off x="914015" y="817009"/>
-            <a:ext cx="1277778" cy="167369"/>
+            <a:off x="619776" y="900112"/>
+            <a:ext cx="1957587" cy="215444"/>
           </a:xfrm>
           <a:prstGeom prst="rect">
             <a:avLst/>
@@ -5144,42 +5176,42 @@
           <a:p>
             <a:pPr algn="ctr"/>
             <a:r>
-              <a:rPr lang="en-US" altLang="ko-KR" sz="494" b="1" dirty="0">
+              <a:rPr lang="en-US" altLang="ko-KR" sz="800" b="1" dirty="0">
                 <a:latin typeface="KoPub돋움체 Bold" panose="00000800000000000000" pitchFamily="2" charset="-127"/>
                 <a:ea typeface="KoPub돋움체 Bold" panose="00000800000000000000" pitchFamily="2" charset="-127"/>
               </a:rPr>
               <a:t>[</a:t>
             </a:r>
             <a:r>
-              <a:rPr lang="ko-KR" altLang="en-US" sz="494" b="1" dirty="0">
+              <a:rPr lang="ko-KR" altLang="en-US" sz="800" b="1" dirty="0">
                 <a:latin typeface="KoPub돋움체 Bold" panose="00000800000000000000" pitchFamily="2" charset="-127"/>
                 <a:ea typeface="KoPub돋움체 Bold" panose="00000800000000000000" pitchFamily="2" charset="-127"/>
               </a:rPr>
               <a:t>우리가 가치를 만드는 공간</a:t>
             </a:r>
             <a:r>
-              <a:rPr lang="en-US" altLang="ko-KR" sz="494" b="1" dirty="0">
+              <a:rPr lang="en-US" altLang="ko-KR" sz="800" b="1" dirty="0">
                 <a:latin typeface="KoPub돋움체 Bold" panose="00000800000000000000" pitchFamily="2" charset="-127"/>
                 <a:ea typeface="KoPub돋움체 Bold" panose="00000800000000000000" pitchFamily="2" charset="-127"/>
               </a:rPr>
               <a:t>, </a:t>
             </a:r>
             <a:r>
-              <a:rPr lang="ko-KR" altLang="en-US" sz="494" b="1" dirty="0" err="1">
+              <a:rPr lang="ko-KR" altLang="en-US" sz="800" b="1" dirty="0" err="1">
                 <a:latin typeface="KoPub돋움체 Bold" panose="00000800000000000000" pitchFamily="2" charset="-127"/>
                 <a:ea typeface="KoPub돋움체 Bold" panose="00000800000000000000" pitchFamily="2" charset="-127"/>
               </a:rPr>
               <a:t>우리가치</a:t>
             </a:r>
             <a:r>
-              <a:rPr lang="ko-KR" altLang="en-US" sz="494" b="1" dirty="0">
+              <a:rPr lang="ko-KR" altLang="en-US" sz="800" b="1" dirty="0">
                 <a:latin typeface="KoPub돋움체 Bold" panose="00000800000000000000" pitchFamily="2" charset="-127"/>
                 <a:ea typeface="KoPub돋움체 Bold" panose="00000800000000000000" pitchFamily="2" charset="-127"/>
               </a:rPr>
               <a:t> 허브</a:t>
             </a:r>
             <a:r>
-              <a:rPr lang="en-US" altLang="ko-KR" sz="494" b="1" dirty="0">
+              <a:rPr lang="en-US" altLang="ko-KR" sz="800" b="1" dirty="0">
                 <a:latin typeface="KoPub돋움체 Bold" panose="00000800000000000000" pitchFamily="2" charset="-127"/>
                 <a:ea typeface="KoPub돋움체 Bold" panose="00000800000000000000" pitchFamily="2" charset="-127"/>
               </a:rPr>
@@ -5193,7 +5225,7 @@
           <p:cNvPr id="9" name="그림 8">
             <a:extLst>
               <a:ext uri="{FF2B5EF4-FFF2-40B4-BE49-F238E27FC236}">
-                <a16:creationId xmlns:a16="http://schemas.microsoft.com/office/drawing/2014/main" id="{F3A7A373-FECD-4243-98D0-B228302974CA}"/>
+                <a16:creationId xmlns:a16="http://schemas.microsoft.com/office/drawing/2014/main" id="{502962EF-1B0C-F248-4E68-525C2A07B9E6}"/>
               </a:ext>
             </a:extLst>
           </p:cNvPr>
@@ -5210,8 +5242,8 @@
         </p:blipFill>
         <p:spPr>
           <a:xfrm>
-            <a:off x="896601" y="716227"/>
-            <a:ext cx="145755" cy="127277"/>
+            <a:off x="603724" y="642969"/>
+            <a:ext cx="175906" cy="153604"/>
           </a:xfrm>
           <a:prstGeom prst="rect">
             <a:avLst/>
@@ -5223,7 +5255,7 @@
           <p:cNvPr id="11" name="그림 10">
             <a:extLst>
               <a:ext uri="{FF2B5EF4-FFF2-40B4-BE49-F238E27FC236}">
-                <a16:creationId xmlns:a16="http://schemas.microsoft.com/office/drawing/2014/main" id="{25D16522-22F0-487F-BE90-3035E8C29235}"/>
+                <a16:creationId xmlns:a16="http://schemas.microsoft.com/office/drawing/2014/main" id="{71F181F5-2A03-FE7C-4ECB-D5AD6545AD07}"/>
               </a:ext>
             </a:extLst>
           </p:cNvPr>
@@ -5240,8 +5272,8 @@
         </p:blipFill>
         <p:spPr>
           <a:xfrm rot="10800000">
-            <a:off x="2030965" y="721574"/>
-            <a:ext cx="145753" cy="127277"/>
+            <a:off x="2423948" y="642967"/>
+            <a:ext cx="175902" cy="153606"/>
           </a:xfrm>
           <a:prstGeom prst="rect">
             <a:avLst/>
@@ -5251,7 +5283,7 @@
     </p:spTree>
     <p:extLst>
       <p:ext uri="{BB962C8B-B14F-4D97-AF65-F5344CB8AC3E}">
-        <p14:creationId xmlns:p14="http://schemas.microsoft.com/office/powerpoint/2010/main" val="1752469808"/>
+        <p14:creationId xmlns:p14="http://schemas.microsoft.com/office/powerpoint/2010/main" val="1282454771"/>
       </p:ext>
     </p:extLst>
   </p:cSld>
@@ -5269,7 +5301,7 @@
         <p:cNvPr id="1" name="">
           <a:extLst>
             <a:ext uri="{FF2B5EF4-FFF2-40B4-BE49-F238E27FC236}">
-              <a16:creationId xmlns:a16="http://schemas.microsoft.com/office/drawing/2014/main" id="{4B91BF69-B73E-E52D-A273-34695C83C39D}"/>
+              <a16:creationId xmlns:a16="http://schemas.microsoft.com/office/drawing/2014/main" id="{952E7605-240F-DA3E-53C9-7E5889BFC9E2}"/>
             </a:ext>
           </a:extLst>
         </p:cNvPr>
@@ -5289,7 +5321,7 @@
           <p:cNvPr id="4" name="Picture 1">
             <a:extLst>
               <a:ext uri="{FF2B5EF4-FFF2-40B4-BE49-F238E27FC236}">
-                <a16:creationId xmlns:a16="http://schemas.microsoft.com/office/drawing/2014/main" id="{480AF66F-CB5C-451A-847A-EB60BA58025A}"/>
+                <a16:creationId xmlns:a16="http://schemas.microsoft.com/office/drawing/2014/main" id="{19A06173-2436-A5E6-4C1A-B8EDD2819494}"/>
               </a:ext>
             </a:extLst>
           </p:cNvPr>
@@ -5306,8 +5338,8 @@
         </p:blipFill>
         <p:spPr>
           <a:xfrm>
-            <a:off x="834546" y="1018696"/>
-            <a:ext cx="355023" cy="200754"/>
+            <a:off x="147393" y="129534"/>
+            <a:ext cx="544284" cy="307776"/>
           </a:xfrm>
           <a:prstGeom prst="rect">
             <a:avLst/>
@@ -5324,7 +5356,7 @@
           <p:cNvPr id="5" name="TextBox 4">
             <a:extLst>
               <a:ext uri="{FF2B5EF4-FFF2-40B4-BE49-F238E27FC236}">
-                <a16:creationId xmlns:a16="http://schemas.microsoft.com/office/drawing/2014/main" id="{5D20D6DC-7FD8-414D-8D41-7397E6AB51D5}"/>
+                <a16:creationId xmlns:a16="http://schemas.microsoft.com/office/drawing/2014/main" id="{41F53660-7D28-06A5-E36E-A9F6719EC5EF}"/>
               </a:ext>
             </a:extLst>
           </p:cNvPr>
@@ -5333,8 +5365,8 @@
         </p:nvSpPr>
         <p:spPr>
           <a:xfrm>
-            <a:off x="1138753" y="1035390"/>
-            <a:ext cx="1233714" cy="167369"/>
+            <a:off x="1402907" y="1475898"/>
+            <a:ext cx="1590324" cy="200055"/>
           </a:xfrm>
           <a:prstGeom prst="rect">
             <a:avLst/>
@@ -5349,86 +5381,7 @@
           <a:p>
             <a:pPr algn="ctr"/>
             <a:r>
-              <a:rPr lang="ko-KR" altLang="en-US" sz="494" b="1" dirty="0">
-                <a:solidFill>
-                  <a:srgbClr val="4472C4"/>
-                </a:solidFill>
-                <a:latin typeface="KoPub돋움체 Bold" panose="02020603020101020101" pitchFamily="18" charset="-127"/>
-                <a:ea typeface="KoPub돋움체 Bold" panose="02020603020101020101" pitchFamily="18" charset="-127"/>
-              </a:rPr>
-              <a:t>순천향대학교 천안병원 </a:t>
-            </a:r>
-            <a:r>
-              <a:rPr lang="en-US" altLang="ko-KR" sz="494" b="1" dirty="0">
-                <a:solidFill>
-                  <a:srgbClr val="4472C4"/>
-                </a:solidFill>
-                <a:latin typeface="KoPub돋움체 Bold" panose="02020603020101020101" pitchFamily="18" charset="-127"/>
-                <a:ea typeface="KoPub돋움체 Bold" panose="02020603020101020101" pitchFamily="18" charset="-127"/>
-              </a:rPr>
-              <a:t>| </a:t>
-            </a:r>
-            <a:r>
-              <a:rPr lang="ko-KR" altLang="en-US" sz="494" b="1" dirty="0">
-                <a:solidFill>
-                  <a:srgbClr val="4472C4"/>
-                </a:solidFill>
-                <a:latin typeface="KoPub돋움체 Bold" panose="02020603020101020101" pitchFamily="18" charset="-127"/>
-                <a:ea typeface="KoPub돋움체 Bold" panose="02020603020101020101" pitchFamily="18" charset="-127"/>
-              </a:rPr>
-              <a:t>진료지원간호팀</a:t>
-            </a:r>
-            <a:endParaRPr lang="ko-KR" altLang="en-US" sz="593" b="1" dirty="0">
-              <a:solidFill>
-                <a:srgbClr val="4472C4"/>
-              </a:solidFill>
-              <a:latin typeface="KoPub돋움체 Bold" panose="02020603020101020101" pitchFamily="18" charset="-127"/>
-              <a:ea typeface="KoPub돋움체 Bold" panose="02020603020101020101" pitchFamily="18" charset="-127"/>
-            </a:endParaRPr>
-          </a:p>
-        </p:txBody>
-      </p:sp>
-      <p:sp>
-        <p:nvSpPr>
-          <p:cNvPr id="7" name="TextBox 6">
-            <a:extLst>
-              <a:ext uri="{FF2B5EF4-FFF2-40B4-BE49-F238E27FC236}">
-                <a16:creationId xmlns:a16="http://schemas.microsoft.com/office/drawing/2014/main" id="{568CE481-19EF-4F97-AF73-265FDB83283E}"/>
-              </a:ext>
-            </a:extLst>
-          </p:cNvPr>
-          <p:cNvSpPr txBox="1"/>
-          <p:nvPr/>
-        </p:nvSpPr>
-        <p:spPr>
-          <a:xfrm>
-            <a:off x="1007527" y="671882"/>
-            <a:ext cx="1090755" cy="228231"/>
-          </a:xfrm>
-          <a:prstGeom prst="rect">
-            <a:avLst/>
-          </a:prstGeom>
-          <a:noFill/>
-        </p:spPr>
-        <p:txBody>
-          <a:bodyPr wrap="none">
-            <a:spAutoFit/>
-          </a:bodyPr>
-          <a:lstStyle/>
-          <a:p>
-            <a:pPr algn="ctr"/>
-            <a:r>
-              <a:rPr lang="ko-KR" altLang="en-US" sz="890" dirty="0" err="1">
-                <a:solidFill>
-                  <a:srgbClr val="00B0F0"/>
-                </a:solidFill>
-                <a:latin typeface="KoPub돋움체 Bold" panose="00000800000000000000" pitchFamily="2" charset="-127"/>
-                <a:ea typeface="KoPub돋움체 Bold" panose="00000800000000000000" pitchFamily="2" charset="-127"/>
-              </a:rPr>
-              <a:t>우리가치</a:t>
-            </a:r>
-            <a:r>
-              <a:rPr lang="ko-KR" altLang="en-US" sz="890" dirty="0">
+              <a:rPr lang="ko-KR" altLang="en-US" sz="700" b="1" dirty="0">
                 <a:solidFill>
                   <a:schemeClr val="accent1">
                     <a:lumMod val="50000"/>
@@ -5437,10 +5390,97 @@
                 <a:latin typeface="KoPub돋움체 Bold" panose="02020603020101020101" pitchFamily="18" charset="-127"/>
                 <a:ea typeface="KoPub돋움체 Bold" panose="02020603020101020101" pitchFamily="18" charset="-127"/>
               </a:rPr>
+              <a:t>순천향대학교 천안병원</a:t>
+            </a:r>
+            <a:r>
+              <a:rPr lang="en-US" altLang="ko-KR" sz="700" b="1" dirty="0">
+                <a:solidFill>
+                  <a:schemeClr val="accent1">
+                    <a:lumMod val="50000"/>
+                  </a:schemeClr>
+                </a:solidFill>
+                <a:latin typeface="KoPub돋움체 Bold" panose="02020603020101020101" pitchFamily="18" charset="-127"/>
+                <a:ea typeface="KoPub돋움체 Bold" panose="02020603020101020101" pitchFamily="18" charset="-127"/>
+              </a:rPr>
               <a:t> </a:t>
             </a:r>
             <a:r>
-              <a:rPr lang="en-US" altLang="ko-KR" sz="890" dirty="0" err="1">
+              <a:rPr lang="ko-KR" altLang="en-US" sz="700" b="1" dirty="0">
+                <a:solidFill>
+                  <a:schemeClr val="accent1">
+                    <a:lumMod val="50000"/>
+                  </a:schemeClr>
+                </a:solidFill>
+                <a:latin typeface="KoPub돋움체 Bold" panose="02020603020101020101" pitchFamily="18" charset="-127"/>
+                <a:ea typeface="KoPub돋움체 Bold" panose="02020603020101020101" pitchFamily="18" charset="-127"/>
+              </a:rPr>
+              <a:t>진료지원간호팀</a:t>
+            </a:r>
+            <a:endParaRPr lang="ko-KR" altLang="en-US" sz="800" b="1" dirty="0">
+              <a:solidFill>
+                <a:schemeClr val="accent1">
+                  <a:lumMod val="50000"/>
+                </a:schemeClr>
+              </a:solidFill>
+              <a:latin typeface="KoPub돋움체 Bold" panose="02020603020101020101" pitchFamily="18" charset="-127"/>
+              <a:ea typeface="KoPub돋움체 Bold" panose="02020603020101020101" pitchFamily="18" charset="-127"/>
+            </a:endParaRPr>
+          </a:p>
+        </p:txBody>
+      </p:sp>
+      <p:sp>
+        <p:nvSpPr>
+          <p:cNvPr id="7" name="TextBox 6">
+            <a:extLst>
+              <a:ext uri="{FF2B5EF4-FFF2-40B4-BE49-F238E27FC236}">
+                <a16:creationId xmlns:a16="http://schemas.microsoft.com/office/drawing/2014/main" id="{F8E946DA-B944-C22E-8340-58B20037A260}"/>
+              </a:ext>
+            </a:extLst>
+          </p:cNvPr>
+          <p:cNvSpPr txBox="1"/>
+          <p:nvPr/>
+        </p:nvSpPr>
+        <p:spPr>
+          <a:xfrm>
+            <a:off x="675817" y="642967"/>
+            <a:ext cx="1845506" cy="338554"/>
+          </a:xfrm>
+          <a:prstGeom prst="rect">
+            <a:avLst/>
+          </a:prstGeom>
+          <a:noFill/>
+        </p:spPr>
+        <p:txBody>
+          <a:bodyPr wrap="none">
+            <a:spAutoFit/>
+          </a:bodyPr>
+          <a:lstStyle/>
+          <a:p>
+            <a:pPr algn="ctr"/>
+            <a:r>
+              <a:rPr lang="ko-KR" altLang="en-US" sz="1600" dirty="0" err="1">
+                <a:solidFill>
+                  <a:srgbClr val="00B0F0"/>
+                </a:solidFill>
+                <a:latin typeface="Noto Sans KR Black" panose="020B0200000000000000" pitchFamily="50" charset="-127"/>
+                <a:ea typeface="Noto Sans KR Black" panose="020B0200000000000000" pitchFamily="50" charset="-127"/>
+              </a:rPr>
+              <a:t>우리가치</a:t>
+            </a:r>
+            <a:r>
+              <a:rPr lang="ko-KR" altLang="en-US" sz="1600" dirty="0">
+                <a:solidFill>
+                  <a:schemeClr val="accent1">
+                    <a:lumMod val="50000"/>
+                  </a:schemeClr>
+                </a:solidFill>
+                <a:latin typeface="KoPub돋움체 Bold" panose="02020603020101020101" pitchFamily="18" charset="-127"/>
+                <a:ea typeface="KoPub돋움체 Bold" panose="02020603020101020101" pitchFamily="18" charset="-127"/>
+              </a:rPr>
+              <a:t> </a:t>
+            </a:r>
+            <a:r>
+              <a:rPr lang="en-US" altLang="ko-KR" sz="1600" dirty="0" err="1">
                 <a:solidFill>
                   <a:schemeClr val="accent1">
                     <a:lumMod val="50000"/>
@@ -5451,7 +5491,7 @@
               </a:rPr>
               <a:t>WeValue</a:t>
             </a:r>
-            <a:endParaRPr lang="en-US" altLang="ko-KR" sz="890" dirty="0">
+            <a:endParaRPr lang="en-US" altLang="ko-KR" sz="1600" dirty="0">
               <a:solidFill>
                 <a:schemeClr val="accent1">
                   <a:lumMod val="50000"/>
@@ -5468,7 +5508,7 @@
           <p:cNvPr id="8" name="TextBox 7">
             <a:extLst>
               <a:ext uri="{FF2B5EF4-FFF2-40B4-BE49-F238E27FC236}">
-                <a16:creationId xmlns:a16="http://schemas.microsoft.com/office/drawing/2014/main" id="{DAA9A54C-F797-44FB-AB3D-27BD433EFBED}"/>
+                <a16:creationId xmlns:a16="http://schemas.microsoft.com/office/drawing/2014/main" id="{0B7AA03A-7DBC-8499-9C73-A4BC911F2029}"/>
               </a:ext>
             </a:extLst>
           </p:cNvPr>
@@ -5477,8 +5517,8 @@
         </p:nvSpPr>
         <p:spPr>
           <a:xfrm>
-            <a:off x="914015" y="817009"/>
-            <a:ext cx="1277778" cy="167369"/>
+            <a:off x="619776" y="900112"/>
+            <a:ext cx="1957587" cy="215444"/>
           </a:xfrm>
           <a:prstGeom prst="rect">
             <a:avLst/>
@@ -5493,42 +5533,42 @@
           <a:p>
             <a:pPr algn="ctr"/>
             <a:r>
-              <a:rPr lang="en-US" altLang="ko-KR" sz="494" b="1" dirty="0">
+              <a:rPr lang="en-US" altLang="ko-KR" sz="800" b="1" dirty="0">
                 <a:latin typeface="KoPub돋움체 Bold" panose="00000800000000000000" pitchFamily="2" charset="-127"/>
                 <a:ea typeface="KoPub돋움체 Bold" panose="00000800000000000000" pitchFamily="2" charset="-127"/>
               </a:rPr>
               <a:t>[</a:t>
             </a:r>
             <a:r>
-              <a:rPr lang="ko-KR" altLang="en-US" sz="494" b="1" dirty="0">
+              <a:rPr lang="ko-KR" altLang="en-US" sz="800" b="1" dirty="0">
                 <a:latin typeface="KoPub돋움체 Bold" panose="00000800000000000000" pitchFamily="2" charset="-127"/>
                 <a:ea typeface="KoPub돋움체 Bold" panose="00000800000000000000" pitchFamily="2" charset="-127"/>
               </a:rPr>
               <a:t>우리가 가치를 만드는 공간</a:t>
             </a:r>
             <a:r>
-              <a:rPr lang="en-US" altLang="ko-KR" sz="494" b="1" dirty="0">
+              <a:rPr lang="en-US" altLang="ko-KR" sz="800" b="1" dirty="0">
                 <a:latin typeface="KoPub돋움체 Bold" panose="00000800000000000000" pitchFamily="2" charset="-127"/>
                 <a:ea typeface="KoPub돋움체 Bold" panose="00000800000000000000" pitchFamily="2" charset="-127"/>
               </a:rPr>
               <a:t>, </a:t>
             </a:r>
             <a:r>
-              <a:rPr lang="ko-KR" altLang="en-US" sz="494" b="1" dirty="0" err="1">
+              <a:rPr lang="ko-KR" altLang="en-US" sz="800" b="1" dirty="0" err="1">
                 <a:latin typeface="KoPub돋움체 Bold" panose="00000800000000000000" pitchFamily="2" charset="-127"/>
                 <a:ea typeface="KoPub돋움체 Bold" panose="00000800000000000000" pitchFamily="2" charset="-127"/>
               </a:rPr>
               <a:t>우리가치</a:t>
             </a:r>
             <a:r>
-              <a:rPr lang="ko-KR" altLang="en-US" sz="494" b="1" dirty="0">
+              <a:rPr lang="ko-KR" altLang="en-US" sz="800" b="1" dirty="0">
                 <a:latin typeface="KoPub돋움체 Bold" panose="00000800000000000000" pitchFamily="2" charset="-127"/>
                 <a:ea typeface="KoPub돋움체 Bold" panose="00000800000000000000" pitchFamily="2" charset="-127"/>
               </a:rPr>
               <a:t> 허브</a:t>
             </a:r>
             <a:r>
-              <a:rPr lang="en-US" altLang="ko-KR" sz="494" b="1" dirty="0">
+              <a:rPr lang="en-US" altLang="ko-KR" sz="800" b="1" dirty="0">
                 <a:latin typeface="KoPub돋움체 Bold" panose="00000800000000000000" pitchFamily="2" charset="-127"/>
                 <a:ea typeface="KoPub돋움체 Bold" panose="00000800000000000000" pitchFamily="2" charset="-127"/>
               </a:rPr>
@@ -5542,7 +5582,7 @@
           <p:cNvPr id="9" name="그림 8">
             <a:extLst>
               <a:ext uri="{FF2B5EF4-FFF2-40B4-BE49-F238E27FC236}">
-                <a16:creationId xmlns:a16="http://schemas.microsoft.com/office/drawing/2014/main" id="{F3A7A373-FECD-4243-98D0-B228302974CA}"/>
+                <a16:creationId xmlns:a16="http://schemas.microsoft.com/office/drawing/2014/main" id="{074A6330-7F4F-82A5-9079-9B6D5AD659DA}"/>
               </a:ext>
             </a:extLst>
           </p:cNvPr>
@@ -5559,8 +5599,8 @@
         </p:blipFill>
         <p:spPr>
           <a:xfrm>
-            <a:off x="896601" y="716227"/>
-            <a:ext cx="145755" cy="127277"/>
+            <a:off x="603724" y="642969"/>
+            <a:ext cx="175906" cy="153604"/>
           </a:xfrm>
           <a:prstGeom prst="rect">
             <a:avLst/>
@@ -5572,7 +5612,7 @@
           <p:cNvPr id="11" name="그림 10">
             <a:extLst>
               <a:ext uri="{FF2B5EF4-FFF2-40B4-BE49-F238E27FC236}">
-                <a16:creationId xmlns:a16="http://schemas.microsoft.com/office/drawing/2014/main" id="{25D16522-22F0-487F-BE90-3035E8C29235}"/>
+                <a16:creationId xmlns:a16="http://schemas.microsoft.com/office/drawing/2014/main" id="{AE3693BE-8927-795F-D95D-D820D9A3EAAF}"/>
               </a:ext>
             </a:extLst>
           </p:cNvPr>
@@ -5589,8 +5629,8 @@
         </p:blipFill>
         <p:spPr>
           <a:xfrm rot="10800000">
-            <a:off x="2030965" y="721574"/>
-            <a:ext cx="145753" cy="127277"/>
+            <a:off x="2423948" y="642967"/>
+            <a:ext cx="175902" cy="153606"/>
           </a:xfrm>
           <a:prstGeom prst="rect">
             <a:avLst/>
@@ -5600,7 +5640,7 @@
     </p:spTree>
     <p:extLst>
       <p:ext uri="{BB962C8B-B14F-4D97-AF65-F5344CB8AC3E}">
-        <p14:creationId xmlns:p14="http://schemas.microsoft.com/office/powerpoint/2010/main" val="127331357"/>
+        <p14:creationId xmlns:p14="http://schemas.microsoft.com/office/powerpoint/2010/main" val="1058533138"/>
       </p:ext>
     </p:extLst>
   </p:cSld>
@@ -5618,7 +5658,7 @@
         <p:cNvPr id="1" name="">
           <a:extLst>
             <a:ext uri="{FF2B5EF4-FFF2-40B4-BE49-F238E27FC236}">
-              <a16:creationId xmlns:a16="http://schemas.microsoft.com/office/drawing/2014/main" id="{4B91BF69-B73E-E52D-A273-34695C83C39D}"/>
+              <a16:creationId xmlns:a16="http://schemas.microsoft.com/office/drawing/2014/main" id="{A5CF9064-F583-AF84-C9E9-3D700D7E7359}"/>
             </a:ext>
           </a:extLst>
         </p:cNvPr>
@@ -5638,7 +5678,7 @@
           <p:cNvPr id="4" name="Picture 1">
             <a:extLst>
               <a:ext uri="{FF2B5EF4-FFF2-40B4-BE49-F238E27FC236}">
-                <a16:creationId xmlns:a16="http://schemas.microsoft.com/office/drawing/2014/main" id="{480AF66F-CB5C-451A-847A-EB60BA58025A}"/>
+                <a16:creationId xmlns:a16="http://schemas.microsoft.com/office/drawing/2014/main" id="{77B90727-557F-2570-40C0-94892E8EA2B1}"/>
               </a:ext>
             </a:extLst>
           </p:cNvPr>
@@ -5655,8 +5695,8 @@
         </p:blipFill>
         <p:spPr>
           <a:xfrm>
-            <a:off x="834546" y="1018696"/>
-            <a:ext cx="355023" cy="200754"/>
+            <a:off x="147393" y="129534"/>
+            <a:ext cx="544284" cy="307776"/>
           </a:xfrm>
           <a:prstGeom prst="rect">
             <a:avLst/>
@@ -5673,7 +5713,7 @@
           <p:cNvPr id="5" name="TextBox 4">
             <a:extLst>
               <a:ext uri="{FF2B5EF4-FFF2-40B4-BE49-F238E27FC236}">
-                <a16:creationId xmlns:a16="http://schemas.microsoft.com/office/drawing/2014/main" id="{5D20D6DC-7FD8-414D-8D41-7397E6AB51D5}"/>
+                <a16:creationId xmlns:a16="http://schemas.microsoft.com/office/drawing/2014/main" id="{F4C32A81-F20A-8D8F-993A-F212AD9E03DF}"/>
               </a:ext>
             </a:extLst>
           </p:cNvPr>
@@ -5682,8 +5722,8 @@
         </p:nvSpPr>
         <p:spPr>
           <a:xfrm>
-            <a:off x="1138753" y="1035390"/>
-            <a:ext cx="1233714" cy="167369"/>
+            <a:off x="1402907" y="1475898"/>
+            <a:ext cx="1590324" cy="200055"/>
           </a:xfrm>
           <a:prstGeom prst="rect">
             <a:avLst/>
@@ -5698,86 +5738,7 @@
           <a:p>
             <a:pPr algn="ctr"/>
             <a:r>
-              <a:rPr lang="ko-KR" altLang="en-US" sz="494" b="1" dirty="0">
-                <a:solidFill>
-                  <a:srgbClr val="4472C4"/>
-                </a:solidFill>
-                <a:latin typeface="KoPub돋움체 Bold" panose="02020603020101020101" pitchFamily="18" charset="-127"/>
-                <a:ea typeface="KoPub돋움체 Bold" panose="02020603020101020101" pitchFamily="18" charset="-127"/>
-              </a:rPr>
-              <a:t>순천향대학교 천안병원 </a:t>
-            </a:r>
-            <a:r>
-              <a:rPr lang="en-US" altLang="ko-KR" sz="494" b="1" dirty="0">
-                <a:solidFill>
-                  <a:srgbClr val="4472C4"/>
-                </a:solidFill>
-                <a:latin typeface="KoPub돋움체 Bold" panose="02020603020101020101" pitchFamily="18" charset="-127"/>
-                <a:ea typeface="KoPub돋움체 Bold" panose="02020603020101020101" pitchFamily="18" charset="-127"/>
-              </a:rPr>
-              <a:t>| </a:t>
-            </a:r>
-            <a:r>
-              <a:rPr lang="ko-KR" altLang="en-US" sz="494" b="1" dirty="0">
-                <a:solidFill>
-                  <a:srgbClr val="4472C4"/>
-                </a:solidFill>
-                <a:latin typeface="KoPub돋움체 Bold" panose="02020603020101020101" pitchFamily="18" charset="-127"/>
-                <a:ea typeface="KoPub돋움체 Bold" panose="02020603020101020101" pitchFamily="18" charset="-127"/>
-              </a:rPr>
-              <a:t>진료지원간호팀</a:t>
-            </a:r>
-            <a:endParaRPr lang="ko-KR" altLang="en-US" sz="593" b="1" dirty="0">
-              <a:solidFill>
-                <a:srgbClr val="4472C4"/>
-              </a:solidFill>
-              <a:latin typeface="KoPub돋움체 Bold" panose="02020603020101020101" pitchFamily="18" charset="-127"/>
-              <a:ea typeface="KoPub돋움체 Bold" panose="02020603020101020101" pitchFamily="18" charset="-127"/>
-            </a:endParaRPr>
-          </a:p>
-        </p:txBody>
-      </p:sp>
-      <p:sp>
-        <p:nvSpPr>
-          <p:cNvPr id="7" name="TextBox 6">
-            <a:extLst>
-              <a:ext uri="{FF2B5EF4-FFF2-40B4-BE49-F238E27FC236}">
-                <a16:creationId xmlns:a16="http://schemas.microsoft.com/office/drawing/2014/main" id="{568CE481-19EF-4F97-AF73-265FDB83283E}"/>
-              </a:ext>
-            </a:extLst>
-          </p:cNvPr>
-          <p:cNvSpPr txBox="1"/>
-          <p:nvPr/>
-        </p:nvSpPr>
-        <p:spPr>
-          <a:xfrm>
-            <a:off x="1007527" y="671882"/>
-            <a:ext cx="1090755" cy="228231"/>
-          </a:xfrm>
-          <a:prstGeom prst="rect">
-            <a:avLst/>
-          </a:prstGeom>
-          <a:noFill/>
-        </p:spPr>
-        <p:txBody>
-          <a:bodyPr wrap="none">
-            <a:spAutoFit/>
-          </a:bodyPr>
-          <a:lstStyle/>
-          <a:p>
-            <a:pPr algn="ctr"/>
-            <a:r>
-              <a:rPr lang="ko-KR" altLang="en-US" sz="890" dirty="0" err="1">
-                <a:solidFill>
-                  <a:srgbClr val="00B0F0"/>
-                </a:solidFill>
-                <a:latin typeface="KoPub돋움체 Bold" panose="00000800000000000000" pitchFamily="2" charset="-127"/>
-                <a:ea typeface="KoPub돋움체 Bold" panose="00000800000000000000" pitchFamily="2" charset="-127"/>
-              </a:rPr>
-              <a:t>우리가치</a:t>
-            </a:r>
-            <a:r>
-              <a:rPr lang="ko-KR" altLang="en-US" sz="890" dirty="0">
+              <a:rPr lang="ko-KR" altLang="en-US" sz="700" b="1" dirty="0">
                 <a:solidFill>
                   <a:schemeClr val="accent1">
                     <a:lumMod val="50000"/>
@@ -5786,10 +5747,97 @@
                 <a:latin typeface="KoPub돋움체 Bold" panose="02020603020101020101" pitchFamily="18" charset="-127"/>
                 <a:ea typeface="KoPub돋움체 Bold" panose="02020603020101020101" pitchFamily="18" charset="-127"/>
               </a:rPr>
+              <a:t>순천향대학교 천안병원</a:t>
+            </a:r>
+            <a:r>
+              <a:rPr lang="en-US" altLang="ko-KR" sz="700" b="1" dirty="0">
+                <a:solidFill>
+                  <a:schemeClr val="accent1">
+                    <a:lumMod val="50000"/>
+                  </a:schemeClr>
+                </a:solidFill>
+                <a:latin typeface="KoPub돋움체 Bold" panose="02020603020101020101" pitchFamily="18" charset="-127"/>
+                <a:ea typeface="KoPub돋움체 Bold" panose="02020603020101020101" pitchFamily="18" charset="-127"/>
+              </a:rPr>
               <a:t> </a:t>
             </a:r>
             <a:r>
-              <a:rPr lang="en-US" altLang="ko-KR" sz="890" dirty="0" err="1">
+              <a:rPr lang="ko-KR" altLang="en-US" sz="700" b="1" dirty="0">
+                <a:solidFill>
+                  <a:schemeClr val="accent1">
+                    <a:lumMod val="50000"/>
+                  </a:schemeClr>
+                </a:solidFill>
+                <a:latin typeface="KoPub돋움체 Bold" panose="02020603020101020101" pitchFamily="18" charset="-127"/>
+                <a:ea typeface="KoPub돋움체 Bold" panose="02020603020101020101" pitchFamily="18" charset="-127"/>
+              </a:rPr>
+              <a:t>진료지원간호팀</a:t>
+            </a:r>
+            <a:endParaRPr lang="ko-KR" altLang="en-US" sz="800" b="1" dirty="0">
+              <a:solidFill>
+                <a:schemeClr val="accent1">
+                  <a:lumMod val="50000"/>
+                </a:schemeClr>
+              </a:solidFill>
+              <a:latin typeface="KoPub돋움체 Bold" panose="02020603020101020101" pitchFamily="18" charset="-127"/>
+              <a:ea typeface="KoPub돋움체 Bold" panose="02020603020101020101" pitchFamily="18" charset="-127"/>
+            </a:endParaRPr>
+          </a:p>
+        </p:txBody>
+      </p:sp>
+      <p:sp>
+        <p:nvSpPr>
+          <p:cNvPr id="7" name="TextBox 6">
+            <a:extLst>
+              <a:ext uri="{FF2B5EF4-FFF2-40B4-BE49-F238E27FC236}">
+                <a16:creationId xmlns:a16="http://schemas.microsoft.com/office/drawing/2014/main" id="{764FFBEF-B328-8C32-1561-80993F91E588}"/>
+              </a:ext>
+            </a:extLst>
+          </p:cNvPr>
+          <p:cNvSpPr txBox="1"/>
+          <p:nvPr/>
+        </p:nvSpPr>
+        <p:spPr>
+          <a:xfrm>
+            <a:off x="675817" y="642967"/>
+            <a:ext cx="1845506" cy="338554"/>
+          </a:xfrm>
+          <a:prstGeom prst="rect">
+            <a:avLst/>
+          </a:prstGeom>
+          <a:noFill/>
+        </p:spPr>
+        <p:txBody>
+          <a:bodyPr wrap="none">
+            <a:spAutoFit/>
+          </a:bodyPr>
+          <a:lstStyle/>
+          <a:p>
+            <a:pPr algn="ctr"/>
+            <a:r>
+              <a:rPr lang="ko-KR" altLang="en-US" sz="1600" dirty="0" err="1">
+                <a:solidFill>
+                  <a:srgbClr val="00B0F0"/>
+                </a:solidFill>
+                <a:latin typeface="Noto Sans KR Black" panose="020B0200000000000000" pitchFamily="50" charset="-127"/>
+                <a:ea typeface="Noto Sans KR Black" panose="020B0200000000000000" pitchFamily="50" charset="-127"/>
+              </a:rPr>
+              <a:t>우리가치</a:t>
+            </a:r>
+            <a:r>
+              <a:rPr lang="ko-KR" altLang="en-US" sz="1600" dirty="0">
+                <a:solidFill>
+                  <a:schemeClr val="accent1">
+                    <a:lumMod val="50000"/>
+                  </a:schemeClr>
+                </a:solidFill>
+                <a:latin typeface="KoPub돋움체 Bold" panose="02020603020101020101" pitchFamily="18" charset="-127"/>
+                <a:ea typeface="KoPub돋움체 Bold" panose="02020603020101020101" pitchFamily="18" charset="-127"/>
+              </a:rPr>
+              <a:t> </a:t>
+            </a:r>
+            <a:r>
+              <a:rPr lang="en-US" altLang="ko-KR" sz="1600" dirty="0" err="1">
                 <a:solidFill>
                   <a:schemeClr val="accent1">
                     <a:lumMod val="50000"/>
@@ -5800,7 +5848,7 @@
               </a:rPr>
               <a:t>WeValue</a:t>
             </a:r>
-            <a:endParaRPr lang="en-US" altLang="ko-KR" sz="890" dirty="0">
+            <a:endParaRPr lang="en-US" altLang="ko-KR" sz="1600" dirty="0">
               <a:solidFill>
                 <a:schemeClr val="accent1">
                   <a:lumMod val="50000"/>
@@ -5817,7 +5865,7 @@
           <p:cNvPr id="8" name="TextBox 7">
             <a:extLst>
               <a:ext uri="{FF2B5EF4-FFF2-40B4-BE49-F238E27FC236}">
-                <a16:creationId xmlns:a16="http://schemas.microsoft.com/office/drawing/2014/main" id="{DAA9A54C-F797-44FB-AB3D-27BD433EFBED}"/>
+                <a16:creationId xmlns:a16="http://schemas.microsoft.com/office/drawing/2014/main" id="{6770AA4D-9970-9E44-0CF1-9CF01DABADD2}"/>
               </a:ext>
             </a:extLst>
           </p:cNvPr>
@@ -5826,8 +5874,8 @@
         </p:nvSpPr>
         <p:spPr>
           <a:xfrm>
-            <a:off x="914015" y="817009"/>
-            <a:ext cx="1277778" cy="167369"/>
+            <a:off x="619776" y="900112"/>
+            <a:ext cx="1957587" cy="215444"/>
           </a:xfrm>
           <a:prstGeom prst="rect">
             <a:avLst/>
@@ -5842,42 +5890,42 @@
           <a:p>
             <a:pPr algn="ctr"/>
             <a:r>
-              <a:rPr lang="en-US" altLang="ko-KR" sz="494" b="1" dirty="0">
+              <a:rPr lang="en-US" altLang="ko-KR" sz="800" b="1" dirty="0">
                 <a:latin typeface="KoPub돋움체 Bold" panose="00000800000000000000" pitchFamily="2" charset="-127"/>
                 <a:ea typeface="KoPub돋움체 Bold" panose="00000800000000000000" pitchFamily="2" charset="-127"/>
               </a:rPr>
               <a:t>[</a:t>
             </a:r>
             <a:r>
-              <a:rPr lang="ko-KR" altLang="en-US" sz="494" b="1" dirty="0">
+              <a:rPr lang="ko-KR" altLang="en-US" sz="800" b="1" dirty="0">
                 <a:latin typeface="KoPub돋움체 Bold" panose="00000800000000000000" pitchFamily="2" charset="-127"/>
                 <a:ea typeface="KoPub돋움체 Bold" panose="00000800000000000000" pitchFamily="2" charset="-127"/>
               </a:rPr>
               <a:t>우리가 가치를 만드는 공간</a:t>
             </a:r>
             <a:r>
-              <a:rPr lang="en-US" altLang="ko-KR" sz="494" b="1" dirty="0">
+              <a:rPr lang="en-US" altLang="ko-KR" sz="800" b="1" dirty="0">
                 <a:latin typeface="KoPub돋움체 Bold" panose="00000800000000000000" pitchFamily="2" charset="-127"/>
                 <a:ea typeface="KoPub돋움체 Bold" panose="00000800000000000000" pitchFamily="2" charset="-127"/>
               </a:rPr>
               <a:t>, </a:t>
             </a:r>
             <a:r>
-              <a:rPr lang="ko-KR" altLang="en-US" sz="494" b="1" dirty="0" err="1">
+              <a:rPr lang="ko-KR" altLang="en-US" sz="800" b="1" dirty="0" err="1">
                 <a:latin typeface="KoPub돋움체 Bold" panose="00000800000000000000" pitchFamily="2" charset="-127"/>
                 <a:ea typeface="KoPub돋움체 Bold" panose="00000800000000000000" pitchFamily="2" charset="-127"/>
               </a:rPr>
               <a:t>우리가치</a:t>
             </a:r>
             <a:r>
-              <a:rPr lang="ko-KR" altLang="en-US" sz="494" b="1" dirty="0">
+              <a:rPr lang="ko-KR" altLang="en-US" sz="800" b="1" dirty="0">
                 <a:latin typeface="KoPub돋움체 Bold" panose="00000800000000000000" pitchFamily="2" charset="-127"/>
                 <a:ea typeface="KoPub돋움체 Bold" panose="00000800000000000000" pitchFamily="2" charset="-127"/>
               </a:rPr>
               <a:t> 허브</a:t>
             </a:r>
             <a:r>
-              <a:rPr lang="en-US" altLang="ko-KR" sz="494" b="1" dirty="0">
+              <a:rPr lang="en-US" altLang="ko-KR" sz="800" b="1" dirty="0">
                 <a:latin typeface="KoPub돋움체 Bold" panose="00000800000000000000" pitchFamily="2" charset="-127"/>
                 <a:ea typeface="KoPub돋움체 Bold" panose="00000800000000000000" pitchFamily="2" charset="-127"/>
               </a:rPr>
@@ -5891,7 +5939,7 @@
           <p:cNvPr id="9" name="그림 8">
             <a:extLst>
               <a:ext uri="{FF2B5EF4-FFF2-40B4-BE49-F238E27FC236}">
-                <a16:creationId xmlns:a16="http://schemas.microsoft.com/office/drawing/2014/main" id="{F3A7A373-FECD-4243-98D0-B228302974CA}"/>
+                <a16:creationId xmlns:a16="http://schemas.microsoft.com/office/drawing/2014/main" id="{98153167-4419-48ED-80AC-5C3EF7B86335}"/>
               </a:ext>
             </a:extLst>
           </p:cNvPr>
@@ -5908,8 +5956,8 @@
         </p:blipFill>
         <p:spPr>
           <a:xfrm>
-            <a:off x="896601" y="716227"/>
-            <a:ext cx="145755" cy="127277"/>
+            <a:off x="603724" y="642969"/>
+            <a:ext cx="175906" cy="153604"/>
           </a:xfrm>
           <a:prstGeom prst="rect">
             <a:avLst/>
@@ -5921,7 +5969,7 @@
           <p:cNvPr id="11" name="그림 10">
             <a:extLst>
               <a:ext uri="{FF2B5EF4-FFF2-40B4-BE49-F238E27FC236}">
-                <a16:creationId xmlns:a16="http://schemas.microsoft.com/office/drawing/2014/main" id="{25D16522-22F0-487F-BE90-3035E8C29235}"/>
+                <a16:creationId xmlns:a16="http://schemas.microsoft.com/office/drawing/2014/main" id="{9FB88B5B-442A-76BA-6064-83801B871E39}"/>
               </a:ext>
             </a:extLst>
           </p:cNvPr>
@@ -5938,8 +5986,8 @@
         </p:blipFill>
         <p:spPr>
           <a:xfrm rot="10800000">
-            <a:off x="2030965" y="721574"/>
-            <a:ext cx="145753" cy="127277"/>
+            <a:off x="2423948" y="642967"/>
+            <a:ext cx="175902" cy="153606"/>
           </a:xfrm>
           <a:prstGeom prst="rect">
             <a:avLst/>
@@ -5949,7 +5997,7 @@
     </p:spTree>
     <p:extLst>
       <p:ext uri="{BB962C8B-B14F-4D97-AF65-F5344CB8AC3E}">
-        <p14:creationId xmlns:p14="http://schemas.microsoft.com/office/powerpoint/2010/main" val="276754522"/>
+        <p14:creationId xmlns:p14="http://schemas.microsoft.com/office/powerpoint/2010/main" val="1590011397"/>
       </p:ext>
     </p:extLst>
   </p:cSld>

--- a/documents/명함제작/[2026 우리가치(WeValue) QI 활동 프로젝트 명함1(뒤).pptx
+++ b/documents/명함제작/[2026 우리가치(WeValue) QI 활동 프로젝트 명함1(뒤).pptx
@@ -1,6 +1,6 @@
 
 <file path=ppt/presentation.xml><?xml version="1.0" encoding="utf-8"?>
-<p:presentation xmlns:a="http://schemas.openxmlformats.org/drawingml/2006/main" xmlns:r="http://schemas.openxmlformats.org/officeDocument/2006/relationships" xmlns:p="http://schemas.openxmlformats.org/presentationml/2006/main" saveSubsetFonts="1">
+<p:presentation xmlns:a="http://schemas.openxmlformats.org/drawingml/2006/main" xmlns:r="http://schemas.openxmlformats.org/officeDocument/2006/relationships" xmlns:p="http://schemas.openxmlformats.org/presentationml/2006/main" embedTrueTypeFonts="1" saveSubsetFonts="1">
   <p:sldMasterIdLst>
     <p:sldMasterId id="2147483883" r:id="rId1"/>
   </p:sldMasterIdLst>
@@ -17,6 +17,26 @@
   </p:sldIdLst>
   <p:sldSz cx="3203575" cy="1800225"/>
   <p:notesSz cx="6858000" cy="9945688"/>
+  <p:embeddedFontLst>
+    <p:embeddedFont>
+      <p:font typeface="Franklin Gothic Heavy" panose="020B0903020102020204" pitchFamily="34" charset="0"/>
+      <p:regular r:id="rId9"/>
+      <p:italic r:id="rId10"/>
+    </p:embeddedFont>
+    <p:embeddedFont>
+      <p:font typeface="KoPub돋움체 Bold" panose="02020603020101020101" pitchFamily="18" charset="-127"/>
+      <p:regular r:id="rId11"/>
+    </p:embeddedFont>
+    <p:embeddedFont>
+      <p:font typeface="Noto Sans KR Black" panose="020B0200000000000000" pitchFamily="50" charset="-127"/>
+      <p:bold r:id="rId12"/>
+    </p:embeddedFont>
+    <p:embeddedFont>
+      <p:font typeface="맑은 고딕" panose="020B0503020000020004" pitchFamily="50" charset="-127"/>
+      <p:regular r:id="rId13"/>
+      <p:bold r:id="rId14"/>
+    </p:embeddedFont>
+  </p:embeddedFontLst>
   <p:defaultTextStyle>
     <a:defPPr>
       <a:defRPr lang="en-US"/>
@@ -233,7 +253,7 @@
           <a:p>
             <a:fld id="{F929F65E-AEE7-45C5-814B-4468CAF1E537}" type="datetimeFigureOut">
               <a:rPr lang="ko-KR" altLang="en-US" smtClean="0"/>
-              <a:t>2026-05-14</a:t>
+              <a:t>2026-07-09</a:t>
             </a:fld>
             <a:endParaRPr lang="ko-KR" altLang="en-US"/>
           </a:p>
@@ -631,7 +651,7 @@
           <a:p>
             <a:fld id="{149F34B4-7175-41BD-B98B-2E7021201D7D}" type="datetimeFigureOut">
               <a:rPr lang="ko-KR" altLang="en-US" smtClean="0"/>
-              <a:t>2026-05-14</a:t>
+              <a:t>2026-07-09</a:t>
             </a:fld>
             <a:endParaRPr lang="ko-KR" altLang="en-US"/>
           </a:p>
@@ -801,7 +821,7 @@
           <a:p>
             <a:fld id="{149F34B4-7175-41BD-B98B-2E7021201D7D}" type="datetimeFigureOut">
               <a:rPr lang="ko-KR" altLang="en-US" smtClean="0"/>
-              <a:t>2026-05-14</a:t>
+              <a:t>2026-07-09</a:t>
             </a:fld>
             <a:endParaRPr lang="ko-KR" altLang="en-US"/>
           </a:p>
@@ -981,7 +1001,7 @@
           <a:p>
             <a:fld id="{149F34B4-7175-41BD-B98B-2E7021201D7D}" type="datetimeFigureOut">
               <a:rPr lang="ko-KR" altLang="en-US" smtClean="0"/>
-              <a:t>2026-05-14</a:t>
+              <a:t>2026-07-09</a:t>
             </a:fld>
             <a:endParaRPr lang="ko-KR" altLang="en-US"/>
           </a:p>
@@ -1654,7 +1674,7 @@
           <a:p>
             <a:fld id="{149F34B4-7175-41BD-B98B-2E7021201D7D}" type="datetimeFigureOut">
               <a:rPr lang="ko-KR" altLang="en-US" smtClean="0"/>
-              <a:t>2026-05-14</a:t>
+              <a:t>2026-07-09</a:t>
             </a:fld>
             <a:endParaRPr lang="ko-KR" altLang="en-US"/>
           </a:p>
@@ -1900,7 +1920,7 @@
           <a:p>
             <a:fld id="{149F34B4-7175-41BD-B98B-2E7021201D7D}" type="datetimeFigureOut">
               <a:rPr lang="ko-KR" altLang="en-US" smtClean="0"/>
-              <a:t>2026-05-14</a:t>
+              <a:t>2026-07-09</a:t>
             </a:fld>
             <a:endParaRPr lang="ko-KR" altLang="en-US"/>
           </a:p>
@@ -2132,7 +2152,7 @@
           <a:p>
             <a:fld id="{149F34B4-7175-41BD-B98B-2E7021201D7D}" type="datetimeFigureOut">
               <a:rPr lang="ko-KR" altLang="en-US" smtClean="0"/>
-              <a:t>2026-05-14</a:t>
+              <a:t>2026-07-09</a:t>
             </a:fld>
             <a:endParaRPr lang="ko-KR" altLang="en-US"/>
           </a:p>
@@ -2499,7 +2519,7 @@
           <a:p>
             <a:fld id="{149F34B4-7175-41BD-B98B-2E7021201D7D}" type="datetimeFigureOut">
               <a:rPr lang="ko-KR" altLang="en-US" smtClean="0"/>
-              <a:t>2026-05-14</a:t>
+              <a:t>2026-07-09</a:t>
             </a:fld>
             <a:endParaRPr lang="ko-KR" altLang="en-US"/>
           </a:p>
@@ -2617,7 +2637,7 @@
           <a:p>
             <a:fld id="{149F34B4-7175-41BD-B98B-2E7021201D7D}" type="datetimeFigureOut">
               <a:rPr lang="ko-KR" altLang="en-US" smtClean="0"/>
-              <a:t>2026-05-14</a:t>
+              <a:t>2026-07-09</a:t>
             </a:fld>
             <a:endParaRPr lang="ko-KR" altLang="en-US"/>
           </a:p>
@@ -2712,7 +2732,7 @@
           <a:p>
             <a:fld id="{149F34B4-7175-41BD-B98B-2E7021201D7D}" type="datetimeFigureOut">
               <a:rPr lang="ko-KR" altLang="en-US" smtClean="0"/>
-              <a:t>2026-05-14</a:t>
+              <a:t>2026-07-09</a:t>
             </a:fld>
             <a:endParaRPr lang="ko-KR" altLang="en-US"/>
           </a:p>
@@ -2760,6 +2780,36 @@
           </a:p>
         </p:txBody>
       </p:sp>
+      <p:pic>
+        <p:nvPicPr>
+          <p:cNvPr id="5" name="그림 4">
+            <a:extLst>
+              <a:ext uri="{FF2B5EF4-FFF2-40B4-BE49-F238E27FC236}">
+                <a16:creationId xmlns:a16="http://schemas.microsoft.com/office/drawing/2014/main" id="{412C47B8-B5FF-13E4-C86D-05E3F6798668}"/>
+              </a:ext>
+            </a:extLst>
+          </p:cNvPr>
+          <p:cNvPicPr>
+            <a:picLocks noChangeAspect="1"/>
+          </p:cNvPicPr>
+          <p:nvPr userDrawn="1"/>
+        </p:nvPicPr>
+        <p:blipFill>
+          <a:blip r:embed="rId2"/>
+          <a:stretch>
+            <a:fillRect/>
+          </a:stretch>
+        </p:blipFill>
+        <p:spPr>
+          <a:xfrm>
+            <a:off x="220246" y="176279"/>
+            <a:ext cx="464556" cy="426653"/>
+          </a:xfrm>
+          <a:prstGeom prst="rect">
+            <a:avLst/>
+          </a:prstGeom>
+        </p:spPr>
+      </p:pic>
     </p:spTree>
     <p:extLst>
       <p:ext uri="{BB962C8B-B14F-4D97-AF65-F5344CB8AC3E}">
@@ -2989,7 +3039,7 @@
           <a:p>
             <a:fld id="{149F34B4-7175-41BD-B98B-2E7021201D7D}" type="datetimeFigureOut">
               <a:rPr lang="ko-KR" altLang="en-US" smtClean="0"/>
-              <a:t>2026-05-14</a:t>
+              <a:t>2026-07-09</a:t>
             </a:fld>
             <a:endParaRPr lang="ko-KR" altLang="en-US"/>
           </a:p>
@@ -3246,7 +3296,7 @@
           <a:p>
             <a:fld id="{149F34B4-7175-41BD-B98B-2E7021201D7D}" type="datetimeFigureOut">
               <a:rPr lang="ko-KR" altLang="en-US" smtClean="0"/>
-              <a:t>2026-05-14</a:t>
+              <a:t>2026-07-09</a:t>
             </a:fld>
             <a:endParaRPr lang="ko-KR" altLang="en-US"/>
           </a:p>
@@ -3459,7 +3509,7 @@
           <a:p>
             <a:fld id="{149F34B4-7175-41BD-B98B-2E7021201D7D}" type="datetimeFigureOut">
               <a:rPr lang="ko-KR" altLang="en-US" smtClean="0"/>
-              <a:t>2026-05-14</a:t>
+              <a:t>2026-07-09</a:t>
             </a:fld>
             <a:endParaRPr lang="ko-KR" altLang="en-US"/>
           </a:p>
@@ -3888,41 +3938,6 @@
           <a:chExt cx="0" cy="0"/>
         </a:xfrm>
       </p:grpSpPr>
-      <p:pic>
-        <p:nvPicPr>
-          <p:cNvPr id="4" name="Picture 1">
-            <a:extLst>
-              <a:ext uri="{FF2B5EF4-FFF2-40B4-BE49-F238E27FC236}">
-                <a16:creationId xmlns:a16="http://schemas.microsoft.com/office/drawing/2014/main" id="{AF22DEA8-A306-34D0-1F99-0F31BB7F57C6}"/>
-              </a:ext>
-            </a:extLst>
-          </p:cNvPr>
-          <p:cNvPicPr>
-            <a:picLocks noChangeAspect="1"/>
-          </p:cNvPicPr>
-          <p:nvPr/>
-        </p:nvPicPr>
-        <p:blipFill>
-          <a:blip r:embed="rId2"/>
-          <a:stretch>
-            <a:fillRect/>
-          </a:stretch>
-        </p:blipFill>
-        <p:spPr>
-          <a:xfrm>
-            <a:off x="147393" y="129534"/>
-            <a:ext cx="544284" cy="307776"/>
-          </a:xfrm>
-          <a:prstGeom prst="rect">
-            <a:avLst/>
-          </a:prstGeom>
-          <a:noFill/>
-          <a:ln>
-            <a:noFill/>
-          </a:ln>
-          <a:effectLst/>
-        </p:spPr>
-      </p:pic>
       <p:sp>
         <p:nvSpPr>
           <p:cNvPr id="5" name="TextBox 4">
@@ -3937,8 +3952,8 @@
         </p:nvSpPr>
         <p:spPr>
           <a:xfrm>
-            <a:off x="1402907" y="1475898"/>
-            <a:ext cx="1590324" cy="200055"/>
+            <a:off x="2258736" y="1475898"/>
+            <a:ext cx="734495" cy="200055"/>
           </a:xfrm>
           <a:prstGeom prst="rect">
             <a:avLst/>
@@ -3946,36 +3961,12 @@
           <a:noFill/>
         </p:spPr>
         <p:txBody>
-          <a:bodyPr wrap="square" rtlCol="0">
+          <a:bodyPr wrap="none" rtlCol="0">
             <a:spAutoFit/>
           </a:bodyPr>
           <a:lstStyle/>
           <a:p>
-            <a:pPr algn="ctr"/>
-            <a:r>
-              <a:rPr lang="ko-KR" altLang="en-US" sz="700" b="1" dirty="0">
-                <a:solidFill>
-                  <a:schemeClr val="accent1">
-                    <a:lumMod val="50000"/>
-                  </a:schemeClr>
-                </a:solidFill>
-                <a:latin typeface="KoPub돋움체 Bold" panose="02020603020101020101" pitchFamily="18" charset="-127"/>
-                <a:ea typeface="KoPub돋움체 Bold" panose="02020603020101020101" pitchFamily="18" charset="-127"/>
-              </a:rPr>
-              <a:t>순천향대학교 천안병원</a:t>
-            </a:r>
-            <a:r>
-              <a:rPr lang="en-US" altLang="ko-KR" sz="700" b="1" dirty="0">
-                <a:solidFill>
-                  <a:schemeClr val="accent1">
-                    <a:lumMod val="50000"/>
-                  </a:schemeClr>
-                </a:solidFill>
-                <a:latin typeface="KoPub돋움체 Bold" panose="02020603020101020101" pitchFamily="18" charset="-127"/>
-                <a:ea typeface="KoPub돋움체 Bold" panose="02020603020101020101" pitchFamily="18" charset="-127"/>
-              </a:rPr>
-              <a:t> </a:t>
-            </a:r>
+            <a:pPr algn="r"/>
             <a:r>
               <a:rPr lang="ko-KR" altLang="en-US" sz="700" b="1" dirty="0">
                 <a:solidFill>
@@ -4164,7 +4155,7 @@
           <p:nvPr/>
         </p:nvPicPr>
         <p:blipFill>
-          <a:blip r:embed="rId3"/>
+          <a:blip r:embed="rId2"/>
           <a:stretch>
             <a:fillRect/>
           </a:stretch>
@@ -4194,7 +4185,7 @@
           <p:nvPr/>
         </p:nvPicPr>
         <p:blipFill>
-          <a:blip r:embed="rId3"/>
+          <a:blip r:embed="rId2"/>
           <a:stretch>
             <a:fillRect/>
           </a:stretch>
@@ -4230,7 +4221,7 @@
         <p:cNvPr id="1" name="">
           <a:extLst>
             <a:ext uri="{FF2B5EF4-FFF2-40B4-BE49-F238E27FC236}">
-              <a16:creationId xmlns:a16="http://schemas.microsoft.com/office/drawing/2014/main" id="{52F88161-BA4B-95A6-3012-9B3EA1F5127B}"/>
+              <a16:creationId xmlns:a16="http://schemas.microsoft.com/office/drawing/2014/main" id="{85E98EA7-7E16-F0C1-9E40-97F9E20380E9}"/>
             </a:ext>
           </a:extLst>
         </p:cNvPr>
@@ -4245,12 +4236,214 @@
           <a:chExt cx="0" cy="0"/>
         </a:xfrm>
       </p:grpSpPr>
+      <p:sp>
+        <p:nvSpPr>
+          <p:cNvPr id="5" name="TextBox 4">
+            <a:extLst>
+              <a:ext uri="{FF2B5EF4-FFF2-40B4-BE49-F238E27FC236}">
+                <a16:creationId xmlns:a16="http://schemas.microsoft.com/office/drawing/2014/main" id="{51FEBC87-3F2E-4C70-40A7-E2DF0C2F56B0}"/>
+              </a:ext>
+            </a:extLst>
+          </p:cNvPr>
+          <p:cNvSpPr txBox="1"/>
+          <p:nvPr/>
+        </p:nvSpPr>
+        <p:spPr>
+          <a:xfrm>
+            <a:off x="2258736" y="1475898"/>
+            <a:ext cx="734495" cy="200055"/>
+          </a:xfrm>
+          <a:prstGeom prst="rect">
+            <a:avLst/>
+          </a:prstGeom>
+          <a:noFill/>
+        </p:spPr>
+        <p:txBody>
+          <a:bodyPr wrap="none" rtlCol="0">
+            <a:spAutoFit/>
+          </a:bodyPr>
+          <a:lstStyle/>
+          <a:p>
+            <a:pPr algn="r"/>
+            <a:r>
+              <a:rPr lang="ko-KR" altLang="en-US" sz="700" b="1" dirty="0">
+                <a:solidFill>
+                  <a:schemeClr val="accent1">
+                    <a:lumMod val="50000"/>
+                  </a:schemeClr>
+                </a:solidFill>
+                <a:latin typeface="KoPub돋움체 Bold" panose="02020603020101020101" pitchFamily="18" charset="-127"/>
+                <a:ea typeface="KoPub돋움체 Bold" panose="02020603020101020101" pitchFamily="18" charset="-127"/>
+              </a:rPr>
+              <a:t>진료지원간호팀</a:t>
+            </a:r>
+            <a:endParaRPr lang="ko-KR" altLang="en-US" sz="800" b="1" dirty="0">
+              <a:solidFill>
+                <a:schemeClr val="accent1">
+                  <a:lumMod val="50000"/>
+                </a:schemeClr>
+              </a:solidFill>
+              <a:latin typeface="KoPub돋움체 Bold" panose="02020603020101020101" pitchFamily="18" charset="-127"/>
+              <a:ea typeface="KoPub돋움체 Bold" panose="02020603020101020101" pitchFamily="18" charset="-127"/>
+            </a:endParaRPr>
+          </a:p>
+        </p:txBody>
+      </p:sp>
+      <p:sp>
+        <p:nvSpPr>
+          <p:cNvPr id="7" name="TextBox 6">
+            <a:extLst>
+              <a:ext uri="{FF2B5EF4-FFF2-40B4-BE49-F238E27FC236}">
+                <a16:creationId xmlns:a16="http://schemas.microsoft.com/office/drawing/2014/main" id="{62C81409-C5A3-5FA0-06A5-CE6F7E5EB945}"/>
+              </a:ext>
+            </a:extLst>
+          </p:cNvPr>
+          <p:cNvSpPr txBox="1"/>
+          <p:nvPr/>
+        </p:nvSpPr>
+        <p:spPr>
+          <a:xfrm>
+            <a:off x="675817" y="642967"/>
+            <a:ext cx="1845506" cy="338554"/>
+          </a:xfrm>
+          <a:prstGeom prst="rect">
+            <a:avLst/>
+          </a:prstGeom>
+          <a:noFill/>
+        </p:spPr>
+        <p:txBody>
+          <a:bodyPr wrap="none">
+            <a:spAutoFit/>
+          </a:bodyPr>
+          <a:lstStyle/>
+          <a:p>
+            <a:pPr algn="ctr"/>
+            <a:r>
+              <a:rPr lang="ko-KR" altLang="en-US" sz="1600" dirty="0" err="1">
+                <a:solidFill>
+                  <a:srgbClr val="00B0F0"/>
+                </a:solidFill>
+                <a:latin typeface="Noto Sans KR Black" panose="020B0200000000000000" pitchFamily="50" charset="-127"/>
+                <a:ea typeface="Noto Sans KR Black" panose="020B0200000000000000" pitchFamily="50" charset="-127"/>
+              </a:rPr>
+              <a:t>우리가치</a:t>
+            </a:r>
+            <a:r>
+              <a:rPr lang="ko-KR" altLang="en-US" sz="1600" dirty="0">
+                <a:solidFill>
+                  <a:schemeClr val="accent1">
+                    <a:lumMod val="50000"/>
+                  </a:schemeClr>
+                </a:solidFill>
+                <a:latin typeface="KoPub돋움체 Bold" panose="02020603020101020101" pitchFamily="18" charset="-127"/>
+                <a:ea typeface="KoPub돋움체 Bold" panose="02020603020101020101" pitchFamily="18" charset="-127"/>
+              </a:rPr>
+              <a:t> </a:t>
+            </a:r>
+            <a:r>
+              <a:rPr lang="en-US" altLang="ko-KR" sz="1600" dirty="0" err="1">
+                <a:solidFill>
+                  <a:schemeClr val="accent1">
+                    <a:lumMod val="50000"/>
+                  </a:schemeClr>
+                </a:solidFill>
+                <a:latin typeface="Franklin Gothic Heavy" panose="020B0903020102020204" pitchFamily="34" charset="0"/>
+                <a:ea typeface="KoPub돋움체 Bold" panose="02020603020101020101" pitchFamily="18" charset="-127"/>
+              </a:rPr>
+              <a:t>WeValue</a:t>
+            </a:r>
+            <a:endParaRPr lang="en-US" altLang="ko-KR" sz="1600" dirty="0">
+              <a:solidFill>
+                <a:schemeClr val="accent1">
+                  <a:lumMod val="50000"/>
+                </a:schemeClr>
+              </a:solidFill>
+              <a:latin typeface="Franklin Gothic Heavy" panose="020B0903020102020204" pitchFamily="34" charset="0"/>
+              <a:ea typeface="KoPub돋움체 Bold" panose="02020603020101020101" pitchFamily="18" charset="-127"/>
+            </a:endParaRPr>
+          </a:p>
+        </p:txBody>
+      </p:sp>
+      <p:sp>
+        <p:nvSpPr>
+          <p:cNvPr id="8" name="TextBox 7">
+            <a:extLst>
+              <a:ext uri="{FF2B5EF4-FFF2-40B4-BE49-F238E27FC236}">
+                <a16:creationId xmlns:a16="http://schemas.microsoft.com/office/drawing/2014/main" id="{943AC9B8-CC5B-1945-71F5-38C1E75C6729}"/>
+              </a:ext>
+            </a:extLst>
+          </p:cNvPr>
+          <p:cNvSpPr txBox="1"/>
+          <p:nvPr/>
+        </p:nvSpPr>
+        <p:spPr>
+          <a:xfrm>
+            <a:off x="619776" y="900112"/>
+            <a:ext cx="1957587" cy="215444"/>
+          </a:xfrm>
+          <a:prstGeom prst="rect">
+            <a:avLst/>
+          </a:prstGeom>
+          <a:noFill/>
+        </p:spPr>
+        <p:txBody>
+          <a:bodyPr wrap="none">
+            <a:spAutoFit/>
+          </a:bodyPr>
+          <a:lstStyle/>
+          <a:p>
+            <a:pPr algn="ctr"/>
+            <a:r>
+              <a:rPr lang="en-US" altLang="ko-KR" sz="800" b="1" dirty="0">
+                <a:latin typeface="KoPub돋움체 Bold" panose="00000800000000000000" pitchFamily="2" charset="-127"/>
+                <a:ea typeface="KoPub돋움체 Bold" panose="00000800000000000000" pitchFamily="2" charset="-127"/>
+              </a:rPr>
+              <a:t>[</a:t>
+            </a:r>
+            <a:r>
+              <a:rPr lang="ko-KR" altLang="en-US" sz="800" b="1" dirty="0">
+                <a:latin typeface="KoPub돋움체 Bold" panose="00000800000000000000" pitchFamily="2" charset="-127"/>
+                <a:ea typeface="KoPub돋움체 Bold" panose="00000800000000000000" pitchFamily="2" charset="-127"/>
+              </a:rPr>
+              <a:t>우리가 가치를 만드는 공간</a:t>
+            </a:r>
+            <a:r>
+              <a:rPr lang="en-US" altLang="ko-KR" sz="800" b="1" dirty="0">
+                <a:latin typeface="KoPub돋움체 Bold" panose="00000800000000000000" pitchFamily="2" charset="-127"/>
+                <a:ea typeface="KoPub돋움체 Bold" panose="00000800000000000000" pitchFamily="2" charset="-127"/>
+              </a:rPr>
+              <a:t>, </a:t>
+            </a:r>
+            <a:r>
+              <a:rPr lang="ko-KR" altLang="en-US" sz="800" b="1" dirty="0" err="1">
+                <a:latin typeface="KoPub돋움체 Bold" panose="00000800000000000000" pitchFamily="2" charset="-127"/>
+                <a:ea typeface="KoPub돋움체 Bold" panose="00000800000000000000" pitchFamily="2" charset="-127"/>
+              </a:rPr>
+              <a:t>우리가치</a:t>
+            </a:r>
+            <a:r>
+              <a:rPr lang="ko-KR" altLang="en-US" sz="800" b="1" dirty="0">
+                <a:latin typeface="KoPub돋움체 Bold" panose="00000800000000000000" pitchFamily="2" charset="-127"/>
+                <a:ea typeface="KoPub돋움체 Bold" panose="00000800000000000000" pitchFamily="2" charset="-127"/>
+              </a:rPr>
+              <a:t> 허브</a:t>
+            </a:r>
+            <a:r>
+              <a:rPr lang="en-US" altLang="ko-KR" sz="800" b="1" dirty="0">
+                <a:latin typeface="KoPub돋움체 Bold" panose="00000800000000000000" pitchFamily="2" charset="-127"/>
+                <a:ea typeface="KoPub돋움체 Bold" panose="00000800000000000000" pitchFamily="2" charset="-127"/>
+              </a:rPr>
+              <a:t>]</a:t>
+            </a:r>
+          </a:p>
+        </p:txBody>
+      </p:sp>
       <p:pic>
         <p:nvPicPr>
-          <p:cNvPr id="4" name="Picture 1">
+          <p:cNvPr id="9" name="그림 8">
             <a:extLst>
               <a:ext uri="{FF2B5EF4-FFF2-40B4-BE49-F238E27FC236}">
-                <a16:creationId xmlns:a16="http://schemas.microsoft.com/office/drawing/2014/main" id="{08107745-8B12-8357-0A2F-461F3E33DBFD}"/>
+                <a16:creationId xmlns:a16="http://schemas.microsoft.com/office/drawing/2014/main" id="{6C82538D-0FBF-8501-6D99-88F76DFA104D}"/>
               </a:ext>
             </a:extLst>
           </p:cNvPr>
@@ -4267,251 +4460,20 @@
         </p:blipFill>
         <p:spPr>
           <a:xfrm>
-            <a:off x="147393" y="129534"/>
-            <a:ext cx="544284" cy="307776"/>
+            <a:off x="603724" y="642969"/>
+            <a:ext cx="175906" cy="153604"/>
           </a:xfrm>
           <a:prstGeom prst="rect">
             <a:avLst/>
           </a:prstGeom>
-          <a:noFill/>
-          <a:ln>
-            <a:noFill/>
-          </a:ln>
-          <a:effectLst/>
         </p:spPr>
       </p:pic>
-      <p:sp>
-        <p:nvSpPr>
-          <p:cNvPr id="5" name="TextBox 4">
+      <p:pic>
+        <p:nvPicPr>
+          <p:cNvPr id="11" name="그림 10">
             <a:extLst>
               <a:ext uri="{FF2B5EF4-FFF2-40B4-BE49-F238E27FC236}">
-                <a16:creationId xmlns:a16="http://schemas.microsoft.com/office/drawing/2014/main" id="{2262E1BD-F7DC-A961-8DA6-DABE1EC3DDB7}"/>
-              </a:ext>
-            </a:extLst>
-          </p:cNvPr>
-          <p:cNvSpPr txBox="1"/>
-          <p:nvPr/>
-        </p:nvSpPr>
-        <p:spPr>
-          <a:xfrm>
-            <a:off x="1402907" y="1475898"/>
-            <a:ext cx="1590324" cy="200055"/>
-          </a:xfrm>
-          <a:prstGeom prst="rect">
-            <a:avLst/>
-          </a:prstGeom>
-          <a:noFill/>
-        </p:spPr>
-        <p:txBody>
-          <a:bodyPr wrap="square" rtlCol="0">
-            <a:spAutoFit/>
-          </a:bodyPr>
-          <a:lstStyle/>
-          <a:p>
-            <a:pPr algn="ctr"/>
-            <a:r>
-              <a:rPr lang="ko-KR" altLang="en-US" sz="700" b="1" dirty="0">
-                <a:solidFill>
-                  <a:schemeClr val="accent1">
-                    <a:lumMod val="50000"/>
-                  </a:schemeClr>
-                </a:solidFill>
-                <a:latin typeface="KoPub돋움체 Bold" panose="02020603020101020101" pitchFamily="18" charset="-127"/>
-                <a:ea typeface="KoPub돋움체 Bold" panose="02020603020101020101" pitchFamily="18" charset="-127"/>
-              </a:rPr>
-              <a:t>순천향대학교 천안병원</a:t>
-            </a:r>
-            <a:r>
-              <a:rPr lang="en-US" altLang="ko-KR" sz="700" b="1" dirty="0">
-                <a:solidFill>
-                  <a:schemeClr val="accent1">
-                    <a:lumMod val="50000"/>
-                  </a:schemeClr>
-                </a:solidFill>
-                <a:latin typeface="KoPub돋움체 Bold" panose="02020603020101020101" pitchFamily="18" charset="-127"/>
-                <a:ea typeface="KoPub돋움체 Bold" panose="02020603020101020101" pitchFamily="18" charset="-127"/>
-              </a:rPr>
-              <a:t> </a:t>
-            </a:r>
-            <a:r>
-              <a:rPr lang="ko-KR" altLang="en-US" sz="700" b="1" dirty="0">
-                <a:solidFill>
-                  <a:schemeClr val="accent1">
-                    <a:lumMod val="50000"/>
-                  </a:schemeClr>
-                </a:solidFill>
-                <a:latin typeface="KoPub돋움체 Bold" panose="02020603020101020101" pitchFamily="18" charset="-127"/>
-                <a:ea typeface="KoPub돋움체 Bold" panose="02020603020101020101" pitchFamily="18" charset="-127"/>
-              </a:rPr>
-              <a:t>진료지원간호팀</a:t>
-            </a:r>
-            <a:endParaRPr lang="ko-KR" altLang="en-US" sz="800" b="1" dirty="0">
-              <a:solidFill>
-                <a:schemeClr val="accent1">
-                  <a:lumMod val="50000"/>
-                </a:schemeClr>
-              </a:solidFill>
-              <a:latin typeface="KoPub돋움체 Bold" panose="02020603020101020101" pitchFamily="18" charset="-127"/>
-              <a:ea typeface="KoPub돋움체 Bold" panose="02020603020101020101" pitchFamily="18" charset="-127"/>
-            </a:endParaRPr>
-          </a:p>
-        </p:txBody>
-      </p:sp>
-      <p:sp>
-        <p:nvSpPr>
-          <p:cNvPr id="7" name="TextBox 6">
-            <a:extLst>
-              <a:ext uri="{FF2B5EF4-FFF2-40B4-BE49-F238E27FC236}">
-                <a16:creationId xmlns:a16="http://schemas.microsoft.com/office/drawing/2014/main" id="{8958C8E4-6F7C-FE0C-CE8A-5D19C1C7CECC}"/>
-              </a:ext>
-            </a:extLst>
-          </p:cNvPr>
-          <p:cNvSpPr txBox="1"/>
-          <p:nvPr/>
-        </p:nvSpPr>
-        <p:spPr>
-          <a:xfrm>
-            <a:off x="675817" y="642967"/>
-            <a:ext cx="1845506" cy="338554"/>
-          </a:xfrm>
-          <a:prstGeom prst="rect">
-            <a:avLst/>
-          </a:prstGeom>
-          <a:noFill/>
-        </p:spPr>
-        <p:txBody>
-          <a:bodyPr wrap="none">
-            <a:spAutoFit/>
-          </a:bodyPr>
-          <a:lstStyle/>
-          <a:p>
-            <a:pPr algn="ctr"/>
-            <a:r>
-              <a:rPr lang="ko-KR" altLang="en-US" sz="1600" dirty="0" err="1">
-                <a:solidFill>
-                  <a:srgbClr val="00B0F0"/>
-                </a:solidFill>
-                <a:latin typeface="Noto Sans KR Black" panose="020B0200000000000000" pitchFamily="50" charset="-127"/>
-                <a:ea typeface="Noto Sans KR Black" panose="020B0200000000000000" pitchFamily="50" charset="-127"/>
-              </a:rPr>
-              <a:t>우리가치</a:t>
-            </a:r>
-            <a:r>
-              <a:rPr lang="ko-KR" altLang="en-US" sz="1600" dirty="0">
-                <a:solidFill>
-                  <a:schemeClr val="accent1">
-                    <a:lumMod val="50000"/>
-                  </a:schemeClr>
-                </a:solidFill>
-                <a:latin typeface="KoPub돋움체 Bold" panose="02020603020101020101" pitchFamily="18" charset="-127"/>
-                <a:ea typeface="KoPub돋움체 Bold" panose="02020603020101020101" pitchFamily="18" charset="-127"/>
-              </a:rPr>
-              <a:t> </a:t>
-            </a:r>
-            <a:r>
-              <a:rPr lang="en-US" altLang="ko-KR" sz="1600" dirty="0" err="1">
-                <a:solidFill>
-                  <a:schemeClr val="accent1">
-                    <a:lumMod val="50000"/>
-                  </a:schemeClr>
-                </a:solidFill>
-                <a:latin typeface="Franklin Gothic Heavy" panose="020B0903020102020204" pitchFamily="34" charset="0"/>
-                <a:ea typeface="KoPub돋움체 Bold" panose="02020603020101020101" pitchFamily="18" charset="-127"/>
-              </a:rPr>
-              <a:t>WeValue</a:t>
-            </a:r>
-            <a:endParaRPr lang="en-US" altLang="ko-KR" sz="1600" dirty="0">
-              <a:solidFill>
-                <a:schemeClr val="accent1">
-                  <a:lumMod val="50000"/>
-                </a:schemeClr>
-              </a:solidFill>
-              <a:latin typeface="Franklin Gothic Heavy" panose="020B0903020102020204" pitchFamily="34" charset="0"/>
-              <a:ea typeface="KoPub돋움체 Bold" panose="02020603020101020101" pitchFamily="18" charset="-127"/>
-            </a:endParaRPr>
-          </a:p>
-        </p:txBody>
-      </p:sp>
-      <p:sp>
-        <p:nvSpPr>
-          <p:cNvPr id="8" name="TextBox 7">
-            <a:extLst>
-              <a:ext uri="{FF2B5EF4-FFF2-40B4-BE49-F238E27FC236}">
-                <a16:creationId xmlns:a16="http://schemas.microsoft.com/office/drawing/2014/main" id="{D6220925-B894-D490-340D-A4AF2853075D}"/>
-              </a:ext>
-            </a:extLst>
-          </p:cNvPr>
-          <p:cNvSpPr txBox="1"/>
-          <p:nvPr/>
-        </p:nvSpPr>
-        <p:spPr>
-          <a:xfrm>
-            <a:off x="619776" y="900112"/>
-            <a:ext cx="1957587" cy="215444"/>
-          </a:xfrm>
-          <a:prstGeom prst="rect">
-            <a:avLst/>
-          </a:prstGeom>
-          <a:noFill/>
-        </p:spPr>
-        <p:txBody>
-          <a:bodyPr wrap="none">
-            <a:spAutoFit/>
-          </a:bodyPr>
-          <a:lstStyle/>
-          <a:p>
-            <a:pPr algn="ctr"/>
-            <a:r>
-              <a:rPr lang="en-US" altLang="ko-KR" sz="800" b="1" dirty="0">
-                <a:latin typeface="KoPub돋움체 Bold" panose="00000800000000000000" pitchFamily="2" charset="-127"/>
-                <a:ea typeface="KoPub돋움체 Bold" panose="00000800000000000000" pitchFamily="2" charset="-127"/>
-              </a:rPr>
-              <a:t>[</a:t>
-            </a:r>
-            <a:r>
-              <a:rPr lang="ko-KR" altLang="en-US" sz="800" b="1" dirty="0">
-                <a:latin typeface="KoPub돋움체 Bold" panose="00000800000000000000" pitchFamily="2" charset="-127"/>
-                <a:ea typeface="KoPub돋움체 Bold" panose="00000800000000000000" pitchFamily="2" charset="-127"/>
-              </a:rPr>
-              <a:t>우리가 가치를 만드는 공간</a:t>
-            </a:r>
-            <a:r>
-              <a:rPr lang="en-US" altLang="ko-KR" sz="800" b="1" dirty="0">
-                <a:latin typeface="KoPub돋움체 Bold" panose="00000800000000000000" pitchFamily="2" charset="-127"/>
-                <a:ea typeface="KoPub돋움체 Bold" panose="00000800000000000000" pitchFamily="2" charset="-127"/>
-              </a:rPr>
-              <a:t>, </a:t>
-            </a:r>
-            <a:r>
-              <a:rPr lang="ko-KR" altLang="en-US" sz="800" b="1" dirty="0" err="1">
-                <a:latin typeface="KoPub돋움체 Bold" panose="00000800000000000000" pitchFamily="2" charset="-127"/>
-                <a:ea typeface="KoPub돋움체 Bold" panose="00000800000000000000" pitchFamily="2" charset="-127"/>
-              </a:rPr>
-              <a:t>우리가치</a:t>
-            </a:r>
-            <a:r>
-              <a:rPr lang="ko-KR" altLang="en-US" sz="800" b="1" dirty="0">
-                <a:latin typeface="KoPub돋움체 Bold" panose="00000800000000000000" pitchFamily="2" charset="-127"/>
-                <a:ea typeface="KoPub돋움체 Bold" panose="00000800000000000000" pitchFamily="2" charset="-127"/>
-              </a:rPr>
-              <a:t> 허브</a:t>
-            </a:r>
-            <a:r>
-              <a:rPr lang="en-US" altLang="ko-KR" sz="800" b="1" dirty="0">
-                <a:latin typeface="KoPub돋움체 Bold" panose="00000800000000000000" pitchFamily="2" charset="-127"/>
-                <a:ea typeface="KoPub돋움체 Bold" panose="00000800000000000000" pitchFamily="2" charset="-127"/>
-              </a:rPr>
-              <a:t>]</a:t>
-            </a:r>
-          </a:p>
-        </p:txBody>
-      </p:sp>
-      <p:pic>
-        <p:nvPicPr>
-          <p:cNvPr id="9" name="그림 8">
-            <a:extLst>
-              <a:ext uri="{FF2B5EF4-FFF2-40B4-BE49-F238E27FC236}">
-                <a16:creationId xmlns:a16="http://schemas.microsoft.com/office/drawing/2014/main" id="{0F8037F7-CD2C-AD03-E6D4-667BBCE54FDC}"/>
+                <a16:creationId xmlns:a16="http://schemas.microsoft.com/office/drawing/2014/main" id="{318F6A6F-CF48-6684-4131-672734F1AFF7}"/>
               </a:ext>
             </a:extLst>
           </p:cNvPr>
@@ -4521,42 +4483,12 @@
           <p:nvPr/>
         </p:nvPicPr>
         <p:blipFill>
-          <a:blip r:embed="rId3"/>
+          <a:blip r:embed="rId2"/>
           <a:stretch>
             <a:fillRect/>
           </a:stretch>
         </p:blipFill>
         <p:spPr>
-          <a:xfrm>
-            <a:off x="603724" y="642969"/>
-            <a:ext cx="175906" cy="153604"/>
-          </a:xfrm>
-          <a:prstGeom prst="rect">
-            <a:avLst/>
-          </a:prstGeom>
-        </p:spPr>
-      </p:pic>
-      <p:pic>
-        <p:nvPicPr>
-          <p:cNvPr id="11" name="그림 10">
-            <a:extLst>
-              <a:ext uri="{FF2B5EF4-FFF2-40B4-BE49-F238E27FC236}">
-                <a16:creationId xmlns:a16="http://schemas.microsoft.com/office/drawing/2014/main" id="{B40926DE-15CC-A314-C876-EC3702DBF077}"/>
-              </a:ext>
-            </a:extLst>
-          </p:cNvPr>
-          <p:cNvPicPr>
-            <a:picLocks noChangeAspect="1"/>
-          </p:cNvPicPr>
-          <p:nvPr/>
-        </p:nvPicPr>
-        <p:blipFill>
-          <a:blip r:embed="rId3"/>
-          <a:stretch>
-            <a:fillRect/>
-          </a:stretch>
-        </p:blipFill>
-        <p:spPr>
           <a:xfrm rot="10800000">
             <a:off x="2423948" y="642967"/>
             <a:ext cx="175902" cy="153606"/>
@@ -4569,7 +4501,7 @@
     </p:spTree>
     <p:extLst>
       <p:ext uri="{BB962C8B-B14F-4D97-AF65-F5344CB8AC3E}">
-        <p14:creationId xmlns:p14="http://schemas.microsoft.com/office/powerpoint/2010/main" val="2582257656"/>
+        <p14:creationId xmlns:p14="http://schemas.microsoft.com/office/powerpoint/2010/main" val="821036478"/>
       </p:ext>
     </p:extLst>
   </p:cSld>
@@ -4587,7 +4519,7 @@
         <p:cNvPr id="1" name="">
           <a:extLst>
             <a:ext uri="{FF2B5EF4-FFF2-40B4-BE49-F238E27FC236}">
-              <a16:creationId xmlns:a16="http://schemas.microsoft.com/office/drawing/2014/main" id="{5136E58B-5C66-B0F9-802A-AC54450BC0CA}"/>
+              <a16:creationId xmlns:a16="http://schemas.microsoft.com/office/drawing/2014/main" id="{08B45BD1-661D-1101-CFBF-1F61B164B47C}"/>
             </a:ext>
           </a:extLst>
         </p:cNvPr>
@@ -4602,12 +4534,214 @@
           <a:chExt cx="0" cy="0"/>
         </a:xfrm>
       </p:grpSpPr>
+      <p:sp>
+        <p:nvSpPr>
+          <p:cNvPr id="5" name="TextBox 4">
+            <a:extLst>
+              <a:ext uri="{FF2B5EF4-FFF2-40B4-BE49-F238E27FC236}">
+                <a16:creationId xmlns:a16="http://schemas.microsoft.com/office/drawing/2014/main" id="{D590B379-E92A-F37A-913B-B57D4438C228}"/>
+              </a:ext>
+            </a:extLst>
+          </p:cNvPr>
+          <p:cNvSpPr txBox="1"/>
+          <p:nvPr/>
+        </p:nvSpPr>
+        <p:spPr>
+          <a:xfrm>
+            <a:off x="2258736" y="1475898"/>
+            <a:ext cx="734495" cy="200055"/>
+          </a:xfrm>
+          <a:prstGeom prst="rect">
+            <a:avLst/>
+          </a:prstGeom>
+          <a:noFill/>
+        </p:spPr>
+        <p:txBody>
+          <a:bodyPr wrap="none" rtlCol="0">
+            <a:spAutoFit/>
+          </a:bodyPr>
+          <a:lstStyle/>
+          <a:p>
+            <a:pPr algn="r"/>
+            <a:r>
+              <a:rPr lang="ko-KR" altLang="en-US" sz="700" b="1" dirty="0">
+                <a:solidFill>
+                  <a:schemeClr val="accent1">
+                    <a:lumMod val="50000"/>
+                  </a:schemeClr>
+                </a:solidFill>
+                <a:latin typeface="KoPub돋움체 Bold" panose="02020603020101020101" pitchFamily="18" charset="-127"/>
+                <a:ea typeface="KoPub돋움체 Bold" panose="02020603020101020101" pitchFamily="18" charset="-127"/>
+              </a:rPr>
+              <a:t>진료지원간호팀</a:t>
+            </a:r>
+            <a:endParaRPr lang="ko-KR" altLang="en-US" sz="800" b="1" dirty="0">
+              <a:solidFill>
+                <a:schemeClr val="accent1">
+                  <a:lumMod val="50000"/>
+                </a:schemeClr>
+              </a:solidFill>
+              <a:latin typeface="KoPub돋움체 Bold" panose="02020603020101020101" pitchFamily="18" charset="-127"/>
+              <a:ea typeface="KoPub돋움체 Bold" panose="02020603020101020101" pitchFamily="18" charset="-127"/>
+            </a:endParaRPr>
+          </a:p>
+        </p:txBody>
+      </p:sp>
+      <p:sp>
+        <p:nvSpPr>
+          <p:cNvPr id="7" name="TextBox 6">
+            <a:extLst>
+              <a:ext uri="{FF2B5EF4-FFF2-40B4-BE49-F238E27FC236}">
+                <a16:creationId xmlns:a16="http://schemas.microsoft.com/office/drawing/2014/main" id="{A7BDF817-56CF-8B80-2009-2AF61D96C8FB}"/>
+              </a:ext>
+            </a:extLst>
+          </p:cNvPr>
+          <p:cNvSpPr txBox="1"/>
+          <p:nvPr/>
+        </p:nvSpPr>
+        <p:spPr>
+          <a:xfrm>
+            <a:off x="675817" y="642967"/>
+            <a:ext cx="1845506" cy="338554"/>
+          </a:xfrm>
+          <a:prstGeom prst="rect">
+            <a:avLst/>
+          </a:prstGeom>
+          <a:noFill/>
+        </p:spPr>
+        <p:txBody>
+          <a:bodyPr wrap="none">
+            <a:spAutoFit/>
+          </a:bodyPr>
+          <a:lstStyle/>
+          <a:p>
+            <a:pPr algn="ctr"/>
+            <a:r>
+              <a:rPr lang="ko-KR" altLang="en-US" sz="1600" dirty="0" err="1">
+                <a:solidFill>
+                  <a:srgbClr val="00B0F0"/>
+                </a:solidFill>
+                <a:latin typeface="Noto Sans KR Black" panose="020B0200000000000000" pitchFamily="50" charset="-127"/>
+                <a:ea typeface="Noto Sans KR Black" panose="020B0200000000000000" pitchFamily="50" charset="-127"/>
+              </a:rPr>
+              <a:t>우리가치</a:t>
+            </a:r>
+            <a:r>
+              <a:rPr lang="ko-KR" altLang="en-US" sz="1600" dirty="0">
+                <a:solidFill>
+                  <a:schemeClr val="accent1">
+                    <a:lumMod val="50000"/>
+                  </a:schemeClr>
+                </a:solidFill>
+                <a:latin typeface="KoPub돋움체 Bold" panose="02020603020101020101" pitchFamily="18" charset="-127"/>
+                <a:ea typeface="KoPub돋움체 Bold" panose="02020603020101020101" pitchFamily="18" charset="-127"/>
+              </a:rPr>
+              <a:t> </a:t>
+            </a:r>
+            <a:r>
+              <a:rPr lang="en-US" altLang="ko-KR" sz="1600" dirty="0" err="1">
+                <a:solidFill>
+                  <a:schemeClr val="accent1">
+                    <a:lumMod val="50000"/>
+                  </a:schemeClr>
+                </a:solidFill>
+                <a:latin typeface="Franklin Gothic Heavy" panose="020B0903020102020204" pitchFamily="34" charset="0"/>
+                <a:ea typeface="KoPub돋움체 Bold" panose="02020603020101020101" pitchFamily="18" charset="-127"/>
+              </a:rPr>
+              <a:t>WeValue</a:t>
+            </a:r>
+            <a:endParaRPr lang="en-US" altLang="ko-KR" sz="1600" dirty="0">
+              <a:solidFill>
+                <a:schemeClr val="accent1">
+                  <a:lumMod val="50000"/>
+                </a:schemeClr>
+              </a:solidFill>
+              <a:latin typeface="Franklin Gothic Heavy" panose="020B0903020102020204" pitchFamily="34" charset="0"/>
+              <a:ea typeface="KoPub돋움체 Bold" panose="02020603020101020101" pitchFamily="18" charset="-127"/>
+            </a:endParaRPr>
+          </a:p>
+        </p:txBody>
+      </p:sp>
+      <p:sp>
+        <p:nvSpPr>
+          <p:cNvPr id="8" name="TextBox 7">
+            <a:extLst>
+              <a:ext uri="{FF2B5EF4-FFF2-40B4-BE49-F238E27FC236}">
+                <a16:creationId xmlns:a16="http://schemas.microsoft.com/office/drawing/2014/main" id="{3CBA70F2-27A9-1237-F8A1-C4CD4F2A46DC}"/>
+              </a:ext>
+            </a:extLst>
+          </p:cNvPr>
+          <p:cNvSpPr txBox="1"/>
+          <p:nvPr/>
+        </p:nvSpPr>
+        <p:spPr>
+          <a:xfrm>
+            <a:off x="619776" y="900112"/>
+            <a:ext cx="1957587" cy="215444"/>
+          </a:xfrm>
+          <a:prstGeom prst="rect">
+            <a:avLst/>
+          </a:prstGeom>
+          <a:noFill/>
+        </p:spPr>
+        <p:txBody>
+          <a:bodyPr wrap="none">
+            <a:spAutoFit/>
+          </a:bodyPr>
+          <a:lstStyle/>
+          <a:p>
+            <a:pPr algn="ctr"/>
+            <a:r>
+              <a:rPr lang="en-US" altLang="ko-KR" sz="800" b="1" dirty="0">
+                <a:latin typeface="KoPub돋움체 Bold" panose="00000800000000000000" pitchFamily="2" charset="-127"/>
+                <a:ea typeface="KoPub돋움체 Bold" panose="00000800000000000000" pitchFamily="2" charset="-127"/>
+              </a:rPr>
+              <a:t>[</a:t>
+            </a:r>
+            <a:r>
+              <a:rPr lang="ko-KR" altLang="en-US" sz="800" b="1" dirty="0">
+                <a:latin typeface="KoPub돋움체 Bold" panose="00000800000000000000" pitchFamily="2" charset="-127"/>
+                <a:ea typeface="KoPub돋움체 Bold" panose="00000800000000000000" pitchFamily="2" charset="-127"/>
+              </a:rPr>
+              <a:t>우리가 가치를 만드는 공간</a:t>
+            </a:r>
+            <a:r>
+              <a:rPr lang="en-US" altLang="ko-KR" sz="800" b="1" dirty="0">
+                <a:latin typeface="KoPub돋움체 Bold" panose="00000800000000000000" pitchFamily="2" charset="-127"/>
+                <a:ea typeface="KoPub돋움체 Bold" panose="00000800000000000000" pitchFamily="2" charset="-127"/>
+              </a:rPr>
+              <a:t>, </a:t>
+            </a:r>
+            <a:r>
+              <a:rPr lang="ko-KR" altLang="en-US" sz="800" b="1" dirty="0" err="1">
+                <a:latin typeface="KoPub돋움체 Bold" panose="00000800000000000000" pitchFamily="2" charset="-127"/>
+                <a:ea typeface="KoPub돋움체 Bold" panose="00000800000000000000" pitchFamily="2" charset="-127"/>
+              </a:rPr>
+              <a:t>우리가치</a:t>
+            </a:r>
+            <a:r>
+              <a:rPr lang="ko-KR" altLang="en-US" sz="800" b="1" dirty="0">
+                <a:latin typeface="KoPub돋움체 Bold" panose="00000800000000000000" pitchFamily="2" charset="-127"/>
+                <a:ea typeface="KoPub돋움체 Bold" panose="00000800000000000000" pitchFamily="2" charset="-127"/>
+              </a:rPr>
+              <a:t> 허브</a:t>
+            </a:r>
+            <a:r>
+              <a:rPr lang="en-US" altLang="ko-KR" sz="800" b="1" dirty="0">
+                <a:latin typeface="KoPub돋움체 Bold" panose="00000800000000000000" pitchFamily="2" charset="-127"/>
+                <a:ea typeface="KoPub돋움체 Bold" panose="00000800000000000000" pitchFamily="2" charset="-127"/>
+              </a:rPr>
+              <a:t>]</a:t>
+            </a:r>
+          </a:p>
+        </p:txBody>
+      </p:sp>
       <p:pic>
         <p:nvPicPr>
-          <p:cNvPr id="4" name="Picture 1">
+          <p:cNvPr id="9" name="그림 8">
             <a:extLst>
               <a:ext uri="{FF2B5EF4-FFF2-40B4-BE49-F238E27FC236}">
-                <a16:creationId xmlns:a16="http://schemas.microsoft.com/office/drawing/2014/main" id="{943F86AF-C6C6-364A-3119-286C9A6E0DB3}"/>
+                <a16:creationId xmlns:a16="http://schemas.microsoft.com/office/drawing/2014/main" id="{D7A40408-2AE7-FA33-A9BF-7A4D019936F8}"/>
               </a:ext>
             </a:extLst>
           </p:cNvPr>
@@ -4624,251 +4758,20 @@
         </p:blipFill>
         <p:spPr>
           <a:xfrm>
-            <a:off x="147393" y="129534"/>
-            <a:ext cx="544284" cy="307776"/>
+            <a:off x="603724" y="642969"/>
+            <a:ext cx="175906" cy="153604"/>
           </a:xfrm>
           <a:prstGeom prst="rect">
             <a:avLst/>
           </a:prstGeom>
-          <a:noFill/>
-          <a:ln>
-            <a:noFill/>
-          </a:ln>
-          <a:effectLst/>
         </p:spPr>
       </p:pic>
-      <p:sp>
-        <p:nvSpPr>
-          <p:cNvPr id="5" name="TextBox 4">
+      <p:pic>
+        <p:nvPicPr>
+          <p:cNvPr id="11" name="그림 10">
             <a:extLst>
               <a:ext uri="{FF2B5EF4-FFF2-40B4-BE49-F238E27FC236}">
-                <a16:creationId xmlns:a16="http://schemas.microsoft.com/office/drawing/2014/main" id="{EDF1CA3D-408B-3CD3-BDE1-3A1CACE52831}"/>
-              </a:ext>
-            </a:extLst>
-          </p:cNvPr>
-          <p:cNvSpPr txBox="1"/>
-          <p:nvPr/>
-        </p:nvSpPr>
-        <p:spPr>
-          <a:xfrm>
-            <a:off x="1402907" y="1475898"/>
-            <a:ext cx="1590324" cy="200055"/>
-          </a:xfrm>
-          <a:prstGeom prst="rect">
-            <a:avLst/>
-          </a:prstGeom>
-          <a:noFill/>
-        </p:spPr>
-        <p:txBody>
-          <a:bodyPr wrap="square" rtlCol="0">
-            <a:spAutoFit/>
-          </a:bodyPr>
-          <a:lstStyle/>
-          <a:p>
-            <a:pPr algn="ctr"/>
-            <a:r>
-              <a:rPr lang="ko-KR" altLang="en-US" sz="700" b="1" dirty="0">
-                <a:solidFill>
-                  <a:schemeClr val="accent1">
-                    <a:lumMod val="50000"/>
-                  </a:schemeClr>
-                </a:solidFill>
-                <a:latin typeface="KoPub돋움체 Bold" panose="02020603020101020101" pitchFamily="18" charset="-127"/>
-                <a:ea typeface="KoPub돋움체 Bold" panose="02020603020101020101" pitchFamily="18" charset="-127"/>
-              </a:rPr>
-              <a:t>순천향대학교 천안병원</a:t>
-            </a:r>
-            <a:r>
-              <a:rPr lang="en-US" altLang="ko-KR" sz="700" b="1" dirty="0">
-                <a:solidFill>
-                  <a:schemeClr val="accent1">
-                    <a:lumMod val="50000"/>
-                  </a:schemeClr>
-                </a:solidFill>
-                <a:latin typeface="KoPub돋움체 Bold" panose="02020603020101020101" pitchFamily="18" charset="-127"/>
-                <a:ea typeface="KoPub돋움체 Bold" panose="02020603020101020101" pitchFamily="18" charset="-127"/>
-              </a:rPr>
-              <a:t> </a:t>
-            </a:r>
-            <a:r>
-              <a:rPr lang="ko-KR" altLang="en-US" sz="700" b="1" dirty="0">
-                <a:solidFill>
-                  <a:schemeClr val="accent1">
-                    <a:lumMod val="50000"/>
-                  </a:schemeClr>
-                </a:solidFill>
-                <a:latin typeface="KoPub돋움체 Bold" panose="02020603020101020101" pitchFamily="18" charset="-127"/>
-                <a:ea typeface="KoPub돋움체 Bold" panose="02020603020101020101" pitchFamily="18" charset="-127"/>
-              </a:rPr>
-              <a:t>진료지원간호팀</a:t>
-            </a:r>
-            <a:endParaRPr lang="ko-KR" altLang="en-US" sz="800" b="1" dirty="0">
-              <a:solidFill>
-                <a:schemeClr val="accent1">
-                  <a:lumMod val="50000"/>
-                </a:schemeClr>
-              </a:solidFill>
-              <a:latin typeface="KoPub돋움체 Bold" panose="02020603020101020101" pitchFamily="18" charset="-127"/>
-              <a:ea typeface="KoPub돋움체 Bold" panose="02020603020101020101" pitchFamily="18" charset="-127"/>
-            </a:endParaRPr>
-          </a:p>
-        </p:txBody>
-      </p:sp>
-      <p:sp>
-        <p:nvSpPr>
-          <p:cNvPr id="7" name="TextBox 6">
-            <a:extLst>
-              <a:ext uri="{FF2B5EF4-FFF2-40B4-BE49-F238E27FC236}">
-                <a16:creationId xmlns:a16="http://schemas.microsoft.com/office/drawing/2014/main" id="{382E980D-2DDA-B2B3-6E70-61C61F380890}"/>
-              </a:ext>
-            </a:extLst>
-          </p:cNvPr>
-          <p:cNvSpPr txBox="1"/>
-          <p:nvPr/>
-        </p:nvSpPr>
-        <p:spPr>
-          <a:xfrm>
-            <a:off x="675817" y="642967"/>
-            <a:ext cx="1845506" cy="338554"/>
-          </a:xfrm>
-          <a:prstGeom prst="rect">
-            <a:avLst/>
-          </a:prstGeom>
-          <a:noFill/>
-        </p:spPr>
-        <p:txBody>
-          <a:bodyPr wrap="none">
-            <a:spAutoFit/>
-          </a:bodyPr>
-          <a:lstStyle/>
-          <a:p>
-            <a:pPr algn="ctr"/>
-            <a:r>
-              <a:rPr lang="ko-KR" altLang="en-US" sz="1600" dirty="0" err="1">
-                <a:solidFill>
-                  <a:srgbClr val="00B0F0"/>
-                </a:solidFill>
-                <a:latin typeface="Noto Sans KR Black" panose="020B0200000000000000" pitchFamily="50" charset="-127"/>
-                <a:ea typeface="Noto Sans KR Black" panose="020B0200000000000000" pitchFamily="50" charset="-127"/>
-              </a:rPr>
-              <a:t>우리가치</a:t>
-            </a:r>
-            <a:r>
-              <a:rPr lang="ko-KR" altLang="en-US" sz="1600" dirty="0">
-                <a:solidFill>
-                  <a:schemeClr val="accent1">
-                    <a:lumMod val="50000"/>
-                  </a:schemeClr>
-                </a:solidFill>
-                <a:latin typeface="KoPub돋움체 Bold" panose="02020603020101020101" pitchFamily="18" charset="-127"/>
-                <a:ea typeface="KoPub돋움체 Bold" panose="02020603020101020101" pitchFamily="18" charset="-127"/>
-              </a:rPr>
-              <a:t> </a:t>
-            </a:r>
-            <a:r>
-              <a:rPr lang="en-US" altLang="ko-KR" sz="1600" dirty="0" err="1">
-                <a:solidFill>
-                  <a:schemeClr val="accent1">
-                    <a:lumMod val="50000"/>
-                  </a:schemeClr>
-                </a:solidFill>
-                <a:latin typeface="Franklin Gothic Heavy" panose="020B0903020102020204" pitchFamily="34" charset="0"/>
-                <a:ea typeface="KoPub돋움체 Bold" panose="02020603020101020101" pitchFamily="18" charset="-127"/>
-              </a:rPr>
-              <a:t>WeValue</a:t>
-            </a:r>
-            <a:endParaRPr lang="en-US" altLang="ko-KR" sz="1600" dirty="0">
-              <a:solidFill>
-                <a:schemeClr val="accent1">
-                  <a:lumMod val="50000"/>
-                </a:schemeClr>
-              </a:solidFill>
-              <a:latin typeface="Franklin Gothic Heavy" panose="020B0903020102020204" pitchFamily="34" charset="0"/>
-              <a:ea typeface="KoPub돋움체 Bold" panose="02020603020101020101" pitchFamily="18" charset="-127"/>
-            </a:endParaRPr>
-          </a:p>
-        </p:txBody>
-      </p:sp>
-      <p:sp>
-        <p:nvSpPr>
-          <p:cNvPr id="8" name="TextBox 7">
-            <a:extLst>
-              <a:ext uri="{FF2B5EF4-FFF2-40B4-BE49-F238E27FC236}">
-                <a16:creationId xmlns:a16="http://schemas.microsoft.com/office/drawing/2014/main" id="{A1477554-1A37-1EE5-2C62-077C1144CCD2}"/>
-              </a:ext>
-            </a:extLst>
-          </p:cNvPr>
-          <p:cNvSpPr txBox="1"/>
-          <p:nvPr/>
-        </p:nvSpPr>
-        <p:spPr>
-          <a:xfrm>
-            <a:off x="619776" y="900112"/>
-            <a:ext cx="1957587" cy="215444"/>
-          </a:xfrm>
-          <a:prstGeom prst="rect">
-            <a:avLst/>
-          </a:prstGeom>
-          <a:noFill/>
-        </p:spPr>
-        <p:txBody>
-          <a:bodyPr wrap="none">
-            <a:spAutoFit/>
-          </a:bodyPr>
-          <a:lstStyle/>
-          <a:p>
-            <a:pPr algn="ctr"/>
-            <a:r>
-              <a:rPr lang="en-US" altLang="ko-KR" sz="800" b="1" dirty="0">
-                <a:latin typeface="KoPub돋움체 Bold" panose="00000800000000000000" pitchFamily="2" charset="-127"/>
-                <a:ea typeface="KoPub돋움체 Bold" panose="00000800000000000000" pitchFamily="2" charset="-127"/>
-              </a:rPr>
-              <a:t>[</a:t>
-            </a:r>
-            <a:r>
-              <a:rPr lang="ko-KR" altLang="en-US" sz="800" b="1" dirty="0">
-                <a:latin typeface="KoPub돋움체 Bold" panose="00000800000000000000" pitchFamily="2" charset="-127"/>
-                <a:ea typeface="KoPub돋움체 Bold" panose="00000800000000000000" pitchFamily="2" charset="-127"/>
-              </a:rPr>
-              <a:t>우리가 가치를 만드는 공간</a:t>
-            </a:r>
-            <a:r>
-              <a:rPr lang="en-US" altLang="ko-KR" sz="800" b="1" dirty="0">
-                <a:latin typeface="KoPub돋움체 Bold" panose="00000800000000000000" pitchFamily="2" charset="-127"/>
-                <a:ea typeface="KoPub돋움체 Bold" panose="00000800000000000000" pitchFamily="2" charset="-127"/>
-              </a:rPr>
-              <a:t>, </a:t>
-            </a:r>
-            <a:r>
-              <a:rPr lang="ko-KR" altLang="en-US" sz="800" b="1" dirty="0" err="1">
-                <a:latin typeface="KoPub돋움체 Bold" panose="00000800000000000000" pitchFamily="2" charset="-127"/>
-                <a:ea typeface="KoPub돋움체 Bold" panose="00000800000000000000" pitchFamily="2" charset="-127"/>
-              </a:rPr>
-              <a:t>우리가치</a:t>
-            </a:r>
-            <a:r>
-              <a:rPr lang="ko-KR" altLang="en-US" sz="800" b="1" dirty="0">
-                <a:latin typeface="KoPub돋움체 Bold" panose="00000800000000000000" pitchFamily="2" charset="-127"/>
-                <a:ea typeface="KoPub돋움체 Bold" panose="00000800000000000000" pitchFamily="2" charset="-127"/>
-              </a:rPr>
-              <a:t> 허브</a:t>
-            </a:r>
-            <a:r>
-              <a:rPr lang="en-US" altLang="ko-KR" sz="800" b="1" dirty="0">
-                <a:latin typeface="KoPub돋움체 Bold" panose="00000800000000000000" pitchFamily="2" charset="-127"/>
-                <a:ea typeface="KoPub돋움체 Bold" panose="00000800000000000000" pitchFamily="2" charset="-127"/>
-              </a:rPr>
-              <a:t>]</a:t>
-            </a:r>
-          </a:p>
-        </p:txBody>
-      </p:sp>
-      <p:pic>
-        <p:nvPicPr>
-          <p:cNvPr id="9" name="그림 8">
-            <a:extLst>
-              <a:ext uri="{FF2B5EF4-FFF2-40B4-BE49-F238E27FC236}">
-                <a16:creationId xmlns:a16="http://schemas.microsoft.com/office/drawing/2014/main" id="{609A144E-68B8-D5BB-5731-26BC4181C0C9}"/>
+                <a16:creationId xmlns:a16="http://schemas.microsoft.com/office/drawing/2014/main" id="{7CFE1568-A23C-D90A-FBC7-872A0D1FCD0D}"/>
               </a:ext>
             </a:extLst>
           </p:cNvPr>
@@ -4878,42 +4781,12 @@
           <p:nvPr/>
         </p:nvPicPr>
         <p:blipFill>
-          <a:blip r:embed="rId3"/>
+          <a:blip r:embed="rId2"/>
           <a:stretch>
             <a:fillRect/>
           </a:stretch>
         </p:blipFill>
         <p:spPr>
-          <a:xfrm>
-            <a:off x="603724" y="642969"/>
-            <a:ext cx="175906" cy="153604"/>
-          </a:xfrm>
-          <a:prstGeom prst="rect">
-            <a:avLst/>
-          </a:prstGeom>
-        </p:spPr>
-      </p:pic>
-      <p:pic>
-        <p:nvPicPr>
-          <p:cNvPr id="11" name="그림 10">
-            <a:extLst>
-              <a:ext uri="{FF2B5EF4-FFF2-40B4-BE49-F238E27FC236}">
-                <a16:creationId xmlns:a16="http://schemas.microsoft.com/office/drawing/2014/main" id="{4AE1B9F2-2C3E-371E-E521-391BA8839E63}"/>
-              </a:ext>
-            </a:extLst>
-          </p:cNvPr>
-          <p:cNvPicPr>
-            <a:picLocks noChangeAspect="1"/>
-          </p:cNvPicPr>
-          <p:nvPr/>
-        </p:nvPicPr>
-        <p:blipFill>
-          <a:blip r:embed="rId3"/>
-          <a:stretch>
-            <a:fillRect/>
-          </a:stretch>
-        </p:blipFill>
-        <p:spPr>
           <a:xfrm rot="10800000">
             <a:off x="2423948" y="642967"/>
             <a:ext cx="175902" cy="153606"/>
@@ -4926,7 +4799,7 @@
     </p:spTree>
     <p:extLst>
       <p:ext uri="{BB962C8B-B14F-4D97-AF65-F5344CB8AC3E}">
-        <p14:creationId xmlns:p14="http://schemas.microsoft.com/office/powerpoint/2010/main" val="194795576"/>
+        <p14:creationId xmlns:p14="http://schemas.microsoft.com/office/powerpoint/2010/main" val="3979042898"/>
       </p:ext>
     </p:extLst>
   </p:cSld>
@@ -4944,7 +4817,7 @@
         <p:cNvPr id="1" name="">
           <a:extLst>
             <a:ext uri="{FF2B5EF4-FFF2-40B4-BE49-F238E27FC236}">
-              <a16:creationId xmlns:a16="http://schemas.microsoft.com/office/drawing/2014/main" id="{78039DC5-E956-5B49-5CA7-94E076A5CC83}"/>
+              <a16:creationId xmlns:a16="http://schemas.microsoft.com/office/drawing/2014/main" id="{0F026B0C-6E70-80F3-0F74-F9D36B41741B}"/>
             </a:ext>
           </a:extLst>
         </p:cNvPr>
@@ -4959,12 +4832,214 @@
           <a:chExt cx="0" cy="0"/>
         </a:xfrm>
       </p:grpSpPr>
+      <p:sp>
+        <p:nvSpPr>
+          <p:cNvPr id="5" name="TextBox 4">
+            <a:extLst>
+              <a:ext uri="{FF2B5EF4-FFF2-40B4-BE49-F238E27FC236}">
+                <a16:creationId xmlns:a16="http://schemas.microsoft.com/office/drawing/2014/main" id="{5D00E760-2717-33EF-DB67-D24C06A5898B}"/>
+              </a:ext>
+            </a:extLst>
+          </p:cNvPr>
+          <p:cNvSpPr txBox="1"/>
+          <p:nvPr/>
+        </p:nvSpPr>
+        <p:spPr>
+          <a:xfrm>
+            <a:off x="2258736" y="1475898"/>
+            <a:ext cx="734495" cy="200055"/>
+          </a:xfrm>
+          <a:prstGeom prst="rect">
+            <a:avLst/>
+          </a:prstGeom>
+          <a:noFill/>
+        </p:spPr>
+        <p:txBody>
+          <a:bodyPr wrap="none" rtlCol="0">
+            <a:spAutoFit/>
+          </a:bodyPr>
+          <a:lstStyle/>
+          <a:p>
+            <a:pPr algn="r"/>
+            <a:r>
+              <a:rPr lang="ko-KR" altLang="en-US" sz="700" b="1" dirty="0">
+                <a:solidFill>
+                  <a:schemeClr val="accent1">
+                    <a:lumMod val="50000"/>
+                  </a:schemeClr>
+                </a:solidFill>
+                <a:latin typeface="KoPub돋움체 Bold" panose="02020603020101020101" pitchFamily="18" charset="-127"/>
+                <a:ea typeface="KoPub돋움체 Bold" panose="02020603020101020101" pitchFamily="18" charset="-127"/>
+              </a:rPr>
+              <a:t>진료지원간호팀</a:t>
+            </a:r>
+            <a:endParaRPr lang="ko-KR" altLang="en-US" sz="800" b="1" dirty="0">
+              <a:solidFill>
+                <a:schemeClr val="accent1">
+                  <a:lumMod val="50000"/>
+                </a:schemeClr>
+              </a:solidFill>
+              <a:latin typeface="KoPub돋움체 Bold" panose="02020603020101020101" pitchFamily="18" charset="-127"/>
+              <a:ea typeface="KoPub돋움체 Bold" panose="02020603020101020101" pitchFamily="18" charset="-127"/>
+            </a:endParaRPr>
+          </a:p>
+        </p:txBody>
+      </p:sp>
+      <p:sp>
+        <p:nvSpPr>
+          <p:cNvPr id="7" name="TextBox 6">
+            <a:extLst>
+              <a:ext uri="{FF2B5EF4-FFF2-40B4-BE49-F238E27FC236}">
+                <a16:creationId xmlns:a16="http://schemas.microsoft.com/office/drawing/2014/main" id="{4DA7049E-8833-6525-9D31-65ED2236A6E3}"/>
+              </a:ext>
+            </a:extLst>
+          </p:cNvPr>
+          <p:cNvSpPr txBox="1"/>
+          <p:nvPr/>
+        </p:nvSpPr>
+        <p:spPr>
+          <a:xfrm>
+            <a:off x="675817" y="642967"/>
+            <a:ext cx="1845506" cy="338554"/>
+          </a:xfrm>
+          <a:prstGeom prst="rect">
+            <a:avLst/>
+          </a:prstGeom>
+          <a:noFill/>
+        </p:spPr>
+        <p:txBody>
+          <a:bodyPr wrap="none">
+            <a:spAutoFit/>
+          </a:bodyPr>
+          <a:lstStyle/>
+          <a:p>
+            <a:pPr algn="ctr"/>
+            <a:r>
+              <a:rPr lang="ko-KR" altLang="en-US" sz="1600" dirty="0" err="1">
+                <a:solidFill>
+                  <a:srgbClr val="00B0F0"/>
+                </a:solidFill>
+                <a:latin typeface="Noto Sans KR Black" panose="020B0200000000000000" pitchFamily="50" charset="-127"/>
+                <a:ea typeface="Noto Sans KR Black" panose="020B0200000000000000" pitchFamily="50" charset="-127"/>
+              </a:rPr>
+              <a:t>우리가치</a:t>
+            </a:r>
+            <a:r>
+              <a:rPr lang="ko-KR" altLang="en-US" sz="1600" dirty="0">
+                <a:solidFill>
+                  <a:schemeClr val="accent1">
+                    <a:lumMod val="50000"/>
+                  </a:schemeClr>
+                </a:solidFill>
+                <a:latin typeface="KoPub돋움체 Bold" panose="02020603020101020101" pitchFamily="18" charset="-127"/>
+                <a:ea typeface="KoPub돋움체 Bold" panose="02020603020101020101" pitchFamily="18" charset="-127"/>
+              </a:rPr>
+              <a:t> </a:t>
+            </a:r>
+            <a:r>
+              <a:rPr lang="en-US" altLang="ko-KR" sz="1600" dirty="0" err="1">
+                <a:solidFill>
+                  <a:schemeClr val="accent1">
+                    <a:lumMod val="50000"/>
+                  </a:schemeClr>
+                </a:solidFill>
+                <a:latin typeface="Franklin Gothic Heavy" panose="020B0903020102020204" pitchFamily="34" charset="0"/>
+                <a:ea typeface="KoPub돋움체 Bold" panose="02020603020101020101" pitchFamily="18" charset="-127"/>
+              </a:rPr>
+              <a:t>WeValue</a:t>
+            </a:r>
+            <a:endParaRPr lang="en-US" altLang="ko-KR" sz="1600" dirty="0">
+              <a:solidFill>
+                <a:schemeClr val="accent1">
+                  <a:lumMod val="50000"/>
+                </a:schemeClr>
+              </a:solidFill>
+              <a:latin typeface="Franklin Gothic Heavy" panose="020B0903020102020204" pitchFamily="34" charset="0"/>
+              <a:ea typeface="KoPub돋움체 Bold" panose="02020603020101020101" pitchFamily="18" charset="-127"/>
+            </a:endParaRPr>
+          </a:p>
+        </p:txBody>
+      </p:sp>
+      <p:sp>
+        <p:nvSpPr>
+          <p:cNvPr id="8" name="TextBox 7">
+            <a:extLst>
+              <a:ext uri="{FF2B5EF4-FFF2-40B4-BE49-F238E27FC236}">
+                <a16:creationId xmlns:a16="http://schemas.microsoft.com/office/drawing/2014/main" id="{A689C188-4292-CBF9-5B56-81F519DCEF24}"/>
+              </a:ext>
+            </a:extLst>
+          </p:cNvPr>
+          <p:cNvSpPr txBox="1"/>
+          <p:nvPr/>
+        </p:nvSpPr>
+        <p:spPr>
+          <a:xfrm>
+            <a:off x="619776" y="900112"/>
+            <a:ext cx="1957587" cy="215444"/>
+          </a:xfrm>
+          <a:prstGeom prst="rect">
+            <a:avLst/>
+          </a:prstGeom>
+          <a:noFill/>
+        </p:spPr>
+        <p:txBody>
+          <a:bodyPr wrap="none">
+            <a:spAutoFit/>
+          </a:bodyPr>
+          <a:lstStyle/>
+          <a:p>
+            <a:pPr algn="ctr"/>
+            <a:r>
+              <a:rPr lang="en-US" altLang="ko-KR" sz="800" b="1" dirty="0">
+                <a:latin typeface="KoPub돋움체 Bold" panose="00000800000000000000" pitchFamily="2" charset="-127"/>
+                <a:ea typeface="KoPub돋움체 Bold" panose="00000800000000000000" pitchFamily="2" charset="-127"/>
+              </a:rPr>
+              <a:t>[</a:t>
+            </a:r>
+            <a:r>
+              <a:rPr lang="ko-KR" altLang="en-US" sz="800" b="1" dirty="0">
+                <a:latin typeface="KoPub돋움체 Bold" panose="00000800000000000000" pitchFamily="2" charset="-127"/>
+                <a:ea typeface="KoPub돋움체 Bold" panose="00000800000000000000" pitchFamily="2" charset="-127"/>
+              </a:rPr>
+              <a:t>우리가 가치를 만드는 공간</a:t>
+            </a:r>
+            <a:r>
+              <a:rPr lang="en-US" altLang="ko-KR" sz="800" b="1" dirty="0">
+                <a:latin typeface="KoPub돋움체 Bold" panose="00000800000000000000" pitchFamily="2" charset="-127"/>
+                <a:ea typeface="KoPub돋움체 Bold" panose="00000800000000000000" pitchFamily="2" charset="-127"/>
+              </a:rPr>
+              <a:t>, </a:t>
+            </a:r>
+            <a:r>
+              <a:rPr lang="ko-KR" altLang="en-US" sz="800" b="1" dirty="0" err="1">
+                <a:latin typeface="KoPub돋움체 Bold" panose="00000800000000000000" pitchFamily="2" charset="-127"/>
+                <a:ea typeface="KoPub돋움체 Bold" panose="00000800000000000000" pitchFamily="2" charset="-127"/>
+              </a:rPr>
+              <a:t>우리가치</a:t>
+            </a:r>
+            <a:r>
+              <a:rPr lang="ko-KR" altLang="en-US" sz="800" b="1" dirty="0">
+                <a:latin typeface="KoPub돋움체 Bold" panose="00000800000000000000" pitchFamily="2" charset="-127"/>
+                <a:ea typeface="KoPub돋움체 Bold" panose="00000800000000000000" pitchFamily="2" charset="-127"/>
+              </a:rPr>
+              <a:t> 허브</a:t>
+            </a:r>
+            <a:r>
+              <a:rPr lang="en-US" altLang="ko-KR" sz="800" b="1" dirty="0">
+                <a:latin typeface="KoPub돋움체 Bold" panose="00000800000000000000" pitchFamily="2" charset="-127"/>
+                <a:ea typeface="KoPub돋움체 Bold" panose="00000800000000000000" pitchFamily="2" charset="-127"/>
+              </a:rPr>
+              <a:t>]</a:t>
+            </a:r>
+          </a:p>
+        </p:txBody>
+      </p:sp>
       <p:pic>
         <p:nvPicPr>
-          <p:cNvPr id="4" name="Picture 1">
+          <p:cNvPr id="9" name="그림 8">
             <a:extLst>
               <a:ext uri="{FF2B5EF4-FFF2-40B4-BE49-F238E27FC236}">
-                <a16:creationId xmlns:a16="http://schemas.microsoft.com/office/drawing/2014/main" id="{328B5BC9-DEFC-EE92-C5E7-2248E55972BA}"/>
+                <a16:creationId xmlns:a16="http://schemas.microsoft.com/office/drawing/2014/main" id="{8528A241-F5AE-3E15-56AA-F240B3899815}"/>
               </a:ext>
             </a:extLst>
           </p:cNvPr>
@@ -4981,251 +5056,20 @@
         </p:blipFill>
         <p:spPr>
           <a:xfrm>
-            <a:off x="147393" y="129534"/>
-            <a:ext cx="544284" cy="307776"/>
+            <a:off x="603724" y="642969"/>
+            <a:ext cx="175906" cy="153604"/>
           </a:xfrm>
           <a:prstGeom prst="rect">
             <a:avLst/>
           </a:prstGeom>
-          <a:noFill/>
-          <a:ln>
-            <a:noFill/>
-          </a:ln>
-          <a:effectLst/>
         </p:spPr>
       </p:pic>
-      <p:sp>
-        <p:nvSpPr>
-          <p:cNvPr id="5" name="TextBox 4">
+      <p:pic>
+        <p:nvPicPr>
+          <p:cNvPr id="11" name="그림 10">
             <a:extLst>
               <a:ext uri="{FF2B5EF4-FFF2-40B4-BE49-F238E27FC236}">
-                <a16:creationId xmlns:a16="http://schemas.microsoft.com/office/drawing/2014/main" id="{B2417798-018E-90CA-94E9-D9B361C67A78}"/>
-              </a:ext>
-            </a:extLst>
-          </p:cNvPr>
-          <p:cNvSpPr txBox="1"/>
-          <p:nvPr/>
-        </p:nvSpPr>
-        <p:spPr>
-          <a:xfrm>
-            <a:off x="1402907" y="1475898"/>
-            <a:ext cx="1590324" cy="200055"/>
-          </a:xfrm>
-          <a:prstGeom prst="rect">
-            <a:avLst/>
-          </a:prstGeom>
-          <a:noFill/>
-        </p:spPr>
-        <p:txBody>
-          <a:bodyPr wrap="square" rtlCol="0">
-            <a:spAutoFit/>
-          </a:bodyPr>
-          <a:lstStyle/>
-          <a:p>
-            <a:pPr algn="ctr"/>
-            <a:r>
-              <a:rPr lang="ko-KR" altLang="en-US" sz="700" b="1" dirty="0">
-                <a:solidFill>
-                  <a:schemeClr val="accent1">
-                    <a:lumMod val="50000"/>
-                  </a:schemeClr>
-                </a:solidFill>
-                <a:latin typeface="KoPub돋움체 Bold" panose="02020603020101020101" pitchFamily="18" charset="-127"/>
-                <a:ea typeface="KoPub돋움체 Bold" panose="02020603020101020101" pitchFamily="18" charset="-127"/>
-              </a:rPr>
-              <a:t>순천향대학교 천안병원</a:t>
-            </a:r>
-            <a:r>
-              <a:rPr lang="en-US" altLang="ko-KR" sz="700" b="1" dirty="0">
-                <a:solidFill>
-                  <a:schemeClr val="accent1">
-                    <a:lumMod val="50000"/>
-                  </a:schemeClr>
-                </a:solidFill>
-                <a:latin typeface="KoPub돋움체 Bold" panose="02020603020101020101" pitchFamily="18" charset="-127"/>
-                <a:ea typeface="KoPub돋움체 Bold" panose="02020603020101020101" pitchFamily="18" charset="-127"/>
-              </a:rPr>
-              <a:t> </a:t>
-            </a:r>
-            <a:r>
-              <a:rPr lang="ko-KR" altLang="en-US" sz="700" b="1" dirty="0">
-                <a:solidFill>
-                  <a:schemeClr val="accent1">
-                    <a:lumMod val="50000"/>
-                  </a:schemeClr>
-                </a:solidFill>
-                <a:latin typeface="KoPub돋움체 Bold" panose="02020603020101020101" pitchFamily="18" charset="-127"/>
-                <a:ea typeface="KoPub돋움체 Bold" panose="02020603020101020101" pitchFamily="18" charset="-127"/>
-              </a:rPr>
-              <a:t>진료지원간호팀</a:t>
-            </a:r>
-            <a:endParaRPr lang="ko-KR" altLang="en-US" sz="800" b="1" dirty="0">
-              <a:solidFill>
-                <a:schemeClr val="accent1">
-                  <a:lumMod val="50000"/>
-                </a:schemeClr>
-              </a:solidFill>
-              <a:latin typeface="KoPub돋움체 Bold" panose="02020603020101020101" pitchFamily="18" charset="-127"/>
-              <a:ea typeface="KoPub돋움체 Bold" panose="02020603020101020101" pitchFamily="18" charset="-127"/>
-            </a:endParaRPr>
-          </a:p>
-        </p:txBody>
-      </p:sp>
-      <p:sp>
-        <p:nvSpPr>
-          <p:cNvPr id="7" name="TextBox 6">
-            <a:extLst>
-              <a:ext uri="{FF2B5EF4-FFF2-40B4-BE49-F238E27FC236}">
-                <a16:creationId xmlns:a16="http://schemas.microsoft.com/office/drawing/2014/main" id="{A2E669AB-BE1E-2E9A-2EA6-0906B93346D8}"/>
-              </a:ext>
-            </a:extLst>
-          </p:cNvPr>
-          <p:cNvSpPr txBox="1"/>
-          <p:nvPr/>
-        </p:nvSpPr>
-        <p:spPr>
-          <a:xfrm>
-            <a:off x="675817" y="642967"/>
-            <a:ext cx="1845506" cy="338554"/>
-          </a:xfrm>
-          <a:prstGeom prst="rect">
-            <a:avLst/>
-          </a:prstGeom>
-          <a:noFill/>
-        </p:spPr>
-        <p:txBody>
-          <a:bodyPr wrap="none">
-            <a:spAutoFit/>
-          </a:bodyPr>
-          <a:lstStyle/>
-          <a:p>
-            <a:pPr algn="ctr"/>
-            <a:r>
-              <a:rPr lang="ko-KR" altLang="en-US" sz="1600" dirty="0" err="1">
-                <a:solidFill>
-                  <a:srgbClr val="00B0F0"/>
-                </a:solidFill>
-                <a:latin typeface="Noto Sans KR Black" panose="020B0200000000000000" pitchFamily="50" charset="-127"/>
-                <a:ea typeface="Noto Sans KR Black" panose="020B0200000000000000" pitchFamily="50" charset="-127"/>
-              </a:rPr>
-              <a:t>우리가치</a:t>
-            </a:r>
-            <a:r>
-              <a:rPr lang="ko-KR" altLang="en-US" sz="1600" dirty="0">
-                <a:solidFill>
-                  <a:schemeClr val="accent1">
-                    <a:lumMod val="50000"/>
-                  </a:schemeClr>
-                </a:solidFill>
-                <a:latin typeface="KoPub돋움체 Bold" panose="02020603020101020101" pitchFamily="18" charset="-127"/>
-                <a:ea typeface="KoPub돋움체 Bold" panose="02020603020101020101" pitchFamily="18" charset="-127"/>
-              </a:rPr>
-              <a:t> </a:t>
-            </a:r>
-            <a:r>
-              <a:rPr lang="en-US" altLang="ko-KR" sz="1600" dirty="0" err="1">
-                <a:solidFill>
-                  <a:schemeClr val="accent1">
-                    <a:lumMod val="50000"/>
-                  </a:schemeClr>
-                </a:solidFill>
-                <a:latin typeface="Franklin Gothic Heavy" panose="020B0903020102020204" pitchFamily="34" charset="0"/>
-                <a:ea typeface="KoPub돋움체 Bold" panose="02020603020101020101" pitchFamily="18" charset="-127"/>
-              </a:rPr>
-              <a:t>WeValue</a:t>
-            </a:r>
-            <a:endParaRPr lang="en-US" altLang="ko-KR" sz="1600" dirty="0">
-              <a:solidFill>
-                <a:schemeClr val="accent1">
-                  <a:lumMod val="50000"/>
-                </a:schemeClr>
-              </a:solidFill>
-              <a:latin typeface="Franklin Gothic Heavy" panose="020B0903020102020204" pitchFamily="34" charset="0"/>
-              <a:ea typeface="KoPub돋움체 Bold" panose="02020603020101020101" pitchFamily="18" charset="-127"/>
-            </a:endParaRPr>
-          </a:p>
-        </p:txBody>
-      </p:sp>
-      <p:sp>
-        <p:nvSpPr>
-          <p:cNvPr id="8" name="TextBox 7">
-            <a:extLst>
-              <a:ext uri="{FF2B5EF4-FFF2-40B4-BE49-F238E27FC236}">
-                <a16:creationId xmlns:a16="http://schemas.microsoft.com/office/drawing/2014/main" id="{FC429CDB-3B23-42A3-9704-5F748573D5B3}"/>
-              </a:ext>
-            </a:extLst>
-          </p:cNvPr>
-          <p:cNvSpPr txBox="1"/>
-          <p:nvPr/>
-        </p:nvSpPr>
-        <p:spPr>
-          <a:xfrm>
-            <a:off x="619776" y="900112"/>
-            <a:ext cx="1957587" cy="215444"/>
-          </a:xfrm>
-          <a:prstGeom prst="rect">
-            <a:avLst/>
-          </a:prstGeom>
-          <a:noFill/>
-        </p:spPr>
-        <p:txBody>
-          <a:bodyPr wrap="none">
-            <a:spAutoFit/>
-          </a:bodyPr>
-          <a:lstStyle/>
-          <a:p>
-            <a:pPr algn="ctr"/>
-            <a:r>
-              <a:rPr lang="en-US" altLang="ko-KR" sz="800" b="1" dirty="0">
-                <a:latin typeface="KoPub돋움체 Bold" panose="00000800000000000000" pitchFamily="2" charset="-127"/>
-                <a:ea typeface="KoPub돋움체 Bold" panose="00000800000000000000" pitchFamily="2" charset="-127"/>
-              </a:rPr>
-              <a:t>[</a:t>
-            </a:r>
-            <a:r>
-              <a:rPr lang="ko-KR" altLang="en-US" sz="800" b="1" dirty="0">
-                <a:latin typeface="KoPub돋움체 Bold" panose="00000800000000000000" pitchFamily="2" charset="-127"/>
-                <a:ea typeface="KoPub돋움체 Bold" panose="00000800000000000000" pitchFamily="2" charset="-127"/>
-              </a:rPr>
-              <a:t>우리가 가치를 만드는 공간</a:t>
-            </a:r>
-            <a:r>
-              <a:rPr lang="en-US" altLang="ko-KR" sz="800" b="1" dirty="0">
-                <a:latin typeface="KoPub돋움체 Bold" panose="00000800000000000000" pitchFamily="2" charset="-127"/>
-                <a:ea typeface="KoPub돋움체 Bold" panose="00000800000000000000" pitchFamily="2" charset="-127"/>
-              </a:rPr>
-              <a:t>, </a:t>
-            </a:r>
-            <a:r>
-              <a:rPr lang="ko-KR" altLang="en-US" sz="800" b="1" dirty="0" err="1">
-                <a:latin typeface="KoPub돋움체 Bold" panose="00000800000000000000" pitchFamily="2" charset="-127"/>
-                <a:ea typeface="KoPub돋움체 Bold" panose="00000800000000000000" pitchFamily="2" charset="-127"/>
-              </a:rPr>
-              <a:t>우리가치</a:t>
-            </a:r>
-            <a:r>
-              <a:rPr lang="ko-KR" altLang="en-US" sz="800" b="1" dirty="0">
-                <a:latin typeface="KoPub돋움체 Bold" panose="00000800000000000000" pitchFamily="2" charset="-127"/>
-                <a:ea typeface="KoPub돋움체 Bold" panose="00000800000000000000" pitchFamily="2" charset="-127"/>
-              </a:rPr>
-              <a:t> 허브</a:t>
-            </a:r>
-            <a:r>
-              <a:rPr lang="en-US" altLang="ko-KR" sz="800" b="1" dirty="0">
-                <a:latin typeface="KoPub돋움체 Bold" panose="00000800000000000000" pitchFamily="2" charset="-127"/>
-                <a:ea typeface="KoPub돋움체 Bold" panose="00000800000000000000" pitchFamily="2" charset="-127"/>
-              </a:rPr>
-              <a:t>]</a:t>
-            </a:r>
-          </a:p>
-        </p:txBody>
-      </p:sp>
-      <p:pic>
-        <p:nvPicPr>
-          <p:cNvPr id="9" name="그림 8">
-            <a:extLst>
-              <a:ext uri="{FF2B5EF4-FFF2-40B4-BE49-F238E27FC236}">
-                <a16:creationId xmlns:a16="http://schemas.microsoft.com/office/drawing/2014/main" id="{502962EF-1B0C-F248-4E68-525C2A07B9E6}"/>
+                <a16:creationId xmlns:a16="http://schemas.microsoft.com/office/drawing/2014/main" id="{9A14FF0E-F845-5622-EB34-2EDE7C0E6730}"/>
               </a:ext>
             </a:extLst>
           </p:cNvPr>
@@ -5235,42 +5079,12 @@
           <p:nvPr/>
         </p:nvPicPr>
         <p:blipFill>
-          <a:blip r:embed="rId3"/>
+          <a:blip r:embed="rId2"/>
           <a:stretch>
             <a:fillRect/>
           </a:stretch>
         </p:blipFill>
         <p:spPr>
-          <a:xfrm>
-            <a:off x="603724" y="642969"/>
-            <a:ext cx="175906" cy="153604"/>
-          </a:xfrm>
-          <a:prstGeom prst="rect">
-            <a:avLst/>
-          </a:prstGeom>
-        </p:spPr>
-      </p:pic>
-      <p:pic>
-        <p:nvPicPr>
-          <p:cNvPr id="11" name="그림 10">
-            <a:extLst>
-              <a:ext uri="{FF2B5EF4-FFF2-40B4-BE49-F238E27FC236}">
-                <a16:creationId xmlns:a16="http://schemas.microsoft.com/office/drawing/2014/main" id="{71F181F5-2A03-FE7C-4ECB-D5AD6545AD07}"/>
-              </a:ext>
-            </a:extLst>
-          </p:cNvPr>
-          <p:cNvPicPr>
-            <a:picLocks noChangeAspect="1"/>
-          </p:cNvPicPr>
-          <p:nvPr/>
-        </p:nvPicPr>
-        <p:blipFill>
-          <a:blip r:embed="rId3"/>
-          <a:stretch>
-            <a:fillRect/>
-          </a:stretch>
-        </p:blipFill>
-        <p:spPr>
           <a:xfrm rot="10800000">
             <a:off x="2423948" y="642967"/>
             <a:ext cx="175902" cy="153606"/>
@@ -5283,7 +5097,7 @@
     </p:spTree>
     <p:extLst>
       <p:ext uri="{BB962C8B-B14F-4D97-AF65-F5344CB8AC3E}">
-        <p14:creationId xmlns:p14="http://schemas.microsoft.com/office/powerpoint/2010/main" val="1282454771"/>
+        <p14:creationId xmlns:p14="http://schemas.microsoft.com/office/powerpoint/2010/main" val="3999415223"/>
       </p:ext>
     </p:extLst>
   </p:cSld>
@@ -5301,7 +5115,7 @@
         <p:cNvPr id="1" name="">
           <a:extLst>
             <a:ext uri="{FF2B5EF4-FFF2-40B4-BE49-F238E27FC236}">
-              <a16:creationId xmlns:a16="http://schemas.microsoft.com/office/drawing/2014/main" id="{952E7605-240F-DA3E-53C9-7E5889BFC9E2}"/>
+              <a16:creationId xmlns:a16="http://schemas.microsoft.com/office/drawing/2014/main" id="{88FA1B3E-100E-7586-A7DB-BEC5784FF51E}"/>
             </a:ext>
           </a:extLst>
         </p:cNvPr>
@@ -5316,12 +5130,214 @@
           <a:chExt cx="0" cy="0"/>
         </a:xfrm>
       </p:grpSpPr>
+      <p:sp>
+        <p:nvSpPr>
+          <p:cNvPr id="5" name="TextBox 4">
+            <a:extLst>
+              <a:ext uri="{FF2B5EF4-FFF2-40B4-BE49-F238E27FC236}">
+                <a16:creationId xmlns:a16="http://schemas.microsoft.com/office/drawing/2014/main" id="{A302DCAE-759D-E7DD-5ABD-9D959F171442}"/>
+              </a:ext>
+            </a:extLst>
+          </p:cNvPr>
+          <p:cNvSpPr txBox="1"/>
+          <p:nvPr/>
+        </p:nvSpPr>
+        <p:spPr>
+          <a:xfrm>
+            <a:off x="2258736" y="1475898"/>
+            <a:ext cx="734495" cy="200055"/>
+          </a:xfrm>
+          <a:prstGeom prst="rect">
+            <a:avLst/>
+          </a:prstGeom>
+          <a:noFill/>
+        </p:spPr>
+        <p:txBody>
+          <a:bodyPr wrap="none" rtlCol="0">
+            <a:spAutoFit/>
+          </a:bodyPr>
+          <a:lstStyle/>
+          <a:p>
+            <a:pPr algn="r"/>
+            <a:r>
+              <a:rPr lang="ko-KR" altLang="en-US" sz="700" b="1" dirty="0">
+                <a:solidFill>
+                  <a:schemeClr val="accent1">
+                    <a:lumMod val="50000"/>
+                  </a:schemeClr>
+                </a:solidFill>
+                <a:latin typeface="KoPub돋움체 Bold" panose="02020603020101020101" pitchFamily="18" charset="-127"/>
+                <a:ea typeface="KoPub돋움체 Bold" panose="02020603020101020101" pitchFamily="18" charset="-127"/>
+              </a:rPr>
+              <a:t>진료지원간호팀</a:t>
+            </a:r>
+            <a:endParaRPr lang="ko-KR" altLang="en-US" sz="800" b="1" dirty="0">
+              <a:solidFill>
+                <a:schemeClr val="accent1">
+                  <a:lumMod val="50000"/>
+                </a:schemeClr>
+              </a:solidFill>
+              <a:latin typeface="KoPub돋움체 Bold" panose="02020603020101020101" pitchFamily="18" charset="-127"/>
+              <a:ea typeface="KoPub돋움체 Bold" panose="02020603020101020101" pitchFamily="18" charset="-127"/>
+            </a:endParaRPr>
+          </a:p>
+        </p:txBody>
+      </p:sp>
+      <p:sp>
+        <p:nvSpPr>
+          <p:cNvPr id="7" name="TextBox 6">
+            <a:extLst>
+              <a:ext uri="{FF2B5EF4-FFF2-40B4-BE49-F238E27FC236}">
+                <a16:creationId xmlns:a16="http://schemas.microsoft.com/office/drawing/2014/main" id="{FC5AEA4E-D66B-4FF5-49BD-E7F25509218D}"/>
+              </a:ext>
+            </a:extLst>
+          </p:cNvPr>
+          <p:cNvSpPr txBox="1"/>
+          <p:nvPr/>
+        </p:nvSpPr>
+        <p:spPr>
+          <a:xfrm>
+            <a:off x="675817" y="642967"/>
+            <a:ext cx="1845506" cy="338554"/>
+          </a:xfrm>
+          <a:prstGeom prst="rect">
+            <a:avLst/>
+          </a:prstGeom>
+          <a:noFill/>
+        </p:spPr>
+        <p:txBody>
+          <a:bodyPr wrap="none">
+            <a:spAutoFit/>
+          </a:bodyPr>
+          <a:lstStyle/>
+          <a:p>
+            <a:pPr algn="ctr"/>
+            <a:r>
+              <a:rPr lang="ko-KR" altLang="en-US" sz="1600" dirty="0" err="1">
+                <a:solidFill>
+                  <a:srgbClr val="00B0F0"/>
+                </a:solidFill>
+                <a:latin typeface="Noto Sans KR Black" panose="020B0200000000000000" pitchFamily="50" charset="-127"/>
+                <a:ea typeface="Noto Sans KR Black" panose="020B0200000000000000" pitchFamily="50" charset="-127"/>
+              </a:rPr>
+              <a:t>우리가치</a:t>
+            </a:r>
+            <a:r>
+              <a:rPr lang="ko-KR" altLang="en-US" sz="1600" dirty="0">
+                <a:solidFill>
+                  <a:schemeClr val="accent1">
+                    <a:lumMod val="50000"/>
+                  </a:schemeClr>
+                </a:solidFill>
+                <a:latin typeface="KoPub돋움체 Bold" panose="02020603020101020101" pitchFamily="18" charset="-127"/>
+                <a:ea typeface="KoPub돋움체 Bold" panose="02020603020101020101" pitchFamily="18" charset="-127"/>
+              </a:rPr>
+              <a:t> </a:t>
+            </a:r>
+            <a:r>
+              <a:rPr lang="en-US" altLang="ko-KR" sz="1600" dirty="0" err="1">
+                <a:solidFill>
+                  <a:schemeClr val="accent1">
+                    <a:lumMod val="50000"/>
+                  </a:schemeClr>
+                </a:solidFill>
+                <a:latin typeface="Franklin Gothic Heavy" panose="020B0903020102020204" pitchFamily="34" charset="0"/>
+                <a:ea typeface="KoPub돋움체 Bold" panose="02020603020101020101" pitchFamily="18" charset="-127"/>
+              </a:rPr>
+              <a:t>WeValue</a:t>
+            </a:r>
+            <a:endParaRPr lang="en-US" altLang="ko-KR" sz="1600" dirty="0">
+              <a:solidFill>
+                <a:schemeClr val="accent1">
+                  <a:lumMod val="50000"/>
+                </a:schemeClr>
+              </a:solidFill>
+              <a:latin typeface="Franklin Gothic Heavy" panose="020B0903020102020204" pitchFamily="34" charset="0"/>
+              <a:ea typeface="KoPub돋움체 Bold" panose="02020603020101020101" pitchFamily="18" charset="-127"/>
+            </a:endParaRPr>
+          </a:p>
+        </p:txBody>
+      </p:sp>
+      <p:sp>
+        <p:nvSpPr>
+          <p:cNvPr id="8" name="TextBox 7">
+            <a:extLst>
+              <a:ext uri="{FF2B5EF4-FFF2-40B4-BE49-F238E27FC236}">
+                <a16:creationId xmlns:a16="http://schemas.microsoft.com/office/drawing/2014/main" id="{E6B5FAD9-C93D-B01E-20A0-B73140DFC9BB}"/>
+              </a:ext>
+            </a:extLst>
+          </p:cNvPr>
+          <p:cNvSpPr txBox="1"/>
+          <p:nvPr/>
+        </p:nvSpPr>
+        <p:spPr>
+          <a:xfrm>
+            <a:off x="619776" y="900112"/>
+            <a:ext cx="1957587" cy="215444"/>
+          </a:xfrm>
+          <a:prstGeom prst="rect">
+            <a:avLst/>
+          </a:prstGeom>
+          <a:noFill/>
+        </p:spPr>
+        <p:txBody>
+          <a:bodyPr wrap="none">
+            <a:spAutoFit/>
+          </a:bodyPr>
+          <a:lstStyle/>
+          <a:p>
+            <a:pPr algn="ctr"/>
+            <a:r>
+              <a:rPr lang="en-US" altLang="ko-KR" sz="800" b="1" dirty="0">
+                <a:latin typeface="KoPub돋움체 Bold" panose="00000800000000000000" pitchFamily="2" charset="-127"/>
+                <a:ea typeface="KoPub돋움체 Bold" panose="00000800000000000000" pitchFamily="2" charset="-127"/>
+              </a:rPr>
+              <a:t>[</a:t>
+            </a:r>
+            <a:r>
+              <a:rPr lang="ko-KR" altLang="en-US" sz="800" b="1" dirty="0">
+                <a:latin typeface="KoPub돋움체 Bold" panose="00000800000000000000" pitchFamily="2" charset="-127"/>
+                <a:ea typeface="KoPub돋움체 Bold" panose="00000800000000000000" pitchFamily="2" charset="-127"/>
+              </a:rPr>
+              <a:t>우리가 가치를 만드는 공간</a:t>
+            </a:r>
+            <a:r>
+              <a:rPr lang="en-US" altLang="ko-KR" sz="800" b="1" dirty="0">
+                <a:latin typeface="KoPub돋움체 Bold" panose="00000800000000000000" pitchFamily="2" charset="-127"/>
+                <a:ea typeface="KoPub돋움체 Bold" panose="00000800000000000000" pitchFamily="2" charset="-127"/>
+              </a:rPr>
+              <a:t>, </a:t>
+            </a:r>
+            <a:r>
+              <a:rPr lang="ko-KR" altLang="en-US" sz="800" b="1" dirty="0" err="1">
+                <a:latin typeface="KoPub돋움체 Bold" panose="00000800000000000000" pitchFamily="2" charset="-127"/>
+                <a:ea typeface="KoPub돋움체 Bold" panose="00000800000000000000" pitchFamily="2" charset="-127"/>
+              </a:rPr>
+              <a:t>우리가치</a:t>
+            </a:r>
+            <a:r>
+              <a:rPr lang="ko-KR" altLang="en-US" sz="800" b="1" dirty="0">
+                <a:latin typeface="KoPub돋움체 Bold" panose="00000800000000000000" pitchFamily="2" charset="-127"/>
+                <a:ea typeface="KoPub돋움체 Bold" panose="00000800000000000000" pitchFamily="2" charset="-127"/>
+              </a:rPr>
+              <a:t> 허브</a:t>
+            </a:r>
+            <a:r>
+              <a:rPr lang="en-US" altLang="ko-KR" sz="800" b="1" dirty="0">
+                <a:latin typeface="KoPub돋움체 Bold" panose="00000800000000000000" pitchFamily="2" charset="-127"/>
+                <a:ea typeface="KoPub돋움체 Bold" panose="00000800000000000000" pitchFamily="2" charset="-127"/>
+              </a:rPr>
+              <a:t>]</a:t>
+            </a:r>
+          </a:p>
+        </p:txBody>
+      </p:sp>
       <p:pic>
         <p:nvPicPr>
-          <p:cNvPr id="4" name="Picture 1">
+          <p:cNvPr id="9" name="그림 8">
             <a:extLst>
               <a:ext uri="{FF2B5EF4-FFF2-40B4-BE49-F238E27FC236}">
-                <a16:creationId xmlns:a16="http://schemas.microsoft.com/office/drawing/2014/main" id="{19A06173-2436-A5E6-4C1A-B8EDD2819494}"/>
+                <a16:creationId xmlns:a16="http://schemas.microsoft.com/office/drawing/2014/main" id="{90DAE7A5-295F-89DE-E2CE-218641B23002}"/>
               </a:ext>
             </a:extLst>
           </p:cNvPr>
@@ -5338,251 +5354,20 @@
         </p:blipFill>
         <p:spPr>
           <a:xfrm>
-            <a:off x="147393" y="129534"/>
-            <a:ext cx="544284" cy="307776"/>
+            <a:off x="603724" y="642969"/>
+            <a:ext cx="175906" cy="153604"/>
           </a:xfrm>
           <a:prstGeom prst="rect">
             <a:avLst/>
           </a:prstGeom>
-          <a:noFill/>
-          <a:ln>
-            <a:noFill/>
-          </a:ln>
-          <a:effectLst/>
         </p:spPr>
       </p:pic>
-      <p:sp>
-        <p:nvSpPr>
-          <p:cNvPr id="5" name="TextBox 4">
+      <p:pic>
+        <p:nvPicPr>
+          <p:cNvPr id="11" name="그림 10">
             <a:extLst>
               <a:ext uri="{FF2B5EF4-FFF2-40B4-BE49-F238E27FC236}">
-                <a16:creationId xmlns:a16="http://schemas.microsoft.com/office/drawing/2014/main" id="{41F53660-7D28-06A5-E36E-A9F6719EC5EF}"/>
-              </a:ext>
-            </a:extLst>
-          </p:cNvPr>
-          <p:cNvSpPr txBox="1"/>
-          <p:nvPr/>
-        </p:nvSpPr>
-        <p:spPr>
-          <a:xfrm>
-            <a:off x="1402907" y="1475898"/>
-            <a:ext cx="1590324" cy="200055"/>
-          </a:xfrm>
-          <a:prstGeom prst="rect">
-            <a:avLst/>
-          </a:prstGeom>
-          <a:noFill/>
-        </p:spPr>
-        <p:txBody>
-          <a:bodyPr wrap="square" rtlCol="0">
-            <a:spAutoFit/>
-          </a:bodyPr>
-          <a:lstStyle/>
-          <a:p>
-            <a:pPr algn="ctr"/>
-            <a:r>
-              <a:rPr lang="ko-KR" altLang="en-US" sz="700" b="1" dirty="0">
-                <a:solidFill>
-                  <a:schemeClr val="accent1">
-                    <a:lumMod val="50000"/>
-                  </a:schemeClr>
-                </a:solidFill>
-                <a:latin typeface="KoPub돋움체 Bold" panose="02020603020101020101" pitchFamily="18" charset="-127"/>
-                <a:ea typeface="KoPub돋움체 Bold" panose="02020603020101020101" pitchFamily="18" charset="-127"/>
-              </a:rPr>
-              <a:t>순천향대학교 천안병원</a:t>
-            </a:r>
-            <a:r>
-              <a:rPr lang="en-US" altLang="ko-KR" sz="700" b="1" dirty="0">
-                <a:solidFill>
-                  <a:schemeClr val="accent1">
-                    <a:lumMod val="50000"/>
-                  </a:schemeClr>
-                </a:solidFill>
-                <a:latin typeface="KoPub돋움체 Bold" panose="02020603020101020101" pitchFamily="18" charset="-127"/>
-                <a:ea typeface="KoPub돋움체 Bold" panose="02020603020101020101" pitchFamily="18" charset="-127"/>
-              </a:rPr>
-              <a:t> </a:t>
-            </a:r>
-            <a:r>
-              <a:rPr lang="ko-KR" altLang="en-US" sz="700" b="1" dirty="0">
-                <a:solidFill>
-                  <a:schemeClr val="accent1">
-                    <a:lumMod val="50000"/>
-                  </a:schemeClr>
-                </a:solidFill>
-                <a:latin typeface="KoPub돋움체 Bold" panose="02020603020101020101" pitchFamily="18" charset="-127"/>
-                <a:ea typeface="KoPub돋움체 Bold" panose="02020603020101020101" pitchFamily="18" charset="-127"/>
-              </a:rPr>
-              <a:t>진료지원간호팀</a:t>
-            </a:r>
-            <a:endParaRPr lang="ko-KR" altLang="en-US" sz="800" b="1" dirty="0">
-              <a:solidFill>
-                <a:schemeClr val="accent1">
-                  <a:lumMod val="50000"/>
-                </a:schemeClr>
-              </a:solidFill>
-              <a:latin typeface="KoPub돋움체 Bold" panose="02020603020101020101" pitchFamily="18" charset="-127"/>
-              <a:ea typeface="KoPub돋움체 Bold" panose="02020603020101020101" pitchFamily="18" charset="-127"/>
-            </a:endParaRPr>
-          </a:p>
-        </p:txBody>
-      </p:sp>
-      <p:sp>
-        <p:nvSpPr>
-          <p:cNvPr id="7" name="TextBox 6">
-            <a:extLst>
-              <a:ext uri="{FF2B5EF4-FFF2-40B4-BE49-F238E27FC236}">
-                <a16:creationId xmlns:a16="http://schemas.microsoft.com/office/drawing/2014/main" id="{F8E946DA-B944-C22E-8340-58B20037A260}"/>
-              </a:ext>
-            </a:extLst>
-          </p:cNvPr>
-          <p:cNvSpPr txBox="1"/>
-          <p:nvPr/>
-        </p:nvSpPr>
-        <p:spPr>
-          <a:xfrm>
-            <a:off x="675817" y="642967"/>
-            <a:ext cx="1845506" cy="338554"/>
-          </a:xfrm>
-          <a:prstGeom prst="rect">
-            <a:avLst/>
-          </a:prstGeom>
-          <a:noFill/>
-        </p:spPr>
-        <p:txBody>
-          <a:bodyPr wrap="none">
-            <a:spAutoFit/>
-          </a:bodyPr>
-          <a:lstStyle/>
-          <a:p>
-            <a:pPr algn="ctr"/>
-            <a:r>
-              <a:rPr lang="ko-KR" altLang="en-US" sz="1600" dirty="0" err="1">
-                <a:solidFill>
-                  <a:srgbClr val="00B0F0"/>
-                </a:solidFill>
-                <a:latin typeface="Noto Sans KR Black" panose="020B0200000000000000" pitchFamily="50" charset="-127"/>
-                <a:ea typeface="Noto Sans KR Black" panose="020B0200000000000000" pitchFamily="50" charset="-127"/>
-              </a:rPr>
-              <a:t>우리가치</a:t>
-            </a:r>
-            <a:r>
-              <a:rPr lang="ko-KR" altLang="en-US" sz="1600" dirty="0">
-                <a:solidFill>
-                  <a:schemeClr val="accent1">
-                    <a:lumMod val="50000"/>
-                  </a:schemeClr>
-                </a:solidFill>
-                <a:latin typeface="KoPub돋움체 Bold" panose="02020603020101020101" pitchFamily="18" charset="-127"/>
-                <a:ea typeface="KoPub돋움체 Bold" panose="02020603020101020101" pitchFamily="18" charset="-127"/>
-              </a:rPr>
-              <a:t> </a:t>
-            </a:r>
-            <a:r>
-              <a:rPr lang="en-US" altLang="ko-KR" sz="1600" dirty="0" err="1">
-                <a:solidFill>
-                  <a:schemeClr val="accent1">
-                    <a:lumMod val="50000"/>
-                  </a:schemeClr>
-                </a:solidFill>
-                <a:latin typeface="Franklin Gothic Heavy" panose="020B0903020102020204" pitchFamily="34" charset="0"/>
-                <a:ea typeface="KoPub돋움체 Bold" panose="02020603020101020101" pitchFamily="18" charset="-127"/>
-              </a:rPr>
-              <a:t>WeValue</a:t>
-            </a:r>
-            <a:endParaRPr lang="en-US" altLang="ko-KR" sz="1600" dirty="0">
-              <a:solidFill>
-                <a:schemeClr val="accent1">
-                  <a:lumMod val="50000"/>
-                </a:schemeClr>
-              </a:solidFill>
-              <a:latin typeface="Franklin Gothic Heavy" panose="020B0903020102020204" pitchFamily="34" charset="0"/>
-              <a:ea typeface="KoPub돋움체 Bold" panose="02020603020101020101" pitchFamily="18" charset="-127"/>
-            </a:endParaRPr>
-          </a:p>
-        </p:txBody>
-      </p:sp>
-      <p:sp>
-        <p:nvSpPr>
-          <p:cNvPr id="8" name="TextBox 7">
-            <a:extLst>
-              <a:ext uri="{FF2B5EF4-FFF2-40B4-BE49-F238E27FC236}">
-                <a16:creationId xmlns:a16="http://schemas.microsoft.com/office/drawing/2014/main" id="{0B7AA03A-7DBC-8499-9C73-A4BC911F2029}"/>
-              </a:ext>
-            </a:extLst>
-          </p:cNvPr>
-          <p:cNvSpPr txBox="1"/>
-          <p:nvPr/>
-        </p:nvSpPr>
-        <p:spPr>
-          <a:xfrm>
-            <a:off x="619776" y="900112"/>
-            <a:ext cx="1957587" cy="215444"/>
-          </a:xfrm>
-          <a:prstGeom prst="rect">
-            <a:avLst/>
-          </a:prstGeom>
-          <a:noFill/>
-        </p:spPr>
-        <p:txBody>
-          <a:bodyPr wrap="none">
-            <a:spAutoFit/>
-          </a:bodyPr>
-          <a:lstStyle/>
-          <a:p>
-            <a:pPr algn="ctr"/>
-            <a:r>
-              <a:rPr lang="en-US" altLang="ko-KR" sz="800" b="1" dirty="0">
-                <a:latin typeface="KoPub돋움체 Bold" panose="00000800000000000000" pitchFamily="2" charset="-127"/>
-                <a:ea typeface="KoPub돋움체 Bold" panose="00000800000000000000" pitchFamily="2" charset="-127"/>
-              </a:rPr>
-              <a:t>[</a:t>
-            </a:r>
-            <a:r>
-              <a:rPr lang="ko-KR" altLang="en-US" sz="800" b="1" dirty="0">
-                <a:latin typeface="KoPub돋움체 Bold" panose="00000800000000000000" pitchFamily="2" charset="-127"/>
-                <a:ea typeface="KoPub돋움체 Bold" panose="00000800000000000000" pitchFamily="2" charset="-127"/>
-              </a:rPr>
-              <a:t>우리가 가치를 만드는 공간</a:t>
-            </a:r>
-            <a:r>
-              <a:rPr lang="en-US" altLang="ko-KR" sz="800" b="1" dirty="0">
-                <a:latin typeface="KoPub돋움체 Bold" panose="00000800000000000000" pitchFamily="2" charset="-127"/>
-                <a:ea typeface="KoPub돋움체 Bold" panose="00000800000000000000" pitchFamily="2" charset="-127"/>
-              </a:rPr>
-              <a:t>, </a:t>
-            </a:r>
-            <a:r>
-              <a:rPr lang="ko-KR" altLang="en-US" sz="800" b="1" dirty="0" err="1">
-                <a:latin typeface="KoPub돋움체 Bold" panose="00000800000000000000" pitchFamily="2" charset="-127"/>
-                <a:ea typeface="KoPub돋움체 Bold" panose="00000800000000000000" pitchFamily="2" charset="-127"/>
-              </a:rPr>
-              <a:t>우리가치</a:t>
-            </a:r>
-            <a:r>
-              <a:rPr lang="ko-KR" altLang="en-US" sz="800" b="1" dirty="0">
-                <a:latin typeface="KoPub돋움체 Bold" panose="00000800000000000000" pitchFamily="2" charset="-127"/>
-                <a:ea typeface="KoPub돋움체 Bold" panose="00000800000000000000" pitchFamily="2" charset="-127"/>
-              </a:rPr>
-              <a:t> 허브</a:t>
-            </a:r>
-            <a:r>
-              <a:rPr lang="en-US" altLang="ko-KR" sz="800" b="1" dirty="0">
-                <a:latin typeface="KoPub돋움체 Bold" panose="00000800000000000000" pitchFamily="2" charset="-127"/>
-                <a:ea typeface="KoPub돋움체 Bold" panose="00000800000000000000" pitchFamily="2" charset="-127"/>
-              </a:rPr>
-              <a:t>]</a:t>
-            </a:r>
-          </a:p>
-        </p:txBody>
-      </p:sp>
-      <p:pic>
-        <p:nvPicPr>
-          <p:cNvPr id="9" name="그림 8">
-            <a:extLst>
-              <a:ext uri="{FF2B5EF4-FFF2-40B4-BE49-F238E27FC236}">
-                <a16:creationId xmlns:a16="http://schemas.microsoft.com/office/drawing/2014/main" id="{074A6330-7F4F-82A5-9079-9B6D5AD659DA}"/>
+                <a16:creationId xmlns:a16="http://schemas.microsoft.com/office/drawing/2014/main" id="{0882ADEF-CAA5-685D-B4D0-FDAB1F37B5E3}"/>
               </a:ext>
             </a:extLst>
           </p:cNvPr>
@@ -5592,42 +5377,12 @@
           <p:nvPr/>
         </p:nvPicPr>
         <p:blipFill>
-          <a:blip r:embed="rId3"/>
+          <a:blip r:embed="rId2"/>
           <a:stretch>
             <a:fillRect/>
           </a:stretch>
         </p:blipFill>
         <p:spPr>
-          <a:xfrm>
-            <a:off x="603724" y="642969"/>
-            <a:ext cx="175906" cy="153604"/>
-          </a:xfrm>
-          <a:prstGeom prst="rect">
-            <a:avLst/>
-          </a:prstGeom>
-        </p:spPr>
-      </p:pic>
-      <p:pic>
-        <p:nvPicPr>
-          <p:cNvPr id="11" name="그림 10">
-            <a:extLst>
-              <a:ext uri="{FF2B5EF4-FFF2-40B4-BE49-F238E27FC236}">
-                <a16:creationId xmlns:a16="http://schemas.microsoft.com/office/drawing/2014/main" id="{AE3693BE-8927-795F-D95D-D820D9A3EAAF}"/>
-              </a:ext>
-            </a:extLst>
-          </p:cNvPr>
-          <p:cNvPicPr>
-            <a:picLocks noChangeAspect="1"/>
-          </p:cNvPicPr>
-          <p:nvPr/>
-        </p:nvPicPr>
-        <p:blipFill>
-          <a:blip r:embed="rId3"/>
-          <a:stretch>
-            <a:fillRect/>
-          </a:stretch>
-        </p:blipFill>
-        <p:spPr>
           <a:xfrm rot="10800000">
             <a:off x="2423948" y="642967"/>
             <a:ext cx="175902" cy="153606"/>
@@ -5640,7 +5395,7 @@
     </p:spTree>
     <p:extLst>
       <p:ext uri="{BB962C8B-B14F-4D97-AF65-F5344CB8AC3E}">
-        <p14:creationId xmlns:p14="http://schemas.microsoft.com/office/powerpoint/2010/main" val="1058533138"/>
+        <p14:creationId xmlns:p14="http://schemas.microsoft.com/office/powerpoint/2010/main" val="3804633613"/>
       </p:ext>
     </p:extLst>
   </p:cSld>
@@ -5658,7 +5413,7 @@
         <p:cNvPr id="1" name="">
           <a:extLst>
             <a:ext uri="{FF2B5EF4-FFF2-40B4-BE49-F238E27FC236}">
-              <a16:creationId xmlns:a16="http://schemas.microsoft.com/office/drawing/2014/main" id="{A5CF9064-F583-AF84-C9E9-3D700D7E7359}"/>
+              <a16:creationId xmlns:a16="http://schemas.microsoft.com/office/drawing/2014/main" id="{8242FEE4-288C-8832-1F63-4BB87E971E25}"/>
             </a:ext>
           </a:extLst>
         </p:cNvPr>
@@ -5673,12 +5428,214 @@
           <a:chExt cx="0" cy="0"/>
         </a:xfrm>
       </p:grpSpPr>
+      <p:sp>
+        <p:nvSpPr>
+          <p:cNvPr id="5" name="TextBox 4">
+            <a:extLst>
+              <a:ext uri="{FF2B5EF4-FFF2-40B4-BE49-F238E27FC236}">
+                <a16:creationId xmlns:a16="http://schemas.microsoft.com/office/drawing/2014/main" id="{17003B73-88E1-D8D9-9BE1-9EA5662E049E}"/>
+              </a:ext>
+            </a:extLst>
+          </p:cNvPr>
+          <p:cNvSpPr txBox="1"/>
+          <p:nvPr/>
+        </p:nvSpPr>
+        <p:spPr>
+          <a:xfrm>
+            <a:off x="2258736" y="1475898"/>
+            <a:ext cx="734495" cy="200055"/>
+          </a:xfrm>
+          <a:prstGeom prst="rect">
+            <a:avLst/>
+          </a:prstGeom>
+          <a:noFill/>
+        </p:spPr>
+        <p:txBody>
+          <a:bodyPr wrap="none" rtlCol="0">
+            <a:spAutoFit/>
+          </a:bodyPr>
+          <a:lstStyle/>
+          <a:p>
+            <a:pPr algn="r"/>
+            <a:r>
+              <a:rPr lang="ko-KR" altLang="en-US" sz="700" b="1" dirty="0">
+                <a:solidFill>
+                  <a:schemeClr val="accent1">
+                    <a:lumMod val="50000"/>
+                  </a:schemeClr>
+                </a:solidFill>
+                <a:latin typeface="KoPub돋움체 Bold" panose="02020603020101020101" pitchFamily="18" charset="-127"/>
+                <a:ea typeface="KoPub돋움체 Bold" panose="02020603020101020101" pitchFamily="18" charset="-127"/>
+              </a:rPr>
+              <a:t>진료지원간호팀</a:t>
+            </a:r>
+            <a:endParaRPr lang="ko-KR" altLang="en-US" sz="800" b="1" dirty="0">
+              <a:solidFill>
+                <a:schemeClr val="accent1">
+                  <a:lumMod val="50000"/>
+                </a:schemeClr>
+              </a:solidFill>
+              <a:latin typeface="KoPub돋움체 Bold" panose="02020603020101020101" pitchFamily="18" charset="-127"/>
+              <a:ea typeface="KoPub돋움체 Bold" panose="02020603020101020101" pitchFamily="18" charset="-127"/>
+            </a:endParaRPr>
+          </a:p>
+        </p:txBody>
+      </p:sp>
+      <p:sp>
+        <p:nvSpPr>
+          <p:cNvPr id="7" name="TextBox 6">
+            <a:extLst>
+              <a:ext uri="{FF2B5EF4-FFF2-40B4-BE49-F238E27FC236}">
+                <a16:creationId xmlns:a16="http://schemas.microsoft.com/office/drawing/2014/main" id="{9B017783-EE83-E1CD-2698-37F774F58F02}"/>
+              </a:ext>
+            </a:extLst>
+          </p:cNvPr>
+          <p:cNvSpPr txBox="1"/>
+          <p:nvPr/>
+        </p:nvSpPr>
+        <p:spPr>
+          <a:xfrm>
+            <a:off x="675817" y="642967"/>
+            <a:ext cx="1845506" cy="338554"/>
+          </a:xfrm>
+          <a:prstGeom prst="rect">
+            <a:avLst/>
+          </a:prstGeom>
+          <a:noFill/>
+        </p:spPr>
+        <p:txBody>
+          <a:bodyPr wrap="none">
+            <a:spAutoFit/>
+          </a:bodyPr>
+          <a:lstStyle/>
+          <a:p>
+            <a:pPr algn="ctr"/>
+            <a:r>
+              <a:rPr lang="ko-KR" altLang="en-US" sz="1600" dirty="0" err="1">
+                <a:solidFill>
+                  <a:srgbClr val="00B0F0"/>
+                </a:solidFill>
+                <a:latin typeface="Noto Sans KR Black" panose="020B0200000000000000" pitchFamily="50" charset="-127"/>
+                <a:ea typeface="Noto Sans KR Black" panose="020B0200000000000000" pitchFamily="50" charset="-127"/>
+              </a:rPr>
+              <a:t>우리가치</a:t>
+            </a:r>
+            <a:r>
+              <a:rPr lang="ko-KR" altLang="en-US" sz="1600" dirty="0">
+                <a:solidFill>
+                  <a:schemeClr val="accent1">
+                    <a:lumMod val="50000"/>
+                  </a:schemeClr>
+                </a:solidFill>
+                <a:latin typeface="KoPub돋움체 Bold" panose="02020603020101020101" pitchFamily="18" charset="-127"/>
+                <a:ea typeface="KoPub돋움체 Bold" panose="02020603020101020101" pitchFamily="18" charset="-127"/>
+              </a:rPr>
+              <a:t> </a:t>
+            </a:r>
+            <a:r>
+              <a:rPr lang="en-US" altLang="ko-KR" sz="1600" dirty="0" err="1">
+                <a:solidFill>
+                  <a:schemeClr val="accent1">
+                    <a:lumMod val="50000"/>
+                  </a:schemeClr>
+                </a:solidFill>
+                <a:latin typeface="Franklin Gothic Heavy" panose="020B0903020102020204" pitchFamily="34" charset="0"/>
+                <a:ea typeface="KoPub돋움체 Bold" panose="02020603020101020101" pitchFamily="18" charset="-127"/>
+              </a:rPr>
+              <a:t>WeValue</a:t>
+            </a:r>
+            <a:endParaRPr lang="en-US" altLang="ko-KR" sz="1600" dirty="0">
+              <a:solidFill>
+                <a:schemeClr val="accent1">
+                  <a:lumMod val="50000"/>
+                </a:schemeClr>
+              </a:solidFill>
+              <a:latin typeface="Franklin Gothic Heavy" panose="020B0903020102020204" pitchFamily="34" charset="0"/>
+              <a:ea typeface="KoPub돋움체 Bold" panose="02020603020101020101" pitchFamily="18" charset="-127"/>
+            </a:endParaRPr>
+          </a:p>
+        </p:txBody>
+      </p:sp>
+      <p:sp>
+        <p:nvSpPr>
+          <p:cNvPr id="8" name="TextBox 7">
+            <a:extLst>
+              <a:ext uri="{FF2B5EF4-FFF2-40B4-BE49-F238E27FC236}">
+                <a16:creationId xmlns:a16="http://schemas.microsoft.com/office/drawing/2014/main" id="{7AA58063-8D9D-DA6A-D1EF-3FAF94B0F3B9}"/>
+              </a:ext>
+            </a:extLst>
+          </p:cNvPr>
+          <p:cNvSpPr txBox="1"/>
+          <p:nvPr/>
+        </p:nvSpPr>
+        <p:spPr>
+          <a:xfrm>
+            <a:off x="619776" y="900112"/>
+            <a:ext cx="1957587" cy="215444"/>
+          </a:xfrm>
+          <a:prstGeom prst="rect">
+            <a:avLst/>
+          </a:prstGeom>
+          <a:noFill/>
+        </p:spPr>
+        <p:txBody>
+          <a:bodyPr wrap="none">
+            <a:spAutoFit/>
+          </a:bodyPr>
+          <a:lstStyle/>
+          <a:p>
+            <a:pPr algn="ctr"/>
+            <a:r>
+              <a:rPr lang="en-US" altLang="ko-KR" sz="800" b="1" dirty="0">
+                <a:latin typeface="KoPub돋움체 Bold" panose="00000800000000000000" pitchFamily="2" charset="-127"/>
+                <a:ea typeface="KoPub돋움체 Bold" panose="00000800000000000000" pitchFamily="2" charset="-127"/>
+              </a:rPr>
+              <a:t>[</a:t>
+            </a:r>
+            <a:r>
+              <a:rPr lang="ko-KR" altLang="en-US" sz="800" b="1" dirty="0">
+                <a:latin typeface="KoPub돋움체 Bold" panose="00000800000000000000" pitchFamily="2" charset="-127"/>
+                <a:ea typeface="KoPub돋움체 Bold" panose="00000800000000000000" pitchFamily="2" charset="-127"/>
+              </a:rPr>
+              <a:t>우리가 가치를 만드는 공간</a:t>
+            </a:r>
+            <a:r>
+              <a:rPr lang="en-US" altLang="ko-KR" sz="800" b="1" dirty="0">
+                <a:latin typeface="KoPub돋움체 Bold" panose="00000800000000000000" pitchFamily="2" charset="-127"/>
+                <a:ea typeface="KoPub돋움체 Bold" panose="00000800000000000000" pitchFamily="2" charset="-127"/>
+              </a:rPr>
+              <a:t>, </a:t>
+            </a:r>
+            <a:r>
+              <a:rPr lang="ko-KR" altLang="en-US" sz="800" b="1" dirty="0" err="1">
+                <a:latin typeface="KoPub돋움체 Bold" panose="00000800000000000000" pitchFamily="2" charset="-127"/>
+                <a:ea typeface="KoPub돋움체 Bold" panose="00000800000000000000" pitchFamily="2" charset="-127"/>
+              </a:rPr>
+              <a:t>우리가치</a:t>
+            </a:r>
+            <a:r>
+              <a:rPr lang="ko-KR" altLang="en-US" sz="800" b="1" dirty="0">
+                <a:latin typeface="KoPub돋움체 Bold" panose="00000800000000000000" pitchFamily="2" charset="-127"/>
+                <a:ea typeface="KoPub돋움체 Bold" panose="00000800000000000000" pitchFamily="2" charset="-127"/>
+              </a:rPr>
+              <a:t> 허브</a:t>
+            </a:r>
+            <a:r>
+              <a:rPr lang="en-US" altLang="ko-KR" sz="800" b="1" dirty="0">
+                <a:latin typeface="KoPub돋움체 Bold" panose="00000800000000000000" pitchFamily="2" charset="-127"/>
+                <a:ea typeface="KoPub돋움체 Bold" panose="00000800000000000000" pitchFamily="2" charset="-127"/>
+              </a:rPr>
+              <a:t>]</a:t>
+            </a:r>
+          </a:p>
+        </p:txBody>
+      </p:sp>
       <p:pic>
         <p:nvPicPr>
-          <p:cNvPr id="4" name="Picture 1">
+          <p:cNvPr id="9" name="그림 8">
             <a:extLst>
               <a:ext uri="{FF2B5EF4-FFF2-40B4-BE49-F238E27FC236}">
-                <a16:creationId xmlns:a16="http://schemas.microsoft.com/office/drawing/2014/main" id="{77B90727-557F-2570-40C0-94892E8EA2B1}"/>
+                <a16:creationId xmlns:a16="http://schemas.microsoft.com/office/drawing/2014/main" id="{84F085E8-47CF-5425-017C-C889D373CEC8}"/>
               </a:ext>
             </a:extLst>
           </p:cNvPr>
@@ -5695,251 +5652,20 @@
         </p:blipFill>
         <p:spPr>
           <a:xfrm>
-            <a:off x="147393" y="129534"/>
-            <a:ext cx="544284" cy="307776"/>
+            <a:off x="603724" y="642969"/>
+            <a:ext cx="175906" cy="153604"/>
           </a:xfrm>
           <a:prstGeom prst="rect">
             <a:avLst/>
           </a:prstGeom>
-          <a:noFill/>
-          <a:ln>
-            <a:noFill/>
-          </a:ln>
-          <a:effectLst/>
         </p:spPr>
       </p:pic>
-      <p:sp>
-        <p:nvSpPr>
-          <p:cNvPr id="5" name="TextBox 4">
+      <p:pic>
+        <p:nvPicPr>
+          <p:cNvPr id="11" name="그림 10">
             <a:extLst>
               <a:ext uri="{FF2B5EF4-FFF2-40B4-BE49-F238E27FC236}">
-                <a16:creationId xmlns:a16="http://schemas.microsoft.com/office/drawing/2014/main" id="{F4C32A81-F20A-8D8F-993A-F212AD9E03DF}"/>
-              </a:ext>
-            </a:extLst>
-          </p:cNvPr>
-          <p:cNvSpPr txBox="1"/>
-          <p:nvPr/>
-        </p:nvSpPr>
-        <p:spPr>
-          <a:xfrm>
-            <a:off x="1402907" y="1475898"/>
-            <a:ext cx="1590324" cy="200055"/>
-          </a:xfrm>
-          <a:prstGeom prst="rect">
-            <a:avLst/>
-          </a:prstGeom>
-          <a:noFill/>
-        </p:spPr>
-        <p:txBody>
-          <a:bodyPr wrap="square" rtlCol="0">
-            <a:spAutoFit/>
-          </a:bodyPr>
-          <a:lstStyle/>
-          <a:p>
-            <a:pPr algn="ctr"/>
-            <a:r>
-              <a:rPr lang="ko-KR" altLang="en-US" sz="700" b="1" dirty="0">
-                <a:solidFill>
-                  <a:schemeClr val="accent1">
-                    <a:lumMod val="50000"/>
-                  </a:schemeClr>
-                </a:solidFill>
-                <a:latin typeface="KoPub돋움체 Bold" panose="02020603020101020101" pitchFamily="18" charset="-127"/>
-                <a:ea typeface="KoPub돋움체 Bold" panose="02020603020101020101" pitchFamily="18" charset="-127"/>
-              </a:rPr>
-              <a:t>순천향대학교 천안병원</a:t>
-            </a:r>
-            <a:r>
-              <a:rPr lang="en-US" altLang="ko-KR" sz="700" b="1" dirty="0">
-                <a:solidFill>
-                  <a:schemeClr val="accent1">
-                    <a:lumMod val="50000"/>
-                  </a:schemeClr>
-                </a:solidFill>
-                <a:latin typeface="KoPub돋움체 Bold" panose="02020603020101020101" pitchFamily="18" charset="-127"/>
-                <a:ea typeface="KoPub돋움체 Bold" panose="02020603020101020101" pitchFamily="18" charset="-127"/>
-              </a:rPr>
-              <a:t> </a:t>
-            </a:r>
-            <a:r>
-              <a:rPr lang="ko-KR" altLang="en-US" sz="700" b="1" dirty="0">
-                <a:solidFill>
-                  <a:schemeClr val="accent1">
-                    <a:lumMod val="50000"/>
-                  </a:schemeClr>
-                </a:solidFill>
-                <a:latin typeface="KoPub돋움체 Bold" panose="02020603020101020101" pitchFamily="18" charset="-127"/>
-                <a:ea typeface="KoPub돋움체 Bold" panose="02020603020101020101" pitchFamily="18" charset="-127"/>
-              </a:rPr>
-              <a:t>진료지원간호팀</a:t>
-            </a:r>
-            <a:endParaRPr lang="ko-KR" altLang="en-US" sz="800" b="1" dirty="0">
-              <a:solidFill>
-                <a:schemeClr val="accent1">
-                  <a:lumMod val="50000"/>
-                </a:schemeClr>
-              </a:solidFill>
-              <a:latin typeface="KoPub돋움체 Bold" panose="02020603020101020101" pitchFamily="18" charset="-127"/>
-              <a:ea typeface="KoPub돋움체 Bold" panose="02020603020101020101" pitchFamily="18" charset="-127"/>
-            </a:endParaRPr>
-          </a:p>
-        </p:txBody>
-      </p:sp>
-      <p:sp>
-        <p:nvSpPr>
-          <p:cNvPr id="7" name="TextBox 6">
-            <a:extLst>
-              <a:ext uri="{FF2B5EF4-FFF2-40B4-BE49-F238E27FC236}">
-                <a16:creationId xmlns:a16="http://schemas.microsoft.com/office/drawing/2014/main" id="{764FFBEF-B328-8C32-1561-80993F91E588}"/>
-              </a:ext>
-            </a:extLst>
-          </p:cNvPr>
-          <p:cNvSpPr txBox="1"/>
-          <p:nvPr/>
-        </p:nvSpPr>
-        <p:spPr>
-          <a:xfrm>
-            <a:off x="675817" y="642967"/>
-            <a:ext cx="1845506" cy="338554"/>
-          </a:xfrm>
-          <a:prstGeom prst="rect">
-            <a:avLst/>
-          </a:prstGeom>
-          <a:noFill/>
-        </p:spPr>
-        <p:txBody>
-          <a:bodyPr wrap="none">
-            <a:spAutoFit/>
-          </a:bodyPr>
-          <a:lstStyle/>
-          <a:p>
-            <a:pPr algn="ctr"/>
-            <a:r>
-              <a:rPr lang="ko-KR" altLang="en-US" sz="1600" dirty="0" err="1">
-                <a:solidFill>
-                  <a:srgbClr val="00B0F0"/>
-                </a:solidFill>
-                <a:latin typeface="Noto Sans KR Black" panose="020B0200000000000000" pitchFamily="50" charset="-127"/>
-                <a:ea typeface="Noto Sans KR Black" panose="020B0200000000000000" pitchFamily="50" charset="-127"/>
-              </a:rPr>
-              <a:t>우리가치</a:t>
-            </a:r>
-            <a:r>
-              <a:rPr lang="ko-KR" altLang="en-US" sz="1600" dirty="0">
-                <a:solidFill>
-                  <a:schemeClr val="accent1">
-                    <a:lumMod val="50000"/>
-                  </a:schemeClr>
-                </a:solidFill>
-                <a:latin typeface="KoPub돋움체 Bold" panose="02020603020101020101" pitchFamily="18" charset="-127"/>
-                <a:ea typeface="KoPub돋움체 Bold" panose="02020603020101020101" pitchFamily="18" charset="-127"/>
-              </a:rPr>
-              <a:t> </a:t>
-            </a:r>
-            <a:r>
-              <a:rPr lang="en-US" altLang="ko-KR" sz="1600" dirty="0" err="1">
-                <a:solidFill>
-                  <a:schemeClr val="accent1">
-                    <a:lumMod val="50000"/>
-                  </a:schemeClr>
-                </a:solidFill>
-                <a:latin typeface="Franklin Gothic Heavy" panose="020B0903020102020204" pitchFamily="34" charset="0"/>
-                <a:ea typeface="KoPub돋움체 Bold" panose="02020603020101020101" pitchFamily="18" charset="-127"/>
-              </a:rPr>
-              <a:t>WeValue</a:t>
-            </a:r>
-            <a:endParaRPr lang="en-US" altLang="ko-KR" sz="1600" dirty="0">
-              <a:solidFill>
-                <a:schemeClr val="accent1">
-                  <a:lumMod val="50000"/>
-                </a:schemeClr>
-              </a:solidFill>
-              <a:latin typeface="Franklin Gothic Heavy" panose="020B0903020102020204" pitchFamily="34" charset="0"/>
-              <a:ea typeface="KoPub돋움체 Bold" panose="02020603020101020101" pitchFamily="18" charset="-127"/>
-            </a:endParaRPr>
-          </a:p>
-        </p:txBody>
-      </p:sp>
-      <p:sp>
-        <p:nvSpPr>
-          <p:cNvPr id="8" name="TextBox 7">
-            <a:extLst>
-              <a:ext uri="{FF2B5EF4-FFF2-40B4-BE49-F238E27FC236}">
-                <a16:creationId xmlns:a16="http://schemas.microsoft.com/office/drawing/2014/main" id="{6770AA4D-9970-9E44-0CF1-9CF01DABADD2}"/>
-              </a:ext>
-            </a:extLst>
-          </p:cNvPr>
-          <p:cNvSpPr txBox="1"/>
-          <p:nvPr/>
-        </p:nvSpPr>
-        <p:spPr>
-          <a:xfrm>
-            <a:off x="619776" y="900112"/>
-            <a:ext cx="1957587" cy="215444"/>
-          </a:xfrm>
-          <a:prstGeom prst="rect">
-            <a:avLst/>
-          </a:prstGeom>
-          <a:noFill/>
-        </p:spPr>
-        <p:txBody>
-          <a:bodyPr wrap="none">
-            <a:spAutoFit/>
-          </a:bodyPr>
-          <a:lstStyle/>
-          <a:p>
-            <a:pPr algn="ctr"/>
-            <a:r>
-              <a:rPr lang="en-US" altLang="ko-KR" sz="800" b="1" dirty="0">
-                <a:latin typeface="KoPub돋움체 Bold" panose="00000800000000000000" pitchFamily="2" charset="-127"/>
-                <a:ea typeface="KoPub돋움체 Bold" panose="00000800000000000000" pitchFamily="2" charset="-127"/>
-              </a:rPr>
-              <a:t>[</a:t>
-            </a:r>
-            <a:r>
-              <a:rPr lang="ko-KR" altLang="en-US" sz="800" b="1" dirty="0">
-                <a:latin typeface="KoPub돋움체 Bold" panose="00000800000000000000" pitchFamily="2" charset="-127"/>
-                <a:ea typeface="KoPub돋움체 Bold" panose="00000800000000000000" pitchFamily="2" charset="-127"/>
-              </a:rPr>
-              <a:t>우리가 가치를 만드는 공간</a:t>
-            </a:r>
-            <a:r>
-              <a:rPr lang="en-US" altLang="ko-KR" sz="800" b="1" dirty="0">
-                <a:latin typeface="KoPub돋움체 Bold" panose="00000800000000000000" pitchFamily="2" charset="-127"/>
-                <a:ea typeface="KoPub돋움체 Bold" panose="00000800000000000000" pitchFamily="2" charset="-127"/>
-              </a:rPr>
-              <a:t>, </a:t>
-            </a:r>
-            <a:r>
-              <a:rPr lang="ko-KR" altLang="en-US" sz="800" b="1" dirty="0" err="1">
-                <a:latin typeface="KoPub돋움체 Bold" panose="00000800000000000000" pitchFamily="2" charset="-127"/>
-                <a:ea typeface="KoPub돋움체 Bold" panose="00000800000000000000" pitchFamily="2" charset="-127"/>
-              </a:rPr>
-              <a:t>우리가치</a:t>
-            </a:r>
-            <a:r>
-              <a:rPr lang="ko-KR" altLang="en-US" sz="800" b="1" dirty="0">
-                <a:latin typeface="KoPub돋움체 Bold" panose="00000800000000000000" pitchFamily="2" charset="-127"/>
-                <a:ea typeface="KoPub돋움체 Bold" panose="00000800000000000000" pitchFamily="2" charset="-127"/>
-              </a:rPr>
-              <a:t> 허브</a:t>
-            </a:r>
-            <a:r>
-              <a:rPr lang="en-US" altLang="ko-KR" sz="800" b="1" dirty="0">
-                <a:latin typeface="KoPub돋움체 Bold" panose="00000800000000000000" pitchFamily="2" charset="-127"/>
-                <a:ea typeface="KoPub돋움체 Bold" panose="00000800000000000000" pitchFamily="2" charset="-127"/>
-              </a:rPr>
-              <a:t>]</a:t>
-            </a:r>
-          </a:p>
-        </p:txBody>
-      </p:sp>
-      <p:pic>
-        <p:nvPicPr>
-          <p:cNvPr id="9" name="그림 8">
-            <a:extLst>
-              <a:ext uri="{FF2B5EF4-FFF2-40B4-BE49-F238E27FC236}">
-                <a16:creationId xmlns:a16="http://schemas.microsoft.com/office/drawing/2014/main" id="{98153167-4419-48ED-80AC-5C3EF7B86335}"/>
+                <a16:creationId xmlns:a16="http://schemas.microsoft.com/office/drawing/2014/main" id="{3BE439CF-F0D5-B13E-7025-D8DFEDB93602}"/>
               </a:ext>
             </a:extLst>
           </p:cNvPr>
@@ -5949,42 +5675,12 @@
           <p:nvPr/>
         </p:nvPicPr>
         <p:blipFill>
-          <a:blip r:embed="rId3"/>
+          <a:blip r:embed="rId2"/>
           <a:stretch>
             <a:fillRect/>
           </a:stretch>
         </p:blipFill>
         <p:spPr>
-          <a:xfrm>
-            <a:off x="603724" y="642969"/>
-            <a:ext cx="175906" cy="153604"/>
-          </a:xfrm>
-          <a:prstGeom prst="rect">
-            <a:avLst/>
-          </a:prstGeom>
-        </p:spPr>
-      </p:pic>
-      <p:pic>
-        <p:nvPicPr>
-          <p:cNvPr id="11" name="그림 10">
-            <a:extLst>
-              <a:ext uri="{FF2B5EF4-FFF2-40B4-BE49-F238E27FC236}">
-                <a16:creationId xmlns:a16="http://schemas.microsoft.com/office/drawing/2014/main" id="{9FB88B5B-442A-76BA-6064-83801B871E39}"/>
-              </a:ext>
-            </a:extLst>
-          </p:cNvPr>
-          <p:cNvPicPr>
-            <a:picLocks noChangeAspect="1"/>
-          </p:cNvPicPr>
-          <p:nvPr/>
-        </p:nvPicPr>
-        <p:blipFill>
-          <a:blip r:embed="rId3"/>
-          <a:stretch>
-            <a:fillRect/>
-          </a:stretch>
-        </p:blipFill>
-        <p:spPr>
           <a:xfrm rot="10800000">
             <a:off x="2423948" y="642967"/>
             <a:ext cx="175902" cy="153606"/>
@@ -5997,7 +5693,7 @@
     </p:spTree>
     <p:extLst>
       <p:ext uri="{BB962C8B-B14F-4D97-AF65-F5344CB8AC3E}">
-        <p14:creationId xmlns:p14="http://schemas.microsoft.com/office/powerpoint/2010/main" val="1590011397"/>
+        <p14:creationId xmlns:p14="http://schemas.microsoft.com/office/powerpoint/2010/main" val="1270482942"/>
       </p:ext>
     </p:extLst>
   </p:cSld>
